--- a/презентация/Тілашар-защита.pptx
+++ b/презентация/Тілашар-защита.pptx
@@ -1081,7 +1081,12 @@
           <a:lstStyle/>
           <a:p>
             <a:r>
-              <a:t>Про вес: 192 килобайта — это меньше одной фотографии. Важно для школьного телефона</a:t>
+              <a:t>Про вес: код и стили — 199 килобайт, всё приложение целиком около 1,4 мегабайта.</a:t>
+            </a:r>
+          </a:p>
+          <a:p>
+            <a:r>
+              <a:t>Это меньше одной фотографии с телефона. Важно для школьного телефона</a:t>
             </a:r>
           </a:p>
           <a:p>
@@ -15588,7 +15593,7 @@
                 <a:cs typeface="GQ Text Bold"/>
                 <a:ea typeface="GQ Text Bold"/>
               </a:rPr>
-              <a:t>192</a:t>
+              <a:t>199</a:t>
             </a:r>
           </a:p>
         </p:txBody>
@@ -15670,7 +15675,7 @@
                 <a:cs typeface="GQ Text"/>
                 <a:ea typeface="GQ Text"/>
               </a:rPr>
-              <a:t>вес приложения в сжатом виде</a:t>
+              <a:t>код и стили в сжатом виде</a:t>
             </a:r>
           </a:p>
         </p:txBody>
@@ -15929,8 +15934,8 @@
         </p:nvSpPr>
         <p:spPr>
           <a:xfrm>
-            <a:off x="749808" y="6285788"/>
-            <a:ext cx="10692079" cy="209194"/>
+            <a:off x="749808" y="6153200"/>
+            <a:ext cx="10692079" cy="356514"/>
           </a:xfrm>
           <a:prstGeom prst="rect">
             <a:avLst/>
@@ -15957,7 +15962,25 @@
                 <a:cs typeface="GQ Text"/>
                 <a:ea typeface="GQ Text"/>
               </a:rPr>
-              <a:t>Работа без интернета проверена: все файлы, включая шрифт, лежат внутри приложения.</a:t>
+              <a:t>Приложение целиком, вместе со шрифтом и изображениями, занимает около 1,4 МБ. Оно скачивается один раз и дальше работает без интернета — проверено: в сеть не уходит ни одного</a:t>
+            </a:r>
+          </a:p>
+          <a:p>
+            <a:pPr algn="l">
+              <a:lnSpc>
+                <a:spcPts val="1160"/>
+              </a:lnSpc>
+            </a:pPr>
+            <a:r>
+              <a:rPr sz="850">
+                <a:solidFill>
+                  <a:srgbClr val="A6ADB6"/>
+                </a:solidFill>
+                <a:latin typeface="GQ Text"/>
+                <a:cs typeface="GQ Text"/>
+                <a:ea typeface="GQ Text"/>
+              </a:rPr>
+              <a:t>запроса.</a:t>
             </a:r>
           </a:p>
         </p:txBody>

--- a/презентация/Тілашар-защита.pptx
+++ b/презентация/Тілашар-защита.pptx
@@ -633,7 +633,7 @@
           </a:p>
           <a:p>
             <a:r>
-              <a:t>«ты делаешь» вместо «я делаю». Ученик получал похвалу за неверную форму — это хуже,</a:t>
+              <a:t>«ты читаешь» вместо «я читаю». Ученик получал похвалу за неверную форму — это хуже,</a:t>
             </a:r>
           </a:p>
           <a:p>
@@ -9916,7 +9916,7 @@
         <p:spPr>
           <a:xfrm>
             <a:off x="749808" y="2937764"/>
-            <a:ext cx="5245455" cy="2533903"/>
+            <a:ext cx="5245455" cy="2737103"/>
           </a:xfrm>
           <a:prstGeom prst="rect">
             <a:avLst/>
@@ -10205,7 +10205,7 @@
                 <a:cs typeface="IBM Plex Mono SemiBold"/>
                 <a:ea typeface="IBM Plex Mono SemiBold"/>
               </a:rPr>
-              <a:t>жатырмын</a:t>
+              <a:t>оқимын</a:t>
             </a:r>
           </a:p>
         </p:txBody>
@@ -10246,7 +10246,7 @@
                 <a:cs typeface="GQ Text"/>
                 <a:ea typeface="GQ Text"/>
               </a:rPr>
-              <a:t>я делаю</a:t>
+              <a:t>я читаю</a:t>
             </a:r>
           </a:p>
         </p:txBody>
@@ -10287,7 +10287,7 @@
                 <a:cs typeface="IBM Plex Mono SemiBold"/>
                 <a:ea typeface="IBM Plex Mono SemiBold"/>
               </a:rPr>
-              <a:t>жатырсың</a:t>
+              <a:t>оқисың</a:t>
             </a:r>
           </a:p>
         </p:txBody>
@@ -10328,7 +10328,7 @@
                 <a:cs typeface="GQ Text"/>
                 <a:ea typeface="GQ Text"/>
               </a:rPr>
-              <a:t>ты делаешь</a:t>
+              <a:t>ты читаешь</a:t>
             </a:r>
           </a:p>
         </p:txBody>
@@ -10342,7 +10342,7 @@
         <p:spPr>
           <a:xfrm>
             <a:off x="1024127" y="4758435"/>
-            <a:ext cx="4696815" cy="491744"/>
+            <a:ext cx="4696815" cy="694944"/>
           </a:xfrm>
           <a:prstGeom prst="rect">
             <a:avLst/>
@@ -10369,7 +10369,7 @@
                 <a:cs typeface="GQ Text"/>
                 <a:ea typeface="GQ Text"/>
               </a:rPr>
-              <a:t>Расстояние между этими формами — ровно один символ. Столько</a:t>
+              <a:t>Формы различаются одной буквой: «м» против «с». Ровно столько</a:t>
             </a:r>
           </a:p>
           <a:p>
@@ -10387,7 +10387,25 @@
                 <a:cs typeface="GQ Text"/>
                 <a:ea typeface="GQ Text"/>
               </a:rPr>
-              <a:t>же, сколько у обычной описки.</a:t>
+              <a:t>же, сколько у обычной описки — отличить их по расстоянию</a:t>
+            </a:r>
+          </a:p>
+          <a:p>
+            <a:pPr algn="l">
+              <a:lnSpc>
+                <a:spcPts val="1600"/>
+              </a:lnSpc>
+            </a:pPr>
+            <a:r>
+              <a:rPr sz="1100">
+                <a:solidFill>
+                  <a:srgbClr val="A6ADB6"/>
+                </a:solidFill>
+                <a:latin typeface="GQ Text"/>
+                <a:cs typeface="GQ Text"/>
+                <a:ea typeface="GQ Text"/>
+              </a:rPr>
+              <a:t>нельзя.</a:t>
             </a:r>
           </a:p>
         </p:txBody>
@@ -11210,7 +11228,7 @@
                 <a:cs typeface="IBM Plex Mono Medium"/>
                 <a:ea typeface="IBM Plex Mono Medium"/>
               </a:rPr>
-              <a:t>СЕПТІКТЕР</a:t>
+              <a:t>СЕПТІК</a:t>
             </a:r>
           </a:p>
         </p:txBody>
@@ -11218,6 +11236,65 @@
       <p:sp>
         <p:nvSpPr>
           <p:cNvPr id="17" name="TextBox 16"/>
+          <p:cNvSpPr txBox="1"/>
+          <p:nvPr/>
+        </p:nvSpPr>
+        <p:spPr>
+          <a:xfrm>
+            <a:off x="8011972" y="3044337"/>
+            <a:ext cx="1009192" cy="414601"/>
+          </a:xfrm>
+          <a:prstGeom prst="rect">
+            <a:avLst/>
+          </a:prstGeom>
+          <a:noFill/>
+        </p:spPr>
+        <p:txBody>
+          <a:bodyPr wrap="none" lIns="0" rIns="0" tIns="0" bIns="0" anchor="t">
+            <a:spAutoFit/>
+          </a:bodyPr>
+          <a:lstStyle/>
+          <a:p>
+            <a:pPr algn="l">
+              <a:lnSpc>
+                <a:spcPts val="1349"/>
+              </a:lnSpc>
+            </a:pPr>
+            <a:r>
+              <a:rPr sz="950">
+                <a:solidFill>
+                  <a:srgbClr val="535C66"/>
+                </a:solidFill>
+                <a:latin typeface="GQ Text"/>
+                <a:cs typeface="GQ Text"/>
+                <a:ea typeface="GQ Text"/>
+              </a:rPr>
+              <a:t>падежей в</a:t>
+            </a:r>
+          </a:p>
+          <a:p>
+            <a:pPr algn="l">
+              <a:lnSpc>
+                <a:spcPts val="1349"/>
+              </a:lnSpc>
+            </a:pPr>
+            <a:r>
+              <a:rPr sz="950">
+                <a:solidFill>
+                  <a:srgbClr val="535C66"/>
+                </a:solidFill>
+                <a:latin typeface="GQ Text"/>
+                <a:cs typeface="GQ Text"/>
+                <a:ea typeface="GQ Text"/>
+              </a:rPr>
+              <a:t>казахском</a:t>
+            </a:r>
+          </a:p>
+        </p:txBody>
+      </p:sp>
+      <p:sp>
+        <p:nvSpPr>
+          <p:cNvPr id="18" name="TextBox 17"/>
           <p:cNvSpPr txBox="1"/>
           <p:nvPr/>
         </p:nvSpPr>
@@ -11258,7 +11335,7 @@
       </p:sp>
       <p:sp>
         <p:nvSpPr>
-          <p:cNvPr id="18" name="TextBox 17"/>
+          <p:cNvPr id="19" name="TextBox 18"/>
           <p:cNvSpPr txBox="1"/>
           <p:nvPr/>
         </p:nvSpPr>
@@ -11317,7 +11394,66 @@
       </p:sp>
       <p:sp>
         <p:nvSpPr>
-          <p:cNvPr id="19" name="TextBox 18"/>
+          <p:cNvPr id="20" name="TextBox 19"/>
+          <p:cNvSpPr txBox="1"/>
+          <p:nvPr/>
+        </p:nvSpPr>
+        <p:spPr>
+          <a:xfrm>
+            <a:off x="9222333" y="3196737"/>
+            <a:ext cx="1009192" cy="414601"/>
+          </a:xfrm>
+          <a:prstGeom prst="rect">
+            <a:avLst/>
+          </a:prstGeom>
+          <a:noFill/>
+        </p:spPr>
+        <p:txBody>
+          <a:bodyPr wrap="none" lIns="0" rIns="0" tIns="0" bIns="0" anchor="t">
+            <a:spAutoFit/>
+          </a:bodyPr>
+          <a:lstStyle/>
+          <a:p>
+            <a:pPr algn="l">
+              <a:lnSpc>
+                <a:spcPts val="1349"/>
+              </a:lnSpc>
+            </a:pPr>
+            <a:r>
+              <a:rPr sz="950">
+                <a:solidFill>
+                  <a:srgbClr val="535C66"/>
+                </a:solidFill>
+                <a:latin typeface="GQ Text"/>
+                <a:cs typeface="GQ Text"/>
+                <a:ea typeface="GQ Text"/>
+              </a:rPr>
+              <a:t>на учебниковых</a:t>
+            </a:r>
+          </a:p>
+          <a:p>
+            <a:pPr algn="l">
+              <a:lnSpc>
+                <a:spcPts val="1349"/>
+              </a:lnSpc>
+            </a:pPr>
+            <a:r>
+              <a:rPr sz="950">
+                <a:solidFill>
+                  <a:srgbClr val="535C66"/>
+                </a:solidFill>
+                <a:latin typeface="GQ Text"/>
+                <a:cs typeface="GQ Text"/>
+                <a:ea typeface="GQ Text"/>
+              </a:rPr>
+              <a:t>формах</a:t>
+            </a:r>
+          </a:p>
+        </p:txBody>
+      </p:sp>
+      <p:sp>
+        <p:nvSpPr>
+          <p:cNvPr id="21" name="TextBox 20"/>
           <p:cNvSpPr txBox="1"/>
           <p:nvPr/>
         </p:nvSpPr>
@@ -11358,7 +11494,7 @@
       </p:sp>
       <p:sp>
         <p:nvSpPr>
-          <p:cNvPr id="20" name="TextBox 19"/>
+          <p:cNvPr id="22" name="TextBox 21"/>
           <p:cNvSpPr txBox="1"/>
           <p:nvPr/>
         </p:nvSpPr>
@@ -11417,7 +11553,66 @@
       </p:sp>
       <p:sp>
         <p:nvSpPr>
-          <p:cNvPr id="21" name="Rectangle 20"/>
+          <p:cNvPr id="23" name="TextBox 22"/>
+          <p:cNvSpPr txBox="1"/>
+          <p:nvPr/>
+        </p:nvSpPr>
+        <p:spPr>
+          <a:xfrm>
+            <a:off x="10432694" y="3196737"/>
+            <a:ext cx="1009192" cy="414601"/>
+          </a:xfrm>
+          <a:prstGeom prst="rect">
+            <a:avLst/>
+          </a:prstGeom>
+          <a:noFill/>
+        </p:spPr>
+        <p:txBody>
+          <a:bodyPr wrap="none" lIns="0" rIns="0" tIns="0" bIns="0" anchor="t">
+            <a:spAutoFit/>
+          </a:bodyPr>
+          <a:lstStyle/>
+          <a:p>
+            <a:pPr algn="l">
+              <a:lnSpc>
+                <a:spcPts val="1349"/>
+              </a:lnSpc>
+            </a:pPr>
+            <a:r>
+              <a:rPr sz="950">
+                <a:solidFill>
+                  <a:srgbClr val="535C66"/>
+                </a:solidFill>
+                <a:latin typeface="GQ Text"/>
+                <a:cs typeface="GQ Text"/>
+                <a:ea typeface="GQ Text"/>
+              </a:rPr>
+              <a:t>и любое своё</a:t>
+            </a:r>
+          </a:p>
+          <a:p>
+            <a:pPr algn="l">
+              <a:lnSpc>
+                <a:spcPts val="1349"/>
+              </a:lnSpc>
+            </a:pPr>
+            <a:r>
+              <a:rPr sz="950">
+                <a:solidFill>
+                  <a:srgbClr val="535C66"/>
+                </a:solidFill>
+                <a:latin typeface="GQ Text"/>
+                <a:cs typeface="GQ Text"/>
+                <a:ea typeface="GQ Text"/>
+              </a:rPr>
+              <a:t>сверх того</a:t>
+            </a:r>
+          </a:p>
+        </p:txBody>
+      </p:sp>
+      <p:sp>
+        <p:nvSpPr>
+          <p:cNvPr id="24" name="Rectangle 23"/>
           <p:cNvSpPr/>
           <p:nvPr/>
         </p:nvSpPr>
@@ -11447,7 +11642,7 @@
       </p:sp>
       <p:sp>
         <p:nvSpPr>
-          <p:cNvPr id="22" name="TextBox 21"/>
+          <p:cNvPr id="25" name="TextBox 24"/>
           <p:cNvSpPr txBox="1"/>
           <p:nvPr/>
         </p:nvSpPr>
@@ -16035,14 +16230,14 @@
       </p:sp>
       <p:sp>
         <p:nvSpPr>
-          <p:cNvPr id="28" name="Rectangle 27"/>
+          <p:cNvPr id="30" name="Rectangle 29"/>
           <p:cNvSpPr/>
           <p:nvPr/>
         </p:nvSpPr>
         <p:spPr>
           <a:xfrm>
             <a:off x="6196431" y="2448306"/>
-            <a:ext cx="5245455" cy="2037587"/>
+            <a:ext cx="5245455" cy="2361183"/>
           </a:xfrm>
           <a:prstGeom prst="rect">
             <a:avLst/>
@@ -16067,14 +16262,14 @@
       </p:sp>
       <p:sp>
         <p:nvSpPr>
-          <p:cNvPr id="29" name="Rectangle 28"/>
+          <p:cNvPr id="31" name="Rectangle 30"/>
           <p:cNvSpPr/>
           <p:nvPr/>
         </p:nvSpPr>
         <p:spPr>
           <a:xfrm>
             <a:off x="6196431" y="2448306"/>
-            <a:ext cx="32004" cy="2037587"/>
+            <a:ext cx="32004" cy="2361183"/>
           </a:xfrm>
           <a:prstGeom prst="rect">
             <a:avLst/>
@@ -17139,6 +17334,88 @@
                 <a:ea typeface="GQ Text"/>
               </a:rPr>
               <a:t>Проверка вёрстки этой презентации при пересборке</a:t>
+            </a:r>
+          </a:p>
+        </p:txBody>
+      </p:sp>
+      <p:sp>
+        <p:nvSpPr>
+          <p:cNvPr id="28" name="TextBox 27"/>
+          <p:cNvSpPr txBox="1"/>
+          <p:nvPr/>
+        </p:nvSpPr>
+        <p:spPr>
+          <a:xfrm>
+            <a:off x="6452463" y="4308297"/>
+            <a:ext cx="210566" cy="277723"/>
+          </a:xfrm>
+          <a:prstGeom prst="rect">
+            <a:avLst/>
+          </a:prstGeom>
+          <a:noFill/>
+        </p:spPr>
+        <p:txBody>
+          <a:bodyPr wrap="none" lIns="0" rIns="0" tIns="0" bIns="0" anchor="t">
+            <a:spAutoFit/>
+          </a:bodyPr>
+          <a:lstStyle/>
+          <a:p>
+            <a:pPr algn="l">
+              <a:lnSpc>
+                <a:spcPts val="1540"/>
+              </a:lnSpc>
+            </a:pPr>
+            <a:r>
+              <a:rPr sz="1100">
+                <a:solidFill>
+                  <a:srgbClr val="00793D"/>
+                </a:solidFill>
+                <a:latin typeface="IBM Plex Mono Medium"/>
+                <a:cs typeface="IBM Plex Mono Medium"/>
+                <a:ea typeface="IBM Plex Mono Medium"/>
+              </a:rPr>
+              <a:t>—</a:t>
+            </a:r>
+          </a:p>
+        </p:txBody>
+      </p:sp>
+      <p:sp>
+        <p:nvSpPr>
+          <p:cNvPr id="29" name="TextBox 28"/>
+          <p:cNvSpPr txBox="1"/>
+          <p:nvPr/>
+        </p:nvSpPr>
+        <p:spPr>
+          <a:xfrm>
+            <a:off x="6663029" y="4308297"/>
+            <a:ext cx="4522825" cy="277723"/>
+          </a:xfrm>
+          <a:prstGeom prst="rect">
+            <a:avLst/>
+          </a:prstGeom>
+          <a:noFill/>
+        </p:spPr>
+        <p:txBody>
+          <a:bodyPr wrap="none" lIns="0" rIns="0" tIns="0" bIns="0" anchor="t">
+            <a:spAutoFit/>
+          </a:bodyPr>
+          <a:lstStyle/>
+          <a:p>
+            <a:pPr algn="l">
+              <a:lnSpc>
+                <a:spcPts val="1540"/>
+              </a:lnSpc>
+            </a:pPr>
+            <a:r>
+              <a:rPr sz="1100">
+                <a:solidFill>
+                  <a:srgbClr val="535C66"/>
+                </a:solidFill>
+                <a:latin typeface="GQ Text"/>
+                <a:cs typeface="GQ Text"/>
+                <a:ea typeface="GQ Text"/>
+              </a:rPr>
+              <a:t>Сверка каждого числа доклада с данными проекта</a:t>
             </a:r>
           </a:p>
         </p:txBody>
@@ -22036,7 +22313,7 @@
                 <a:cs typeface="GQ Text"/>
                 <a:ea typeface="GQ Text"/>
               </a:rPr>
-              <a:t>картинок и сравнил с</a:t>
+              <a:t>картинок, сравнил с</a:t>
             </a:r>
           </a:p>
           <a:p>
@@ -22072,7 +22349,7 @@
                 <a:cs typeface="GQ Text"/>
                 <a:ea typeface="GQ Text"/>
               </a:rPr>
-              <a:t>показываются.</a:t>
+              <a:t>показываются на экране.</a:t>
             </a:r>
           </a:p>
         </p:txBody>
@@ -23521,7 +23798,7 @@
                 <a:cs typeface="GQ Text SemiBold"/>
                 <a:ea typeface="GQ Text SemiBold"/>
               </a:rPr>
-              <a:t>нет ә ғ қ ң ұ</a:t>
+              <a:t>нет 5 из 9: ә ғ қ ң ұ</a:t>
             </a:r>
           </a:p>
         </p:txBody>
@@ -23674,7 +23951,7 @@
                 <a:cs typeface="GQ Text SemiBold"/>
                 <a:ea typeface="GQ Text SemiBold"/>
               </a:rPr>
-              <a:t>нет 7 из 9</a:t>
+              <a:t>нет 7 из 9: ә ғ қ ң ө ү һ</a:t>
             </a:r>
           </a:p>
         </p:txBody>
@@ -23969,7 +24246,7 @@
                 <a:cs typeface="GQ Text"/>
                 <a:ea typeface="GQ Text"/>
               </a:rPr>
-              <a:t>Проверено разбором таблицы cmap самих файлов шрифтов, а не на глаз.</a:t>
+              <a:t>Проверено разбором таблицы символов самих файлов шрифтов, а не на глаз. Воспроизводится одной командой: tools/check_fonts.py</a:t>
             </a:r>
           </a:p>
         </p:txBody>
@@ -25125,7 +25402,7 @@
                 <a:cs typeface="GQ Text"/>
                 <a:ea typeface="GQ Text"/>
               </a:rPr>
-              <a:t>Сравнение строк отвечает только «совпало или нет». Учителю этого мало: он видит, что именно ученик сделал</a:t>
+              <a:t>Сравнение строк отвечает только «совпало или нет». Живой учитель отвечает иначе: он видит, что именно</a:t>
             </a:r>
           </a:p>
           <a:p>
@@ -25143,7 +25420,7 @@
                 <a:cs typeface="GQ Text"/>
                 <a:ea typeface="GQ Text"/>
               </a:rPr>
-              <a:t>не так. Я собрал проверку, которая различает четыре случая.</a:t>
+              <a:t>ученик сделал не так. Я собрал проверку, которая различает четыре случая.</a:t>
             </a:r>
           </a:p>
         </p:txBody>

--- a/презентация/Тілашар-защита.pptx
+++ b/презентация/Тілашар-защита.pptx
@@ -15720,7 +15720,7 @@
         <p:spPr>
           <a:xfrm>
             <a:off x="6672173" y="2904883"/>
-            <a:ext cx="4513681" cy="277723"/>
+            <a:ext cx="4513681" cy="473303"/>
           </a:xfrm>
           <a:prstGeom prst="rect">
             <a:avLst/>
@@ -15747,40 +15747,141 @@
                 <a:cs typeface="GQ Text"/>
                 <a:ea typeface="GQ Text"/>
               </a:rPr>
-              <a:t>Собирается автоматически при каждом обновлении проекта</a:t>
-            </a:r>
-          </a:p>
-        </p:txBody>
-      </p:sp>
-      <p:sp>
-        <p:nvSpPr>
-          <p:cNvPr id="16" name="TextBox 15"/>
-          <p:cNvSpPr txBox="1"/>
-          <p:nvPr/>
-        </p:nvSpPr>
-        <p:spPr>
-          <a:xfrm>
-            <a:off x="749808" y="3917998"/>
-            <a:ext cx="3381146" cy="600892"/>
-          </a:xfrm>
-          <a:prstGeom prst="rect">
-            <a:avLst/>
-          </a:prstGeom>
-          <a:noFill/>
-        </p:spPr>
-        <p:txBody>
-          <a:bodyPr wrap="none" lIns="0" rIns="0" tIns="0" bIns="0" anchor="t">
-            <a:spAutoFit/>
-          </a:bodyPr>
-          <a:lstStyle/>
-          <a:p>
-            <a:pPr algn="l">
-              <a:lnSpc>
-                <a:spcPts val="3332"/>
-              </a:lnSpc>
-            </a:pPr>
-            <a:r>
-              <a:rPr sz="3400" spc="-102">
+              <a:t>Собирается автоматически. Готовый файл — в разделе Releases:</a:t>
+            </a:r>
+          </a:p>
+          <a:p>
+            <a:pPr algn="l">
+              <a:lnSpc>
+                <a:spcPts val="1540"/>
+              </a:lnSpc>
+            </a:pPr>
+            <a:r>
+              <a:rPr sz="1100">
+                <a:solidFill>
+                  <a:srgbClr val="EEEBE5"/>
+                </a:solidFill>
+                <a:latin typeface="GQ Text"/>
+                <a:cs typeface="GQ Text"/>
+                <a:ea typeface="GQ Text"/>
+              </a:rPr>
+              <a:t>github.com/s-chaikovskiy/grammarquest-web/releases</a:t>
+            </a:r>
+          </a:p>
+        </p:txBody>
+      </p:sp>
+      <p:pic>
+        <p:nvPicPr>
+          <p:cNvPr id="16" name="Picture 15" descr="image.png"/>
+          <p:cNvPicPr>
+            <a:picLocks noChangeAspect="1"/>
+          </p:cNvPicPr>
+          <p:nvPr/>
+        </p:nvPicPr>
+        <p:blipFill>
+          <a:blip r:embed="rId2"/>
+          <a:stretch>
+            <a:fillRect/>
+          </a:stretch>
+        </p:blipFill>
+        <p:spPr>
+          <a:xfrm>
+            <a:off x="749808" y="3985704"/>
+            <a:ext cx="1225296" cy="1225296"/>
+          </a:xfrm>
+          <a:prstGeom prst="rect">
+            <a:avLst/>
+          </a:prstGeom>
+        </p:spPr>
+      </p:pic>
+      <p:sp>
+        <p:nvSpPr>
+          <p:cNvPr id="17" name="TextBox 16"/>
+          <p:cNvSpPr txBox="1"/>
+          <p:nvPr/>
+        </p:nvSpPr>
+        <p:spPr>
+          <a:xfrm>
+            <a:off x="749808" y="5311584"/>
+            <a:ext cx="1682496" cy="414909"/>
+          </a:xfrm>
+          <a:prstGeom prst="rect">
+            <a:avLst/>
+          </a:prstGeom>
+          <a:noFill/>
+        </p:spPr>
+        <p:txBody>
+          <a:bodyPr wrap="none" lIns="0" rIns="0" tIns="0" bIns="0" anchor="t">
+            <a:spAutoFit/>
+          </a:bodyPr>
+          <a:lstStyle/>
+          <a:p>
+            <a:pPr algn="l">
+              <a:lnSpc>
+                <a:spcPts val="1350"/>
+              </a:lnSpc>
+            </a:pPr>
+            <a:r>
+              <a:rPr sz="950">
+                <a:solidFill>
+                  <a:srgbClr val="A6ADB6"/>
+                </a:solidFill>
+                <a:latin typeface="GQ Text"/>
+                <a:cs typeface="GQ Text"/>
+                <a:ea typeface="GQ Text"/>
+              </a:rPr>
+              <a:t>Открыть приложение:</a:t>
+            </a:r>
+          </a:p>
+          <a:p>
+            <a:pPr algn="l">
+              <a:lnSpc>
+                <a:spcPts val="1350"/>
+              </a:lnSpc>
+            </a:pPr>
+            <a:r>
+              <a:rPr sz="950">
+                <a:solidFill>
+                  <a:srgbClr val="A6ADB6"/>
+                </a:solidFill>
+                <a:latin typeface="GQ Text"/>
+                <a:cs typeface="GQ Text"/>
+                <a:ea typeface="GQ Text"/>
+              </a:rPr>
+              <a:t>tilashar-kz.vercel.app</a:t>
+            </a:r>
+          </a:p>
+        </p:txBody>
+      </p:sp>
+      <p:sp>
+        <p:nvSpPr>
+          <p:cNvPr id="18" name="TextBox 17"/>
+          <p:cNvSpPr txBox="1"/>
+          <p:nvPr/>
+        </p:nvSpPr>
+        <p:spPr>
+          <a:xfrm>
+            <a:off x="2542032" y="3976844"/>
+            <a:ext cx="2783738" cy="565546"/>
+          </a:xfrm>
+          <a:prstGeom prst="rect">
+            <a:avLst/>
+          </a:prstGeom>
+          <a:noFill/>
+        </p:spPr>
+        <p:txBody>
+          <a:bodyPr wrap="none" lIns="0" rIns="0" tIns="0" bIns="0" anchor="t">
+            <a:spAutoFit/>
+          </a:bodyPr>
+          <a:lstStyle/>
+          <a:p>
+            <a:pPr algn="l">
+              <a:lnSpc>
+                <a:spcPts val="3136"/>
+              </a:lnSpc>
+            </a:pPr>
+            <a:r>
+              <a:rPr sz="3200" spc="-96">
                 <a:solidFill>
                   <a:srgbClr val="EEEBE5"/>
                 </a:solidFill>
@@ -15795,14 +15896,14 @@
       </p:sp>
       <p:sp>
         <p:nvSpPr>
-          <p:cNvPr id="17" name="TextBox 16"/>
-          <p:cNvSpPr txBox="1"/>
-          <p:nvPr/>
-        </p:nvSpPr>
-        <p:spPr>
-          <a:xfrm>
-            <a:off x="749808" y="4475924"/>
-            <a:ext cx="3381146" cy="216408"/>
+          <p:cNvPr id="19" name="TextBox 18"/>
+          <p:cNvSpPr txBox="1"/>
+          <p:nvPr/>
+        </p:nvSpPr>
+        <p:spPr>
+          <a:xfrm>
+            <a:off x="2542032" y="4505896"/>
+            <a:ext cx="2783738" cy="216408"/>
           </a:xfrm>
           <a:prstGeom prst="rect">
             <a:avLst/>
@@ -15836,14 +15937,14 @@
       </p:sp>
       <p:sp>
         <p:nvSpPr>
-          <p:cNvPr id="18" name="TextBox 17"/>
-          <p:cNvSpPr txBox="1"/>
-          <p:nvPr/>
-        </p:nvSpPr>
-        <p:spPr>
-          <a:xfrm>
-            <a:off x="749808" y="4716736"/>
-            <a:ext cx="3381146" cy="243278"/>
+          <p:cNvPr id="20" name="TextBox 19"/>
+          <p:cNvSpPr txBox="1"/>
+          <p:nvPr/>
+        </p:nvSpPr>
+        <p:spPr>
+          <a:xfrm>
+            <a:off x="2542032" y="4746708"/>
+            <a:ext cx="2783738" cy="243278"/>
           </a:xfrm>
           <a:prstGeom prst="rect">
             <a:avLst/>
@@ -15877,33 +15978,33 @@
       </p:sp>
       <p:sp>
         <p:nvSpPr>
-          <p:cNvPr id="19" name="TextBox 18"/>
-          <p:cNvSpPr txBox="1"/>
-          <p:nvPr/>
-        </p:nvSpPr>
-        <p:spPr>
-          <a:xfrm>
-            <a:off x="4405274" y="3917998"/>
-            <a:ext cx="3381146" cy="600892"/>
-          </a:xfrm>
-          <a:prstGeom prst="rect">
-            <a:avLst/>
-          </a:prstGeom>
-          <a:noFill/>
-        </p:spPr>
-        <p:txBody>
-          <a:bodyPr wrap="none" lIns="0" rIns="0" tIns="0" bIns="0" anchor="t">
-            <a:spAutoFit/>
-          </a:bodyPr>
-          <a:lstStyle/>
-          <a:p>
-            <a:pPr algn="l">
-              <a:lnSpc>
-                <a:spcPts val="3332"/>
-              </a:lnSpc>
-            </a:pPr>
-            <a:r>
-              <a:rPr sz="3400" spc="-102">
+          <p:cNvPr id="21" name="TextBox 20"/>
+          <p:cNvSpPr txBox="1"/>
+          <p:nvPr/>
+        </p:nvSpPr>
+        <p:spPr>
+          <a:xfrm>
+            <a:off x="5600090" y="3976844"/>
+            <a:ext cx="2783738" cy="565546"/>
+          </a:xfrm>
+          <a:prstGeom prst="rect">
+            <a:avLst/>
+          </a:prstGeom>
+          <a:noFill/>
+        </p:spPr>
+        <p:txBody>
+          <a:bodyPr wrap="none" lIns="0" rIns="0" tIns="0" bIns="0" anchor="t">
+            <a:spAutoFit/>
+          </a:bodyPr>
+          <a:lstStyle/>
+          <a:p>
+            <a:pPr algn="l">
+              <a:lnSpc>
+                <a:spcPts val="3136"/>
+              </a:lnSpc>
+            </a:pPr>
+            <a:r>
+              <a:rPr sz="3200" spc="-96">
                 <a:solidFill>
                   <a:srgbClr val="EEEBE5"/>
                 </a:solidFill>
@@ -15918,14 +16019,14 @@
       </p:sp>
       <p:sp>
         <p:nvSpPr>
-          <p:cNvPr id="20" name="TextBox 19"/>
-          <p:cNvSpPr txBox="1"/>
-          <p:nvPr/>
-        </p:nvSpPr>
-        <p:spPr>
-          <a:xfrm>
-            <a:off x="4405274" y="4475924"/>
-            <a:ext cx="3381146" cy="216408"/>
+          <p:cNvPr id="22" name="TextBox 21"/>
+          <p:cNvSpPr txBox="1"/>
+          <p:nvPr/>
+        </p:nvSpPr>
+        <p:spPr>
+          <a:xfrm>
+            <a:off x="5600090" y="4505896"/>
+            <a:ext cx="2783738" cy="216408"/>
           </a:xfrm>
           <a:prstGeom prst="rect">
             <a:avLst/>
@@ -15959,14 +16060,14 @@
       </p:sp>
       <p:sp>
         <p:nvSpPr>
-          <p:cNvPr id="21" name="TextBox 20"/>
-          <p:cNvSpPr txBox="1"/>
-          <p:nvPr/>
-        </p:nvSpPr>
-        <p:spPr>
-          <a:xfrm>
-            <a:off x="4405274" y="4716736"/>
-            <a:ext cx="3381146" cy="243278"/>
+          <p:cNvPr id="23" name="TextBox 22"/>
+          <p:cNvSpPr txBox="1"/>
+          <p:nvPr/>
+        </p:nvSpPr>
+        <p:spPr>
+          <a:xfrm>
+            <a:off x="5600090" y="4746708"/>
+            <a:ext cx="2783738" cy="243278"/>
           </a:xfrm>
           <a:prstGeom prst="rect">
             <a:avLst/>
@@ -16000,33 +16101,33 @@
       </p:sp>
       <p:sp>
         <p:nvSpPr>
-          <p:cNvPr id="22" name="TextBox 21"/>
-          <p:cNvSpPr txBox="1"/>
-          <p:nvPr/>
-        </p:nvSpPr>
-        <p:spPr>
-          <a:xfrm>
-            <a:off x="8060740" y="3917998"/>
-            <a:ext cx="3381146" cy="600892"/>
-          </a:xfrm>
-          <a:prstGeom prst="rect">
-            <a:avLst/>
-          </a:prstGeom>
-          <a:noFill/>
-        </p:spPr>
-        <p:txBody>
-          <a:bodyPr wrap="none" lIns="0" rIns="0" tIns="0" bIns="0" anchor="t">
-            <a:spAutoFit/>
-          </a:bodyPr>
-          <a:lstStyle/>
-          <a:p>
-            <a:pPr algn="l">
-              <a:lnSpc>
-                <a:spcPts val="3332"/>
-              </a:lnSpc>
-            </a:pPr>
-            <a:r>
-              <a:rPr sz="3400" spc="-102">
+          <p:cNvPr id="24" name="TextBox 23"/>
+          <p:cNvSpPr txBox="1"/>
+          <p:nvPr/>
+        </p:nvSpPr>
+        <p:spPr>
+          <a:xfrm>
+            <a:off x="8658148" y="3976844"/>
+            <a:ext cx="2783738" cy="565546"/>
+          </a:xfrm>
+          <a:prstGeom prst="rect">
+            <a:avLst/>
+          </a:prstGeom>
+          <a:noFill/>
+        </p:spPr>
+        <p:txBody>
+          <a:bodyPr wrap="none" lIns="0" rIns="0" tIns="0" bIns="0" anchor="t">
+            <a:spAutoFit/>
+          </a:bodyPr>
+          <a:lstStyle/>
+          <a:p>
+            <a:pPr algn="l">
+              <a:lnSpc>
+                <a:spcPts val="3136"/>
+              </a:lnSpc>
+            </a:pPr>
+            <a:r>
+              <a:rPr sz="3200" spc="-96">
                 <a:solidFill>
                   <a:srgbClr val="EEEBE5"/>
                 </a:solidFill>
@@ -16041,14 +16142,14 @@
       </p:sp>
       <p:sp>
         <p:nvSpPr>
-          <p:cNvPr id="23" name="TextBox 22"/>
-          <p:cNvSpPr txBox="1"/>
-          <p:nvPr/>
-        </p:nvSpPr>
-        <p:spPr>
-          <a:xfrm>
-            <a:off x="8060740" y="4475924"/>
-            <a:ext cx="3381146" cy="216408"/>
+          <p:cNvPr id="25" name="TextBox 24"/>
+          <p:cNvSpPr txBox="1"/>
+          <p:nvPr/>
+        </p:nvSpPr>
+        <p:spPr>
+          <a:xfrm>
+            <a:off x="8658148" y="4505896"/>
+            <a:ext cx="2783738" cy="216408"/>
           </a:xfrm>
           <a:prstGeom prst="rect">
             <a:avLst/>
@@ -16082,14 +16183,14 @@
       </p:sp>
       <p:sp>
         <p:nvSpPr>
-          <p:cNvPr id="24" name="TextBox 23"/>
-          <p:cNvSpPr txBox="1"/>
-          <p:nvPr/>
-        </p:nvSpPr>
-        <p:spPr>
-          <a:xfrm>
-            <a:off x="8060740" y="4716736"/>
-            <a:ext cx="3381146" cy="243278"/>
+          <p:cNvPr id="26" name="TextBox 25"/>
+          <p:cNvSpPr txBox="1"/>
+          <p:nvPr/>
+        </p:nvSpPr>
+        <p:spPr>
+          <a:xfrm>
+            <a:off x="8658148" y="4746708"/>
+            <a:ext cx="2783738" cy="243278"/>
           </a:xfrm>
           <a:prstGeom prst="rect">
             <a:avLst/>
@@ -16123,7 +16224,7 @@
       </p:sp>
       <p:sp>
         <p:nvSpPr>
-          <p:cNvPr id="25" name="TextBox 24"/>
+          <p:cNvPr id="27" name="TextBox 26"/>
           <p:cNvSpPr txBox="1"/>
           <p:nvPr/>
         </p:nvSpPr>
@@ -19075,7 +19176,7 @@
                 <a:cs typeface="IBM Plex Mono Medium"/>
                 <a:ea typeface="IBM Plex Mono Medium"/>
               </a:rPr>
-              <a:t>GRAMMARQUEST-WEB.VERCEL.APP  ·  ФАМИЛИЯ ИМЯ · __ КЛАСС · ШКОЛА №__, Г. ____ · НАУЧНЫЙ РУКОВОДИТЕЛЬ: ____</a:t>
+              <a:t>TILASHAR-KZ.VERCEL.APP  ·  ФАМИЛИЯ ИМЯ · __ КЛАСС · ШКОЛА №__, Г. ____ · НАУЧНЫЙ РУКОВОДИТЕЛЬ: ____</a:t>
             </a:r>
           </a:p>
         </p:txBody>

--- a/презентация/Тілашар-защита.pptx
+++ b/презентация/Тілашар-защита.pptx
@@ -806,12 +806,17 @@
           <a:lstStyle/>
           <a:p>
             <a:r>
-              <a:t>Честный момент, который лучше сказать самому, не дожидаясь вопроса: базовые уроки</a:t>
-            </a:r>
-          </a:p>
-          <a:p>
-            <a:r>
-              <a:t>писал я, а не носитель языка, поэтому они идут на проверку учителю.</a:t>
+              <a:t>Честный момент, который лучше сказать самому, не дожидаясь вопроса: казахский</a:t>
+            </a:r>
+          </a:p>
+          <a:p>
+            <a:r>
+              <a:t>текст курса писал не носитель языка — ни новые уроки, ни исходные. Весь текст</a:t>
+            </a:r>
+          </a:p>
+          <a:p>
+            <a:r>
+              <a:t>выгружен учителю на проверку: уроки, правила и справочник — 168 тысяч знаков.</a:t>
             </a:r>
           </a:p>
           <a:p/>
@@ -1447,12 +1452,37 @@
           </a:p>
           <a:p>
             <a:r>
-              <a:t>   Восемь базовых уроков написал я, они помечены в проекте и проходят проверку</a:t>
-            </a:r>
-          </a:p>
-          <a:p>
-            <a:r>
-              <a:t>   у учителя казахского языка. Остальные взяты из прежней версии курса.</a:t>
+              <a:t>   Нет, и это относится ко всему курсу. Восемь базовых уроков написал я,</a:t>
+            </a:r>
+          </a:p>
+          <a:p>
+            <a:r>
+              <a:t>   остальные восемнадцать сгенерировала прежняя программа, а я внёс в них</a:t>
+            </a:r>
+          </a:p>
+          <a:p>
+            <a:r>
+              <a:t>   44 исправления. Носитель языка не видел ни один урок — поэтому весь</a:t>
+            </a:r>
+          </a:p>
+          <a:p>
+            <a:r>
+              <a:t>   казахский текст выгружен учителю на проверку: 94 тысячи знаков в уроках</a:t>
+            </a:r>
+          </a:p>
+          <a:p>
+            <a:r>
+              <a:t>   и ещё 74 тысячи в правилах и справочнике — всего 168 тысяч.</a:t>
+            </a:r>
+          </a:p>
+          <a:p>
+            <a:r>
+              <a:t>   Говорить именно так: сказать «остальные взяты из прежней версии» значит</a:t>
+            </a:r>
+          </a:p>
+          <a:p>
+            <a:r>
+              <a:t>   намекнуть, что они проверены. Они не проверены.</a:t>
             </a:r>
           </a:p>
           <a:p/>
@@ -11487,7 +11517,7 @@
                 <a:cs typeface="GQ Text Bold"/>
                 <a:ea typeface="GQ Text Bold"/>
               </a:rPr>
-              <a:t>174</a:t>
+              <a:t>162</a:t>
             </a:r>
           </a:p>
         </p:txBody>
@@ -11528,7 +11558,7 @@
                 <a:cs typeface="IBM Plex Mono Medium"/>
                 <a:ea typeface="IBM Plex Mono Medium"/>
               </a:rPr>
-              <a:t>СЛОВА В</a:t>
+              <a:t>СТАТЬИ В</a:t>
             </a:r>
           </a:p>
           <a:p>
@@ -12825,8 +12855,8 @@
         </p:nvSpPr>
         <p:spPr>
           <a:xfrm>
-            <a:off x="749808" y="6285788"/>
-            <a:ext cx="10692079" cy="209194"/>
+            <a:off x="749808" y="6153200"/>
+            <a:ext cx="10692079" cy="356514"/>
           </a:xfrm>
           <a:prstGeom prst="rect">
             <a:avLst/>
@@ -12853,7 +12883,25 @@
                 <a:cs typeface="GQ Text"/>
                 <a:ea typeface="GQ Text"/>
               </a:rPr>
-              <a:t>Восемь новых уроков написаны мной и до защиты проверяются учителем казахского языка — они отдельно помечены в проекте и выгружены на сверку.</a:t>
+              <a:t>Весь казахский текст курса — и восемь новых уроков, и остальные восемнадцать — написан без участия носителя языка и проходит проверку у учителя. Полная выгрузка на сверку лежит в</a:t>
+            </a:r>
+          </a:p>
+          <a:p>
+            <a:pPr algn="l">
+              <a:lnSpc>
+                <a:spcPts val="1160"/>
+              </a:lnSpc>
+            </a:pPr>
+            <a:r>
+              <a:rPr sz="850">
+                <a:solidFill>
+                  <a:srgbClr val="535C66"/>
+                </a:solidFill>
+                <a:latin typeface="GQ Text"/>
+                <a:cs typeface="GQ Text"/>
+                <a:ea typeface="GQ Text"/>
+              </a:rPr>
+              <a:t>проекте.</a:t>
             </a:r>
           </a:p>
         </p:txBody>
@@ -13461,7 +13509,7 @@
                 <a:cs typeface="GQ Text"/>
                 <a:ea typeface="GQ Text"/>
               </a:rPr>
-              <a:t>174 слова из уроков, поиск</a:t>
+              <a:t>162 статьи из уроков, поиск</a:t>
             </a:r>
           </a:p>
           <a:p>
@@ -17047,7 +17095,7 @@
                 <a:cs typeface="GQ Text"/>
                 <a:ea typeface="GQ Text"/>
               </a:rPr>
-              <a:t>Собрал содержание базового курса и отдал его на проверку</a:t>
+              <a:t>Собрал содержание базового курса и отправил на проверку</a:t>
             </a:r>
           </a:p>
           <a:p>
@@ -17065,7 +17113,7 @@
                 <a:cs typeface="GQ Text"/>
                 <a:ea typeface="GQ Text"/>
               </a:rPr>
-              <a:t>учителю</a:t>
+              <a:t>учителю весь курс</a:t>
             </a:r>
           </a:p>
         </p:txBody>
@@ -18835,7 +18883,7 @@
                 <a:cs typeface="GQ Text"/>
                 <a:ea typeface="GQ Text"/>
               </a:rPr>
-              <a:t>Проверка базового курса учителем казахского</a:t>
+              <a:t>Проверка всего казахского текста учителем — 168</a:t>
             </a:r>
           </a:p>
           <a:p>
@@ -18853,7 +18901,7 @@
                 <a:cs typeface="GQ Text"/>
                 <a:ea typeface="GQ Text"/>
               </a:rPr>
-              <a:t>языка</a:t>
+              <a:t>тысяч знаков</a:t>
             </a:r>
           </a:p>
         </p:txBody>

--- a/презентация/Тілашар-защита.pptx
+++ b/презентация/Тілашар-защита.pptx
@@ -525,17 +525,28 @@
           <a:p/>
           <a:p>
             <a:r>
-              <a:t>Проект начался не с идеи, а с раздражения: я занимался казахским в приложении</a:t>
-            </a:r>
-          </a:p>
-          <a:p>
-            <a:r>
-              <a:t>и раз за разом получал «неверно» там, где ответ был правильный. Я решил разобраться</a:t>
-            </a:r>
-          </a:p>
-          <a:p>
-            <a:r>
-              <a:t>почему — и оказалось, что причина техническая, и её можно устранить.</a:t>
+              <a:t>Сразу скажу, откуда взялся проект. Первая версия этого тренажёра победила</a:t>
+            </a:r>
+          </a:p>
+          <a:p>
+            <a:r>
+              <a:t>на школьной олимпиаде — жюри убедил замысел. Но когда я стал смотреть, как им</a:t>
+            </a:r>
+          </a:p>
+          <a:p>
+            <a:r>
+              <a:t>пользуются, оказалось, что до конца доходят единицы. Сегодня я рассказываю,</a:t>
+            </a:r>
+          </a:p>
+          <a:p>
+            <a:r>
+              <a:t>что я за это время выяснил и какой стала вторая версия.</a:t>
+            </a:r>
+          </a:p>
+          <a:p/>
+          <a:p>
+            <a:r>
+              <a:t>Это важная рамка: я не переделываю чужую неудачу, я развиваю свою работу.</a:t>
             </a:r>
           </a:p>
           <a:p/>
@@ -1086,7 +1097,7 @@
           <a:lstStyle/>
           <a:p>
             <a:r>
-              <a:t>Про вес: код и стили — 199 килобайт, всё приложение целиком около 1,4 мегабайта.</a:t>
+              <a:t>Про вес: код и стили — 201 килобайт, всё приложение целиком около 1,4 мегабайта.</a:t>
             </a:r>
           </a:p>
           <a:p>
@@ -1398,6 +1409,17 @@
           <a:p/>
           <a:p>
             <a:r>
+              <a:t>И вторая, не менее важная: прототип победил на школьном этапе за идею. Вторая</a:t>
+            </a:r>
+          </a:p>
+          <a:p>
+            <a:r>
+              <a:t>версия — про то, как идею довели до состояния, когда ею действительно пользуются.</a:t>
+            </a:r>
+          </a:p>
+          <a:p/>
+          <a:p>
+            <a:r>
               <a:t>ЧАСТЫЕ ВОПРОСЫ ЖЮРИ</a:t>
             </a:r>
           </a:p>
@@ -1414,7 +1436,33 @@
           </a:p>
           <a:p>
             <a:r>
-              <a:t>   результат. Прежняя версия была написана без проверки — она и не работала.</a:t>
+              <a:t>   результат. Первая версия писалась без такой проверки — потому и не доходила</a:t>
+            </a:r>
+          </a:p>
+          <a:p>
+            <a:r>
+              <a:t>   до конца ни у кого, кроме меня.</a:t>
+            </a:r>
+          </a:p>
+          <a:p/>
+          <a:p>
+            <a:r>
+              <a:t>0. «А чем это отличается от прошлогодней работы?»</a:t>
+            </a:r>
+          </a:p>
+          <a:p>
+            <a:r>
+              <a:t>   Прошлый раз я показывал замысел, и он победил. В этот раз я показываю проверку</a:t>
+            </a:r>
+          </a:p>
+          <a:p>
+            <a:r>
+              <a:t>   этого замысла на данных и то, что из проверки вышло: движок сверки ответов,</a:t>
+            </a:r>
+          </a:p>
+          <a:p>
+            <a:r>
+              <a:t>   базовый курс для 5–7 класса, интервальное повторение, работа без интернета.</a:t>
             </a:r>
           </a:p>
           <a:p/>
@@ -1655,18 +1703,28 @@
           <a:lstStyle/>
           <a:p>
             <a:r>
-              <a:t>Ключевая мысль: я не стал сразу переделывать программу. Сначала вопрос и гипотеза,</a:t>
-            </a:r>
-          </a:p>
-          <a:p>
-            <a:r>
-              <a:t>потом проверка.</a:t>
+              <a:t>Ключевая мысль слайда: победа на школьном этапе — это признание идеи, а не</a:t>
+            </a:r>
+          </a:p>
+          <a:p>
+            <a:r>
+              <a:t>доказательство, что продукт работает. Разница между этими двумя вещами</a:t>
+            </a:r>
+          </a:p>
+          <a:p>
+            <a:r>
+              <a:t>и есть содержание моей второй версии.</a:t>
             </a:r>
           </a:p>
           <a:p/>
           <a:p>
             <a:r>
-              <a:t>Гипотезу я сформулировал так, чтобы её можно было опровергнуть. Если бы барьеры</a:t>
+              <a:t>Я не стал сразу дописывать программу. Сначала вопрос и гипотеза, потом проверка.</a:t>
+            </a:r>
+          </a:p>
+          <a:p>
+            <a:r>
+              <a:t>Гипотезу сформулировал так, чтобы её можно было опровергнуть: если бы барьеры</a:t>
             </a:r>
           </a:p>
           <a:p>
@@ -1746,7 +1804,12 @@
           </a:p>
           <a:p>
             <a:r>
-              <a:t>а не «улучшить»: пока не знаешь причину, улучшать нечего.</a:t>
+              <a:t>а не «улучшить»: пока не знаешь причину, улучшать нечего. Это и отличает вторую</a:t>
+            </a:r>
+          </a:p>
+          <a:p>
+            <a:r>
+              <a:t>версию от простого «дописал ещё уроков».</a:t>
             </a:r>
           </a:p>
           <a:p/>
@@ -2102,23 +2165,23 @@
           <a:lstStyle/>
           <a:p>
             <a:r>
-              <a:t>Здесь важно не злорадствовать над прежней версией — её писал я же, только раньше</a:t>
-            </a:r>
-          </a:p>
-          <a:p>
-            <a:r>
-              <a:t>и с помощью нейросети, которая уверенно описывала то, чего не сделала.</a:t>
+              <a:t>Тон здесь важен. Это не разбор чужих ошибок и не самобичевание: у первой версии</a:t>
+            </a:r>
+          </a:p>
+          <a:p>
+            <a:r>
+              <a:t>замысел был шире того, что успело заработать, — так бывает с любым прототипом.</a:t>
+            </a:r>
+          </a:p>
+          <a:p>
+            <a:r>
+              <a:t>Ценность в том, что я это проверил, а не поверил описанию.</a:t>
             </a:r>
           </a:p>
           <a:p/>
           <a:p>
             <a:r>
-              <a:t>Главный вывод для меня: описание в документации ничего не доказывает. Проверять</a:t>
-            </a:r>
-          </a:p>
-          <a:p>
-            <a:r>
-              <a:t>надо код и данные.</a:t>
+              <a:t>Главный вывод: описание ничего не доказывает. Проверять надо код и данные.</a:t>
             </a:r>
           </a:p>
         </p:txBody>
@@ -9337,7 +9400,7 @@
                 <a:cs typeface="GQ Text Bold"/>
                 <a:ea typeface="GQ Text Bold"/>
               </a:rPr>
-              <a:t>Тренажёр, который</a:t>
+              <a:t>От прототипа</a:t>
             </a:r>
           </a:p>
         </p:txBody>
@@ -9378,7 +9441,7 @@
                 <a:cs typeface="GQ Text Bold"/>
                 <a:ea typeface="GQ Text Bold"/>
               </a:rPr>
-              <a:t>не спорит с учеником</a:t>
+              <a:t>к рабочему тренажёру</a:t>
             </a:r>
           </a:p>
         </p:txBody>
@@ -9437,7 +9500,7 @@
                 <a:cs typeface="GQ Text"/>
                 <a:ea typeface="GQ Text"/>
               </a:rPr>
-              <a:t>Рассказываю, почему прежняя версия не работала, что я в ней измерил и</a:t>
+              <a:t>Первая версия победила на школьной олимпиаде. Рассказываю, что я</a:t>
             </a:r>
           </a:p>
           <a:p>
@@ -9455,7 +9518,7 @@
                 <a:cs typeface="GQ Text"/>
                 <a:ea typeface="GQ Text"/>
               </a:rPr>
-              <a:t>что сделал.</a:t>
+              <a:t>узнал за это время и какой стала вторая.</a:t>
             </a:r>
           </a:p>
         </p:txBody>
@@ -15937,7 +16000,7 @@
                 <a:cs typeface="GQ Text Bold"/>
                 <a:ea typeface="GQ Text Bold"/>
               </a:rPr>
-              <a:t>199</a:t>
+              <a:t>201</a:t>
             </a:r>
           </a:p>
         </p:txBody>
@@ -16690,7 +16753,7 @@
                 <a:cs typeface="GQ Text"/>
                 <a:ea typeface="GQ Text"/>
               </a:rPr>
-              <a:t>Код я писал с помощью нейросети — и именно поэтому проверял каждое её утверждение. Прежняя версия</a:t>
+              <a:t>Код я писал с помощью нейросети — и именно поэтому проверял каждое её утверждение. Прототип показал,</a:t>
             </a:r>
           </a:p>
           <a:p>
@@ -16708,7 +16771,7 @@
                 <a:cs typeface="GQ Text"/>
                 <a:ea typeface="GQ Text"/>
               </a:rPr>
-              <a:t>показала, чем кончается доверие без проверки.</a:t>
+              <a:t>чем кончается доверие без проверки.</a:t>
             </a:r>
           </a:p>
         </p:txBody>
@@ -18437,7 +18500,7 @@
         <p:spPr>
           <a:xfrm>
             <a:off x="749808" y="1960626"/>
-            <a:ext cx="6153226" cy="2440432"/>
+            <a:ext cx="6153226" cy="2757932"/>
           </a:xfrm>
           <a:prstGeom prst="rect">
             <a:avLst/>
@@ -18661,7 +18724,7 @@
         <p:spPr>
           <a:xfrm>
             <a:off x="1024127" y="2488438"/>
-            <a:ext cx="5604586" cy="1720850"/>
+            <a:ext cx="5604586" cy="2038349"/>
           </a:xfrm>
           <a:prstGeom prst="rect">
             <a:avLst/>
@@ -18688,7 +18751,7 @@
                 <a:cs typeface="GQ Text Bold"/>
                 <a:ea typeface="GQ Text Bold"/>
               </a:rPr>
-              <a:t>Гипотеза подтвердилась: главным</a:t>
+              <a:t>Гипотеза подтвердилась: ученикам мешала</a:t>
             </a:r>
           </a:p>
           <a:p>
@@ -18706,7 +18769,7 @@
                 <a:cs typeface="GQ Text Bold"/>
                 <a:ea typeface="GQ Text Bold"/>
               </a:rPr>
-              <a:t>препятствием оказалась не сложность</a:t>
+              <a:t>не сложность казахского языка, а</a:t>
             </a:r>
           </a:p>
           <a:p>
@@ -18724,7 +18787,7 @@
                 <a:cs typeface="GQ Text Bold"/>
                 <a:ea typeface="GQ Text Bold"/>
               </a:rPr>
-              <a:t>казахского языка, а технические барьеры.</a:t>
+              <a:t>технические барьеры. Их удалось снять, и ни</a:t>
             </a:r>
           </a:p>
           <a:p>
@@ -18742,7 +18805,7 @@
                 <a:cs typeface="GQ Text Bold"/>
                 <a:ea typeface="GQ Text Bold"/>
               </a:rPr>
-              <a:t>Их удалось снять, и ни один из них не</a:t>
+              <a:t>один не потребовал упрощать сам язык.</a:t>
             </a:r>
           </a:p>
           <a:p>
@@ -18760,7 +18823,25 @@
                 <a:cs typeface="GQ Text Bold"/>
                 <a:ea typeface="GQ Text Bold"/>
               </a:rPr>
-              <a:t>потребовал упрощать сам язык.</a:t>
+              <a:t>Прототип был верной идеей — второй версии</a:t>
+            </a:r>
+          </a:p>
+          <a:p>
+            <a:pPr algn="l">
+              <a:lnSpc>
+                <a:spcPts val="2500"/>
+              </a:lnSpc>
+            </a:pPr>
+            <a:r>
+              <a:rPr sz="1900" spc="-34">
+                <a:solidFill>
+                  <a:srgbClr val="EEEBE5"/>
+                </a:solidFill>
+                <a:latin typeface="GQ Text Bold"/>
+                <a:cs typeface="GQ Text Bold"/>
+                <a:ea typeface="GQ Text Bold"/>
+              </a:rPr>
+              <a:t>понадобилось довести её до рабочего вида.</a:t>
             </a:r>
           </a:p>
         </p:txBody>
@@ -20038,7 +20119,7 @@
                 <a:cs typeface="IBM Plex Mono SemiBold"/>
                 <a:ea typeface="IBM Plex Mono SemiBold"/>
               </a:rPr>
-              <a:t>ПРОБЛЕМА ИССЛЕДОВАНИЯ</a:t>
+              <a:t>С ЧЕГО НАЧАЛАСЬ ВТОРАЯ ВЕРСИЯ</a:t>
             </a:r>
           </a:p>
         </p:txBody>
@@ -20120,7 +20201,7 @@
                 <a:cs typeface="GQ Text Bold"/>
                 <a:ea typeface="GQ Text Bold"/>
               </a:rPr>
-              <a:t>У меня уже была программа. Она не работала —</a:t>
+              <a:t>Прототип победил на школьной олимпиаде. А</a:t>
             </a:r>
           </a:p>
           <a:p>
@@ -20138,7 +20219,7 @@
                 <a:cs typeface="GQ Text Bold"/>
                 <a:ea typeface="GQ Text Bold"/>
               </a:rPr>
-              <a:t>и я хотел понять почему</a:t>
+              <a:t>потом я стал смотреть, как им пользуются</a:t>
             </a:r>
           </a:p>
         </p:txBody>
@@ -20179,7 +20260,7 @@
                 <a:cs typeface="GQ Text"/>
                 <a:ea typeface="GQ Text"/>
               </a:rPr>
-              <a:t>Написанная раньше версия тренажёра существовала, но ученики бросали её через несколько заданий. Вместо</a:t>
+              <a:t>Замысел жюри убедил. Но за экраном обнаружилось другое: ученики доходили до нескольких заданий и</a:t>
             </a:r>
           </a:p>
           <a:p>
@@ -20197,7 +20278,7 @@
                 <a:cs typeface="GQ Text"/>
                 <a:ea typeface="GQ Text"/>
               </a:rPr>
-              <a:t>того чтобы переписывать наугад, я поставил вопрос как исследовательский.</a:t>
+              <a:t>переставали. Вместо того чтобы дописывать наугад, я поставил вопрос как исследовательский.</a:t>
             </a:r>
           </a:p>
         </p:txBody>
@@ -20530,7 +20611,7 @@
         </p:nvSpPr>
         <p:spPr>
           <a:xfrm>
-            <a:off x="7104202" y="2263775"/>
+            <a:off x="7104202" y="2277364"/>
             <a:ext cx="4337684" cy="1964182"/>
           </a:xfrm>
           <a:prstGeom prst="rect">
@@ -20674,27 +20755,27 @@
         </p:nvSpPr>
         <p:spPr>
           <a:xfrm>
-            <a:off x="749808" y="804986"/>
-            <a:ext cx="10692079" cy="1101660"/>
-          </a:xfrm>
-          <a:prstGeom prst="rect">
-            <a:avLst/>
-          </a:prstGeom>
-          <a:noFill/>
-        </p:spPr>
-        <p:txBody>
-          <a:bodyPr wrap="none" lIns="0" rIns="0" tIns="0" bIns="0" anchor="t">
-            <a:spAutoFit/>
-          </a:bodyPr>
-          <a:lstStyle/>
-          <a:p>
-            <a:pPr algn="l">
-              <a:lnSpc>
-                <a:spcPts val="3584"/>
-              </a:lnSpc>
-            </a:pPr>
-            <a:r>
-              <a:rPr sz="3350" spc="-74">
+            <a:off x="749808" y="803899"/>
+            <a:ext cx="10692079" cy="1118102"/>
+          </a:xfrm>
+          <a:prstGeom prst="rect">
+            <a:avLst/>
+          </a:prstGeom>
+          <a:noFill/>
+        </p:spPr>
+        <p:txBody>
+          <a:bodyPr wrap="none" lIns="0" rIns="0" tIns="0" bIns="0" anchor="t">
+            <a:spAutoFit/>
+          </a:bodyPr>
+          <a:lstStyle/>
+          <a:p>
+            <a:pPr algn="l">
+              <a:lnSpc>
+                <a:spcPts val="3638"/>
+              </a:lnSpc>
+            </a:pPr>
+            <a:r>
+              <a:rPr sz="3400" spc="-75">
                 <a:solidFill>
                   <a:srgbClr val="1B222B"/>
                 </a:solidFill>
@@ -20702,17 +20783,17 @@
                 <a:cs typeface="GQ Text Bold"/>
                 <a:ea typeface="GQ Text Bold"/>
               </a:rPr>
-              <a:t>Цель: превратить нерабочий прототип в тренажёр,</a:t>
-            </a:r>
-          </a:p>
-          <a:p>
-            <a:pPr algn="l">
-              <a:lnSpc>
-                <a:spcPts val="3584"/>
-              </a:lnSpc>
-            </a:pPr>
-            <a:r>
-              <a:rPr sz="3350" spc="-74">
+              <a:t>Цель: довести прототип до тренажёра, которым</a:t>
+            </a:r>
+          </a:p>
+          <a:p>
+            <a:pPr algn="l">
+              <a:lnSpc>
+                <a:spcPts val="3638"/>
+              </a:lnSpc>
+            </a:pPr>
+            <a:r>
+              <a:rPr sz="3400" spc="-75">
                 <a:solidFill>
                   <a:srgbClr val="1B222B"/>
                 </a:solidFill>
@@ -20720,7 +20801,7 @@
                 <a:cs typeface="GQ Text Bold"/>
                 <a:ea typeface="GQ Text Bold"/>
               </a:rPr>
-              <a:t>которым можно пользоваться каждый день</a:t>
+              <a:t>занимаются каждый день</a:t>
             </a:r>
           </a:p>
         </p:txBody>
@@ -20733,7 +20814,7 @@
         </p:nvSpPr>
         <p:spPr>
           <a:xfrm>
-            <a:off x="749808" y="2044319"/>
+            <a:off x="749808" y="2057908"/>
             <a:ext cx="10692079" cy="7315"/>
           </a:xfrm>
           <a:prstGeom prst="rect">
@@ -20763,7 +20844,7 @@
         </p:nvSpPr>
         <p:spPr>
           <a:xfrm>
-            <a:off x="749808" y="2241423"/>
+            <a:off x="749808" y="2255012"/>
             <a:ext cx="6153226" cy="198374"/>
           </a:xfrm>
           <a:prstGeom prst="rect">
@@ -20804,7 +20885,7 @@
         </p:nvSpPr>
         <p:spPr>
           <a:xfrm>
-            <a:off x="749808" y="2571927"/>
+            <a:off x="749808" y="2585516"/>
             <a:ext cx="216916" cy="290347"/>
           </a:xfrm>
           <a:prstGeom prst="rect">
@@ -20845,8 +20926,8 @@
         </p:nvSpPr>
         <p:spPr>
           <a:xfrm>
-            <a:off x="966724" y="2571927"/>
-            <a:ext cx="5936310" cy="511174"/>
+            <a:off x="966724" y="2585516"/>
+            <a:ext cx="5936310" cy="306705"/>
           </a:xfrm>
           <a:prstGeom prst="rect">
             <a:avLst/>
@@ -20884,15 +20965,90 @@
                 <a:cs typeface="GQ Text"/>
                 <a:ea typeface="GQ Text"/>
               </a:rPr>
-              <a:t> Проверить каждое заявленное свойство прежней версии на данных,</a:t>
-            </a:r>
-          </a:p>
+              <a:t> Проверить каждое свойство прототипа на данных, а не на глаз.</a:t>
+            </a:r>
+          </a:p>
+        </p:txBody>
+      </p:sp>
+      <p:sp>
+        <p:nvSpPr>
+          <p:cNvPr id="11" name="TextBox 10"/>
+          <p:cNvSpPr txBox="1"/>
+          <p:nvPr/>
+        </p:nvSpPr>
+        <p:spPr>
+          <a:xfrm>
+            <a:off x="749808" y="2945434"/>
+            <a:ext cx="216916" cy="290347"/>
+          </a:xfrm>
+          <a:prstGeom prst="rect">
+            <a:avLst/>
+          </a:prstGeom>
+          <a:noFill/>
+        </p:spPr>
+        <p:txBody>
+          <a:bodyPr wrap="none" lIns="0" rIns="0" tIns="0" bIns="0" anchor="t">
+            <a:spAutoFit/>
+          </a:bodyPr>
+          <a:lstStyle/>
           <a:p>
             <a:pPr algn="l">
               <a:lnSpc>
                 <a:spcPts val="1610"/>
               </a:lnSpc>
             </a:pPr>
+            <a:r>
+              <a:rPr sz="1150">
+                <a:solidFill>
+                  <a:srgbClr val="0064B9"/>
+                </a:solidFill>
+                <a:latin typeface="IBM Plex Mono Medium"/>
+                <a:cs typeface="IBM Plex Mono Medium"/>
+                <a:ea typeface="IBM Plex Mono Medium"/>
+              </a:rPr>
+              <a:t>→</a:t>
+            </a:r>
+          </a:p>
+        </p:txBody>
+      </p:sp>
+      <p:sp>
+        <p:nvSpPr>
+          <p:cNvPr id="12" name="TextBox 11"/>
+          <p:cNvSpPr txBox="1"/>
+          <p:nvPr/>
+        </p:nvSpPr>
+        <p:spPr>
+          <a:xfrm>
+            <a:off x="966724" y="2945434"/>
+            <a:ext cx="5936310" cy="511174"/>
+          </a:xfrm>
+          <a:prstGeom prst="rect">
+            <a:avLst/>
+          </a:prstGeom>
+          <a:noFill/>
+        </p:spPr>
+        <p:txBody>
+          <a:bodyPr wrap="none" lIns="0" rIns="0" tIns="0" bIns="0" anchor="t">
+            <a:spAutoFit/>
+          </a:bodyPr>
+          <a:lstStyle/>
+          <a:p>
+            <a:pPr algn="l">
+              <a:lnSpc>
+                <a:spcPts val="1610"/>
+              </a:lnSpc>
+            </a:pPr>
+            <a:r>
+              <a:rPr sz="1150">
+                <a:solidFill>
+                  <a:srgbClr val="1B222B"/>
+                </a:solidFill>
+                <a:latin typeface="GQ Text SemiBold"/>
+                <a:cs typeface="GQ Text SemiBold"/>
+                <a:ea typeface="GQ Text SemiBold"/>
+              </a:rPr>
+              <a:t>Снять барьер ввода. </a:t>
+            </a:r>
             <a:r>
               <a:rPr sz="1150">
                 <a:solidFill>
@@ -20902,20 +21058,38 @@
                 <a:cs typeface="GQ Text"/>
                 <a:ea typeface="GQ Text"/>
               </a:rPr>
-              <a:t>а не на глаз.</a:t>
-            </a:r>
-          </a:p>
-        </p:txBody>
-      </p:sp>
-      <p:sp>
-        <p:nvSpPr>
-          <p:cNvPr id="11" name="TextBox 10"/>
-          <p:cNvSpPr txBox="1"/>
-          <p:nvPr/>
-        </p:nvSpPr>
-        <p:spPr>
-          <a:xfrm>
-            <a:off x="749808" y="3136315"/>
+              <a:t> Сделать так, чтобы верный ответ засчитывался с обычной</a:t>
+            </a:r>
+          </a:p>
+          <a:p>
+            <a:pPr algn="l">
+              <a:lnSpc>
+                <a:spcPts val="1610"/>
+              </a:lnSpc>
+            </a:pPr>
+            <a:r>
+              <a:rPr sz="1150">
+                <a:solidFill>
+                  <a:srgbClr val="1B222B"/>
+                </a:solidFill>
+                <a:latin typeface="GQ Text"/>
+                <a:cs typeface="GQ Text"/>
+                <a:ea typeface="GQ Text"/>
+              </a:rPr>
+              <a:t>русской клавиатуры.</a:t>
+            </a:r>
+          </a:p>
+        </p:txBody>
+      </p:sp>
+      <p:sp>
+        <p:nvSpPr>
+          <p:cNvPr id="13" name="TextBox 12"/>
+          <p:cNvSpPr txBox="1"/>
+          <p:nvPr/>
+        </p:nvSpPr>
+        <p:spPr>
+          <a:xfrm>
+            <a:off x="749808" y="3509822"/>
             <a:ext cx="216916" cy="290347"/>
           </a:xfrm>
           <a:prstGeom prst="rect">
@@ -20950,13 +21124,13 @@
       </p:sp>
       <p:sp>
         <p:nvSpPr>
-          <p:cNvPr id="12" name="TextBox 11"/>
-          <p:cNvSpPr txBox="1"/>
-          <p:nvPr/>
-        </p:nvSpPr>
-        <p:spPr>
-          <a:xfrm>
-            <a:off x="966724" y="3136315"/>
+          <p:cNvPr id="14" name="TextBox 13"/>
+          <p:cNvSpPr txBox="1"/>
+          <p:nvPr/>
+        </p:nvSpPr>
+        <p:spPr>
+          <a:xfrm>
+            <a:off x="966724" y="3509822"/>
             <a:ext cx="5936310" cy="511174"/>
           </a:xfrm>
           <a:prstGeom prst="rect">
@@ -20984,7 +21158,7 @@
                 <a:cs typeface="GQ Text SemiBold"/>
                 <a:ea typeface="GQ Text SemiBold"/>
               </a:rPr>
-              <a:t>Снять барьер ввода. </a:t>
+              <a:t>Достроить содержание. </a:t>
             </a:r>
             <a:r>
               <a:rPr sz="1150">
@@ -20995,7 +21169,7 @@
                 <a:cs typeface="GQ Text"/>
                 <a:ea typeface="GQ Text"/>
               </a:rPr>
-              <a:t> Сделать так, чтобы верный ответ засчитывался с обычной</a:t>
+              <a:t> Курс начинался с уровня 8–11 класса — пятикласснику</a:t>
             </a:r>
           </a:p>
           <a:p>
@@ -21013,20 +21187,20 @@
                 <a:cs typeface="GQ Text"/>
                 <a:ea typeface="GQ Text"/>
               </a:rPr>
-              <a:t>русской клавиатуры.</a:t>
-            </a:r>
-          </a:p>
-        </p:txBody>
-      </p:sp>
-      <p:sp>
-        <p:nvSpPr>
-          <p:cNvPr id="13" name="TextBox 12"/>
-          <p:cNvSpPr txBox="1"/>
-          <p:nvPr/>
-        </p:nvSpPr>
-        <p:spPr>
-          <a:xfrm>
-            <a:off x="749808" y="3700703"/>
+              <a:t>не за что было зацепиться.</a:t>
+            </a:r>
+          </a:p>
+        </p:txBody>
+      </p:sp>
+      <p:sp>
+        <p:nvSpPr>
+          <p:cNvPr id="15" name="TextBox 14"/>
+          <p:cNvSpPr txBox="1"/>
+          <p:nvPr/>
+        </p:nvSpPr>
+        <p:spPr>
+          <a:xfrm>
+            <a:off x="749808" y="4074210"/>
             <a:ext cx="216916" cy="290347"/>
           </a:xfrm>
           <a:prstGeom prst="rect">
@@ -21061,13 +21235,13 @@
       </p:sp>
       <p:sp>
         <p:nvSpPr>
-          <p:cNvPr id="14" name="TextBox 13"/>
-          <p:cNvSpPr txBox="1"/>
-          <p:nvPr/>
-        </p:nvSpPr>
-        <p:spPr>
-          <a:xfrm>
-            <a:off x="966724" y="3700703"/>
+          <p:cNvPr id="16" name="TextBox 15"/>
+          <p:cNvSpPr txBox="1"/>
+          <p:nvPr/>
+        </p:nvSpPr>
+        <p:spPr>
+          <a:xfrm>
+            <a:off x="966724" y="4074210"/>
             <a:ext cx="5936310" cy="511174"/>
           </a:xfrm>
           <a:prstGeom prst="rect">
@@ -21095,7 +21269,7 @@
                 <a:cs typeface="GQ Text SemiBold"/>
                 <a:ea typeface="GQ Text SemiBold"/>
               </a:rPr>
-              <a:t>Достроить содержание. </a:t>
+              <a:t>Довести до телефона. </a:t>
             </a:r>
             <a:r>
               <a:rPr sz="1150">
@@ -21106,7 +21280,7 @@
                 <a:cs typeface="GQ Text"/>
                 <a:ea typeface="GQ Text"/>
               </a:rPr>
-              <a:t> Курс начинался с уровня 8–11 класса — пятикласснику</a:t>
+              <a:t> Приложение должно открываться с домашнего экрана и</a:t>
             </a:r>
           </a:p>
           <a:p>
@@ -21124,20 +21298,20 @@
                 <a:cs typeface="GQ Text"/>
                 <a:ea typeface="GQ Text"/>
               </a:rPr>
-              <a:t>не за что было зацепиться.</a:t>
-            </a:r>
-          </a:p>
-        </p:txBody>
-      </p:sp>
-      <p:sp>
-        <p:nvSpPr>
-          <p:cNvPr id="15" name="TextBox 14"/>
-          <p:cNvSpPr txBox="1"/>
-          <p:nvPr/>
-        </p:nvSpPr>
-        <p:spPr>
-          <a:xfrm>
-            <a:off x="749808" y="4265091"/>
+              <a:t>работать без интернета.</a:t>
+            </a:r>
+          </a:p>
+        </p:txBody>
+      </p:sp>
+      <p:sp>
+        <p:nvSpPr>
+          <p:cNvPr id="17" name="TextBox 16"/>
+          <p:cNvSpPr txBox="1"/>
+          <p:nvPr/>
+        </p:nvSpPr>
+        <p:spPr>
+          <a:xfrm>
+            <a:off x="749808" y="4638598"/>
             <a:ext cx="216916" cy="290347"/>
           </a:xfrm>
           <a:prstGeom prst="rect">
@@ -21172,13 +21346,13 @@
       </p:sp>
       <p:sp>
         <p:nvSpPr>
-          <p:cNvPr id="16" name="TextBox 15"/>
-          <p:cNvSpPr txBox="1"/>
-          <p:nvPr/>
-        </p:nvSpPr>
-        <p:spPr>
-          <a:xfrm>
-            <a:off x="966724" y="4265091"/>
+          <p:cNvPr id="18" name="TextBox 17"/>
+          <p:cNvSpPr txBox="1"/>
+          <p:nvPr/>
+        </p:nvSpPr>
+        <p:spPr>
+          <a:xfrm>
+            <a:off x="966724" y="4638598"/>
             <a:ext cx="5936310" cy="511174"/>
           </a:xfrm>
           <a:prstGeom prst="rect">
@@ -21206,7 +21380,7 @@
                 <a:cs typeface="GQ Text SemiBold"/>
                 <a:ea typeface="GQ Text SemiBold"/>
               </a:rPr>
-              <a:t>Довести до телефона. </a:t>
+              <a:t>Проверить на людях. </a:t>
             </a:r>
             <a:r>
               <a:rPr sz="1150">
@@ -21217,7 +21391,7 @@
                 <a:cs typeface="GQ Text"/>
                 <a:ea typeface="GQ Text"/>
               </a:rPr>
-              <a:t> Приложение должно открываться с домашнего экрана и</a:t>
+              <a:t> Встроить сбор данных, чтобы результат можно было</a:t>
             </a:r>
           </a:p>
           <a:p>
@@ -21235,117 +21409,6 @@
                 <a:cs typeface="GQ Text"/>
                 <a:ea typeface="GQ Text"/>
               </a:rPr>
-              <a:t>работать без интернета.</a:t>
-            </a:r>
-          </a:p>
-        </p:txBody>
-      </p:sp>
-      <p:sp>
-        <p:nvSpPr>
-          <p:cNvPr id="17" name="TextBox 16"/>
-          <p:cNvSpPr txBox="1"/>
-          <p:nvPr/>
-        </p:nvSpPr>
-        <p:spPr>
-          <a:xfrm>
-            <a:off x="749808" y="4829479"/>
-            <a:ext cx="216916" cy="290347"/>
-          </a:xfrm>
-          <a:prstGeom prst="rect">
-            <a:avLst/>
-          </a:prstGeom>
-          <a:noFill/>
-        </p:spPr>
-        <p:txBody>
-          <a:bodyPr wrap="none" lIns="0" rIns="0" tIns="0" bIns="0" anchor="t">
-            <a:spAutoFit/>
-          </a:bodyPr>
-          <a:lstStyle/>
-          <a:p>
-            <a:pPr algn="l">
-              <a:lnSpc>
-                <a:spcPts val="1610"/>
-              </a:lnSpc>
-            </a:pPr>
-            <a:r>
-              <a:rPr sz="1150">
-                <a:solidFill>
-                  <a:srgbClr val="0064B9"/>
-                </a:solidFill>
-                <a:latin typeface="IBM Plex Mono Medium"/>
-                <a:cs typeface="IBM Plex Mono Medium"/>
-                <a:ea typeface="IBM Plex Mono Medium"/>
-              </a:rPr>
-              <a:t>→</a:t>
-            </a:r>
-          </a:p>
-        </p:txBody>
-      </p:sp>
-      <p:sp>
-        <p:nvSpPr>
-          <p:cNvPr id="18" name="TextBox 17"/>
-          <p:cNvSpPr txBox="1"/>
-          <p:nvPr/>
-        </p:nvSpPr>
-        <p:spPr>
-          <a:xfrm>
-            <a:off x="966724" y="4829479"/>
-            <a:ext cx="5936310" cy="511174"/>
-          </a:xfrm>
-          <a:prstGeom prst="rect">
-            <a:avLst/>
-          </a:prstGeom>
-          <a:noFill/>
-        </p:spPr>
-        <p:txBody>
-          <a:bodyPr wrap="none" lIns="0" rIns="0" tIns="0" bIns="0" anchor="t">
-            <a:spAutoFit/>
-          </a:bodyPr>
-          <a:lstStyle/>
-          <a:p>
-            <a:pPr algn="l">
-              <a:lnSpc>
-                <a:spcPts val="1610"/>
-              </a:lnSpc>
-            </a:pPr>
-            <a:r>
-              <a:rPr sz="1150">
-                <a:solidFill>
-                  <a:srgbClr val="1B222B"/>
-                </a:solidFill>
-                <a:latin typeface="GQ Text SemiBold"/>
-                <a:cs typeface="GQ Text SemiBold"/>
-                <a:ea typeface="GQ Text SemiBold"/>
-              </a:rPr>
-              <a:t>Проверить на людях. </a:t>
-            </a:r>
-            <a:r>
-              <a:rPr sz="1150">
-                <a:solidFill>
-                  <a:srgbClr val="1B222B"/>
-                </a:solidFill>
-                <a:latin typeface="GQ Text"/>
-                <a:cs typeface="GQ Text"/>
-                <a:ea typeface="GQ Text"/>
-              </a:rPr>
-              <a:t> Встроить сбор данных, чтобы результат можно было</a:t>
-            </a:r>
-          </a:p>
-          <a:p>
-            <a:pPr algn="l">
-              <a:lnSpc>
-                <a:spcPts val="1610"/>
-              </a:lnSpc>
-            </a:pPr>
-            <a:r>
-              <a:rPr sz="1150">
-                <a:solidFill>
-                  <a:srgbClr val="1B222B"/>
-                </a:solidFill>
-                <a:latin typeface="GQ Text"/>
-                <a:cs typeface="GQ Text"/>
-                <a:ea typeface="GQ Text"/>
-              </a:rPr>
               <a:t>измерить, а не заявить.</a:t>
             </a:r>
           </a:p>
@@ -21359,7 +21422,7 @@
         </p:nvSpPr>
         <p:spPr>
           <a:xfrm>
-            <a:off x="7360234" y="2515743"/>
+            <a:off x="7360234" y="2529332"/>
             <a:ext cx="3825621" cy="198374"/>
           </a:xfrm>
           <a:prstGeom prst="rect">
@@ -21400,7 +21463,7 @@
         </p:nvSpPr>
         <p:spPr>
           <a:xfrm>
-            <a:off x="7360234" y="2806827"/>
+            <a:off x="7360234" y="2820416"/>
             <a:ext cx="3825621" cy="1204594"/>
           </a:xfrm>
           <a:prstGeom prst="rect">
@@ -21742,7 +21805,7 @@
                 <a:cs typeface="GQ Text"/>
                 <a:ea typeface="GQ Text"/>
               </a:rPr>
-              <a:t>Каждое утверждение о прежней версии я проверял на данных самого проекта. Все проверки —</a:t>
+              <a:t>Каждое утверждение о прототипе я проверял на данных самого проекта. Все проверки — скриптами,</a:t>
             </a:r>
           </a:p>
           <a:p>
@@ -21760,7 +21823,7 @@
                 <a:cs typeface="GQ Text"/>
                 <a:ea typeface="GQ Text"/>
               </a:rPr>
-              <a:t>скриптами, которые лежат в репозитории и запускаются заново.</a:t>
+              <a:t>которые лежат в репозитории и запускаются заново.</a:t>
             </a:r>
           </a:p>
         </p:txBody>
@@ -22240,7 +22303,7 @@
         <p:spPr>
           <a:xfrm>
             <a:off x="5114422" y="3118358"/>
-            <a:ext cx="1962851" cy="842010"/>
+            <a:ext cx="1962851" cy="651509"/>
           </a:xfrm>
           <a:prstGeom prst="rect">
             <a:avLst/>
@@ -22267,7 +22330,7 @@
                 <a:cs typeface="GQ Text"/>
                 <a:ea typeface="GQ Text"/>
               </a:rPr>
-              <a:t>Нашёл, что заявленные типы</a:t>
+              <a:t>Нашёл, какие задуманные</a:t>
             </a:r>
           </a:p>
           <a:p>
@@ -22285,7 +22348,7 @@
                 <a:cs typeface="GQ Text"/>
                 <a:ea typeface="GQ Text"/>
               </a:rPr>
-              <a:t>заданий нигде не</a:t>
+              <a:t>типы заданий прототип так и</a:t>
             </a:r>
           </a:p>
           <a:p>
@@ -22303,25 +22366,7 @@
                 <a:cs typeface="GQ Text"/>
                 <a:ea typeface="GQ Text"/>
               </a:rPr>
-              <a:t>включались, а один из них</a:t>
-            </a:r>
-          </a:p>
-          <a:p>
-            <a:pPr algn="l">
-              <a:lnSpc>
-                <a:spcPts val="1500"/>
-              </a:lnSpc>
-            </a:pPr>
-            <a:r>
-              <a:rPr sz="1050">
-                <a:solidFill>
-                  <a:srgbClr val="535C66"/>
-                </a:solidFill>
-                <a:latin typeface="GQ Text"/>
-                <a:cs typeface="GQ Text"/>
-                <a:ea typeface="GQ Text"/>
-              </a:rPr>
-              <a:t>уронил бы экран.</a:t>
+              <a:t>не успел включить.</a:t>
             </a:r>
           </a:p>
         </p:txBody>
@@ -22917,7 +22962,7 @@
                 <a:cs typeface="GQ Text"/>
                 <a:ea typeface="GQ Text"/>
               </a:rPr>
-              <a:t>В казахском есть буквы ә ғ қ ң ө ұ ү һ і. На русской раскладке их физически негде взять. А прежняя проверка</a:t>
+              <a:t>В казахском есть буквы ә ғ қ ң ө ұ ү һ і. На русской раскладке их физически негде взять. А проверка ответов</a:t>
             </a:r>
           </a:p>
           <a:p>
@@ -22935,7 +22980,7 @@
                 <a:cs typeface="GQ Text"/>
                 <a:ea typeface="GQ Text"/>
               </a:rPr>
-              <a:t>ответов была строгим сравнением строк.</a:t>
+              <a:t>в прототипе была строгим сравнением строк.</a:t>
             </a:r>
           </a:p>
         </p:txBody>
@@ -23304,7 +23349,7 @@
                 <a:cs typeface="GQ Text"/>
                 <a:ea typeface="GQ Text"/>
               </a:rPr>
-              <a:t>прежняя версия не давала ни одной</a:t>
+              <a:t>прототип не давал ни одной</a:t>
             </a:r>
           </a:p>
         </p:txBody>
@@ -23594,7 +23639,7 @@
                 <a:cs typeface="GQ Text Bold"/>
                 <a:ea typeface="GQ Text Bold"/>
               </a:rPr>
-              <a:t>Приложение для казахского было набрано</a:t>
+              <a:t>Прототип для казахского был набран шрифтом</a:t>
             </a:r>
           </a:p>
           <a:p>
@@ -23612,7 +23657,7 @@
                 <a:cs typeface="GQ Text Bold"/>
                 <a:ea typeface="GQ Text Bold"/>
               </a:rPr>
-              <a:t>шрифтом без казахских букв</a:t>
+              <a:t>без казахских букв</a:t>
             </a:r>
           </a:p>
         </p:txBody>
@@ -24514,7 +24559,7 @@
                 <a:cs typeface="IBM Plex Mono SemiBold"/>
                 <a:ea typeface="IBM Plex Mono SemiBold"/>
               </a:rPr>
-              <a:t>НАХОДКА 3 · ЗАЯВЛЕНО И НА ДЕЛЕ</a:t>
+              <a:t>НАХОДКА 3 · ЗАМЫСЕЛ И ИСПОЛНЕНИЕ</a:t>
             </a:r>
           </a:p>
         </p:txBody>
@@ -24568,27 +24613,27 @@
         </p:nvSpPr>
         <p:spPr>
           <a:xfrm>
-            <a:off x="749808" y="810422"/>
-            <a:ext cx="10692079" cy="598187"/>
-          </a:xfrm>
-          <a:prstGeom prst="rect">
-            <a:avLst/>
-          </a:prstGeom>
-          <a:noFill/>
-        </p:spPr>
-        <p:txBody>
-          <a:bodyPr wrap="none" lIns="0" rIns="0" tIns="0" bIns="0" anchor="t">
-            <a:spAutoFit/>
-          </a:bodyPr>
-          <a:lstStyle/>
-          <a:p>
-            <a:pPr algn="l">
-              <a:lnSpc>
-                <a:spcPts val="3317"/>
-              </a:lnSpc>
-            </a:pPr>
-            <a:r>
-              <a:rPr sz="3100" spc="-68">
+            <a:off x="749808" y="798464"/>
+            <a:ext cx="10692079" cy="704317"/>
+          </a:xfrm>
+          <a:prstGeom prst="rect">
+            <a:avLst/>
+          </a:prstGeom>
+          <a:noFill/>
+        </p:spPr>
+        <p:txBody>
+          <a:bodyPr wrap="none" lIns="0" rIns="0" tIns="0" bIns="0" anchor="t">
+            <a:spAutoFit/>
+          </a:bodyPr>
+          <a:lstStyle/>
+          <a:p>
+            <a:pPr algn="l">
+              <a:lnSpc>
+                <a:spcPts val="3906"/>
+              </a:lnSpc>
+            </a:pPr>
+            <a:r>
+              <a:rPr sz="3650" spc="-80">
                 <a:solidFill>
                   <a:srgbClr val="EEEBE5"/>
                 </a:solidFill>
@@ -24596,7 +24641,7 @@
                 <a:cs typeface="GQ Text Bold"/>
                 <a:ea typeface="GQ Text Bold"/>
               </a:rPr>
-              <a:t>Половины заявленных возможностей не существовало</a:t>
+              <a:t>Что прототип задумал и до чего не успел дойти</a:t>
             </a:r>
           </a:p>
         </p:txBody>
@@ -24609,8 +24654,8 @@
         </p:nvSpPr>
         <p:spPr>
           <a:xfrm>
-            <a:off x="749808" y="1407876"/>
-            <a:ext cx="8553663" cy="332907"/>
+            <a:off x="749808" y="1482615"/>
+            <a:ext cx="8553663" cy="567349"/>
           </a:xfrm>
           <a:prstGeom prst="rect">
             <a:avLst/>
@@ -24637,7 +24682,25 @@
                 <a:cs typeface="GQ Text"/>
                 <a:ea typeface="GQ Text"/>
               </a:rPr>
-              <a:t>Я сверил документацию прежней версии с её же кодом. Разошлось почти всё.</a:t>
+              <a:t>Я сверил описание прототипа с его же кодом. Замысел был шире того, что успело заработать, —</a:t>
+            </a:r>
+          </a:p>
+          <a:p>
+            <a:pPr algn="l">
+              <a:lnSpc>
+                <a:spcPts val="1846"/>
+              </a:lnSpc>
+            </a:pPr>
+            <a:r>
+              <a:rPr sz="1300">
+                <a:solidFill>
+                  <a:srgbClr val="A6ADB6"/>
+                </a:solidFill>
+                <a:latin typeface="GQ Text"/>
+                <a:cs typeface="GQ Text"/>
+                <a:ea typeface="GQ Text"/>
+              </a:rPr>
+              <a:t>обычное дело для первой версии, но проверить стоило.</a:t>
             </a:r>
           </a:p>
         </p:txBody>
@@ -24650,7 +24713,7 @@
         </p:nvSpPr>
         <p:spPr>
           <a:xfrm>
-            <a:off x="749808" y="2155723"/>
+            <a:off x="749808" y="2464904"/>
             <a:ext cx="4455033" cy="199275"/>
           </a:xfrm>
           <a:prstGeom prst="rect">
@@ -24678,7 +24741,7 @@
                 <a:cs typeface="IBM Plex Mono SemiBold"/>
                 <a:ea typeface="IBM Plex Mono SemiBold"/>
               </a:rPr>
-              <a:t>ЧТО БЫЛО ЗАЯВЛЕНО</a:t>
+              <a:t>БЫЛО ЗАДУМАНО</a:t>
             </a:r>
           </a:p>
         </p:txBody>
@@ -24691,7 +24754,7 @@
         </p:nvSpPr>
         <p:spPr>
           <a:xfrm>
-            <a:off x="5204841" y="2155723"/>
+            <a:off x="5204841" y="2464904"/>
             <a:ext cx="6237046" cy="199275"/>
           </a:xfrm>
           <a:prstGeom prst="rect">
@@ -24719,7 +24782,7 @@
                 <a:cs typeface="IBM Plex Mono SemiBold"/>
                 <a:ea typeface="IBM Plex Mono SemiBold"/>
               </a:rPr>
-              <a:t>ЧТО ОКАЗАЛОСЬ В КОДЕ</a:t>
+              <a:t>ЧТО УСПЕЛО ЗАРАБОТАТЬ</a:t>
             </a:r>
           </a:p>
         </p:txBody>
@@ -24732,7 +24795,7 @@
         </p:nvSpPr>
         <p:spPr>
           <a:xfrm>
-            <a:off x="749808" y="2411348"/>
+            <a:off x="749808" y="2720530"/>
             <a:ext cx="10692079" cy="7315"/>
           </a:xfrm>
           <a:prstGeom prst="rect">
@@ -24762,7 +24825,7 @@
         </p:nvSpPr>
         <p:spPr>
           <a:xfrm>
-            <a:off x="749808" y="2540302"/>
+            <a:off x="749808" y="2849483"/>
             <a:ext cx="4455033" cy="253738"/>
           </a:xfrm>
           <a:prstGeom prst="rect">
@@ -24803,7 +24866,7 @@
         </p:nvSpPr>
         <p:spPr>
           <a:xfrm>
-            <a:off x="5204841" y="2540302"/>
+            <a:off x="5204841" y="2849483"/>
             <a:ext cx="6237046" cy="253738"/>
           </a:xfrm>
           <a:prstGeom prst="rect">
@@ -24831,7 +24894,7 @@
                 <a:cs typeface="GQ Text"/>
                 <a:ea typeface="GQ Text"/>
               </a:rPr>
-              <a:t>Работал один. У заданий не было пометки типа вовсе</a:t>
+              <a:t>Один. У заданий не было пометки типа</a:t>
             </a:r>
           </a:p>
         </p:txBody>
@@ -24844,7 +24907,7 @@
         </p:nvSpPr>
         <p:spPr>
           <a:xfrm>
-            <a:off x="749808" y="2850260"/>
+            <a:off x="749808" y="3159442"/>
             <a:ext cx="10692079" cy="7315"/>
           </a:xfrm>
           <a:prstGeom prst="rect">
@@ -24874,7 +24937,7 @@
         </p:nvSpPr>
         <p:spPr>
           <a:xfrm>
-            <a:off x="749808" y="2979214"/>
+            <a:off x="749808" y="3288395"/>
             <a:ext cx="4455033" cy="253738"/>
           </a:xfrm>
           <a:prstGeom prst="rect">
@@ -24915,7 +24978,7 @@
         </p:nvSpPr>
         <p:spPr>
           <a:xfrm>
-            <a:off x="5204841" y="2979214"/>
+            <a:off x="5204841" y="3288395"/>
             <a:ext cx="6237046" cy="253738"/>
           </a:xfrm>
           <a:prstGeom prst="rect">
@@ -24943,7 +25006,7 @@
                 <a:cs typeface="GQ Text"/>
                 <a:ea typeface="GQ Text"/>
               </a:rPr>
-              <a:t>Уронило бы экран: нарушены правила хуков React</a:t>
+              <a:t>Не включалось: экран бы не выдержал</a:t>
             </a:r>
           </a:p>
         </p:txBody>
@@ -24956,7 +25019,7 @@
         </p:nvSpPr>
         <p:spPr>
           <a:xfrm>
-            <a:off x="749808" y="3289172"/>
+            <a:off x="749808" y="3598354"/>
             <a:ext cx="10692079" cy="7315"/>
           </a:xfrm>
           <a:prstGeom prst="rect">
@@ -24986,7 +25049,7 @@
         </p:nvSpPr>
         <p:spPr>
           <a:xfrm>
-            <a:off x="749808" y="3418126"/>
+            <a:off x="749808" y="3727307"/>
             <a:ext cx="4455033" cy="253738"/>
           </a:xfrm>
           <a:prstGeom prst="rect">
@@ -25027,7 +25090,7 @@
         </p:nvSpPr>
         <p:spPr>
           <a:xfrm>
-            <a:off x="5204841" y="3418126"/>
+            <a:off x="5204841" y="3727307"/>
             <a:ext cx="6237046" cy="253738"/>
           </a:xfrm>
           <a:prstGeom prst="rect">
@@ -25055,7 +25118,7 @@
                 <a:cs typeface="GQ Text"/>
                 <a:ea typeface="GQ Text"/>
               </a:rPr>
-              <a:t>Экран есть, алгоритма нет — прогонял пройденное подряд</a:t>
+              <a:t>Экран есть, алгоритма нет — задания шли подряд</a:t>
             </a:r>
           </a:p>
         </p:txBody>
@@ -25068,7 +25131,7 @@
         </p:nvSpPr>
         <p:spPr>
           <a:xfrm>
-            <a:off x="749808" y="3728085"/>
+            <a:off x="749808" y="4037266"/>
             <a:ext cx="10692079" cy="7315"/>
           </a:xfrm>
           <a:prstGeom prst="rect">
@@ -25098,7 +25161,7 @@
         </p:nvSpPr>
         <p:spPr>
           <a:xfrm>
-            <a:off x="749808" y="3857038"/>
+            <a:off x="749808" y="4166219"/>
             <a:ext cx="4455033" cy="253738"/>
           </a:xfrm>
           <a:prstGeom prst="rect">
@@ -25139,7 +25202,7 @@
         </p:nvSpPr>
         <p:spPr>
           <a:xfrm>
-            <a:off x="5204841" y="3857038"/>
+            <a:off x="5204841" y="4166219"/>
             <a:ext cx="6237046" cy="253738"/>
           </a:xfrm>
           <a:prstGeom prst="rect">
@@ -25167,7 +25230,7 @@
                 <a:cs typeface="GQ Text"/>
                 <a:ea typeface="GQ Text"/>
               </a:rPr>
-              <a:t>Шрифт грузился из сети</a:t>
+              <a:t>Шрифт приезжал из сети</a:t>
             </a:r>
           </a:p>
         </p:txBody>
@@ -25180,7 +25243,7 @@
         </p:nvSpPr>
         <p:spPr>
           <a:xfrm>
-            <a:off x="749808" y="4166996"/>
+            <a:off x="749808" y="4476178"/>
             <a:ext cx="10692079" cy="7315"/>
           </a:xfrm>
           <a:prstGeom prst="rect">
@@ -25210,7 +25273,7 @@
         </p:nvSpPr>
         <p:spPr>
           <a:xfrm>
-            <a:off x="749808" y="4295950"/>
+            <a:off x="749808" y="4605131"/>
             <a:ext cx="4455033" cy="253738"/>
           </a:xfrm>
           <a:prstGeom prst="rect">
@@ -25251,7 +25314,7 @@
         </p:nvSpPr>
         <p:spPr>
           <a:xfrm>
-            <a:off x="5204841" y="4295950"/>
+            <a:off x="5204841" y="4605131"/>
             <a:ext cx="6237046" cy="253738"/>
           </a:xfrm>
           <a:prstGeom prst="rect">
@@ -25292,7 +25355,7 @@
         </p:nvSpPr>
         <p:spPr>
           <a:xfrm>
-            <a:off x="749808" y="4605908"/>
+            <a:off x="749808" y="4915090"/>
             <a:ext cx="10692079" cy="7315"/>
           </a:xfrm>
           <a:prstGeom prst="rect">

--- a/презентация/Тілашар-защита.pptx
+++ b/презентация/Тілашар-защита.pptx
@@ -13,8 +13,6 @@
     <p:sldId id="261" r:id="rId13"/>
     <p:sldId id="262" r:id="rId14"/>
     <p:sldId id="263" r:id="rId15"/>
-    <p:sldId id="264" r:id="rId16"/>
-    <p:sldId id="265" r:id="rId17"/>
   </p:sldIdLst>
   <p:sldSz cx="12191695" cy="6858000" type="screen4x3"/>
   <p:notesSz cx="6858000" cy="9144000"/>
@@ -563,178 +561,6 @@
 </p:notes>
 </file>
 
-<file path=ppt/notesSlides/notesSlide10.xml><?xml version="1.0" encoding="utf-8"?>
-<p:notes xmlns:a="http://schemas.openxmlformats.org/drawingml/2006/main" xmlns:p="http://schemas.openxmlformats.org/presentationml/2006/main" xmlns:r="http://schemas.openxmlformats.org/officeDocument/2006/relationships">
-  <p:cSld>
-    <p:spTree>
-      <p:nvGrpSpPr>
-        <p:cNvPr id="1" name=""/>
-        <p:cNvGrpSpPr/>
-        <p:nvPr/>
-      </p:nvGrpSpPr>
-      <p:grpSpPr>
-        <a:xfrm>
-          <a:off x="0" y="0"/>
-          <a:ext cx="0" cy="0"/>
-          <a:chOff x="0" y="0"/>
-          <a:chExt cx="0" cy="0"/>
-        </a:xfrm>
-      </p:grpSpPr>
-      <p:sp>
-        <p:nvSpPr>
-          <p:cNvPr id="2" name="Slide Image Placeholder 1"/>
-          <p:cNvSpPr>
-            <a:spLocks noGrp="1"/>
-          </p:cNvSpPr>
-          <p:nvPr>
-            <p:ph type="sldImg" idx="2"/>
-          </p:nvPr>
-        </p:nvSpPr>
-        <p:spPr/>
-      </p:sp>
-      <p:sp>
-        <p:nvSpPr>
-          <p:cNvPr id="3" name="Notes Placeholder 2"/>
-          <p:cNvSpPr>
-            <a:spLocks noGrp="1"/>
-          </p:cNvSpPr>
-          <p:nvPr>
-            <p:ph type="body" idx="3" sz="quarter"/>
-          </p:nvPr>
-        </p:nvSpPr>
-        <p:spPr/>
-        <p:txBody>
-          <a:bodyPr/>
-          <a:lstStyle/>
-          <a:p>
-            <a:r>
-              <a:t>Финал. Не читать по бумажке — сказать своими словами.</a:t>
-            </a:r>
-          </a:p>
-          <a:p/>
-          <a:p>
-            <a:r>
-              <a:t>Главная мысль на прощание: казахский не сложнее других языков. Ученику</a:t>
-            </a:r>
-          </a:p>
-          <a:p>
-            <a:r>
-              <a:t>мешало то, что он не мог нажать нужную букву.</a:t>
-            </a:r>
-          </a:p>
-          <a:p/>
-          <a:p>
-            <a:r>
-              <a:t>ЧАСТЫЕ ВОПРОСЫ ЖЮРИ</a:t>
-            </a:r>
-          </a:p>
-          <a:p/>
-          <a:p>
-            <a:r>
-              <a:t>1. «Что здесь сделал ты, а что нейросеть?»</a:t>
-            </a:r>
-          </a:p>
-          <a:p>
-            <a:r>
-              <a:t>   Код помогала писать нейросеть. Я поставил вопрос, измерил, нашёл причины</a:t>
-            </a:r>
-          </a:p>
-          <a:p>
-            <a:r>
-              <a:t>   и проверил результат. Первая версия писалась без такой проверки — потому</a:t>
-            </a:r>
-          </a:p>
-          <a:p>
-            <a:r>
-              <a:t>   в ней половина задуманного и не работала.</a:t>
-            </a:r>
-          </a:p>
-          <a:p/>
-          <a:p>
-            <a:r>
-              <a:t>2. «Чем это отличается от прошлогодней работы?»</a:t>
-            </a:r>
-          </a:p>
-          <a:p>
-            <a:r>
-              <a:t>   Тогда я показывал замысел, и он победил. Сейчас показываю проверку этого</a:t>
-            </a:r>
-          </a:p>
-          <a:p>
-            <a:r>
-              <a:t>   замысла на данных и то, что из неё вышло.</a:t>
-            </a:r>
-          </a:p>
-          <a:p/>
-          <a:p>
-            <a:r>
-              <a:t>3. «Результаты апробации есть?»</a:t>
-            </a:r>
-          </a:p>
-          <a:p>
-            <a:r>
-              <a:t>   Нет. Эксперимент запланирован, сбор данных встроен в приложение,</a:t>
-            </a:r>
-          </a:p>
-          <a:p>
-            <a:r>
-              <a:t>   данных пока нет. Придумывать проценты я не стал.</a:t>
-            </a:r>
-          </a:p>
-          <a:p/>
-          <a:p>
-            <a:r>
-              <a:t>4. «Уроки писал носитель языка?»</a:t>
-            </a:r>
-          </a:p>
-          <a:p>
-            <a:r>
-              <a:t>   Нет, и это касается всего текста. Носитель языка не видел ни одной строки,</a:t>
-            </a:r>
-          </a:p>
-          <a:p>
-            <a:r>
-              <a:t>   поэтому весь казахский текст — 168 тысяч знаков — выгружен учителю</a:t>
-            </a:r>
-          </a:p>
-          <a:p>
-            <a:r>
-              <a:t>   на проверку.</a:t>
-            </a:r>
-          </a:p>
-          <a:p/>
-          <a:p>
-            <a:r>
-              <a:t>5. «Приложение платное?»</a:t>
-            </a:r>
-          </a:p>
-          <a:p>
-            <a:r>
-              <a:t>   Нет. Открывается по ссылке, работает без интернета, ставится на телефон.</a:t>
-            </a:r>
-          </a:p>
-        </p:txBody>
-      </p:sp>
-      <p:sp>
-        <p:nvSpPr>
-          <p:cNvPr id="4" name="Slide Number Placeholder 3"/>
-          <p:cNvSpPr>
-            <a:spLocks noGrp="1"/>
-          </p:cNvSpPr>
-          <p:nvPr>
-            <p:ph type="sldNum" idx="5" sz="quarter"/>
-          </p:nvPr>
-        </p:nvSpPr>
-        <p:spPr/>
-      </p:sp>
-    </p:spTree>
-  </p:cSld>
-  <p:clrMapOvr>
-    <a:masterClrMapping/>
-  </p:clrMapOvr>
-</p:notes>
-</file>
-
 <file path=ppt/notesSlides/notesSlide2.xml><?xml version="1.0" encoding="utf-8"?>
 <p:notes xmlns:a="http://schemas.openxmlformats.org/drawingml/2006/main" xmlns:p="http://schemas.openxmlformats.org/presentationml/2006/main" xmlns:r="http://schemas.openxmlformats.org/officeDocument/2006/relationships">
   <p:cSld>
@@ -1054,34 +880,44 @@
           <a:lstStyle/>
           <a:p>
             <a:r>
-              <a:t>Это главная находка проекта. Здесь стоит сделать паузу.</a:t>
+              <a:t>Это ядро доклада. Не читать по пунктам — рассказать про первый и третий,</a:t>
+            </a:r>
+          </a:p>
+          <a:p>
+            <a:r>
+              <a:t>остальные видны на слайде.</a:t>
             </a:r>
           </a:p>
           <a:p/>
           <a:p>
             <a:r>
-              <a:t>Скажите фразу целиком: «ученик отвечал верно и получал ошибку». Дайте жюри</a:t>
-            </a:r>
-          </a:p>
-          <a:p>
-            <a:r>
-              <a:t>секунду. Именно из-за этого первую версию и бросали.</a:t>
+              <a:t>Про первый стоит сделать паузу: в казахском есть буквы, которых физически</a:t>
+            </a:r>
+          </a:p>
+          <a:p>
+            <a:r>
+              <a:t>нет на русской клавиатуре. Обычный тренажёр сравнивает ответ буква в букву,</a:t>
+            </a:r>
+          </a:p>
+          <a:p>
+            <a:r>
+              <a:t>и ученик получает «неверно» за правильный ответ. Именно из-за этого первую</a:t>
+            </a:r>
+          </a:p>
+          <a:p>
+            <a:r>
+              <a:t>версию бросали.</a:t>
             </a:r>
           </a:p>
           <a:p/>
           <a:p>
             <a:r>
-              <a:t>Если спросят «а нельзя поставить казахскую раскладку» — можно, но школьник</a:t>
-            </a:r>
-          </a:p>
-          <a:p>
-            <a:r>
-              <a:t>не будет переключать раскладку на каждое задание, а на телефоне это ещё</a:t>
-            </a:r>
-          </a:p>
-          <a:p>
-            <a:r>
-              <a:t>и лишние касания.</a:t>
+              <a:t>Если спросят подробнее про окончания — можно показать вживую на слайде 07:</a:t>
+            </a:r>
+          </a:p>
+          <a:p>
+            <a:r>
+              <a:t>подставить любое слово прямо при жюри.</a:t>
             </a:r>
           </a:p>
         </p:txBody>
@@ -1151,34 +987,23 @@
           <a:lstStyle/>
           <a:p>
             <a:r>
-              <a:t>Этот слайд показывает, что задача была не программистская, а языковая.</a:t>
+              <a:t>Коротко: это не список уроков, а система, которая возвращает материал тогда,</a:t>
+            </a:r>
+          </a:p>
+          <a:p>
+            <a:r>
+              <a:t>когда он начинает забываться.</a:t>
             </a:r>
           </a:p>
           <a:p/>
           <a:p>
             <a:r>
-              <a:t>Сначала я сделал «как у всех» — допуск в один-два символа. И проверка стала</a:t>
-            </a:r>
-          </a:p>
-          <a:p>
-            <a:r>
-              <a:t>засчитывать «ты читаешь» вместо «я читаю». Ученик получал похвалу за неверную</a:t>
-            </a:r>
-          </a:p>
-          <a:p>
-            <a:r>
-              <a:t>форму — это хуже, чем строгий отказ.</a:t>
-            </a:r>
-          </a:p>
-          <a:p/>
-          <a:p>
-            <a:r>
-              <a:t>Если спросят, откуда правило: из свойства казахского языка. Окончание —</a:t>
-            </a:r>
-          </a:p>
-          <a:p>
-            <a:r>
-              <a:t>отдельная часть слова, а не часть корня.</a:t>
+              <a:t>Если останется время — можно показать «Таблицы окончаний»: подставить любое</a:t>
+            </a:r>
+          </a:p>
+          <a:p>
+            <a:r>
+              <a:t>слово прямо при жюри.</a:t>
             </a:r>
           </a:p>
         </p:txBody>
@@ -1248,24 +1073,54 @@
           <a:lstStyle/>
           <a:p>
             <a:r>
-              <a:t>Самая содержательная часть с точки зрения языка.</a:t>
+              <a:t>Живую демонстрацию готовить заранее: открыть приложение до выступления,</a:t>
+            </a:r>
+          </a:p>
+          <a:p>
+            <a:r>
+              <a:t>выбрать короткий урок, проверить, что телефон заряжен.</a:t>
             </a:r>
           </a:p>
           <a:p/>
           <a:p>
             <a:r>
-              <a:t>Пример с «кітабым» стоит проговорить вслух: в учебнике это отдельное правило,</a:t>
-            </a:r>
-          </a:p>
-          <a:p>
-            <a:r>
-              <a:t>а у меня оно работает на любом слове, которое введёт ученик.</a:t>
+              <a:t>Что показать за минуту:</a:t>
+            </a:r>
+          </a:p>
+          <a:p>
+            <a:r>
+              <a:t>1. Дорожку уроков — видно, где я сейчас.</a:t>
+            </a:r>
+          </a:p>
+          <a:p>
+            <a:r>
+              <a:t>2. Открыть урок, дойти до задания.</a:t>
+            </a:r>
+          </a:p>
+          <a:p>
+            <a:r>
+              <a:t>3. Набрать ответ РУССКИМИ буквами — например «аке» вместо «әке».</a:t>
+            </a:r>
+          </a:p>
+          <a:p>
+            <a:r>
+              <a:t>   Приложение ответит «Грамматика верна» и покажет правильное написание.</a:t>
+            </a:r>
+          </a:p>
+          <a:p>
+            <a:r>
+              <a:t>   Это и есть главное.</a:t>
+            </a:r>
+          </a:p>
+          <a:p>
+            <a:r>
+              <a:t>4. Показать ряд казахских букв под полем.</a:t>
             </a:r>
           </a:p>
           <a:p/>
           <a:p>
             <a:r>
-              <a:t>Если спросят про тесты: 21 тест именно на морфологии, всего в проекте 70.</a:t>
+              <a:t>Запасной вариант, если проектор не покажет телефон: слайды с картинками.</a:t>
             </a:r>
           </a:p>
         </p:txBody>
@@ -1335,140 +1190,109 @@
           <a:lstStyle/>
           <a:p>
             <a:r>
-              <a:t>Коротко: это не список уроков, а система, которая возвращает материал тогда,</a:t>
-            </a:r>
-          </a:p>
-          <a:p>
-            <a:r>
-              <a:t>когда он начинает забываться.</a:t>
+              <a:t>Финал. Не читать по бумажке — сказать своими словами.</a:t>
             </a:r>
           </a:p>
           <a:p/>
           <a:p>
             <a:r>
-              <a:t>Если останется время — можно показать «Таблицы окончаний»: подставить любое</a:t>
-            </a:r>
-          </a:p>
-          <a:p>
-            <a:r>
-              <a:t>слово прямо при жюри.</a:t>
-            </a:r>
-          </a:p>
-        </p:txBody>
-      </p:sp>
-      <p:sp>
-        <p:nvSpPr>
-          <p:cNvPr id="4" name="Slide Number Placeholder 3"/>
-          <p:cNvSpPr>
-            <a:spLocks noGrp="1"/>
-          </p:cNvSpPr>
-          <p:nvPr>
-            <p:ph type="sldNum" idx="5" sz="quarter"/>
-          </p:nvPr>
-        </p:nvSpPr>
-        <p:spPr/>
-      </p:sp>
-    </p:spTree>
-  </p:cSld>
-  <p:clrMapOvr>
-    <a:masterClrMapping/>
-  </p:clrMapOvr>
-</p:notes>
-</file>
-
-<file path=ppt/notesSlides/notesSlide9.xml><?xml version="1.0" encoding="utf-8"?>
-<p:notes xmlns:a="http://schemas.openxmlformats.org/drawingml/2006/main" xmlns:p="http://schemas.openxmlformats.org/presentationml/2006/main" xmlns:r="http://schemas.openxmlformats.org/officeDocument/2006/relationships">
-  <p:cSld>
-    <p:spTree>
-      <p:nvGrpSpPr>
-        <p:cNvPr id="1" name=""/>
-        <p:cNvGrpSpPr/>
-        <p:nvPr/>
-      </p:nvGrpSpPr>
-      <p:grpSpPr>
-        <a:xfrm>
-          <a:off x="0" y="0"/>
-          <a:ext cx="0" cy="0"/>
-          <a:chOff x="0" y="0"/>
-          <a:chExt cx="0" cy="0"/>
-        </a:xfrm>
-      </p:grpSpPr>
-      <p:sp>
-        <p:nvSpPr>
-          <p:cNvPr id="2" name="Slide Image Placeholder 1"/>
-          <p:cNvSpPr>
-            <a:spLocks noGrp="1"/>
-          </p:cNvSpPr>
-          <p:nvPr>
-            <p:ph type="sldImg" idx="2"/>
-          </p:nvPr>
-        </p:nvSpPr>
-        <p:spPr/>
-      </p:sp>
-      <p:sp>
-        <p:nvSpPr>
-          <p:cNvPr id="3" name="Notes Placeholder 2"/>
-          <p:cNvSpPr>
-            <a:spLocks noGrp="1"/>
-          </p:cNvSpPr>
-          <p:nvPr>
-            <p:ph type="body" idx="3" sz="quarter"/>
-          </p:nvPr>
-        </p:nvSpPr>
-        <p:spPr/>
-        <p:txBody>
-          <a:bodyPr/>
-          <a:lstStyle/>
-          <a:p>
-            <a:r>
-              <a:t>Живую демонстрацию готовить заранее: открыть приложение до выступления,</a:t>
-            </a:r>
-          </a:p>
-          <a:p>
-            <a:r>
-              <a:t>выбрать короткий урок, проверить, что телефон заряжен.</a:t>
+              <a:t>Главная мысль на прощание: казахский не сложнее других языков. Ученику</a:t>
+            </a:r>
+          </a:p>
+          <a:p>
+            <a:r>
+              <a:t>мешало то, что он не мог нажать нужную букву.</a:t>
             </a:r>
           </a:p>
           <a:p/>
           <a:p>
             <a:r>
-              <a:t>Что показать за минуту:</a:t>
-            </a:r>
-          </a:p>
-          <a:p>
-            <a:r>
-              <a:t>1. Дорожку уроков — видно, где я сейчас.</a:t>
-            </a:r>
-          </a:p>
-          <a:p>
-            <a:r>
-              <a:t>2. Открыть урок, дойти до задания.</a:t>
-            </a:r>
-          </a:p>
-          <a:p>
-            <a:r>
-              <a:t>3. Набрать ответ РУССКИМИ буквами — например «аке» вместо «әке».</a:t>
-            </a:r>
-          </a:p>
-          <a:p>
-            <a:r>
-              <a:t>   Приложение ответит «Грамматика верна» и покажет правильное написание.</a:t>
-            </a:r>
-          </a:p>
-          <a:p>
-            <a:r>
-              <a:t>   Это и есть главное.</a:t>
-            </a:r>
-          </a:p>
-          <a:p>
-            <a:r>
-              <a:t>4. Показать ряд казахских букв под полем.</a:t>
+              <a:t>ЧАСТЫЕ ВОПРОСЫ ЖЮРИ</a:t>
             </a:r>
           </a:p>
           <a:p/>
           <a:p>
             <a:r>
-              <a:t>Запасной вариант, если проектор не покажет телефон: слайды с картинками.</a:t>
+              <a:t>1. «Что здесь сделал ты, а что нейросеть?»</a:t>
+            </a:r>
+          </a:p>
+          <a:p>
+            <a:r>
+              <a:t>   Код помогала писать нейросеть. Я поставил вопрос, измерил, нашёл причины</a:t>
+            </a:r>
+          </a:p>
+          <a:p>
+            <a:r>
+              <a:t>   и проверил результат. Первая версия писалась без такой проверки — потому</a:t>
+            </a:r>
+          </a:p>
+          <a:p>
+            <a:r>
+              <a:t>   в ней половина задуманного и не работала.</a:t>
+            </a:r>
+          </a:p>
+          <a:p/>
+          <a:p>
+            <a:r>
+              <a:t>2. «Чем это отличается от прошлогодней работы?»</a:t>
+            </a:r>
+          </a:p>
+          <a:p>
+            <a:r>
+              <a:t>   Тогда я показывал замысел, и он победил. Сейчас показываю проверку этого</a:t>
+            </a:r>
+          </a:p>
+          <a:p>
+            <a:r>
+              <a:t>   замысла на данных и то, что из неё вышло.</a:t>
+            </a:r>
+          </a:p>
+          <a:p/>
+          <a:p>
+            <a:r>
+              <a:t>3. «Результаты апробации есть?»</a:t>
+            </a:r>
+          </a:p>
+          <a:p>
+            <a:r>
+              <a:t>   Нет. Эксперимент запланирован, сбор данных встроен в приложение,</a:t>
+            </a:r>
+          </a:p>
+          <a:p>
+            <a:r>
+              <a:t>   данных пока нет. Придумывать проценты я не стал.</a:t>
+            </a:r>
+          </a:p>
+          <a:p/>
+          <a:p>
+            <a:r>
+              <a:t>4. «Уроки писал носитель языка?»</a:t>
+            </a:r>
+          </a:p>
+          <a:p>
+            <a:r>
+              <a:t>   Нет, и это касается всего текста. Носитель языка не видел ни одной строки,</a:t>
+            </a:r>
+          </a:p>
+          <a:p>
+            <a:r>
+              <a:t>   поэтому весь казахский текст — 168 тысяч знаков — выгружен учителю</a:t>
+            </a:r>
+          </a:p>
+          <a:p>
+            <a:r>
+              <a:t>   на проверку.</a:t>
+            </a:r>
+          </a:p>
+          <a:p/>
+          <a:p>
+            <a:r>
+              <a:t>5. «Приложение платное?»</a:t>
+            </a:r>
+          </a:p>
+          <a:p>
+            <a:r>
+              <a:t>   Нет. Открывается по ссылке, работает без интернета, ставится на телефон.</a:t>
             </a:r>
           </a:p>
         </p:txBody>
@@ -9018,7 +8842,7 @@
                 <a:cs typeface="GQ Text Bold"/>
                 <a:ea typeface="GQ Text Bold"/>
               </a:rPr>
-              <a:t>86%</a:t>
+              <a:t>3</a:t>
             </a:r>
           </a:p>
         </p:txBody>
@@ -9059,7 +8883,7 @@
                 <a:cs typeface="IBM Plex Mono Medium"/>
                 <a:ea typeface="IBM Plex Mono Medium"/>
               </a:rPr>
-              <a:t>ОТВЕТОВ ТРЕБУЮТ ОСОБЫХ БУКВ</a:t>
+              <a:t>УРОВНЯ ПО КЛАССАМ</a:t>
             </a:r>
           </a:p>
         </p:txBody>
@@ -9101,815 +8925,6 @@
                 <a:ea typeface="IBM Plex Mono Medium"/>
               </a:rPr>
               <a:t>МАЛЫШКО МАКАР ЕВГЕНЬЕВИЧ · 6 «Б» КЛАСС · ШКОЛА №35</a:t>
-            </a:r>
-          </a:p>
-        </p:txBody>
-      </p:sp>
-    </p:spTree>
-  </p:cSld>
-  <p:clrMapOvr>
-    <a:masterClrMapping/>
-  </p:clrMapOvr>
-</p:sld>
-</file>
-
-<file path=ppt/slides/slide10.xml><?xml version="1.0" encoding="utf-8"?>
-<p:sld xmlns:a="http://schemas.openxmlformats.org/drawingml/2006/main" xmlns:p="http://schemas.openxmlformats.org/presentationml/2006/main" xmlns:r="http://schemas.openxmlformats.org/officeDocument/2006/relationships">
-  <p:cSld>
-    <p:spTree>
-      <p:nvGrpSpPr>
-        <p:cNvPr id="1" name=""/>
-        <p:cNvGrpSpPr/>
-        <p:nvPr/>
-      </p:nvGrpSpPr>
-      <p:grpSpPr/>
-      <p:sp>
-        <p:nvSpPr>
-          <p:cNvPr id="2" name="Rectangle 1"/>
-          <p:cNvSpPr/>
-          <p:nvPr/>
-        </p:nvSpPr>
-        <p:spPr>
-          <a:xfrm>
-            <a:off x="0" y="0"/>
-            <a:ext cx="12191695" cy="6858000"/>
-          </a:xfrm>
-          <a:prstGeom prst="rect">
-            <a:avLst/>
-          </a:prstGeom>
-          <a:solidFill>
-            <a:srgbClr val="1B222B"/>
-          </a:solidFill>
-          <a:ln>
-            <a:noFill/>
-          </a:ln>
-          <a:effectLst/>
-        </p:spPr>
-        <p:txBody>
-          <a:bodyPr rtlCol="0" anchor="ctr" wrap="none"/>
-          <a:lstStyle/>
-          <a:p>
-            <a:pPr algn="ctr"/>
-          </a:p>
-        </p:txBody>
-      </p:sp>
-      <p:sp>
-        <p:nvSpPr>
-          <p:cNvPr id="19" name="Rectangle 18"/>
-          <p:cNvSpPr/>
-          <p:nvPr/>
-        </p:nvSpPr>
-        <p:spPr>
-          <a:xfrm>
-            <a:off x="7104202" y="1960626"/>
-            <a:ext cx="4337684" cy="2065019"/>
-          </a:xfrm>
-          <a:prstGeom prst="rect">
-            <a:avLst/>
-          </a:prstGeom>
-          <a:solidFill>
-            <a:srgbClr val="11161E"/>
-          </a:solidFill>
-          <a:ln w="9525">
-            <a:solidFill>
-              <a:srgbClr val="3B434D"/>
-            </a:solidFill>
-          </a:ln>
-          <a:effectLst/>
-        </p:spPr>
-        <p:txBody>
-          <a:bodyPr rtlCol="0" anchor="ctr" wrap="none"/>
-          <a:lstStyle/>
-          <a:p>
-            <a:pPr algn="ctr"/>
-          </a:p>
-        </p:txBody>
-      </p:sp>
-      <p:sp>
-        <p:nvSpPr>
-          <p:cNvPr id="9" name="Rectangle 8"/>
-          <p:cNvSpPr/>
-          <p:nvPr/>
-        </p:nvSpPr>
-        <p:spPr>
-          <a:xfrm>
-            <a:off x="749808" y="1960626"/>
-            <a:ext cx="6153226" cy="2122931"/>
-          </a:xfrm>
-          <a:prstGeom prst="rect">
-            <a:avLst/>
-          </a:prstGeom>
-          <a:solidFill>
-            <a:srgbClr val="0064B9"/>
-          </a:solidFill>
-          <a:ln>
-            <a:noFill/>
-          </a:ln>
-          <a:effectLst/>
-        </p:spPr>
-        <p:txBody>
-          <a:bodyPr rtlCol="0" anchor="ctr" wrap="none"/>
-          <a:lstStyle/>
-          <a:p>
-            <a:pPr algn="ctr"/>
-          </a:p>
-        </p:txBody>
-      </p:sp>
-      <p:sp>
-        <p:nvSpPr>
-          <p:cNvPr id="3" name="Rectangle 2"/>
-          <p:cNvSpPr/>
-          <p:nvPr/>
-        </p:nvSpPr>
-        <p:spPr>
-          <a:xfrm>
-            <a:off x="749808" y="475488"/>
-            <a:ext cx="10692079" cy="7315"/>
-          </a:xfrm>
-          <a:prstGeom prst="rect">
-            <a:avLst/>
-          </a:prstGeom>
-          <a:solidFill>
-            <a:srgbClr val="3B434D"/>
-          </a:solidFill>
-          <a:ln>
-            <a:noFill/>
-          </a:ln>
-          <a:effectLst/>
-        </p:spPr>
-        <p:txBody>
-          <a:bodyPr rtlCol="0" anchor="ctr" wrap="none"/>
-          <a:lstStyle/>
-          <a:p>
-            <a:pPr algn="ctr"/>
-          </a:p>
-        </p:txBody>
-      </p:sp>
-      <p:sp>
-        <p:nvSpPr>
-          <p:cNvPr id="4" name="TextBox 3"/>
-          <p:cNvSpPr txBox="1"/>
-          <p:nvPr/>
-        </p:nvSpPr>
-        <p:spPr>
-          <a:xfrm>
-            <a:off x="749808" y="559308"/>
-            <a:ext cx="7484455" cy="189357"/>
-          </a:xfrm>
-          <a:prstGeom prst="rect">
-            <a:avLst/>
-          </a:prstGeom>
-          <a:noFill/>
-        </p:spPr>
-        <p:txBody>
-          <a:bodyPr wrap="none" lIns="0" rIns="0" tIns="0" bIns="0" anchor="t">
-            <a:spAutoFit/>
-          </a:bodyPr>
-          <a:lstStyle/>
-          <a:p>
-            <a:pPr algn="l">
-              <a:lnSpc>
-                <a:spcPts val="1050"/>
-              </a:lnSpc>
-            </a:pPr>
-            <a:r>
-              <a:rPr sz="850" spc="136">
-                <a:solidFill>
-                  <a:srgbClr val="59AAF8"/>
-                </a:solidFill>
-                <a:latin typeface="IBM Plex Mono SemiBold"/>
-                <a:cs typeface="IBM Plex Mono SemiBold"/>
-                <a:ea typeface="IBM Plex Mono SemiBold"/>
-              </a:rPr>
-              <a:t>ИТОГИ</a:t>
-            </a:r>
-          </a:p>
-        </p:txBody>
-      </p:sp>
-      <p:sp>
-        <p:nvSpPr>
-          <p:cNvPr id="5" name="TextBox 4"/>
-          <p:cNvSpPr txBox="1"/>
-          <p:nvPr/>
-        </p:nvSpPr>
-        <p:spPr>
-          <a:xfrm>
-            <a:off x="10914329" y="559308"/>
-            <a:ext cx="618998" cy="189357"/>
-          </a:xfrm>
-          <a:prstGeom prst="rect">
-            <a:avLst/>
-          </a:prstGeom>
-          <a:noFill/>
-        </p:spPr>
-        <p:txBody>
-          <a:bodyPr wrap="none" lIns="0" rIns="0" tIns="0" bIns="0" anchor="t">
-            <a:spAutoFit/>
-          </a:bodyPr>
-          <a:lstStyle/>
-          <a:p>
-            <a:pPr algn="l">
-              <a:lnSpc>
-                <a:spcPts val="1050"/>
-              </a:lnSpc>
-            </a:pPr>
-            <a:r>
-              <a:rPr sz="850" spc="85">
-                <a:solidFill>
-                  <a:srgbClr val="A6ADB6"/>
-                </a:solidFill>
-                <a:latin typeface="IBM Plex Mono Medium"/>
-                <a:cs typeface="IBM Plex Mono Medium"/>
-                <a:ea typeface="IBM Plex Mono Medium"/>
-              </a:rPr>
-              <a:t>10 / 10</a:t>
-            </a:r>
-          </a:p>
-        </p:txBody>
-      </p:sp>
-      <p:sp>
-        <p:nvSpPr>
-          <p:cNvPr id="6" name="TextBox 5"/>
-          <p:cNvSpPr txBox="1"/>
-          <p:nvPr/>
-        </p:nvSpPr>
-        <p:spPr>
-          <a:xfrm>
-            <a:off x="749808" y="786505"/>
-            <a:ext cx="10692079" cy="810447"/>
-          </a:xfrm>
-          <a:prstGeom prst="rect">
-            <a:avLst/>
-          </a:prstGeom>
-          <a:noFill/>
-        </p:spPr>
-        <p:txBody>
-          <a:bodyPr wrap="none" lIns="0" rIns="0" tIns="0" bIns="0" anchor="t">
-            <a:spAutoFit/>
-          </a:bodyPr>
-          <a:lstStyle/>
-          <a:p>
-            <a:pPr algn="l">
-              <a:lnSpc>
-                <a:spcPts val="4494"/>
-              </a:lnSpc>
-            </a:pPr>
-            <a:r>
-              <a:rPr sz="4200" spc="-92">
-                <a:solidFill>
-                  <a:srgbClr val="EEEBE5"/>
-                </a:solidFill>
-                <a:latin typeface="GQ Text Bold"/>
-                <a:cs typeface="GQ Text Bold"/>
-                <a:ea typeface="GQ Text Bold"/>
-              </a:rPr>
-              <a:t>Что получилось и что дальше</a:t>
-            </a:r>
-          </a:p>
-        </p:txBody>
-      </p:sp>
-      <p:sp>
-        <p:nvSpPr>
-          <p:cNvPr id="7" name="TextBox 6"/>
-          <p:cNvSpPr txBox="1"/>
-          <p:nvPr/>
-        </p:nvSpPr>
-        <p:spPr>
-          <a:xfrm>
-            <a:off x="1024127" y="2212594"/>
-            <a:ext cx="5604586" cy="198374"/>
-          </a:xfrm>
-          <a:prstGeom prst="rect">
-            <a:avLst/>
-          </a:prstGeom>
-          <a:noFill/>
-        </p:spPr>
-        <p:txBody>
-          <a:bodyPr wrap="none" lIns="0" rIns="0" tIns="0" bIns="0" anchor="t">
-            <a:spAutoFit/>
-          </a:bodyPr>
-          <a:lstStyle/>
-          <a:p>
-            <a:pPr algn="l">
-              <a:lnSpc>
-                <a:spcPts val="1100"/>
-              </a:lnSpc>
-            </a:pPr>
-            <a:r>
-              <a:rPr sz="850" spc="136">
-                <a:solidFill>
-                  <a:srgbClr val="59AAF8"/>
-                </a:solidFill>
-                <a:latin typeface="IBM Plex Mono SemiBold"/>
-                <a:cs typeface="IBM Plex Mono SemiBold"/>
-                <a:ea typeface="IBM Plex Mono SemiBold"/>
-              </a:rPr>
-              <a:t>ВЫВОД</a:t>
-            </a:r>
-          </a:p>
-        </p:txBody>
-      </p:sp>
-      <p:sp>
-        <p:nvSpPr>
-          <p:cNvPr id="8" name="TextBox 7"/>
-          <p:cNvSpPr txBox="1"/>
-          <p:nvPr/>
-        </p:nvSpPr>
-        <p:spPr>
-          <a:xfrm>
-            <a:off x="1024127" y="2488438"/>
-            <a:ext cx="5604586" cy="1403350"/>
-          </a:xfrm>
-          <a:prstGeom prst="rect">
-            <a:avLst/>
-          </a:prstGeom>
-          <a:noFill/>
-        </p:spPr>
-        <p:txBody>
-          <a:bodyPr wrap="none" lIns="0" rIns="0" tIns="0" bIns="0" anchor="t">
-            <a:spAutoFit/>
-          </a:bodyPr>
-          <a:lstStyle/>
-          <a:p>
-            <a:pPr algn="l">
-              <a:lnSpc>
-                <a:spcPts val="2500"/>
-              </a:lnSpc>
-            </a:pPr>
-            <a:r>
-              <a:rPr sz="1900" spc="-34">
-                <a:solidFill>
-                  <a:srgbClr val="EEEBE5"/>
-                </a:solidFill>
-                <a:latin typeface="GQ Text Bold"/>
-                <a:cs typeface="GQ Text Bold"/>
-                <a:ea typeface="GQ Text Bold"/>
-              </a:rPr>
-              <a:t>Ученикам мешала не сложность казахского</a:t>
-            </a:r>
-          </a:p>
-          <a:p>
-            <a:pPr algn="l">
-              <a:lnSpc>
-                <a:spcPts val="2500"/>
-              </a:lnSpc>
-            </a:pPr>
-            <a:r>
-              <a:rPr sz="1900" spc="-34">
-                <a:solidFill>
-                  <a:srgbClr val="EEEBE5"/>
-                </a:solidFill>
-                <a:latin typeface="GQ Text Bold"/>
-                <a:cs typeface="GQ Text Bold"/>
-                <a:ea typeface="GQ Text Bold"/>
-              </a:rPr>
-              <a:t>языка, а технические барьеры: нельзя было</a:t>
-            </a:r>
-          </a:p>
-          <a:p>
-            <a:pPr algn="l">
-              <a:lnSpc>
-                <a:spcPts val="2500"/>
-              </a:lnSpc>
-            </a:pPr>
-            <a:r>
-              <a:rPr sz="1900" spc="-34">
-                <a:solidFill>
-                  <a:srgbClr val="EEEBE5"/>
-                </a:solidFill>
-                <a:latin typeface="GQ Text Bold"/>
-                <a:cs typeface="GQ Text Bold"/>
-                <a:ea typeface="GQ Text Bold"/>
-              </a:rPr>
-              <a:t>ввести правильный ответ. Их удалось снять,</a:t>
-            </a:r>
-          </a:p>
-          <a:p>
-            <a:pPr algn="l">
-              <a:lnSpc>
-                <a:spcPts val="2500"/>
-              </a:lnSpc>
-            </a:pPr>
-            <a:r>
-              <a:rPr sz="1900" spc="-34">
-                <a:solidFill>
-                  <a:srgbClr val="EEEBE5"/>
-                </a:solidFill>
-                <a:latin typeface="GQ Text Bold"/>
-                <a:cs typeface="GQ Text Bold"/>
-                <a:ea typeface="GQ Text Bold"/>
-              </a:rPr>
-              <a:t>и ни один не потребовал упрощать сам язык.</a:t>
-            </a:r>
-          </a:p>
-        </p:txBody>
-      </p:sp>
-      <p:sp>
-        <p:nvSpPr>
-          <p:cNvPr id="10" name="TextBox 9"/>
-          <p:cNvSpPr txBox="1"/>
-          <p:nvPr/>
-        </p:nvSpPr>
-        <p:spPr>
-          <a:xfrm>
-            <a:off x="7378522" y="2212594"/>
-            <a:ext cx="3789045" cy="198374"/>
-          </a:xfrm>
-          <a:prstGeom prst="rect">
-            <a:avLst/>
-          </a:prstGeom>
-          <a:noFill/>
-        </p:spPr>
-        <p:txBody>
-          <a:bodyPr wrap="none" lIns="0" rIns="0" tIns="0" bIns="0" anchor="t">
-            <a:spAutoFit/>
-          </a:bodyPr>
-          <a:lstStyle/>
-          <a:p>
-            <a:pPr algn="l">
-              <a:lnSpc>
-                <a:spcPts val="1100"/>
-              </a:lnSpc>
-            </a:pPr>
-            <a:r>
-              <a:rPr sz="850" spc="136">
-                <a:solidFill>
-                  <a:srgbClr val="59AAF8"/>
-                </a:solidFill>
-                <a:latin typeface="IBM Plex Mono SemiBold"/>
-                <a:cs typeface="IBM Plex Mono SemiBold"/>
-                <a:ea typeface="IBM Plex Mono SemiBold"/>
-              </a:rPr>
-              <a:t>ЧТО ДАЛЬШЕ</a:t>
-            </a:r>
-          </a:p>
-        </p:txBody>
-      </p:sp>
-      <p:sp>
-        <p:nvSpPr>
-          <p:cNvPr id="11" name="TextBox 10"/>
-          <p:cNvSpPr txBox="1"/>
-          <p:nvPr/>
-        </p:nvSpPr>
-        <p:spPr>
-          <a:xfrm>
-            <a:off x="7378522" y="2526233"/>
-            <a:ext cx="210566" cy="277723"/>
-          </a:xfrm>
-          <a:prstGeom prst="rect">
-            <a:avLst/>
-          </a:prstGeom>
-          <a:noFill/>
-        </p:spPr>
-        <p:txBody>
-          <a:bodyPr wrap="none" lIns="0" rIns="0" tIns="0" bIns="0" anchor="t">
-            <a:spAutoFit/>
-          </a:bodyPr>
-          <a:lstStyle/>
-          <a:p>
-            <a:pPr algn="l">
-              <a:lnSpc>
-                <a:spcPts val="1540"/>
-              </a:lnSpc>
-            </a:pPr>
-            <a:r>
-              <a:rPr sz="1100">
-                <a:solidFill>
-                  <a:srgbClr val="59AAF8"/>
-                </a:solidFill>
-                <a:latin typeface="IBM Plex Mono Medium"/>
-                <a:cs typeface="IBM Plex Mono Medium"/>
-                <a:ea typeface="IBM Plex Mono Medium"/>
-              </a:rPr>
-              <a:t>—</a:t>
-            </a:r>
-          </a:p>
-        </p:txBody>
-      </p:sp>
-      <p:sp>
-        <p:nvSpPr>
-          <p:cNvPr id="12" name="TextBox 11"/>
-          <p:cNvSpPr txBox="1"/>
-          <p:nvPr/>
-        </p:nvSpPr>
-        <p:spPr>
-          <a:xfrm>
-            <a:off x="7589088" y="2526233"/>
-            <a:ext cx="3578479" cy="277723"/>
-          </a:xfrm>
-          <a:prstGeom prst="rect">
-            <a:avLst/>
-          </a:prstGeom>
-          <a:noFill/>
-        </p:spPr>
-        <p:txBody>
-          <a:bodyPr wrap="none" lIns="0" rIns="0" tIns="0" bIns="0" anchor="t">
-            <a:spAutoFit/>
-          </a:bodyPr>
-          <a:lstStyle/>
-          <a:p>
-            <a:pPr algn="l">
-              <a:lnSpc>
-                <a:spcPts val="1540"/>
-              </a:lnSpc>
-            </a:pPr>
-            <a:r>
-              <a:rPr sz="1100">
-                <a:solidFill>
-                  <a:srgbClr val="EEEBE5"/>
-                </a:solidFill>
-                <a:latin typeface="GQ Text"/>
-                <a:cs typeface="GQ Text"/>
-                <a:ea typeface="GQ Text"/>
-              </a:rPr>
-              <a:t>Проверка всего казахского текста учителем</a:t>
-            </a:r>
-          </a:p>
-        </p:txBody>
-      </p:sp>
-      <p:sp>
-        <p:nvSpPr>
-          <p:cNvPr id="13" name="TextBox 12"/>
-          <p:cNvSpPr txBox="1"/>
-          <p:nvPr/>
-        </p:nvSpPr>
-        <p:spPr>
-          <a:xfrm>
-            <a:off x="7378522" y="2858973"/>
-            <a:ext cx="210566" cy="277723"/>
-          </a:xfrm>
-          <a:prstGeom prst="rect">
-            <a:avLst/>
-          </a:prstGeom>
-          <a:noFill/>
-        </p:spPr>
-        <p:txBody>
-          <a:bodyPr wrap="none" lIns="0" rIns="0" tIns="0" bIns="0" anchor="t">
-            <a:spAutoFit/>
-          </a:bodyPr>
-          <a:lstStyle/>
-          <a:p>
-            <a:pPr algn="l">
-              <a:lnSpc>
-                <a:spcPts val="1540"/>
-              </a:lnSpc>
-            </a:pPr>
-            <a:r>
-              <a:rPr sz="1100">
-                <a:solidFill>
-                  <a:srgbClr val="59AAF8"/>
-                </a:solidFill>
-                <a:latin typeface="IBM Plex Mono Medium"/>
-                <a:cs typeface="IBM Plex Mono Medium"/>
-                <a:ea typeface="IBM Plex Mono Medium"/>
-              </a:rPr>
-              <a:t>—</a:t>
-            </a:r>
-          </a:p>
-        </p:txBody>
-      </p:sp>
-      <p:sp>
-        <p:nvSpPr>
-          <p:cNvPr id="14" name="TextBox 13"/>
-          <p:cNvSpPr txBox="1"/>
-          <p:nvPr/>
-        </p:nvSpPr>
-        <p:spPr>
-          <a:xfrm>
-            <a:off x="7589088" y="2858973"/>
-            <a:ext cx="3578479" cy="277723"/>
-          </a:xfrm>
-          <a:prstGeom prst="rect">
-            <a:avLst/>
-          </a:prstGeom>
-          <a:noFill/>
-        </p:spPr>
-        <p:txBody>
-          <a:bodyPr wrap="none" lIns="0" rIns="0" tIns="0" bIns="0" anchor="t">
-            <a:spAutoFit/>
-          </a:bodyPr>
-          <a:lstStyle/>
-          <a:p>
-            <a:pPr algn="l">
-              <a:lnSpc>
-                <a:spcPts val="1540"/>
-              </a:lnSpc>
-            </a:pPr>
-            <a:r>
-              <a:rPr sz="1100">
-                <a:solidFill>
-                  <a:srgbClr val="EEEBE5"/>
-                </a:solidFill>
-                <a:latin typeface="GQ Text"/>
-                <a:cs typeface="GQ Text"/>
-                <a:ea typeface="GQ Text"/>
-              </a:rPr>
-              <a:t>Апробация на классе и настоящие цифры</a:t>
-            </a:r>
-          </a:p>
-        </p:txBody>
-      </p:sp>
-      <p:sp>
-        <p:nvSpPr>
-          <p:cNvPr id="15" name="TextBox 14"/>
-          <p:cNvSpPr txBox="1"/>
-          <p:nvPr/>
-        </p:nvSpPr>
-        <p:spPr>
-          <a:xfrm>
-            <a:off x="7378522" y="3191713"/>
-            <a:ext cx="210566" cy="277723"/>
-          </a:xfrm>
-          <a:prstGeom prst="rect">
-            <a:avLst/>
-          </a:prstGeom>
-          <a:noFill/>
-        </p:spPr>
-        <p:txBody>
-          <a:bodyPr wrap="none" lIns="0" rIns="0" tIns="0" bIns="0" anchor="t">
-            <a:spAutoFit/>
-          </a:bodyPr>
-          <a:lstStyle/>
-          <a:p>
-            <a:pPr algn="l">
-              <a:lnSpc>
-                <a:spcPts val="1540"/>
-              </a:lnSpc>
-            </a:pPr>
-            <a:r>
-              <a:rPr sz="1100">
-                <a:solidFill>
-                  <a:srgbClr val="59AAF8"/>
-                </a:solidFill>
-                <a:latin typeface="IBM Plex Mono Medium"/>
-                <a:cs typeface="IBM Plex Mono Medium"/>
-                <a:ea typeface="IBM Plex Mono Medium"/>
-              </a:rPr>
-              <a:t>—</a:t>
-            </a:r>
-          </a:p>
-        </p:txBody>
-      </p:sp>
-      <p:sp>
-        <p:nvSpPr>
-          <p:cNvPr id="16" name="TextBox 15"/>
-          <p:cNvSpPr txBox="1"/>
-          <p:nvPr/>
-        </p:nvSpPr>
-        <p:spPr>
-          <a:xfrm>
-            <a:off x="7589088" y="3191713"/>
-            <a:ext cx="3578479" cy="277723"/>
-          </a:xfrm>
-          <a:prstGeom prst="rect">
-            <a:avLst/>
-          </a:prstGeom>
-          <a:noFill/>
-        </p:spPr>
-        <p:txBody>
-          <a:bodyPr wrap="none" lIns="0" rIns="0" tIns="0" bIns="0" anchor="t">
-            <a:spAutoFit/>
-          </a:bodyPr>
-          <a:lstStyle/>
-          <a:p>
-            <a:pPr algn="l">
-              <a:lnSpc>
-                <a:spcPts val="1540"/>
-              </a:lnSpc>
-            </a:pPr>
-            <a:r>
-              <a:rPr sz="1100">
-                <a:solidFill>
-                  <a:srgbClr val="EEEBE5"/>
-                </a:solidFill>
-                <a:latin typeface="GQ Text"/>
-                <a:cs typeface="GQ Text"/>
-                <a:ea typeface="GQ Text"/>
-              </a:rPr>
-              <a:t>Озвучка: 589 фраз, каждая своим голосом</a:t>
-            </a:r>
-          </a:p>
-        </p:txBody>
-      </p:sp>
-      <p:sp>
-        <p:nvSpPr>
-          <p:cNvPr id="17" name="TextBox 16"/>
-          <p:cNvSpPr txBox="1"/>
-          <p:nvPr/>
-        </p:nvSpPr>
-        <p:spPr>
-          <a:xfrm>
-            <a:off x="7378522" y="3524453"/>
-            <a:ext cx="210566" cy="277723"/>
-          </a:xfrm>
-          <a:prstGeom prst="rect">
-            <a:avLst/>
-          </a:prstGeom>
-          <a:noFill/>
-        </p:spPr>
-        <p:txBody>
-          <a:bodyPr wrap="none" lIns="0" rIns="0" tIns="0" bIns="0" anchor="t">
-            <a:spAutoFit/>
-          </a:bodyPr>
-          <a:lstStyle/>
-          <a:p>
-            <a:pPr algn="l">
-              <a:lnSpc>
-                <a:spcPts val="1540"/>
-              </a:lnSpc>
-            </a:pPr>
-            <a:r>
-              <a:rPr sz="1100">
-                <a:solidFill>
-                  <a:srgbClr val="59AAF8"/>
-                </a:solidFill>
-                <a:latin typeface="IBM Plex Mono Medium"/>
-                <a:cs typeface="IBM Plex Mono Medium"/>
-                <a:ea typeface="IBM Plex Mono Medium"/>
-              </a:rPr>
-              <a:t>—</a:t>
-            </a:r>
-          </a:p>
-        </p:txBody>
-      </p:sp>
-      <p:sp>
-        <p:nvSpPr>
-          <p:cNvPr id="18" name="TextBox 17"/>
-          <p:cNvSpPr txBox="1"/>
-          <p:nvPr/>
-        </p:nvSpPr>
-        <p:spPr>
-          <a:xfrm>
-            <a:off x="7589088" y="3524453"/>
-            <a:ext cx="3578479" cy="277723"/>
-          </a:xfrm>
-          <a:prstGeom prst="rect">
-            <a:avLst/>
-          </a:prstGeom>
-          <a:noFill/>
-        </p:spPr>
-        <p:txBody>
-          <a:bodyPr wrap="none" lIns="0" rIns="0" tIns="0" bIns="0" anchor="t">
-            <a:spAutoFit/>
-          </a:bodyPr>
-          <a:lstStyle/>
-          <a:p>
-            <a:pPr algn="l">
-              <a:lnSpc>
-                <a:spcPts val="1540"/>
-              </a:lnSpc>
-            </a:pPr>
-            <a:r>
-              <a:rPr sz="1100">
-                <a:solidFill>
-                  <a:srgbClr val="EEEBE5"/>
-                </a:solidFill>
-                <a:latin typeface="GQ Text"/>
-                <a:cs typeface="GQ Text"/>
-                <a:ea typeface="GQ Text"/>
-              </a:rPr>
-              <a:t>Открытый доступ: бесплатно и по ссылке</a:t>
-            </a:r>
-          </a:p>
-        </p:txBody>
-      </p:sp>
-      <p:sp>
-        <p:nvSpPr>
-          <p:cNvPr id="20" name="TextBox 19"/>
-          <p:cNvSpPr txBox="1"/>
-          <p:nvPr/>
-        </p:nvSpPr>
-        <p:spPr>
-          <a:xfrm>
-            <a:off x="749808" y="6323584"/>
-            <a:ext cx="10692079" cy="198374"/>
-          </a:xfrm>
-          <a:prstGeom prst="rect">
-            <a:avLst/>
-          </a:prstGeom>
-          <a:noFill/>
-        </p:spPr>
-        <p:txBody>
-          <a:bodyPr wrap="none" lIns="0" rIns="0" tIns="0" bIns="0" anchor="t">
-            <a:spAutoFit/>
-          </a:bodyPr>
-          <a:lstStyle/>
-          <a:p>
-            <a:pPr algn="l">
-              <a:lnSpc>
-                <a:spcPts val="1100"/>
-              </a:lnSpc>
-            </a:pPr>
-            <a:r>
-              <a:rPr sz="850" spc="85">
-                <a:solidFill>
-                  <a:srgbClr val="A6ADB6"/>
-                </a:solidFill>
-                <a:latin typeface="IBM Plex Mono Medium"/>
-                <a:cs typeface="IBM Plex Mono Medium"/>
-                <a:ea typeface="IBM Plex Mono Medium"/>
-              </a:rPr>
-              <a:t>TILASHAR-KZ.VERCEL.APP  ·  МАЛЫШКО МАКАР ЕВГЕНЬЕВИЧ · 6 «Б» КЛАСС · ШКОЛА №35</a:t>
             </a:r>
           </a:p>
         </p:txBody>
@@ -10069,7 +9084,7 @@
                 <a:cs typeface="IBM Plex Mono Medium"/>
                 <a:ea typeface="IBM Plex Mono Medium"/>
               </a:rPr>
-              <a:t>02 / 10</a:t>
+              <a:t>02 / 08</a:t>
             </a:r>
           </a:p>
         </p:txBody>
@@ -11762,7 +10777,7 @@
                 <a:cs typeface="IBM Plex Mono Medium"/>
                 <a:ea typeface="IBM Plex Mono Medium"/>
               </a:rPr>
-              <a:t>03 / 10</a:t>
+              <a:t>03 / 08</a:t>
             </a:r>
           </a:p>
         </p:txBody>
@@ -12425,7 +11440,7 @@
                 <a:cs typeface="IBM Plex Mono Medium"/>
                 <a:ea typeface="IBM Plex Mono Medium"/>
               </a:rPr>
-              <a:t>04 / 10</a:t>
+              <a:t>04 / 08</a:t>
             </a:r>
           </a:p>
         </p:txBody>
@@ -13458,7 +12473,7 @@
                 <a:cs typeface="IBM Plex Mono SemiBold"/>
                 <a:ea typeface="IBM Plex Mono SemiBold"/>
               </a:rPr>
-              <a:t>ЧТО ОСОБЕННОГО · 1</a:t>
+              <a:t>ЧТО ОСОБЕННОГО</a:t>
             </a:r>
           </a:p>
         </p:txBody>
@@ -13499,7 +12514,7 @@
                 <a:cs typeface="IBM Plex Mono Medium"/>
                 <a:ea typeface="IBM Plex Mono Medium"/>
               </a:rPr>
-              <a:t>05 / 10</a:t>
+              <a:t>05 / 08</a:t>
             </a:r>
           </a:p>
         </p:txBody>
@@ -13512,8 +12527,8 @@
         </p:nvSpPr>
         <p:spPr>
           <a:xfrm>
-            <a:off x="749808" y="785418"/>
-            <a:ext cx="10692079" cy="820096"/>
+            <a:off x="749808" y="801725"/>
+            <a:ext cx="10692079" cy="675373"/>
           </a:xfrm>
           <a:prstGeom prst="rect">
             <a:avLst/>
@@ -13528,11 +12543,11 @@
           <a:p>
             <a:pPr algn="l">
               <a:lnSpc>
-                <a:spcPts val="4548"/>
-              </a:lnSpc>
-            </a:pPr>
-            <a:r>
-              <a:rPr sz="4250" spc="-94">
+                <a:spcPts val="3745"/>
+              </a:lnSpc>
+            </a:pPr>
+            <a:r>
+              <a:rPr sz="3500" spc="-77">
                 <a:solidFill>
                   <a:srgbClr val="EEEBE5"/>
                 </a:solidFill>
@@ -13540,7 +12555,7 @@
                 <a:cs typeface="GQ Text Bold"/>
                 <a:ea typeface="GQ Text Bold"/>
               </a:rPr>
-              <a:t>Девять букв, которых нет на клавиатуре</a:t>
+              <a:t>Четыре вещи, которых нет в обычном тренажёре</a:t>
             </a:r>
           </a:p>
         </p:txBody>
@@ -13553,8 +12568,8 @@
         </p:nvSpPr>
         <p:spPr>
           <a:xfrm>
-            <a:off x="749808" y="1582437"/>
-            <a:ext cx="9195188" cy="567349"/>
+            <a:off x="749808" y="1480520"/>
+            <a:ext cx="8767504" cy="332907"/>
           </a:xfrm>
           <a:prstGeom prst="rect">
             <a:avLst/>
@@ -13581,39 +12596,301 @@
                 <a:cs typeface="GQ Text"/>
                 <a:ea typeface="GQ Text"/>
               </a:rPr>
-              <a:t>В казахском есть буквы ә ғ қ ң ө ұ ү һ і. На русской раскладке их физически негде взять. Обычный тренажёр</a:t>
-            </a:r>
-          </a:p>
-          <a:p>
-            <a:pPr algn="l">
-              <a:lnSpc>
-                <a:spcPts val="1846"/>
-              </a:lnSpc>
-            </a:pPr>
-            <a:r>
-              <a:rPr sz="1300">
-                <a:solidFill>
-                  <a:srgbClr val="A6ADB6"/>
+              <a:t>Каждая появилась не для красоты, а потому что без неё ученик переставал заниматься.</a:t>
+            </a:r>
+          </a:p>
+        </p:txBody>
+      </p:sp>
+      <p:sp>
+        <p:nvSpPr>
+          <p:cNvPr id="8" name="Rectangle 7"/>
+          <p:cNvSpPr/>
+          <p:nvPr/>
+        </p:nvSpPr>
+        <p:spPr>
+          <a:xfrm>
+            <a:off x="749808" y="2227961"/>
+            <a:ext cx="2522143" cy="2521458"/>
+          </a:xfrm>
+          <a:prstGeom prst="rect">
+            <a:avLst/>
+          </a:prstGeom>
+          <a:solidFill>
+            <a:srgbClr val="11161E"/>
+          </a:solidFill>
+          <a:ln w="9525">
+            <a:solidFill>
+              <a:srgbClr val="3B434D"/>
+            </a:solidFill>
+          </a:ln>
+          <a:effectLst/>
+        </p:spPr>
+        <p:txBody>
+          <a:bodyPr rtlCol="0" anchor="ctr" wrap="none"/>
+          <a:lstStyle/>
+          <a:p>
+            <a:pPr algn="ctr"/>
+          </a:p>
+        </p:txBody>
+      </p:sp>
+      <p:sp>
+        <p:nvSpPr>
+          <p:cNvPr id="9" name="Rectangle 8"/>
+          <p:cNvSpPr/>
+          <p:nvPr/>
+        </p:nvSpPr>
+        <p:spPr>
+          <a:xfrm>
+            <a:off x="749808" y="2227961"/>
+            <a:ext cx="32004" cy="2521458"/>
+          </a:xfrm>
+          <a:prstGeom prst="rect">
+            <a:avLst/>
+          </a:prstGeom>
+          <a:solidFill>
+            <a:srgbClr val="0064B9"/>
+          </a:solidFill>
+          <a:ln>
+            <a:noFill/>
+          </a:ln>
+          <a:effectLst/>
+        </p:spPr>
+        <p:txBody>
+          <a:bodyPr rtlCol="0" anchor="ctr" wrap="none"/>
+          <a:lstStyle/>
+          <a:p>
+            <a:pPr algn="ctr"/>
+          </a:p>
+        </p:txBody>
+      </p:sp>
+      <p:sp>
+        <p:nvSpPr>
+          <p:cNvPr id="10" name="TextBox 9"/>
+          <p:cNvSpPr txBox="1"/>
+          <p:nvPr/>
+        </p:nvSpPr>
+        <p:spPr>
+          <a:xfrm>
+            <a:off x="1005840" y="2462656"/>
+            <a:ext cx="2010079" cy="189357"/>
+          </a:xfrm>
+          <a:prstGeom prst="rect">
+            <a:avLst/>
+          </a:prstGeom>
+          <a:noFill/>
+        </p:spPr>
+        <p:txBody>
+          <a:bodyPr wrap="none" lIns="0" rIns="0" tIns="0" bIns="0" anchor="t">
+            <a:spAutoFit/>
+          </a:bodyPr>
+          <a:lstStyle/>
+          <a:p>
+            <a:pPr algn="l">
+              <a:lnSpc>
+                <a:spcPts val="1050"/>
+              </a:lnSpc>
+            </a:pPr>
+            <a:r>
+              <a:rPr sz="850" spc="136">
+                <a:solidFill>
+                  <a:srgbClr val="59AAF8"/>
+                </a:solidFill>
+                <a:latin typeface="IBM Plex Mono SemiBold"/>
+                <a:cs typeface="IBM Plex Mono SemiBold"/>
+                <a:ea typeface="IBM Plex Mono SemiBold"/>
+              </a:rPr>
+              <a:t>1</a:t>
+            </a:r>
+          </a:p>
+        </p:txBody>
+      </p:sp>
+      <p:sp>
+        <p:nvSpPr>
+          <p:cNvPr id="11" name="TextBox 10"/>
+          <p:cNvSpPr txBox="1"/>
+          <p:nvPr/>
+        </p:nvSpPr>
+        <p:spPr>
+          <a:xfrm>
+            <a:off x="1005840" y="2701467"/>
+            <a:ext cx="2010079" cy="525551"/>
+          </a:xfrm>
+          <a:prstGeom prst="rect">
+            <a:avLst/>
+          </a:prstGeom>
+          <a:noFill/>
+        </p:spPr>
+        <p:txBody>
+          <a:bodyPr wrap="none" lIns="0" rIns="0" tIns="0" bIns="0" anchor="t">
+            <a:spAutoFit/>
+          </a:bodyPr>
+          <a:lstStyle/>
+          <a:p>
+            <a:pPr algn="l">
+              <a:lnSpc>
+                <a:spcPts val="1710"/>
+              </a:lnSpc>
+            </a:pPr>
+            <a:r>
+              <a:rPr sz="1500" spc="-22">
+                <a:solidFill>
+                  <a:srgbClr val="EEEBE5"/>
+                </a:solidFill>
+                <a:latin typeface="GQ Text Bold"/>
+                <a:cs typeface="GQ Text Bold"/>
+                <a:ea typeface="GQ Text Bold"/>
+              </a:rPr>
+              <a:t>Принимает русские</a:t>
+            </a:r>
+          </a:p>
+          <a:p>
+            <a:pPr algn="l">
+              <a:lnSpc>
+                <a:spcPts val="1710"/>
+              </a:lnSpc>
+            </a:pPr>
+            <a:r>
+              <a:rPr sz="1500" spc="-22">
+                <a:solidFill>
+                  <a:srgbClr val="EEEBE5"/>
+                </a:solidFill>
+                <a:latin typeface="GQ Text Bold"/>
+                <a:cs typeface="GQ Text Bold"/>
+                <a:ea typeface="GQ Text Bold"/>
+              </a:rPr>
+              <a:t>буквы</a:t>
+            </a:r>
+          </a:p>
+        </p:txBody>
+      </p:sp>
+      <p:sp>
+        <p:nvSpPr>
+          <p:cNvPr id="12" name="TextBox 11"/>
+          <p:cNvSpPr txBox="1"/>
+          <p:nvPr/>
+        </p:nvSpPr>
+        <p:spPr>
+          <a:xfrm>
+            <a:off x="1005840" y="3297554"/>
+            <a:ext cx="204216" cy="252475"/>
+          </a:xfrm>
+          <a:prstGeom prst="rect">
+            <a:avLst/>
+          </a:prstGeom>
+          <a:noFill/>
+        </p:spPr>
+        <p:txBody>
+          <a:bodyPr wrap="none" lIns="0" rIns="0" tIns="0" bIns="0" anchor="t">
+            <a:spAutoFit/>
+          </a:bodyPr>
+          <a:lstStyle/>
+          <a:p>
+            <a:pPr algn="l">
+              <a:lnSpc>
+                <a:spcPts val="1400"/>
+              </a:lnSpc>
+            </a:pPr>
+            <a:r>
+              <a:rPr sz="1000">
+                <a:solidFill>
+                  <a:srgbClr val="59AAF8"/>
+                </a:solidFill>
+                <a:latin typeface="IBM Plex Mono Medium"/>
+                <a:cs typeface="IBM Plex Mono Medium"/>
+                <a:ea typeface="IBM Plex Mono Medium"/>
+              </a:rPr>
+              <a:t>—</a:t>
+            </a:r>
+          </a:p>
+        </p:txBody>
+      </p:sp>
+      <p:sp>
+        <p:nvSpPr>
+          <p:cNvPr id="13" name="TextBox 12"/>
+          <p:cNvSpPr txBox="1"/>
+          <p:nvPr/>
+        </p:nvSpPr>
+        <p:spPr>
+          <a:xfrm>
+            <a:off x="1210056" y="3297554"/>
+            <a:ext cx="1805863" cy="608076"/>
+          </a:xfrm>
+          <a:prstGeom prst="rect">
+            <a:avLst/>
+          </a:prstGeom>
+          <a:noFill/>
+        </p:spPr>
+        <p:txBody>
+          <a:bodyPr wrap="none" lIns="0" rIns="0" tIns="0" bIns="0" anchor="t">
+            <a:spAutoFit/>
+          </a:bodyPr>
+          <a:lstStyle/>
+          <a:p>
+            <a:pPr algn="l">
+              <a:lnSpc>
+                <a:spcPts val="1400"/>
+              </a:lnSpc>
+            </a:pPr>
+            <a:r>
+              <a:rPr sz="1000">
+                <a:solidFill>
+                  <a:srgbClr val="EEEBE5"/>
                 </a:solidFill>
                 <a:latin typeface="GQ Text"/>
                 <a:cs typeface="GQ Text"/>
                 <a:ea typeface="GQ Text"/>
               </a:rPr>
-              <a:t>сравнивает ответ буква в букву — и ученик получает «неверно» за правильный ответ.</a:t>
-            </a:r>
-          </a:p>
-        </p:txBody>
-      </p:sp>
-      <p:sp>
-        <p:nvSpPr>
-          <p:cNvPr id="8" name="TextBox 7"/>
+              <a:t>В казахском девять букв,</a:t>
+            </a:r>
+          </a:p>
+          <a:p>
+            <a:pPr algn="l">
+              <a:lnSpc>
+                <a:spcPts val="1400"/>
+              </a:lnSpc>
+            </a:pPr>
+            <a:r>
+              <a:rPr sz="1000">
+                <a:solidFill>
+                  <a:srgbClr val="EEEBE5"/>
+                </a:solidFill>
+                <a:latin typeface="GQ Text"/>
+                <a:cs typeface="GQ Text"/>
+                <a:ea typeface="GQ Text"/>
+              </a:rPr>
+              <a:t>которых нет на русской</a:t>
+            </a:r>
+          </a:p>
+          <a:p>
+            <a:pPr algn="l">
+              <a:lnSpc>
+                <a:spcPts val="1400"/>
+              </a:lnSpc>
+            </a:pPr>
+            <a:r>
+              <a:rPr sz="1000">
+                <a:solidFill>
+                  <a:srgbClr val="EEEBE5"/>
+                </a:solidFill>
+                <a:latin typeface="GQ Text"/>
+                <a:cs typeface="GQ Text"/>
+                <a:ea typeface="GQ Text"/>
+              </a:rPr>
+              <a:t>раскладке</a:t>
+            </a:r>
+          </a:p>
+        </p:txBody>
+      </p:sp>
+      <p:sp>
+        <p:nvSpPr>
+          <p:cNvPr id="14" name="TextBox 13"/>
           <p:cNvSpPr txBox="1"/>
           <p:nvPr/>
         </p:nvSpPr>
         <p:spPr>
           <a:xfrm>
-            <a:off x="749808" y="2519616"/>
-            <a:ext cx="3381146" cy="883666"/>
+            <a:off x="1005840" y="3931538"/>
+            <a:ext cx="204216" cy="252475"/>
           </a:xfrm>
           <a:prstGeom prst="rect">
             <a:avLst/>
@@ -13628,33 +12905,272 @@
           <a:p>
             <a:pPr algn="l">
               <a:lnSpc>
-                <a:spcPts val="4900"/>
-              </a:lnSpc>
-            </a:pPr>
-            <a:r>
-              <a:rPr sz="5000" spc="-150">
+                <a:spcPts val="1400"/>
+              </a:lnSpc>
+            </a:pPr>
+            <a:r>
+              <a:rPr sz="1000">
                 <a:solidFill>
                   <a:srgbClr val="59AAF8"/>
+                </a:solidFill>
+                <a:latin typeface="IBM Plex Mono Medium"/>
+                <a:cs typeface="IBM Plex Mono Medium"/>
+                <a:ea typeface="IBM Plex Mono Medium"/>
+              </a:rPr>
+              <a:t>—</a:t>
+            </a:r>
+          </a:p>
+        </p:txBody>
+      </p:sp>
+      <p:sp>
+        <p:nvSpPr>
+          <p:cNvPr id="15" name="TextBox 14"/>
+          <p:cNvSpPr txBox="1"/>
+          <p:nvPr/>
+        </p:nvSpPr>
+        <p:spPr>
+          <a:xfrm>
+            <a:off x="1210056" y="3931538"/>
+            <a:ext cx="1805863" cy="608076"/>
+          </a:xfrm>
+          <a:prstGeom prst="rect">
+            <a:avLst/>
+          </a:prstGeom>
+          <a:noFill/>
+        </p:spPr>
+        <p:txBody>
+          <a:bodyPr wrap="none" lIns="0" rIns="0" tIns="0" bIns="0" anchor="t">
+            <a:spAutoFit/>
+          </a:bodyPr>
+          <a:lstStyle/>
+          <a:p>
+            <a:pPr algn="l">
+              <a:lnSpc>
+                <a:spcPts val="1400"/>
+              </a:lnSpc>
+            </a:pPr>
+            <a:r>
+              <a:rPr sz="1000">
+                <a:solidFill>
+                  <a:srgbClr val="EEEBE5"/>
+                </a:solidFill>
+                <a:latin typeface="GQ Text"/>
+                <a:cs typeface="GQ Text"/>
+                <a:ea typeface="GQ Text"/>
+              </a:rPr>
+              <a:t>Ответ засчитывается,</a:t>
+            </a:r>
+          </a:p>
+          <a:p>
+            <a:pPr algn="l">
+              <a:lnSpc>
+                <a:spcPts val="1400"/>
+              </a:lnSpc>
+            </a:pPr>
+            <a:r>
+              <a:rPr sz="1000">
+                <a:solidFill>
+                  <a:srgbClr val="EEEBE5"/>
+                </a:solidFill>
+                <a:latin typeface="GQ Text"/>
+                <a:cs typeface="GQ Text"/>
+                <a:ea typeface="GQ Text"/>
+              </a:rPr>
+              <a:t>правильное написание</a:t>
+            </a:r>
+          </a:p>
+          <a:p>
+            <a:pPr algn="l">
+              <a:lnSpc>
+                <a:spcPts val="1400"/>
+              </a:lnSpc>
+            </a:pPr>
+            <a:r>
+              <a:rPr sz="1000">
+                <a:solidFill>
+                  <a:srgbClr val="EEEBE5"/>
+                </a:solidFill>
+                <a:latin typeface="GQ Text"/>
+                <a:cs typeface="GQ Text"/>
+                <a:ea typeface="GQ Text"/>
+              </a:rPr>
+              <a:t>показывается</a:t>
+            </a:r>
+          </a:p>
+        </p:txBody>
+      </p:sp>
+      <p:sp>
+        <p:nvSpPr>
+          <p:cNvPr id="16" name="Rectangle 15"/>
+          <p:cNvSpPr/>
+          <p:nvPr/>
+        </p:nvSpPr>
+        <p:spPr>
+          <a:xfrm>
+            <a:off x="3473119" y="2227961"/>
+            <a:ext cx="2522143" cy="2521458"/>
+          </a:xfrm>
+          <a:prstGeom prst="rect">
+            <a:avLst/>
+          </a:prstGeom>
+          <a:solidFill>
+            <a:srgbClr val="11161E"/>
+          </a:solidFill>
+          <a:ln w="9525">
+            <a:solidFill>
+              <a:srgbClr val="3B434D"/>
+            </a:solidFill>
+          </a:ln>
+          <a:effectLst/>
+        </p:spPr>
+        <p:txBody>
+          <a:bodyPr rtlCol="0" anchor="ctr" wrap="none"/>
+          <a:lstStyle/>
+          <a:p>
+            <a:pPr algn="ctr"/>
+          </a:p>
+        </p:txBody>
+      </p:sp>
+      <p:sp>
+        <p:nvSpPr>
+          <p:cNvPr id="17" name="Rectangle 16"/>
+          <p:cNvSpPr/>
+          <p:nvPr/>
+        </p:nvSpPr>
+        <p:spPr>
+          <a:xfrm>
+            <a:off x="3473119" y="2227961"/>
+            <a:ext cx="32004" cy="2521458"/>
+          </a:xfrm>
+          <a:prstGeom prst="rect">
+            <a:avLst/>
+          </a:prstGeom>
+          <a:solidFill>
+            <a:srgbClr val="0064B9"/>
+          </a:solidFill>
+          <a:ln>
+            <a:noFill/>
+          </a:ln>
+          <a:effectLst/>
+        </p:spPr>
+        <p:txBody>
+          <a:bodyPr rtlCol="0" anchor="ctr" wrap="none"/>
+          <a:lstStyle/>
+          <a:p>
+            <a:pPr algn="ctr"/>
+          </a:p>
+        </p:txBody>
+      </p:sp>
+      <p:sp>
+        <p:nvSpPr>
+          <p:cNvPr id="18" name="TextBox 17"/>
+          <p:cNvSpPr txBox="1"/>
+          <p:nvPr/>
+        </p:nvSpPr>
+        <p:spPr>
+          <a:xfrm>
+            <a:off x="3729151" y="2462656"/>
+            <a:ext cx="2010079" cy="189357"/>
+          </a:xfrm>
+          <a:prstGeom prst="rect">
+            <a:avLst/>
+          </a:prstGeom>
+          <a:noFill/>
+        </p:spPr>
+        <p:txBody>
+          <a:bodyPr wrap="none" lIns="0" rIns="0" tIns="0" bIns="0" anchor="t">
+            <a:spAutoFit/>
+          </a:bodyPr>
+          <a:lstStyle/>
+          <a:p>
+            <a:pPr algn="l">
+              <a:lnSpc>
+                <a:spcPts val="1050"/>
+              </a:lnSpc>
+            </a:pPr>
+            <a:r>
+              <a:rPr sz="850" spc="136">
+                <a:solidFill>
+                  <a:srgbClr val="59AAF8"/>
+                </a:solidFill>
+                <a:latin typeface="IBM Plex Mono SemiBold"/>
+                <a:cs typeface="IBM Plex Mono SemiBold"/>
+                <a:ea typeface="IBM Plex Mono SemiBold"/>
+              </a:rPr>
+              <a:t>2</a:t>
+            </a:r>
+          </a:p>
+        </p:txBody>
+      </p:sp>
+      <p:sp>
+        <p:nvSpPr>
+          <p:cNvPr id="19" name="TextBox 18"/>
+          <p:cNvSpPr txBox="1"/>
+          <p:nvPr/>
+        </p:nvSpPr>
+        <p:spPr>
+          <a:xfrm>
+            <a:off x="3729151" y="2701467"/>
+            <a:ext cx="2010079" cy="525551"/>
+          </a:xfrm>
+          <a:prstGeom prst="rect">
+            <a:avLst/>
+          </a:prstGeom>
+          <a:noFill/>
+        </p:spPr>
+        <p:txBody>
+          <a:bodyPr wrap="none" lIns="0" rIns="0" tIns="0" bIns="0" anchor="t">
+            <a:spAutoFit/>
+          </a:bodyPr>
+          <a:lstStyle/>
+          <a:p>
+            <a:pPr algn="l">
+              <a:lnSpc>
+                <a:spcPts val="1710"/>
+              </a:lnSpc>
+            </a:pPr>
+            <a:r>
+              <a:rPr sz="1500" spc="-22">
+                <a:solidFill>
+                  <a:srgbClr val="EEEBE5"/>
                 </a:solidFill>
                 <a:latin typeface="GQ Text Bold"/>
                 <a:cs typeface="GQ Text Bold"/>
                 <a:ea typeface="GQ Text Bold"/>
               </a:rPr>
-              <a:t>193</a:t>
-            </a:r>
-          </a:p>
-        </p:txBody>
-      </p:sp>
-      <p:sp>
-        <p:nvSpPr>
-          <p:cNvPr id="9" name="TextBox 8"/>
+              <a:t>Считает окончания</a:t>
+            </a:r>
+          </a:p>
+          <a:p>
+            <a:pPr algn="l">
+              <a:lnSpc>
+                <a:spcPts val="1710"/>
+              </a:lnSpc>
+            </a:pPr>
+            <a:r>
+              <a:rPr sz="1500" spc="-22">
+                <a:solidFill>
+                  <a:srgbClr val="EEEBE5"/>
+                </a:solidFill>
+                <a:latin typeface="GQ Text Bold"/>
+                <a:cs typeface="GQ Text Bold"/>
+                <a:ea typeface="GQ Text Bold"/>
+              </a:rPr>
+              <a:t>по правилам</a:t>
+            </a:r>
+          </a:p>
+        </p:txBody>
+      </p:sp>
+      <p:sp>
+        <p:nvSpPr>
+          <p:cNvPr id="20" name="TextBox 19"/>
           <p:cNvSpPr txBox="1"/>
           <p:nvPr/>
         </p:nvSpPr>
         <p:spPr>
           <a:xfrm>
-            <a:off x="749808" y="3307016"/>
-            <a:ext cx="3381146" cy="229933"/>
+            <a:off x="3729151" y="3297554"/>
+            <a:ext cx="204216" cy="252475"/>
           </a:xfrm>
           <a:prstGeom prst="rect">
             <a:avLst/>
@@ -13669,33 +13185,33 @@
           <a:p>
             <a:pPr algn="l">
               <a:lnSpc>
-                <a:spcPts val="1275"/>
-              </a:lnSpc>
-            </a:pPr>
-            <a:r>
-              <a:rPr sz="850" spc="68">
-                <a:solidFill>
-                  <a:srgbClr val="A6ADB6"/>
+                <a:spcPts val="1400"/>
+              </a:lnSpc>
+            </a:pPr>
+            <a:r>
+              <a:rPr sz="1000">
+                <a:solidFill>
+                  <a:srgbClr val="59AAF8"/>
                 </a:solidFill>
                 <a:latin typeface="IBM Plex Mono Medium"/>
                 <a:cs typeface="IBM Plex Mono Medium"/>
                 <a:ea typeface="IBM Plex Mono Medium"/>
               </a:rPr>
-              <a:t>ИЗ 225 ОТВЕТОВ</a:t>
-            </a:r>
-          </a:p>
-        </p:txBody>
-      </p:sp>
-      <p:sp>
-        <p:nvSpPr>
-          <p:cNvPr id="10" name="TextBox 9"/>
+              <a:t>—</a:t>
+            </a:r>
+          </a:p>
+        </p:txBody>
+      </p:sp>
+      <p:sp>
+        <p:nvSpPr>
+          <p:cNvPr id="21" name="TextBox 20"/>
           <p:cNvSpPr txBox="1"/>
           <p:nvPr/>
         </p:nvSpPr>
         <p:spPr>
           <a:xfrm>
-            <a:off x="749808" y="3558877"/>
-            <a:ext cx="3381146" cy="243278"/>
+            <a:off x="3933367" y="3297554"/>
+            <a:ext cx="1805863" cy="430276"/>
           </a:xfrm>
           <a:prstGeom prst="rect">
             <a:avLst/>
@@ -13710,33 +13226,51 @@
           <a:p>
             <a:pPr algn="l">
               <a:lnSpc>
-                <a:spcPts val="1349"/>
-              </a:lnSpc>
-            </a:pPr>
-            <a:r>
-              <a:rPr sz="950">
-                <a:solidFill>
-                  <a:srgbClr val="A6ADB6"/>
+                <a:spcPts val="1400"/>
+              </a:lnSpc>
+            </a:pPr>
+            <a:r>
+              <a:rPr sz="1000">
+                <a:solidFill>
+                  <a:srgbClr val="EEEBE5"/>
                 </a:solidFill>
                 <a:latin typeface="GQ Text"/>
                 <a:cs typeface="GQ Text"/>
                 <a:ea typeface="GQ Text"/>
               </a:rPr>
-              <a:t>содержат хотя бы одну такую букву</a:t>
-            </a:r>
-          </a:p>
-        </p:txBody>
-      </p:sp>
-      <p:sp>
-        <p:nvSpPr>
-          <p:cNvPr id="11" name="TextBox 10"/>
+              <a:t>Подставь любое своё слово</a:t>
+            </a:r>
+          </a:p>
+          <a:p>
+            <a:pPr algn="l">
+              <a:lnSpc>
+                <a:spcPts val="1400"/>
+              </a:lnSpc>
+            </a:pPr>
+            <a:r>
+              <a:rPr sz="1000">
+                <a:solidFill>
+                  <a:srgbClr val="EEEBE5"/>
+                </a:solidFill>
+                <a:latin typeface="GQ Text"/>
+                <a:cs typeface="GQ Text"/>
+                <a:ea typeface="GQ Text"/>
+              </a:rPr>
+              <a:t>— увидишь все его формы</a:t>
+            </a:r>
+          </a:p>
+        </p:txBody>
+      </p:sp>
+      <p:sp>
+        <p:nvSpPr>
+          <p:cNvPr id="22" name="TextBox 21"/>
           <p:cNvSpPr txBox="1"/>
           <p:nvPr/>
         </p:nvSpPr>
         <p:spPr>
           <a:xfrm>
-            <a:off x="4405274" y="2519616"/>
-            <a:ext cx="3381146" cy="883666"/>
+            <a:off x="3729151" y="3753739"/>
+            <a:ext cx="204216" cy="252475"/>
           </a:xfrm>
           <a:prstGeom prst="rect">
             <a:avLst/>
@@ -13751,11 +13285,214 @@
           <a:p>
             <a:pPr algn="l">
               <a:lnSpc>
-                <a:spcPts val="4900"/>
-              </a:lnSpc>
-            </a:pPr>
-            <a:r>
-              <a:rPr sz="5000" spc="-150">
+                <a:spcPts val="1400"/>
+              </a:lnSpc>
+            </a:pPr>
+            <a:r>
+              <a:rPr sz="1000">
+                <a:solidFill>
+                  <a:srgbClr val="59AAF8"/>
+                </a:solidFill>
+                <a:latin typeface="IBM Plex Mono Medium"/>
+                <a:cs typeface="IBM Plex Mono Medium"/>
+                <a:ea typeface="IBM Plex Mono Medium"/>
+              </a:rPr>
+              <a:t>—</a:t>
+            </a:r>
+          </a:p>
+        </p:txBody>
+      </p:sp>
+      <p:sp>
+        <p:nvSpPr>
+          <p:cNvPr id="23" name="TextBox 22"/>
+          <p:cNvSpPr txBox="1"/>
+          <p:nvPr/>
+        </p:nvSpPr>
+        <p:spPr>
+          <a:xfrm>
+            <a:off x="3933367" y="3753739"/>
+            <a:ext cx="1805863" cy="430276"/>
+          </a:xfrm>
+          <a:prstGeom prst="rect">
+            <a:avLst/>
+          </a:prstGeom>
+          <a:noFill/>
+        </p:spPr>
+        <p:txBody>
+          <a:bodyPr wrap="none" lIns="0" rIns="0" tIns="0" bIns="0" anchor="t">
+            <a:spAutoFit/>
+          </a:bodyPr>
+          <a:lstStyle/>
+          <a:p>
+            <a:pPr algn="l">
+              <a:lnSpc>
+                <a:spcPts val="1400"/>
+              </a:lnSpc>
+            </a:pPr>
+            <a:r>
+              <a:rPr sz="1000">
+                <a:solidFill>
+                  <a:srgbClr val="EEEBE5"/>
+                </a:solidFill>
+                <a:latin typeface="GQ Text"/>
+                <a:cs typeface="GQ Text"/>
+                <a:ea typeface="GQ Text"/>
+              </a:rPr>
+              <a:t>Не таблица, а правила</a:t>
+            </a:r>
+          </a:p>
+          <a:p>
+            <a:pPr algn="l">
+              <a:lnSpc>
+                <a:spcPts val="1400"/>
+              </a:lnSpc>
+            </a:pPr>
+            <a:r>
+              <a:rPr sz="1000">
+                <a:solidFill>
+                  <a:srgbClr val="EEEBE5"/>
+                </a:solidFill>
+                <a:latin typeface="GQ Text"/>
+                <a:cs typeface="GQ Text"/>
+                <a:ea typeface="GQ Text"/>
+              </a:rPr>
+              <a:t>казахского языка</a:t>
+            </a:r>
+          </a:p>
+        </p:txBody>
+      </p:sp>
+      <p:sp>
+        <p:nvSpPr>
+          <p:cNvPr id="24" name="Rectangle 23"/>
+          <p:cNvSpPr/>
+          <p:nvPr/>
+        </p:nvSpPr>
+        <p:spPr>
+          <a:xfrm>
+            <a:off x="6196431" y="2227961"/>
+            <a:ext cx="2522143" cy="2521458"/>
+          </a:xfrm>
+          <a:prstGeom prst="rect">
+            <a:avLst/>
+          </a:prstGeom>
+          <a:solidFill>
+            <a:srgbClr val="11161E"/>
+          </a:solidFill>
+          <a:ln w="9525">
+            <a:solidFill>
+              <a:srgbClr val="3B434D"/>
+            </a:solidFill>
+          </a:ln>
+          <a:effectLst/>
+        </p:spPr>
+        <p:txBody>
+          <a:bodyPr rtlCol="0" anchor="ctr" wrap="none"/>
+          <a:lstStyle/>
+          <a:p>
+            <a:pPr algn="ctr"/>
+          </a:p>
+        </p:txBody>
+      </p:sp>
+      <p:sp>
+        <p:nvSpPr>
+          <p:cNvPr id="25" name="Rectangle 24"/>
+          <p:cNvSpPr/>
+          <p:nvPr/>
+        </p:nvSpPr>
+        <p:spPr>
+          <a:xfrm>
+            <a:off x="6196431" y="2227961"/>
+            <a:ext cx="32004" cy="2521458"/>
+          </a:xfrm>
+          <a:prstGeom prst="rect">
+            <a:avLst/>
+          </a:prstGeom>
+          <a:solidFill>
+            <a:srgbClr val="0064B9"/>
+          </a:solidFill>
+          <a:ln>
+            <a:noFill/>
+          </a:ln>
+          <a:effectLst/>
+        </p:spPr>
+        <p:txBody>
+          <a:bodyPr rtlCol="0" anchor="ctr" wrap="none"/>
+          <a:lstStyle/>
+          <a:p>
+            <a:pPr algn="ctr"/>
+          </a:p>
+        </p:txBody>
+      </p:sp>
+      <p:sp>
+        <p:nvSpPr>
+          <p:cNvPr id="26" name="TextBox 25"/>
+          <p:cNvSpPr txBox="1"/>
+          <p:nvPr/>
+        </p:nvSpPr>
+        <p:spPr>
+          <a:xfrm>
+            <a:off x="6452463" y="2462656"/>
+            <a:ext cx="2010079" cy="189357"/>
+          </a:xfrm>
+          <a:prstGeom prst="rect">
+            <a:avLst/>
+          </a:prstGeom>
+          <a:noFill/>
+        </p:spPr>
+        <p:txBody>
+          <a:bodyPr wrap="none" lIns="0" rIns="0" tIns="0" bIns="0" anchor="t">
+            <a:spAutoFit/>
+          </a:bodyPr>
+          <a:lstStyle/>
+          <a:p>
+            <a:pPr algn="l">
+              <a:lnSpc>
+                <a:spcPts val="1050"/>
+              </a:lnSpc>
+            </a:pPr>
+            <a:r>
+              <a:rPr sz="850" spc="136">
+                <a:solidFill>
+                  <a:srgbClr val="59AAF8"/>
+                </a:solidFill>
+                <a:latin typeface="IBM Plex Mono SemiBold"/>
+                <a:cs typeface="IBM Plex Mono SemiBold"/>
+                <a:ea typeface="IBM Plex Mono SemiBold"/>
+              </a:rPr>
+              <a:t>3</a:t>
+            </a:r>
+          </a:p>
+        </p:txBody>
+      </p:sp>
+      <p:sp>
+        <p:nvSpPr>
+          <p:cNvPr id="27" name="TextBox 26"/>
+          <p:cNvSpPr txBox="1"/>
+          <p:nvPr/>
+        </p:nvSpPr>
+        <p:spPr>
+          <a:xfrm>
+            <a:off x="6452463" y="2701467"/>
+            <a:ext cx="2010079" cy="308381"/>
+          </a:xfrm>
+          <a:prstGeom prst="rect">
+            <a:avLst/>
+          </a:prstGeom>
+          <a:noFill/>
+        </p:spPr>
+        <p:txBody>
+          <a:bodyPr wrap="none" lIns="0" rIns="0" tIns="0" bIns="0" anchor="t">
+            <a:spAutoFit/>
+          </a:bodyPr>
+          <a:lstStyle/>
+          <a:p>
+            <a:pPr algn="l">
+              <a:lnSpc>
+                <a:spcPts val="1710"/>
+              </a:lnSpc>
+            </a:pPr>
+            <a:r>
+              <a:rPr sz="1500" spc="-22">
                 <a:solidFill>
                   <a:srgbClr val="EEEBE5"/>
                 </a:solidFill>
@@ -13763,21 +13500,21 @@
                 <a:cs typeface="GQ Text Bold"/>
                 <a:ea typeface="GQ Text Bold"/>
               </a:rPr>
-              <a:t>86%</a:t>
-            </a:r>
-          </a:p>
-        </p:txBody>
-      </p:sp>
-      <p:sp>
-        <p:nvSpPr>
-          <p:cNvPr id="12" name="TextBox 11"/>
+              <a:t>Возвращает забытое</a:t>
+            </a:r>
+          </a:p>
+        </p:txBody>
+      </p:sp>
+      <p:sp>
+        <p:nvSpPr>
+          <p:cNvPr id="28" name="TextBox 27"/>
           <p:cNvSpPr txBox="1"/>
           <p:nvPr/>
         </p:nvSpPr>
         <p:spPr>
           <a:xfrm>
-            <a:off x="4405274" y="3307016"/>
-            <a:ext cx="3381146" cy="229933"/>
+            <a:off x="6452463" y="3080384"/>
+            <a:ext cx="204216" cy="252475"/>
           </a:xfrm>
           <a:prstGeom prst="rect">
             <a:avLst/>
@@ -13792,33 +13529,33 @@
           <a:p>
             <a:pPr algn="l">
               <a:lnSpc>
-                <a:spcPts val="1275"/>
-              </a:lnSpc>
-            </a:pPr>
-            <a:r>
-              <a:rPr sz="850" spc="68">
-                <a:solidFill>
-                  <a:srgbClr val="A6ADB6"/>
+                <a:spcPts val="1400"/>
+              </a:lnSpc>
+            </a:pPr>
+            <a:r>
+              <a:rPr sz="1000">
+                <a:solidFill>
+                  <a:srgbClr val="59AAF8"/>
                 </a:solidFill>
                 <a:latin typeface="IBM Plex Mono Medium"/>
                 <a:cs typeface="IBM Plex Mono Medium"/>
                 <a:ea typeface="IBM Plex Mono Medium"/>
               </a:rPr>
-              <a:t>ЗАДАНИЙ КУРСА</a:t>
-            </a:r>
-          </a:p>
-        </p:txBody>
-      </p:sp>
-      <p:sp>
-        <p:nvSpPr>
-          <p:cNvPr id="13" name="TextBox 12"/>
+              <a:t>—</a:t>
+            </a:r>
+          </a:p>
+        </p:txBody>
+      </p:sp>
+      <p:sp>
+        <p:nvSpPr>
+          <p:cNvPr id="29" name="TextBox 28"/>
           <p:cNvSpPr txBox="1"/>
           <p:nvPr/>
         </p:nvSpPr>
         <p:spPr>
           <a:xfrm>
-            <a:off x="4405274" y="3558877"/>
-            <a:ext cx="3381146" cy="243278"/>
+            <a:off x="6656679" y="3080384"/>
+            <a:ext cx="1805863" cy="430276"/>
           </a:xfrm>
           <a:prstGeom prst="rect">
             <a:avLst/>
@@ -13833,33 +13570,51 @@
           <a:p>
             <a:pPr algn="l">
               <a:lnSpc>
-                <a:spcPts val="1349"/>
-              </a:lnSpc>
-            </a:pPr>
-            <a:r>
-              <a:rPr sz="950">
-                <a:solidFill>
-                  <a:srgbClr val="A6ADB6"/>
+                <a:spcPts val="1400"/>
+              </a:lnSpc>
+            </a:pPr>
+            <a:r>
+              <a:rPr sz="1000">
+                <a:solidFill>
+                  <a:srgbClr val="EEEBE5"/>
                 </a:solidFill>
                 <a:latin typeface="GQ Text"/>
                 <a:cs typeface="GQ Text"/>
                 <a:ea typeface="GQ Text"/>
               </a:rPr>
-              <a:t>нельзя ввести с русской клавиатуры</a:t>
-            </a:r>
-          </a:p>
-        </p:txBody>
-      </p:sp>
-      <p:sp>
-        <p:nvSpPr>
-          <p:cNvPr id="14" name="TextBox 13"/>
+              <a:t>Ошибся — задание вернётся</a:t>
+            </a:r>
+          </a:p>
+          <a:p>
+            <a:pPr algn="l">
+              <a:lnSpc>
+                <a:spcPts val="1400"/>
+              </a:lnSpc>
+            </a:pPr>
+            <a:r>
+              <a:rPr sz="1000">
+                <a:solidFill>
+                  <a:srgbClr val="EEEBE5"/>
+                </a:solidFill>
+                <a:latin typeface="GQ Text"/>
+                <a:cs typeface="GQ Text"/>
+                <a:ea typeface="GQ Text"/>
+              </a:rPr>
+              <a:t>сегодня</a:t>
+            </a:r>
+          </a:p>
+        </p:txBody>
+      </p:sp>
+      <p:sp>
+        <p:nvSpPr>
+          <p:cNvPr id="30" name="TextBox 29"/>
           <p:cNvSpPr txBox="1"/>
           <p:nvPr/>
         </p:nvSpPr>
         <p:spPr>
           <a:xfrm>
-            <a:off x="8060740" y="2519616"/>
-            <a:ext cx="3381146" cy="883666"/>
+            <a:off x="6452463" y="3536568"/>
+            <a:ext cx="204216" cy="252475"/>
           </a:xfrm>
           <a:prstGeom prst="rect">
             <a:avLst/>
@@ -13874,11 +13629,214 @@
           <a:p>
             <a:pPr algn="l">
               <a:lnSpc>
-                <a:spcPts val="4900"/>
-              </a:lnSpc>
-            </a:pPr>
-            <a:r>
-              <a:rPr sz="5000" spc="-150">
+                <a:spcPts val="1400"/>
+              </a:lnSpc>
+            </a:pPr>
+            <a:r>
+              <a:rPr sz="1000">
+                <a:solidFill>
+                  <a:srgbClr val="59AAF8"/>
+                </a:solidFill>
+                <a:latin typeface="IBM Plex Mono Medium"/>
+                <a:cs typeface="IBM Plex Mono Medium"/>
+                <a:ea typeface="IBM Plex Mono Medium"/>
+              </a:rPr>
+              <a:t>—</a:t>
+            </a:r>
+          </a:p>
+        </p:txBody>
+      </p:sp>
+      <p:sp>
+        <p:nvSpPr>
+          <p:cNvPr id="31" name="TextBox 30"/>
+          <p:cNvSpPr txBox="1"/>
+          <p:nvPr/>
+        </p:nvSpPr>
+        <p:spPr>
+          <a:xfrm>
+            <a:off x="6656679" y="3536568"/>
+            <a:ext cx="1805863" cy="430276"/>
+          </a:xfrm>
+          <a:prstGeom prst="rect">
+            <a:avLst/>
+          </a:prstGeom>
+          <a:noFill/>
+        </p:spPr>
+        <p:txBody>
+          <a:bodyPr wrap="none" lIns="0" rIns="0" tIns="0" bIns="0" anchor="t">
+            <a:spAutoFit/>
+          </a:bodyPr>
+          <a:lstStyle/>
+          <a:p>
+            <a:pPr algn="l">
+              <a:lnSpc>
+                <a:spcPts val="1400"/>
+              </a:lnSpc>
+            </a:pPr>
+            <a:r>
+              <a:rPr sz="1000">
+                <a:solidFill>
+                  <a:srgbClr val="EEEBE5"/>
+                </a:solidFill>
+                <a:latin typeface="GQ Text"/>
+                <a:cs typeface="GQ Text"/>
+                <a:ea typeface="GQ Text"/>
+              </a:rPr>
+              <a:t>Ответил верно — через день,</a:t>
+            </a:r>
+          </a:p>
+          <a:p>
+            <a:pPr algn="l">
+              <a:lnSpc>
+                <a:spcPts val="1400"/>
+              </a:lnSpc>
+            </a:pPr>
+            <a:r>
+              <a:rPr sz="1000">
+                <a:solidFill>
+                  <a:srgbClr val="EEEBE5"/>
+                </a:solidFill>
+                <a:latin typeface="GQ Text"/>
+                <a:cs typeface="GQ Text"/>
+                <a:ea typeface="GQ Text"/>
+              </a:rPr>
+              <a:t>потом через три</a:t>
+            </a:r>
+          </a:p>
+        </p:txBody>
+      </p:sp>
+      <p:sp>
+        <p:nvSpPr>
+          <p:cNvPr id="32" name="Rectangle 31"/>
+          <p:cNvSpPr/>
+          <p:nvPr/>
+        </p:nvSpPr>
+        <p:spPr>
+          <a:xfrm>
+            <a:off x="8919743" y="2227961"/>
+            <a:ext cx="2522143" cy="2521458"/>
+          </a:xfrm>
+          <a:prstGeom prst="rect">
+            <a:avLst/>
+          </a:prstGeom>
+          <a:solidFill>
+            <a:srgbClr val="11161E"/>
+          </a:solidFill>
+          <a:ln w="9525">
+            <a:solidFill>
+              <a:srgbClr val="3B434D"/>
+            </a:solidFill>
+          </a:ln>
+          <a:effectLst/>
+        </p:spPr>
+        <p:txBody>
+          <a:bodyPr rtlCol="0" anchor="ctr" wrap="none"/>
+          <a:lstStyle/>
+          <a:p>
+            <a:pPr algn="ctr"/>
+          </a:p>
+        </p:txBody>
+      </p:sp>
+      <p:sp>
+        <p:nvSpPr>
+          <p:cNvPr id="33" name="Rectangle 32"/>
+          <p:cNvSpPr/>
+          <p:nvPr/>
+        </p:nvSpPr>
+        <p:spPr>
+          <a:xfrm>
+            <a:off x="8919743" y="2227961"/>
+            <a:ext cx="32004" cy="2521458"/>
+          </a:xfrm>
+          <a:prstGeom prst="rect">
+            <a:avLst/>
+          </a:prstGeom>
+          <a:solidFill>
+            <a:srgbClr val="0064B9"/>
+          </a:solidFill>
+          <a:ln>
+            <a:noFill/>
+          </a:ln>
+          <a:effectLst/>
+        </p:spPr>
+        <p:txBody>
+          <a:bodyPr rtlCol="0" anchor="ctr" wrap="none"/>
+          <a:lstStyle/>
+          <a:p>
+            <a:pPr algn="ctr"/>
+          </a:p>
+        </p:txBody>
+      </p:sp>
+      <p:sp>
+        <p:nvSpPr>
+          <p:cNvPr id="34" name="TextBox 33"/>
+          <p:cNvSpPr txBox="1"/>
+          <p:nvPr/>
+        </p:nvSpPr>
+        <p:spPr>
+          <a:xfrm>
+            <a:off x="9175775" y="2462656"/>
+            <a:ext cx="2010079" cy="189357"/>
+          </a:xfrm>
+          <a:prstGeom prst="rect">
+            <a:avLst/>
+          </a:prstGeom>
+          <a:noFill/>
+        </p:spPr>
+        <p:txBody>
+          <a:bodyPr wrap="none" lIns="0" rIns="0" tIns="0" bIns="0" anchor="t">
+            <a:spAutoFit/>
+          </a:bodyPr>
+          <a:lstStyle/>
+          <a:p>
+            <a:pPr algn="l">
+              <a:lnSpc>
+                <a:spcPts val="1050"/>
+              </a:lnSpc>
+            </a:pPr>
+            <a:r>
+              <a:rPr sz="850" spc="136">
+                <a:solidFill>
+                  <a:srgbClr val="59AAF8"/>
+                </a:solidFill>
+                <a:latin typeface="IBM Plex Mono SemiBold"/>
+                <a:cs typeface="IBM Plex Mono SemiBold"/>
+                <a:ea typeface="IBM Plex Mono SemiBold"/>
+              </a:rPr>
+              <a:t>4</a:t>
+            </a:r>
+          </a:p>
+        </p:txBody>
+      </p:sp>
+      <p:sp>
+        <p:nvSpPr>
+          <p:cNvPr id="35" name="TextBox 34"/>
+          <p:cNvSpPr txBox="1"/>
+          <p:nvPr/>
+        </p:nvSpPr>
+        <p:spPr>
+          <a:xfrm>
+            <a:off x="9175775" y="2701467"/>
+            <a:ext cx="2010079" cy="525551"/>
+          </a:xfrm>
+          <a:prstGeom prst="rect">
+            <a:avLst/>
+          </a:prstGeom>
+          <a:noFill/>
+        </p:spPr>
+        <p:txBody>
+          <a:bodyPr wrap="none" lIns="0" rIns="0" tIns="0" bIns="0" anchor="t">
+            <a:spAutoFit/>
+          </a:bodyPr>
+          <a:lstStyle/>
+          <a:p>
+            <a:pPr algn="l">
+              <a:lnSpc>
+                <a:spcPts val="1710"/>
+              </a:lnSpc>
+            </a:pPr>
+            <a:r>
+              <a:rPr sz="1500" spc="-22">
                 <a:solidFill>
                   <a:srgbClr val="EEEBE5"/>
                 </a:solidFill>
@@ -13886,21 +13844,39 @@
                 <a:cs typeface="GQ Text Bold"/>
                 <a:ea typeface="GQ Text Bold"/>
               </a:rPr>
-              <a:t>9</a:t>
-            </a:r>
-          </a:p>
-        </p:txBody>
-      </p:sp>
-      <p:sp>
-        <p:nvSpPr>
-          <p:cNvPr id="15" name="TextBox 14"/>
+              <a:t>Работает без</a:t>
+            </a:r>
+          </a:p>
+          <a:p>
+            <a:pPr algn="l">
+              <a:lnSpc>
+                <a:spcPts val="1710"/>
+              </a:lnSpc>
+            </a:pPr>
+            <a:r>
+              <a:rPr sz="1500" spc="-22">
+                <a:solidFill>
+                  <a:srgbClr val="EEEBE5"/>
+                </a:solidFill>
+                <a:latin typeface="GQ Text Bold"/>
+                <a:cs typeface="GQ Text Bold"/>
+                <a:ea typeface="GQ Text Bold"/>
+              </a:rPr>
+              <a:t>интернета</a:t>
+            </a:r>
+          </a:p>
+        </p:txBody>
+      </p:sp>
+      <p:sp>
+        <p:nvSpPr>
+          <p:cNvPr id="36" name="TextBox 35"/>
           <p:cNvSpPr txBox="1"/>
           <p:nvPr/>
         </p:nvSpPr>
         <p:spPr>
           <a:xfrm>
-            <a:off x="8060740" y="3307016"/>
-            <a:ext cx="3381146" cy="229933"/>
+            <a:off x="9175775" y="3297554"/>
+            <a:ext cx="204216" cy="252475"/>
           </a:xfrm>
           <a:prstGeom prst="rect">
             <a:avLst/>
@@ -13915,33 +13891,33 @@
           <a:p>
             <a:pPr algn="l">
               <a:lnSpc>
-                <a:spcPts val="1275"/>
-              </a:lnSpc>
-            </a:pPr>
-            <a:r>
-              <a:rPr sz="850" spc="68">
-                <a:solidFill>
-                  <a:srgbClr val="A6ADB6"/>
+                <a:spcPts val="1400"/>
+              </a:lnSpc>
+            </a:pPr>
+            <a:r>
+              <a:rPr sz="1000">
+                <a:solidFill>
+                  <a:srgbClr val="59AAF8"/>
                 </a:solidFill>
                 <a:latin typeface="IBM Plex Mono Medium"/>
                 <a:cs typeface="IBM Plex Mono Medium"/>
                 <a:ea typeface="IBM Plex Mono Medium"/>
               </a:rPr>
-              <a:t>БУКВ В РЯДУ</a:t>
-            </a:r>
-          </a:p>
-        </p:txBody>
-      </p:sp>
-      <p:sp>
-        <p:nvSpPr>
-          <p:cNvPr id="16" name="TextBox 15"/>
+              <a:t>—</a:t>
+            </a:r>
+          </a:p>
+        </p:txBody>
+      </p:sp>
+      <p:sp>
+        <p:nvSpPr>
+          <p:cNvPr id="37" name="TextBox 36"/>
           <p:cNvSpPr txBox="1"/>
           <p:nvPr/>
         </p:nvSpPr>
         <p:spPr>
           <a:xfrm>
-            <a:off x="8060740" y="3558877"/>
-            <a:ext cx="3381146" cy="243278"/>
+            <a:off x="9379991" y="3297554"/>
+            <a:ext cx="1805863" cy="252475"/>
           </a:xfrm>
           <a:prstGeom prst="rect">
             <a:avLst/>
@@ -13956,63 +13932,33 @@
           <a:p>
             <a:pPr algn="l">
               <a:lnSpc>
-                <a:spcPts val="1349"/>
-              </a:lnSpc>
-            </a:pPr>
-            <a:r>
-              <a:rPr sz="950">
-                <a:solidFill>
-                  <a:srgbClr val="A6ADB6"/>
+                <a:spcPts val="1400"/>
+              </a:lnSpc>
+            </a:pPr>
+            <a:r>
+              <a:rPr sz="1000">
+                <a:solidFill>
+                  <a:srgbClr val="EEEBE5"/>
                 </a:solidFill>
                 <a:latin typeface="GQ Text"/>
                 <a:cs typeface="GQ Text"/>
                 <a:ea typeface="GQ Text"/>
               </a:rPr>
-              <a:t>под каждым полем ввода</a:t>
-            </a:r>
-          </a:p>
-        </p:txBody>
-      </p:sp>
-      <p:sp>
-        <p:nvSpPr>
-          <p:cNvPr id="17" name="Rectangle 16"/>
-          <p:cNvSpPr/>
-          <p:nvPr/>
-        </p:nvSpPr>
-        <p:spPr>
-          <a:xfrm>
-            <a:off x="749808" y="4214812"/>
-            <a:ext cx="10692079" cy="958850"/>
-          </a:xfrm>
-          <a:prstGeom prst="rect">
-            <a:avLst/>
-          </a:prstGeom>
-          <a:solidFill>
-            <a:srgbClr val="0064B9"/>
-          </a:solidFill>
-          <a:ln>
-            <a:noFill/>
-          </a:ln>
-          <a:effectLst/>
-        </p:spPr>
-        <p:txBody>
-          <a:bodyPr rtlCol="0" anchor="ctr" wrap="none"/>
-          <a:lstStyle/>
-          <a:p>
-            <a:pPr algn="ctr"/>
-          </a:p>
-        </p:txBody>
-      </p:sp>
-      <p:sp>
-        <p:nvSpPr>
-          <p:cNvPr id="18" name="TextBox 17"/>
+              <a:t>Скачивается один раз</a:t>
+            </a:r>
+          </a:p>
+        </p:txBody>
+      </p:sp>
+      <p:sp>
+        <p:nvSpPr>
+          <p:cNvPr id="38" name="TextBox 37"/>
           <p:cNvSpPr txBox="1"/>
           <p:nvPr/>
         </p:nvSpPr>
         <p:spPr>
           <a:xfrm>
-            <a:off x="1024127" y="4412424"/>
-            <a:ext cx="10143439" cy="598487"/>
+            <a:off x="9175775" y="3575939"/>
+            <a:ext cx="204216" cy="252475"/>
           </a:xfrm>
           <a:prstGeom prst="rect">
             <a:avLst/>
@@ -14027,11 +13973,141 @@
           <a:p>
             <a:pPr algn="l">
               <a:lnSpc>
-                <a:spcPts val="1885"/>
-              </a:lnSpc>
-            </a:pPr>
-            <a:r>
-              <a:rPr sz="1300">
+                <a:spcPts val="1400"/>
+              </a:lnSpc>
+            </a:pPr>
+            <a:r>
+              <a:rPr sz="1000">
+                <a:solidFill>
+                  <a:srgbClr val="59AAF8"/>
+                </a:solidFill>
+                <a:latin typeface="IBM Plex Mono Medium"/>
+                <a:cs typeface="IBM Plex Mono Medium"/>
+                <a:ea typeface="IBM Plex Mono Medium"/>
+              </a:rPr>
+              <a:t>—</a:t>
+            </a:r>
+          </a:p>
+        </p:txBody>
+      </p:sp>
+      <p:sp>
+        <p:nvSpPr>
+          <p:cNvPr id="39" name="TextBox 38"/>
+          <p:cNvSpPr txBox="1"/>
+          <p:nvPr/>
+        </p:nvSpPr>
+        <p:spPr>
+          <a:xfrm>
+            <a:off x="9379991" y="3575939"/>
+            <a:ext cx="1805863" cy="430276"/>
+          </a:xfrm>
+          <a:prstGeom prst="rect">
+            <a:avLst/>
+          </a:prstGeom>
+          <a:noFill/>
+        </p:spPr>
+        <p:txBody>
+          <a:bodyPr wrap="none" lIns="0" rIns="0" tIns="0" bIns="0" anchor="t">
+            <a:spAutoFit/>
+          </a:bodyPr>
+          <a:lstStyle/>
+          <a:p>
+            <a:pPr algn="l">
+              <a:lnSpc>
+                <a:spcPts val="1400"/>
+              </a:lnSpc>
+            </a:pPr>
+            <a:r>
+              <a:rPr sz="1000">
+                <a:solidFill>
+                  <a:srgbClr val="EEEBE5"/>
+                </a:solidFill>
+                <a:latin typeface="GQ Text"/>
+                <a:cs typeface="GQ Text"/>
+                <a:ea typeface="GQ Text"/>
+              </a:rPr>
+              <a:t>Дальше занимайся где</a:t>
+            </a:r>
+          </a:p>
+          <a:p>
+            <a:pPr algn="l">
+              <a:lnSpc>
+                <a:spcPts val="1400"/>
+              </a:lnSpc>
+            </a:pPr>
+            <a:r>
+              <a:rPr sz="1000">
+                <a:solidFill>
+                  <a:srgbClr val="EEEBE5"/>
+                </a:solidFill>
+                <a:latin typeface="GQ Text"/>
+                <a:cs typeface="GQ Text"/>
+                <a:ea typeface="GQ Text"/>
+              </a:rPr>
+              <a:t>угодно</a:t>
+            </a:r>
+          </a:p>
+        </p:txBody>
+      </p:sp>
+      <p:sp>
+        <p:nvSpPr>
+          <p:cNvPr id="40" name="Rectangle 39"/>
+          <p:cNvSpPr/>
+          <p:nvPr/>
+        </p:nvSpPr>
+        <p:spPr>
+          <a:xfrm>
+            <a:off x="749808" y="5151755"/>
+            <a:ext cx="10692079" cy="710247"/>
+          </a:xfrm>
+          <a:prstGeom prst="rect">
+            <a:avLst/>
+          </a:prstGeom>
+          <a:solidFill>
+            <a:srgbClr val="0064B9"/>
+          </a:solidFill>
+          <a:ln>
+            <a:noFill/>
+          </a:ln>
+          <a:effectLst/>
+        </p:spPr>
+        <p:txBody>
+          <a:bodyPr rtlCol="0" anchor="ctr" wrap="none"/>
+          <a:lstStyle/>
+          <a:p>
+            <a:pPr algn="ctr"/>
+          </a:p>
+        </p:txBody>
+      </p:sp>
+      <p:sp>
+        <p:nvSpPr>
+          <p:cNvPr id="41" name="TextBox 40"/>
+          <p:cNvSpPr txBox="1"/>
+          <p:nvPr/>
+        </p:nvSpPr>
+        <p:spPr>
+          <a:xfrm>
+            <a:off x="1024127" y="5350840"/>
+            <a:ext cx="10143439" cy="345281"/>
+          </a:xfrm>
+          <a:prstGeom prst="rect">
+            <a:avLst/>
+          </a:prstGeom>
+          <a:noFill/>
+        </p:spPr>
+        <p:txBody>
+          <a:bodyPr wrap="none" lIns="0" rIns="0" tIns="0" bIns="0" anchor="t">
+            <a:spAutoFit/>
+          </a:bodyPr>
+          <a:lstStyle/>
+          <a:p>
+            <a:pPr algn="l">
+              <a:lnSpc>
+                <a:spcPts val="1812"/>
+              </a:lnSpc>
+            </a:pPr>
+            <a:r>
+              <a:rPr sz="1250">
                 <a:solidFill>
                   <a:srgbClr val="FFFFFF"/>
                 </a:solidFill>
@@ -14039,25 +14115,7 @@
                 <a:cs typeface="GQ Text SemiBold"/>
                 <a:ea typeface="GQ Text SemiBold"/>
               </a:rPr>
-              <a:t>Приложение принимает ответ, набранный русскими буквами, засчитывает его и показывает правильное написание. А</a:t>
-            </a:r>
-          </a:p>
-          <a:p>
-            <a:pPr algn="l">
-              <a:lnSpc>
-                <a:spcPts val="1885"/>
-              </a:lnSpc>
-            </a:pPr>
-            <a:r>
-              <a:rPr sz="1300">
-                <a:solidFill>
-                  <a:srgbClr val="FFFFFF"/>
-                </a:solidFill>
-                <a:latin typeface="GQ Text SemiBold"/>
-                <a:cs typeface="GQ Text SemiBold"/>
-                <a:ea typeface="GQ Text SemiBold"/>
-              </a:rPr>
-              <a:t>ряд казахских букв под полем — нажал, и буква вставилась.</a:t>
+              <a:t>Всё это проверяется автотестами при каждом обновлении: сломать незаметно нельзя.</a:t>
             </a:r>
           </a:p>
         </p:txBody>
@@ -14095,7 +14153,7 @@
             <a:avLst/>
           </a:prstGeom>
           <a:solidFill>
-            <a:srgbClr val="F6F7F9"/>
+            <a:srgbClr val="1B222B"/>
           </a:solidFill>
           <a:ln>
             <a:noFill/>
@@ -14112,68 +14170,6 @@
       </p:sp>
       <p:sp>
         <p:nvSpPr>
-          <p:cNvPr id="16" name="Rectangle 15"/>
-          <p:cNvSpPr/>
-          <p:nvPr/>
-        </p:nvSpPr>
-        <p:spPr>
-          <a:xfrm>
-            <a:off x="6196431" y="2937764"/>
-            <a:ext cx="5245455" cy="2021331"/>
-          </a:xfrm>
-          <a:prstGeom prst="rect">
-            <a:avLst/>
-          </a:prstGeom>
-          <a:solidFill>
-            <a:srgbClr val="0064B9"/>
-          </a:solidFill>
-          <a:ln>
-            <a:noFill/>
-          </a:ln>
-          <a:effectLst/>
-        </p:spPr>
-        <p:txBody>
-          <a:bodyPr rtlCol="0" anchor="ctr" wrap="none"/>
-          <a:lstStyle/>
-          <a:p>
-            <a:pPr algn="ctr"/>
-          </a:p>
-        </p:txBody>
-      </p:sp>
-      <p:sp>
-        <p:nvSpPr>
-          <p:cNvPr id="13" name="Rectangle 12"/>
-          <p:cNvSpPr/>
-          <p:nvPr/>
-        </p:nvSpPr>
-        <p:spPr>
-          <a:xfrm>
-            <a:off x="749808" y="2937764"/>
-            <a:ext cx="5245455" cy="2737103"/>
-          </a:xfrm>
-          <a:prstGeom prst="rect">
-            <a:avLst/>
-          </a:prstGeom>
-          <a:solidFill>
-            <a:srgbClr val="ECF1F5"/>
-          </a:solidFill>
-          <a:ln w="9525">
-            <a:solidFill>
-              <a:srgbClr val="CCD4DC"/>
-            </a:solidFill>
-          </a:ln>
-          <a:effectLst/>
-        </p:spPr>
-        <p:txBody>
-          <a:bodyPr rtlCol="0" anchor="ctr" wrap="none"/>
-          <a:lstStyle/>
-          <a:p>
-            <a:pPr algn="ctr"/>
-          </a:p>
-        </p:txBody>
-      </p:sp>
-      <p:sp>
-        <p:nvSpPr>
           <p:cNvPr id="3" name="Rectangle 2"/>
           <p:cNvSpPr/>
           <p:nvPr/>
@@ -14187,7 +14183,7 @@
             <a:avLst/>
           </a:prstGeom>
           <a:solidFill>
-            <a:srgbClr val="CCD4DC"/>
+            <a:srgbClr val="3B434D"/>
           </a:solidFill>
           <a:ln>
             <a:noFill/>
@@ -14232,13 +14228,13 @@
             <a:r>
               <a:rPr sz="850" spc="136">
                 <a:solidFill>
-                  <a:srgbClr val="0064B9"/>
+                  <a:srgbClr val="59AAF8"/>
                 </a:solidFill>
                 <a:latin typeface="IBM Plex Mono SemiBold"/>
                 <a:cs typeface="IBM Plex Mono SemiBold"/>
                 <a:ea typeface="IBM Plex Mono SemiBold"/>
               </a:rPr>
-              <a:t>ЧТО ОСОБЕННОГО · 2</a:t>
+              <a:t>ЧТО ВНУТРИ</a:t>
             </a:r>
           </a:p>
         </p:txBody>
@@ -14273,13 +14269,13 @@
             <a:r>
               <a:rPr sz="850" spc="85">
                 <a:solidFill>
-                  <a:srgbClr val="535C66"/>
+                  <a:srgbClr val="A6ADB6"/>
                 </a:solidFill>
                 <a:latin typeface="IBM Plex Mono Medium"/>
                 <a:cs typeface="IBM Plex Mono Medium"/>
                 <a:ea typeface="IBM Plex Mono Medium"/>
               </a:rPr>
-              <a:t>06 / 10</a:t>
+              <a:t>06 / 08</a:t>
             </a:r>
           </a:p>
         </p:txBody>
@@ -14292,8 +14288,8 @@
         </p:nvSpPr>
         <p:spPr>
           <a:xfrm>
-            <a:off x="749808" y="799551"/>
-            <a:ext cx="10692079" cy="1183873"/>
+            <a:off x="749808" y="793028"/>
+            <a:ext cx="10692079" cy="752558"/>
           </a:xfrm>
           <a:prstGeom prst="rect">
             <a:avLst/>
@@ -14308,51 +14304,163 @@
           <a:p>
             <a:pPr algn="l">
               <a:lnSpc>
-                <a:spcPts val="3852"/>
-              </a:lnSpc>
-            </a:pPr>
-            <a:r>
-              <a:rPr sz="3600" spc="-79">
-                <a:solidFill>
-                  <a:srgbClr val="1B222B"/>
+                <a:spcPts val="4173"/>
+              </a:lnSpc>
+            </a:pPr>
+            <a:r>
+              <a:rPr sz="3900" spc="-86">
+                <a:solidFill>
+                  <a:srgbClr val="EEEBE5"/>
                 </a:solidFill>
                 <a:latin typeface="GQ Text Bold"/>
                 <a:cs typeface="GQ Text Bold"/>
                 <a:ea typeface="GQ Text Bold"/>
               </a:rPr>
-              <a:t>Почему допуск на опечатку в казахском</a:t>
-            </a:r>
-          </a:p>
-          <a:p>
-            <a:pPr algn="l">
-              <a:lnSpc>
-                <a:spcPts val="3852"/>
-              </a:lnSpc>
-            </a:pPr>
-            <a:r>
-              <a:rPr sz="3600" spc="-79">
-                <a:solidFill>
-                  <a:srgbClr val="1B222B"/>
+              <a:t>Пять разделов и повторение по расписанию</a:t>
+            </a:r>
+          </a:p>
+        </p:txBody>
+      </p:sp>
+      <p:sp>
+        <p:nvSpPr>
+          <p:cNvPr id="7" name="TextBox 6"/>
+          <p:cNvSpPr txBox="1"/>
+          <p:nvPr/>
+        </p:nvSpPr>
+        <p:spPr>
+          <a:xfrm>
+            <a:off x="749808" y="1516588"/>
+            <a:ext cx="9195188" cy="567349"/>
+          </a:xfrm>
+          <a:prstGeom prst="rect">
+            <a:avLst/>
+          </a:prstGeom>
+          <a:noFill/>
+        </p:spPr>
+        <p:txBody>
+          <a:bodyPr wrap="none" lIns="0" rIns="0" tIns="0" bIns="0" anchor="t">
+            <a:spAutoFit/>
+          </a:bodyPr>
+          <a:lstStyle/>
+          <a:p>
+            <a:pPr algn="l">
+              <a:lnSpc>
+                <a:spcPts val="1846"/>
+              </a:lnSpc>
+            </a:pPr>
+            <a:r>
+              <a:rPr sz="1300">
+                <a:solidFill>
+                  <a:srgbClr val="A6ADB6"/>
+                </a:solidFill>
+                <a:latin typeface="GQ Text"/>
+                <a:cs typeface="GQ Text"/>
+                <a:ea typeface="GQ Text"/>
+              </a:rPr>
+              <a:t>Каждое задание становится карточкой. Ответил верно — приложение вернёт её через день, потом через три,</a:t>
+            </a:r>
+          </a:p>
+          <a:p>
+            <a:pPr algn="l">
+              <a:lnSpc>
+                <a:spcPts val="1846"/>
+              </a:lnSpc>
+            </a:pPr>
+            <a:r>
+              <a:rPr sz="1300">
+                <a:solidFill>
+                  <a:srgbClr val="A6ADB6"/>
+                </a:solidFill>
+                <a:latin typeface="GQ Text"/>
+                <a:cs typeface="GQ Text"/>
+                <a:ea typeface="GQ Text"/>
+              </a:rPr>
+              <a:t>дальше реже. Ошибся — вернёт сегодня же.</a:t>
+            </a:r>
+          </a:p>
+        </p:txBody>
+      </p:sp>
+      <p:sp>
+        <p:nvSpPr>
+          <p:cNvPr id="8" name="Rectangle 7"/>
+          <p:cNvSpPr/>
+          <p:nvPr/>
+        </p:nvSpPr>
+        <p:spPr>
+          <a:xfrm>
+            <a:off x="749808" y="2260726"/>
+            <a:ext cx="10692079" cy="7315"/>
+          </a:xfrm>
+          <a:prstGeom prst="rect">
+            <a:avLst/>
+          </a:prstGeom>
+          <a:solidFill>
+            <a:srgbClr val="3B434D"/>
+          </a:solidFill>
+          <a:ln>
+            <a:noFill/>
+          </a:ln>
+          <a:effectLst/>
+        </p:spPr>
+        <p:txBody>
+          <a:bodyPr rtlCol="0" anchor="ctr" wrap="none"/>
+          <a:lstStyle/>
+          <a:p>
+            <a:pPr algn="ctr"/>
+          </a:p>
+        </p:txBody>
+      </p:sp>
+      <p:sp>
+        <p:nvSpPr>
+          <p:cNvPr id="9" name="TextBox 8"/>
+          <p:cNvSpPr txBox="1"/>
+          <p:nvPr/>
+        </p:nvSpPr>
+        <p:spPr>
+          <a:xfrm>
+            <a:off x="749808" y="2535209"/>
+            <a:ext cx="1962851" cy="323169"/>
+          </a:xfrm>
+          <a:prstGeom prst="rect">
+            <a:avLst/>
+          </a:prstGeom>
+          <a:noFill/>
+        </p:spPr>
+        <p:txBody>
+          <a:bodyPr wrap="none" lIns="0" rIns="0" tIns="0" bIns="0" anchor="t">
+            <a:spAutoFit/>
+          </a:bodyPr>
+          <a:lstStyle/>
+          <a:p>
+            <a:pPr algn="l">
+              <a:lnSpc>
+                <a:spcPts val="1792"/>
+              </a:lnSpc>
+            </a:pPr>
+            <a:r>
+              <a:rPr sz="1600" spc="-24">
+                <a:solidFill>
+                  <a:srgbClr val="EEEBE5"/>
                 </a:solidFill>
                 <a:latin typeface="GQ Text Bold"/>
                 <a:cs typeface="GQ Text Bold"/>
                 <a:ea typeface="GQ Text Bold"/>
               </a:rPr>
-              <a:t>работает не так, как в русском</a:t>
-            </a:r>
-          </a:p>
-        </p:txBody>
-      </p:sp>
-      <p:sp>
-        <p:nvSpPr>
-          <p:cNvPr id="7" name="TextBox 6"/>
+              <a:t>Учиться</a:t>
+            </a:r>
+          </a:p>
+        </p:txBody>
+      </p:sp>
+      <p:sp>
+        <p:nvSpPr>
+          <p:cNvPr id="10" name="TextBox 9"/>
           <p:cNvSpPr txBox="1"/>
           <p:nvPr/>
         </p:nvSpPr>
         <p:spPr>
           <a:xfrm>
-            <a:off x="749808" y="1955881"/>
-            <a:ext cx="9195188" cy="567349"/>
+            <a:off x="749808" y="2896743"/>
+            <a:ext cx="1962851" cy="651509"/>
           </a:xfrm>
           <a:prstGeom prst="rect">
             <a:avLst/>
@@ -14367,51 +14475,69 @@
           <a:p>
             <a:pPr algn="l">
               <a:lnSpc>
-                <a:spcPts val="1846"/>
-              </a:lnSpc>
-            </a:pPr>
-            <a:r>
-              <a:rPr sz="1300">
-                <a:solidFill>
-                  <a:srgbClr val="535C66"/>
+                <a:spcPts val="1500"/>
+              </a:lnSpc>
+            </a:pPr>
+            <a:r>
+              <a:rPr sz="1050">
+                <a:solidFill>
+                  <a:srgbClr val="A6ADB6"/>
                 </a:solidFill>
                 <a:latin typeface="GQ Text"/>
                 <a:cs typeface="GQ Text"/>
                 <a:ea typeface="GQ Text"/>
               </a:rPr>
-              <a:t>Обычные тренажёры прощают одну-две ошибки в букве. В казахском это ломает проверку: грамматика живёт в</a:t>
-            </a:r>
-          </a:p>
-          <a:p>
-            <a:pPr algn="l">
-              <a:lnSpc>
-                <a:spcPts val="1846"/>
-              </a:lnSpc>
-            </a:pPr>
-            <a:r>
-              <a:rPr sz="1300">
-                <a:solidFill>
-                  <a:srgbClr val="535C66"/>
+              <a:t>Дорожка уроков: видно</a:t>
+            </a:r>
+          </a:p>
+          <a:p>
+            <a:pPr algn="l">
+              <a:lnSpc>
+                <a:spcPts val="1500"/>
+              </a:lnSpc>
+            </a:pPr>
+            <a:r>
+              <a:rPr sz="1050">
+                <a:solidFill>
+                  <a:srgbClr val="A6ADB6"/>
                 </a:solidFill>
                 <a:latin typeface="GQ Text"/>
                 <a:cs typeface="GQ Text"/>
                 <a:ea typeface="GQ Text"/>
               </a:rPr>
-              <a:t>окончании, и одна буква — это другое лицо.</a:t>
-            </a:r>
-          </a:p>
-        </p:txBody>
-      </p:sp>
-      <p:sp>
-        <p:nvSpPr>
-          <p:cNvPr id="8" name="TextBox 7"/>
+              <a:t>пройденное и следующий</a:t>
+            </a:r>
+          </a:p>
+          <a:p>
+            <a:pPr algn="l">
+              <a:lnSpc>
+                <a:spcPts val="1500"/>
+              </a:lnSpc>
+            </a:pPr>
+            <a:r>
+              <a:rPr sz="1050">
+                <a:solidFill>
+                  <a:srgbClr val="A6ADB6"/>
+                </a:solidFill>
+                <a:latin typeface="GQ Text"/>
+                <a:cs typeface="GQ Text"/>
+                <a:ea typeface="GQ Text"/>
+              </a:rPr>
+              <a:t>шаг</a:t>
+            </a:r>
+          </a:p>
+        </p:txBody>
+      </p:sp>
+      <p:sp>
+        <p:nvSpPr>
+          <p:cNvPr id="11" name="TextBox 10"/>
           <p:cNvSpPr txBox="1"/>
           <p:nvPr/>
         </p:nvSpPr>
         <p:spPr>
           <a:xfrm>
-            <a:off x="1024127" y="3157219"/>
-            <a:ext cx="4696815" cy="486918"/>
+            <a:off x="2932115" y="2535209"/>
+            <a:ext cx="1962851" cy="323169"/>
           </a:xfrm>
           <a:prstGeom prst="rect">
             <a:avLst/>
@@ -14426,33 +14552,33 @@
           <a:p>
             <a:pPr algn="l">
               <a:lnSpc>
-                <a:spcPts val="2700"/>
-              </a:lnSpc>
-            </a:pPr>
-            <a:r>
-              <a:rPr sz="2200" spc="-22">
-                <a:solidFill>
-                  <a:srgbClr val="0064B9"/>
-                </a:solidFill>
-                <a:latin typeface="IBM Plex Mono SemiBold"/>
-                <a:cs typeface="IBM Plex Mono SemiBold"/>
-                <a:ea typeface="IBM Plex Mono SemiBold"/>
-              </a:rPr>
-              <a:t>оқимын</a:t>
-            </a:r>
-          </a:p>
-        </p:txBody>
-      </p:sp>
-      <p:sp>
-        <p:nvSpPr>
-          <p:cNvPr id="9" name="TextBox 8"/>
+                <a:spcPts val="1792"/>
+              </a:lnSpc>
+            </a:pPr>
+            <a:r>
+              <a:rPr sz="1600" spc="-24">
+                <a:solidFill>
+                  <a:srgbClr val="EEEBE5"/>
+                </a:solidFill>
+                <a:latin typeface="GQ Text Bold"/>
+                <a:cs typeface="GQ Text Bold"/>
+                <a:ea typeface="GQ Text Bold"/>
+              </a:rPr>
+              <a:t>Практика</a:t>
+            </a:r>
+          </a:p>
+        </p:txBody>
+      </p:sp>
+      <p:sp>
+        <p:nvSpPr>
+          <p:cNvPr id="12" name="TextBox 11"/>
           <p:cNvSpPr txBox="1"/>
           <p:nvPr/>
         </p:nvSpPr>
         <p:spPr>
           <a:xfrm>
-            <a:off x="1024127" y="3579368"/>
-            <a:ext cx="4696815" cy="270510"/>
+            <a:off x="2932115" y="2896743"/>
+            <a:ext cx="1962851" cy="651509"/>
           </a:xfrm>
           <a:prstGeom prst="rect">
             <a:avLst/>
@@ -14471,29 +14597,65 @@
               </a:lnSpc>
             </a:pPr>
             <a:r>
-              <a:rPr sz="1100">
-                <a:solidFill>
-                  <a:srgbClr val="535C66"/>
+              <a:rPr sz="1050">
+                <a:solidFill>
+                  <a:srgbClr val="A6ADB6"/>
                 </a:solidFill>
                 <a:latin typeface="GQ Text"/>
                 <a:cs typeface="GQ Text"/>
                 <a:ea typeface="GQ Text"/>
               </a:rPr>
-              <a:t>я читаю</a:t>
-            </a:r>
-          </a:p>
-        </p:txBody>
-      </p:sp>
-      <p:sp>
-        <p:nvSpPr>
-          <p:cNvPr id="10" name="TextBox 9"/>
+              <a:t>Цель на день, повторение,</a:t>
+            </a:r>
+          </a:p>
+          <a:p>
+            <a:pPr algn="l">
+              <a:lnSpc>
+                <a:spcPts val="1500"/>
+              </a:lnSpc>
+            </a:pPr>
+            <a:r>
+              <a:rPr sz="1050">
+                <a:solidFill>
+                  <a:srgbClr val="A6ADB6"/>
+                </a:solidFill>
+                <a:latin typeface="GQ Text"/>
+                <a:cs typeface="GQ Text"/>
+                <a:ea typeface="GQ Text"/>
+              </a:rPr>
+              <a:t>карточки слов, спринт на 60</a:t>
+            </a:r>
+          </a:p>
+          <a:p>
+            <a:pPr algn="l">
+              <a:lnSpc>
+                <a:spcPts val="1500"/>
+              </a:lnSpc>
+            </a:pPr>
+            <a:r>
+              <a:rPr sz="1050">
+                <a:solidFill>
+                  <a:srgbClr val="A6ADB6"/>
+                </a:solidFill>
+                <a:latin typeface="GQ Text"/>
+                <a:cs typeface="GQ Text"/>
+                <a:ea typeface="GQ Text"/>
+              </a:rPr>
+              <a:t>секунд</a:t>
+            </a:r>
+          </a:p>
+        </p:txBody>
+      </p:sp>
+      <p:sp>
+        <p:nvSpPr>
+          <p:cNvPr id="13" name="TextBox 12"/>
           <p:cNvSpPr txBox="1"/>
           <p:nvPr/>
         </p:nvSpPr>
         <p:spPr>
           <a:xfrm>
-            <a:off x="1024127" y="3946651"/>
-            <a:ext cx="4696815" cy="486918"/>
+            <a:off x="5114422" y="2535209"/>
+            <a:ext cx="1962851" cy="323169"/>
           </a:xfrm>
           <a:prstGeom prst="rect">
             <a:avLst/>
@@ -14508,33 +14670,33 @@
           <a:p>
             <a:pPr algn="l">
               <a:lnSpc>
-                <a:spcPts val="2700"/>
-              </a:lnSpc>
-            </a:pPr>
-            <a:r>
-              <a:rPr sz="2200" spc="-22">
-                <a:solidFill>
-                  <a:srgbClr val="0064B9"/>
-                </a:solidFill>
-                <a:latin typeface="IBM Plex Mono SemiBold"/>
-                <a:cs typeface="IBM Plex Mono SemiBold"/>
-                <a:ea typeface="IBM Plex Mono SemiBold"/>
-              </a:rPr>
-              <a:t>оқисың</a:t>
-            </a:r>
-          </a:p>
-        </p:txBody>
-      </p:sp>
-      <p:sp>
-        <p:nvSpPr>
-          <p:cNvPr id="11" name="TextBox 10"/>
+                <a:spcPts val="1792"/>
+              </a:lnSpc>
+            </a:pPr>
+            <a:r>
+              <a:rPr sz="1600" spc="-24">
+                <a:solidFill>
+                  <a:srgbClr val="EEEBE5"/>
+                </a:solidFill>
+                <a:latin typeface="GQ Text Bold"/>
+                <a:cs typeface="GQ Text Bold"/>
+                <a:ea typeface="GQ Text Bold"/>
+              </a:rPr>
+              <a:t>Словарь</a:t>
+            </a:r>
+          </a:p>
+        </p:txBody>
+      </p:sp>
+      <p:sp>
+        <p:nvSpPr>
+          <p:cNvPr id="14" name="TextBox 13"/>
           <p:cNvSpPr txBox="1"/>
           <p:nvPr/>
         </p:nvSpPr>
         <p:spPr>
           <a:xfrm>
-            <a:off x="1024127" y="4368799"/>
-            <a:ext cx="4696815" cy="270510"/>
+            <a:off x="5114422" y="2896743"/>
+            <a:ext cx="1962851" cy="651509"/>
           </a:xfrm>
           <a:prstGeom prst="rect">
             <a:avLst/>
@@ -14553,29 +14715,65 @@
               </a:lnSpc>
             </a:pPr>
             <a:r>
-              <a:rPr sz="1100">
-                <a:solidFill>
-                  <a:srgbClr val="535C66"/>
+              <a:rPr sz="1050">
+                <a:solidFill>
+                  <a:srgbClr val="A6ADB6"/>
                 </a:solidFill>
                 <a:latin typeface="GQ Text"/>
                 <a:cs typeface="GQ Text"/>
                 <a:ea typeface="GQ Text"/>
               </a:rPr>
-              <a:t>ты читаешь</a:t>
-            </a:r>
-          </a:p>
-        </p:txBody>
-      </p:sp>
-      <p:sp>
-        <p:nvSpPr>
-          <p:cNvPr id="12" name="TextBox 11"/>
+              <a:t>162 статьи из уроков, поиск</a:t>
+            </a:r>
+          </a:p>
+          <a:p>
+            <a:pPr algn="l">
+              <a:lnSpc>
+                <a:spcPts val="1500"/>
+              </a:lnSpc>
+            </a:pPr>
+            <a:r>
+              <a:rPr sz="1050">
+                <a:solidFill>
+                  <a:srgbClr val="A6ADB6"/>
+                </a:solidFill>
+                <a:latin typeface="GQ Text"/>
+                <a:cs typeface="GQ Text"/>
+                <a:ea typeface="GQ Text"/>
+              </a:rPr>
+              <a:t>работает с русской</a:t>
+            </a:r>
+          </a:p>
+          <a:p>
+            <a:pPr algn="l">
+              <a:lnSpc>
+                <a:spcPts val="1500"/>
+              </a:lnSpc>
+            </a:pPr>
+            <a:r>
+              <a:rPr sz="1050">
+                <a:solidFill>
+                  <a:srgbClr val="A6ADB6"/>
+                </a:solidFill>
+                <a:latin typeface="GQ Text"/>
+                <a:cs typeface="GQ Text"/>
+                <a:ea typeface="GQ Text"/>
+              </a:rPr>
+              <a:t>раскладки</a:t>
+            </a:r>
+          </a:p>
+        </p:txBody>
+      </p:sp>
+      <p:sp>
+        <p:nvSpPr>
+          <p:cNvPr id="15" name="TextBox 14"/>
           <p:cNvSpPr txBox="1"/>
           <p:nvPr/>
         </p:nvSpPr>
         <p:spPr>
           <a:xfrm>
-            <a:off x="1024127" y="4758435"/>
-            <a:ext cx="4696815" cy="694944"/>
+            <a:off x="7296729" y="2535209"/>
+            <a:ext cx="1962851" cy="323169"/>
           </a:xfrm>
           <a:prstGeom prst="rect">
             <a:avLst/>
@@ -14590,69 +14788,240 @@
           <a:p>
             <a:pPr algn="l">
               <a:lnSpc>
-                <a:spcPts val="1600"/>
-              </a:lnSpc>
-            </a:pPr>
-            <a:r>
-              <a:rPr sz="1100">
-                <a:solidFill>
-                  <a:srgbClr val="535C66"/>
+                <a:spcPts val="1792"/>
+              </a:lnSpc>
+            </a:pPr>
+            <a:r>
+              <a:rPr sz="1600" spc="-24">
+                <a:solidFill>
+                  <a:srgbClr val="EEEBE5"/>
+                </a:solidFill>
+                <a:latin typeface="GQ Text Bold"/>
+                <a:cs typeface="GQ Text Bold"/>
+                <a:ea typeface="GQ Text Bold"/>
+              </a:rPr>
+              <a:t>Справка</a:t>
+            </a:r>
+          </a:p>
+        </p:txBody>
+      </p:sp>
+      <p:sp>
+        <p:nvSpPr>
+          <p:cNvPr id="16" name="TextBox 15"/>
+          <p:cNvSpPr txBox="1"/>
+          <p:nvPr/>
+        </p:nvSpPr>
+        <p:spPr>
+          <a:xfrm>
+            <a:off x="7296729" y="2896743"/>
+            <a:ext cx="1962851" cy="461010"/>
+          </a:xfrm>
+          <a:prstGeom prst="rect">
+            <a:avLst/>
+          </a:prstGeom>
+          <a:noFill/>
+        </p:spPr>
+        <p:txBody>
+          <a:bodyPr wrap="none" lIns="0" rIns="0" tIns="0" bIns="0" anchor="t">
+            <a:spAutoFit/>
+          </a:bodyPr>
+          <a:lstStyle/>
+          <a:p>
+            <a:pPr algn="l">
+              <a:lnSpc>
+                <a:spcPts val="1500"/>
+              </a:lnSpc>
+            </a:pPr>
+            <a:r>
+              <a:rPr sz="1050">
+                <a:solidFill>
+                  <a:srgbClr val="A6ADB6"/>
                 </a:solidFill>
                 <a:latin typeface="GQ Text"/>
                 <a:cs typeface="GQ Text"/>
                 <a:ea typeface="GQ Text"/>
               </a:rPr>
-              <a:t>Формы различаются одной буквой: «м» против «с». Ровно столько</a:t>
-            </a:r>
-          </a:p>
-          <a:p>
-            <a:pPr algn="l">
-              <a:lnSpc>
-                <a:spcPts val="1600"/>
-              </a:lnSpc>
-            </a:pPr>
-            <a:r>
-              <a:rPr sz="1100">
-                <a:solidFill>
-                  <a:srgbClr val="535C66"/>
+              <a:t>33 правила, 22 темы и живые</a:t>
+            </a:r>
+          </a:p>
+          <a:p>
+            <a:pPr algn="l">
+              <a:lnSpc>
+                <a:spcPts val="1500"/>
+              </a:lnSpc>
+            </a:pPr>
+            <a:r>
+              <a:rPr sz="1050">
+                <a:solidFill>
+                  <a:srgbClr val="A6ADB6"/>
                 </a:solidFill>
                 <a:latin typeface="GQ Text"/>
                 <a:cs typeface="GQ Text"/>
                 <a:ea typeface="GQ Text"/>
               </a:rPr>
-              <a:t>же, сколько у обычной описки — отличить их по расстоянию</a:t>
-            </a:r>
-          </a:p>
-          <a:p>
-            <a:pPr algn="l">
-              <a:lnSpc>
-                <a:spcPts val="1600"/>
-              </a:lnSpc>
-            </a:pPr>
-            <a:r>
-              <a:rPr sz="1100">
-                <a:solidFill>
-                  <a:srgbClr val="535C66"/>
+              <a:t>таблицы окончаний</a:t>
+            </a:r>
+          </a:p>
+        </p:txBody>
+      </p:sp>
+      <p:sp>
+        <p:nvSpPr>
+          <p:cNvPr id="17" name="TextBox 16"/>
+          <p:cNvSpPr txBox="1"/>
+          <p:nvPr/>
+        </p:nvSpPr>
+        <p:spPr>
+          <a:xfrm>
+            <a:off x="9479036" y="2535209"/>
+            <a:ext cx="1962851" cy="323169"/>
+          </a:xfrm>
+          <a:prstGeom prst="rect">
+            <a:avLst/>
+          </a:prstGeom>
+          <a:noFill/>
+        </p:spPr>
+        <p:txBody>
+          <a:bodyPr wrap="none" lIns="0" rIns="0" tIns="0" bIns="0" anchor="t">
+            <a:spAutoFit/>
+          </a:bodyPr>
+          <a:lstStyle/>
+          <a:p>
+            <a:pPr algn="l">
+              <a:lnSpc>
+                <a:spcPts val="1792"/>
+              </a:lnSpc>
+            </a:pPr>
+            <a:r>
+              <a:rPr sz="1600" spc="-24">
+                <a:solidFill>
+                  <a:srgbClr val="EEEBE5"/>
+                </a:solidFill>
+                <a:latin typeface="GQ Text Bold"/>
+                <a:cs typeface="GQ Text Bold"/>
+                <a:ea typeface="GQ Text Bold"/>
+              </a:rPr>
+              <a:t>Профиль</a:t>
+            </a:r>
+          </a:p>
+        </p:txBody>
+      </p:sp>
+      <p:sp>
+        <p:nvSpPr>
+          <p:cNvPr id="18" name="TextBox 17"/>
+          <p:cNvSpPr txBox="1"/>
+          <p:nvPr/>
+        </p:nvSpPr>
+        <p:spPr>
+          <a:xfrm>
+            <a:off x="9479036" y="2896743"/>
+            <a:ext cx="1962851" cy="651509"/>
+          </a:xfrm>
+          <a:prstGeom prst="rect">
+            <a:avLst/>
+          </a:prstGeom>
+          <a:noFill/>
+        </p:spPr>
+        <p:txBody>
+          <a:bodyPr wrap="none" lIns="0" rIns="0" tIns="0" bIns="0" anchor="t">
+            <a:spAutoFit/>
+          </a:bodyPr>
+          <a:lstStyle/>
+          <a:p>
+            <a:pPr algn="l">
+              <a:lnSpc>
+                <a:spcPts val="1500"/>
+              </a:lnSpc>
+            </a:pPr>
+            <a:r>
+              <a:rPr sz="1050">
+                <a:solidFill>
+                  <a:srgbClr val="A6ADB6"/>
                 </a:solidFill>
                 <a:latin typeface="GQ Text"/>
                 <a:cs typeface="GQ Text"/>
                 <a:ea typeface="GQ Text"/>
               </a:rPr>
-              <a:t>нельзя.</a:t>
-            </a:r>
-          </a:p>
-        </p:txBody>
-      </p:sp>
-      <p:sp>
-        <p:nvSpPr>
-          <p:cNvPr id="14" name="TextBox 13"/>
+              <a:t>Статистика, награды и</a:t>
+            </a:r>
+          </a:p>
+          <a:p>
+            <a:pPr algn="l">
+              <a:lnSpc>
+                <a:spcPts val="1500"/>
+              </a:lnSpc>
+            </a:pPr>
+            <a:r>
+              <a:rPr sz="1050">
+                <a:solidFill>
+                  <a:srgbClr val="A6ADB6"/>
+                </a:solidFill>
+                <a:latin typeface="GQ Text"/>
+                <a:cs typeface="GQ Text"/>
+                <a:ea typeface="GQ Text"/>
+              </a:rPr>
+              <a:t>выгрузка результатов</a:t>
+            </a:r>
+          </a:p>
+          <a:p>
+            <a:pPr algn="l">
+              <a:lnSpc>
+                <a:spcPts val="1500"/>
+              </a:lnSpc>
+            </a:pPr>
+            <a:r>
+              <a:rPr sz="1050">
+                <a:solidFill>
+                  <a:srgbClr val="A6ADB6"/>
+                </a:solidFill>
+                <a:latin typeface="GQ Text"/>
+                <a:cs typeface="GQ Text"/>
+                <a:ea typeface="GQ Text"/>
+              </a:rPr>
+              <a:t>таблицей</a:t>
+            </a:r>
+          </a:p>
+        </p:txBody>
+      </p:sp>
+      <p:sp>
+        <p:nvSpPr>
+          <p:cNvPr id="19" name="Rectangle 18"/>
+          <p:cNvSpPr/>
+          <p:nvPr/>
+        </p:nvSpPr>
+        <p:spPr>
+          <a:xfrm>
+            <a:off x="749808" y="3919347"/>
+            <a:ext cx="10692079" cy="710247"/>
+          </a:xfrm>
+          <a:prstGeom prst="rect">
+            <a:avLst/>
+          </a:prstGeom>
+          <a:solidFill>
+            <a:srgbClr val="0064B9"/>
+          </a:solidFill>
+          <a:ln>
+            <a:noFill/>
+          </a:ln>
+          <a:effectLst/>
+        </p:spPr>
+        <p:txBody>
+          <a:bodyPr rtlCol="0" anchor="ctr" wrap="none"/>
+          <a:lstStyle/>
+          <a:p>
+            <a:pPr algn="ctr"/>
+          </a:p>
+        </p:txBody>
+      </p:sp>
+      <p:sp>
+        <p:nvSpPr>
+          <p:cNvPr id="20" name="TextBox 19"/>
           <p:cNvSpPr txBox="1"/>
           <p:nvPr/>
         </p:nvSpPr>
         <p:spPr>
           <a:xfrm>
-            <a:off x="6470751" y="3189732"/>
-            <a:ext cx="4696815" cy="198374"/>
+            <a:off x="1024127" y="4118432"/>
+            <a:ext cx="10143439" cy="345281"/>
           </a:xfrm>
           <a:prstGeom prst="rect">
             <a:avLst/>
@@ -14667,114 +15036,19 @@
           <a:p>
             <a:pPr algn="l">
               <a:lnSpc>
-                <a:spcPts val="1100"/>
-              </a:lnSpc>
-            </a:pPr>
-            <a:r>
-              <a:rPr sz="850" spc="136">
-                <a:solidFill>
-                  <a:srgbClr val="59AAF8"/>
-                </a:solidFill>
-                <a:latin typeface="IBM Plex Mono SemiBold"/>
-                <a:cs typeface="IBM Plex Mono SemiBold"/>
-                <a:ea typeface="IBM Plex Mono SemiBold"/>
-              </a:rPr>
-              <a:t>ПРАВИЛО, КОТОРОЕ Я ВЫВЕЛ</a:t>
-            </a:r>
-          </a:p>
-        </p:txBody>
-      </p:sp>
-      <p:sp>
-        <p:nvSpPr>
-          <p:cNvPr id="15" name="TextBox 14"/>
-          <p:cNvSpPr txBox="1"/>
-          <p:nvPr/>
-        </p:nvSpPr>
-        <p:spPr>
-          <a:xfrm>
-            <a:off x="6470751" y="3469640"/>
-            <a:ext cx="4696815" cy="1291082"/>
-          </a:xfrm>
-          <a:prstGeom prst="rect">
-            <a:avLst/>
-          </a:prstGeom>
-          <a:noFill/>
-        </p:spPr>
-        <p:txBody>
-          <a:bodyPr wrap="none" lIns="0" rIns="0" tIns="0" bIns="0" anchor="t">
-            <a:spAutoFit/>
-          </a:bodyPr>
-          <a:lstStyle/>
-          <a:p>
-            <a:pPr algn="l">
-              <a:lnSpc>
-                <a:spcPts val="2300"/>
-              </a:lnSpc>
-            </a:pPr>
-            <a:r>
-              <a:rPr sz="1700" spc="-26">
-                <a:solidFill>
-                  <a:srgbClr val="EEEBE5"/>
-                </a:solidFill>
-                <a:latin typeface="GQ Text Bold"/>
-                <a:cs typeface="GQ Text Bold"/>
-                <a:ea typeface="GQ Text Bold"/>
-              </a:rPr>
-              <a:t>Описка теряет или добавляет букву.</a:t>
-            </a:r>
-          </a:p>
-          <a:p>
-            <a:pPr algn="l">
-              <a:lnSpc>
-                <a:spcPts val="2300"/>
-              </a:lnSpc>
-            </a:pPr>
-            <a:r>
-              <a:rPr sz="1700" spc="-26">
-                <a:solidFill>
-                  <a:srgbClr val="EEEBE5"/>
-                </a:solidFill>
-                <a:latin typeface="GQ Text Bold"/>
-                <a:cs typeface="GQ Text Bold"/>
-                <a:ea typeface="GQ Text Bold"/>
-              </a:rPr>
-              <a:t>Смена формы подменяет её. Поэтому</a:t>
-            </a:r>
-          </a:p>
-          <a:p>
-            <a:pPr algn="l">
-              <a:lnSpc>
-                <a:spcPts val="2300"/>
-              </a:lnSpc>
-            </a:pPr>
-            <a:r>
-              <a:rPr sz="1700" spc="-26">
-                <a:solidFill>
-                  <a:srgbClr val="EEEBE5"/>
-                </a:solidFill>
-                <a:latin typeface="GQ Text Bold"/>
-                <a:cs typeface="GQ Text Bold"/>
-                <a:ea typeface="GQ Text Bold"/>
-              </a:rPr>
-              <a:t>допуск работает только при разной длине</a:t>
-            </a:r>
-          </a:p>
-          <a:p>
-            <a:pPr algn="l">
-              <a:lnSpc>
-                <a:spcPts val="2300"/>
-              </a:lnSpc>
-            </a:pPr>
-            <a:r>
-              <a:rPr sz="1700" spc="-26">
-                <a:solidFill>
-                  <a:srgbClr val="EEEBE5"/>
-                </a:solidFill>
-                <a:latin typeface="GQ Text Bold"/>
-                <a:cs typeface="GQ Text Bold"/>
-                <a:ea typeface="GQ Text Bold"/>
-              </a:rPr>
-              <a:t>ответа — и не больше чем на один символ.</a:t>
+                <a:spcPts val="1812"/>
+              </a:lnSpc>
+            </a:pPr>
+            <a:r>
+              <a:rPr sz="1250">
+                <a:solidFill>
+                  <a:srgbClr val="FFFFFF"/>
+                </a:solidFill>
+                <a:latin typeface="GQ Text SemiBold"/>
+                <a:cs typeface="GQ Text SemiBold"/>
+                <a:ea typeface="GQ Text SemiBold"/>
+              </a:rPr>
+              <a:t>Разбор ошибок в конце урока не начисляет очки намеренно: он нужен, чтобы разобраться, а не чтобы набрать их.</a:t>
             </a:r>
           </a:p>
         </p:txBody>
@@ -14812,7 +15086,7 @@
             <a:avLst/>
           </a:prstGeom>
           <a:solidFill>
-            <a:srgbClr val="F6F7F9"/>
+            <a:srgbClr val="1B222B"/>
           </a:solidFill>
           <a:ln>
             <a:noFill/>
@@ -14829,6 +15103,38 @@
       </p:sp>
       <p:sp>
         <p:nvSpPr>
+          <p:cNvPr id="14" name="Rectangle 13"/>
+          <p:cNvSpPr/>
+          <p:nvPr/>
+        </p:nvSpPr>
+        <p:spPr>
+          <a:xfrm>
+            <a:off x="2852928" y="2259330"/>
+            <a:ext cx="8588959" cy="1929384"/>
+          </a:xfrm>
+          <a:prstGeom prst="rect">
+            <a:avLst/>
+          </a:prstGeom>
+          <a:solidFill>
+            <a:srgbClr val="11161E"/>
+          </a:solidFill>
+          <a:ln w="9525">
+            <a:solidFill>
+              <a:srgbClr val="3B434D"/>
+            </a:solidFill>
+          </a:ln>
+          <a:effectLst/>
+        </p:spPr>
+        <p:txBody>
+          <a:bodyPr rtlCol="0" anchor="ctr" wrap="none"/>
+          <a:lstStyle/>
+          <a:p>
+            <a:pPr algn="ctr"/>
+          </a:p>
+        </p:txBody>
+      </p:sp>
+      <p:sp>
+        <p:nvSpPr>
           <p:cNvPr id="3" name="Rectangle 2"/>
           <p:cNvSpPr/>
           <p:nvPr/>
@@ -14842,7 +15148,7 @@
             <a:avLst/>
           </a:prstGeom>
           <a:solidFill>
-            <a:srgbClr val="CCD4DC"/>
+            <a:srgbClr val="3B434D"/>
           </a:solidFill>
           <a:ln>
             <a:noFill/>
@@ -14887,13 +15193,13 @@
             <a:r>
               <a:rPr sz="850" spc="136">
                 <a:solidFill>
-                  <a:srgbClr val="0064B9"/>
+                  <a:srgbClr val="59AAF8"/>
                 </a:solidFill>
                 <a:latin typeface="IBM Plex Mono SemiBold"/>
                 <a:cs typeface="IBM Plex Mono SemiBold"/>
                 <a:ea typeface="IBM Plex Mono SemiBold"/>
               </a:rPr>
-              <a:t>ЧТО ОСОБЕННОГО · 3</a:t>
+              <a:t>ПОКАЖУ ВЖИВУЮ</a:t>
             </a:r>
           </a:p>
         </p:txBody>
@@ -14928,13 +15234,13 @@
             <a:r>
               <a:rPr sz="850" spc="85">
                 <a:solidFill>
-                  <a:srgbClr val="535C66"/>
+                  <a:srgbClr val="A6ADB6"/>
                 </a:solidFill>
                 <a:latin typeface="IBM Plex Mono Medium"/>
                 <a:cs typeface="IBM Plex Mono Medium"/>
                 <a:ea typeface="IBM Plex Mono Medium"/>
               </a:rPr>
-              <a:t>07 / 10</a:t>
+              <a:t>07 / 08</a:t>
             </a:r>
           </a:p>
         </p:txBody>
@@ -14947,8 +15253,8 @@
         </p:nvSpPr>
         <p:spPr>
           <a:xfrm>
-            <a:off x="749808" y="823468"/>
-            <a:ext cx="10692079" cy="482409"/>
+            <a:off x="749808" y="790854"/>
+            <a:ext cx="10692079" cy="771855"/>
           </a:xfrm>
           <a:prstGeom prst="rect">
             <a:avLst/>
@@ -14963,19 +15269,19 @@
           <a:p>
             <a:pPr algn="l">
               <a:lnSpc>
-                <a:spcPts val="2675"/>
-              </a:lnSpc>
-            </a:pPr>
-            <a:r>
-              <a:rPr sz="2500" spc="-55">
-                <a:solidFill>
-                  <a:srgbClr val="1B222B"/>
+                <a:spcPts val="4280"/>
+              </a:lnSpc>
+            </a:pPr>
+            <a:r>
+              <a:rPr sz="4000" spc="-88">
+                <a:solidFill>
+                  <a:srgbClr val="EEEBE5"/>
                 </a:solidFill>
                 <a:latin typeface="GQ Text Bold"/>
                 <a:cs typeface="GQ Text Bold"/>
                 <a:ea typeface="GQ Text Bold"/>
               </a:rPr>
-              <a:t>Окончания приложение считает по правилам, а не берёт из таблицы</a:t>
+              <a:t>Откройте на своём телефоне прямо сейчас</a:t>
             </a:r>
           </a:p>
         </p:txBody>
@@ -14988,8 +15294,8 @@
         </p:nvSpPr>
         <p:spPr>
           <a:xfrm>
-            <a:off x="749808" y="1326342"/>
-            <a:ext cx="8981346" cy="567349"/>
+            <a:off x="749808" y="1530177"/>
+            <a:ext cx="8553663" cy="332907"/>
           </a:xfrm>
           <a:prstGeom prst="rect">
             <a:avLst/>
@@ -15010,75 +15316,110 @@
             <a:r>
               <a:rPr sz="1300">
                 <a:solidFill>
-                  <a:srgbClr val="535C66"/>
+                  <a:srgbClr val="A6ADB6"/>
                 </a:solidFill>
                 <a:latin typeface="GQ Text"/>
                 <a:cs typeface="GQ Text"/>
                 <a:ea typeface="GQ Text"/>
               </a:rPr>
-              <a:t>Ученик подставляет любое своё слово и видит все его формы: окончание подсвечено, рядом сказано,</a:t>
-            </a:r>
-          </a:p>
-          <a:p>
-            <a:pPr algn="l">
-              <a:lnSpc>
-                <a:spcPts val="1846"/>
-              </a:lnSpc>
-            </a:pPr>
-            <a:r>
-              <a:rPr sz="1300">
-                <a:solidFill>
-                  <a:srgbClr val="535C66"/>
+              <a:t>Наведите камеру на код. Приложение откроется сразу — устанавливать ничего не нужно.</a:t>
+            </a:r>
+          </a:p>
+        </p:txBody>
+      </p:sp>
+      <p:pic>
+        <p:nvPicPr>
+          <p:cNvPr id="8" name="Picture 7" descr="image.png"/>
+          <p:cNvPicPr>
+            <a:picLocks noChangeAspect="1"/>
+          </p:cNvPicPr>
+          <p:nvPr/>
+        </p:nvPicPr>
+        <p:blipFill>
+          <a:blip r:embed="rId2"/>
+          <a:stretch>
+            <a:fillRect/>
+          </a:stretch>
+        </p:blipFill>
+        <p:spPr>
+          <a:xfrm>
+            <a:off x="749808" y="2259330"/>
+            <a:ext cx="1417320" cy="1417320"/>
+          </a:xfrm>
+          <a:prstGeom prst="rect">
+            <a:avLst/>
+          </a:prstGeom>
+        </p:spPr>
+      </p:pic>
+      <p:sp>
+        <p:nvSpPr>
+          <p:cNvPr id="9" name="TextBox 8"/>
+          <p:cNvSpPr txBox="1"/>
+          <p:nvPr/>
+        </p:nvSpPr>
+        <p:spPr>
+          <a:xfrm>
+            <a:off x="749808" y="3777233"/>
+            <a:ext cx="2057400" cy="414909"/>
+          </a:xfrm>
+          <a:prstGeom prst="rect">
+            <a:avLst/>
+          </a:prstGeom>
+          <a:noFill/>
+        </p:spPr>
+        <p:txBody>
+          <a:bodyPr wrap="none" lIns="0" rIns="0" tIns="0" bIns="0" anchor="t">
+            <a:spAutoFit/>
+          </a:bodyPr>
+          <a:lstStyle/>
+          <a:p>
+            <a:pPr algn="l">
+              <a:lnSpc>
+                <a:spcPts val="1350"/>
+              </a:lnSpc>
+            </a:pPr>
+            <a:r>
+              <a:rPr sz="950">
+                <a:solidFill>
+                  <a:srgbClr val="A6ADB6"/>
                 </a:solidFill>
                 <a:latin typeface="GQ Text"/>
                 <a:cs typeface="GQ Text"/>
                 <a:ea typeface="GQ Text"/>
               </a:rPr>
-              <a:t>почему выбрано именно оно.</a:t>
-            </a:r>
-          </a:p>
-        </p:txBody>
-      </p:sp>
-      <p:sp>
-        <p:nvSpPr>
-          <p:cNvPr id="8" name="Rectangle 7"/>
-          <p:cNvSpPr/>
-          <p:nvPr/>
-        </p:nvSpPr>
-        <p:spPr>
-          <a:xfrm>
-            <a:off x="749808" y="2070480"/>
-            <a:ext cx="10692079" cy="7315"/>
-          </a:xfrm>
-          <a:prstGeom prst="rect">
-            <a:avLst/>
-          </a:prstGeom>
-          <a:solidFill>
-            <a:srgbClr val="CCD4DC"/>
-          </a:solidFill>
-          <a:ln>
-            <a:noFill/>
-          </a:ln>
-          <a:effectLst/>
-        </p:spPr>
-        <p:txBody>
-          <a:bodyPr rtlCol="0" anchor="ctr" wrap="none"/>
-          <a:lstStyle/>
-          <a:p>
-            <a:pPr algn="ctr"/>
-          </a:p>
-        </p:txBody>
-      </p:sp>
-      <p:sp>
-        <p:nvSpPr>
-          <p:cNvPr id="9" name="TextBox 8"/>
+              <a:t>Открыть приложение:</a:t>
+            </a:r>
+          </a:p>
+          <a:p>
+            <a:pPr algn="l">
+              <a:lnSpc>
+                <a:spcPts val="1350"/>
+              </a:lnSpc>
+            </a:pPr>
+            <a:r>
+              <a:rPr sz="950">
+                <a:solidFill>
+                  <a:srgbClr val="A6ADB6"/>
+                </a:solidFill>
+                <a:latin typeface="GQ Text"/>
+                <a:cs typeface="GQ Text"/>
+                <a:ea typeface="GQ Text"/>
+              </a:rPr>
+              <a:t>tilashar-kz.vercel.app</a:t>
+            </a:r>
+          </a:p>
+        </p:txBody>
+      </p:sp>
+      <p:sp>
+        <p:nvSpPr>
+          <p:cNvPr id="10" name="TextBox 9"/>
           <p:cNvSpPr txBox="1"/>
           <p:nvPr/>
         </p:nvSpPr>
         <p:spPr>
           <a:xfrm>
-            <a:off x="749808" y="2348661"/>
-            <a:ext cx="216916" cy="290347"/>
+            <a:off x="3108960" y="2493010"/>
+            <a:ext cx="8076895" cy="198374"/>
           </a:xfrm>
           <a:prstGeom prst="rect">
             <a:avLst/>
@@ -15093,33 +15434,238 @@
           <a:p>
             <a:pPr algn="l">
               <a:lnSpc>
-                <a:spcPts val="1610"/>
-              </a:lnSpc>
-            </a:pPr>
-            <a:r>
-              <a:rPr sz="1150">
-                <a:solidFill>
-                  <a:srgbClr val="0064B9"/>
+                <a:spcPts val="1100"/>
+              </a:lnSpc>
+            </a:pPr>
+            <a:r>
+              <a:rPr sz="850" spc="136">
+                <a:solidFill>
+                  <a:srgbClr val="59AAF8"/>
+                </a:solidFill>
+                <a:latin typeface="IBM Plex Mono SemiBold"/>
+                <a:cs typeface="IBM Plex Mono SemiBold"/>
+                <a:ea typeface="IBM Plex Mono SemiBold"/>
+              </a:rPr>
+              <a:t>ПОСТАВИТЬ НА ТЕЛЕФОН</a:t>
+            </a:r>
+          </a:p>
+        </p:txBody>
+      </p:sp>
+      <p:sp>
+        <p:nvSpPr>
+          <p:cNvPr id="11" name="TextBox 10"/>
+          <p:cNvSpPr txBox="1"/>
+          <p:nvPr/>
+        </p:nvSpPr>
+        <p:spPr>
+          <a:xfrm>
+            <a:off x="3108960" y="2768854"/>
+            <a:ext cx="8076895" cy="288544"/>
+          </a:xfrm>
+          <a:prstGeom prst="rect">
+            <a:avLst/>
+          </a:prstGeom>
+          <a:noFill/>
+        </p:spPr>
+        <p:txBody>
+          <a:bodyPr wrap="none" lIns="0" rIns="0" tIns="0" bIns="0" anchor="t">
+            <a:spAutoFit/>
+          </a:bodyPr>
+          <a:lstStyle/>
+          <a:p>
+            <a:pPr algn="l">
+              <a:lnSpc>
+                <a:spcPts val="1600"/>
+              </a:lnSpc>
+            </a:pPr>
+            <a:r>
+              <a:rPr sz="1100">
+                <a:solidFill>
+                  <a:srgbClr val="EEEBE5"/>
+                </a:solidFill>
+                <a:latin typeface="GQ Text"/>
+                <a:cs typeface="GQ Text"/>
+                <a:ea typeface="GQ Text"/>
+              </a:rPr>
+              <a:t>Android: меню → «Установить приложение». iPhone: «Поделиться» → «На экран „Домой“»</a:t>
+            </a:r>
+          </a:p>
+        </p:txBody>
+      </p:sp>
+      <p:sp>
+        <p:nvSpPr>
+          <p:cNvPr id="12" name="TextBox 11"/>
+          <p:cNvSpPr txBox="1"/>
+          <p:nvPr/>
+        </p:nvSpPr>
+        <p:spPr>
+          <a:xfrm>
+            <a:off x="3108960" y="3329686"/>
+            <a:ext cx="8076895" cy="198374"/>
+          </a:xfrm>
+          <a:prstGeom prst="rect">
+            <a:avLst/>
+          </a:prstGeom>
+          <a:noFill/>
+        </p:spPr>
+        <p:txBody>
+          <a:bodyPr wrap="none" lIns="0" rIns="0" tIns="0" bIns="0" anchor="t">
+            <a:spAutoFit/>
+          </a:bodyPr>
+          <a:lstStyle/>
+          <a:p>
+            <a:pPr algn="l">
+              <a:lnSpc>
+                <a:spcPts val="1100"/>
+              </a:lnSpc>
+            </a:pPr>
+            <a:r>
+              <a:rPr sz="850" spc="136">
+                <a:solidFill>
+                  <a:srgbClr val="59AAF8"/>
+                </a:solidFill>
+                <a:latin typeface="IBM Plex Mono SemiBold"/>
+                <a:cs typeface="IBM Plex Mono SemiBold"/>
+                <a:ea typeface="IBM Plex Mono SemiBold"/>
+              </a:rPr>
+              <a:t>ФАЙЛОМ ДЛЯ ANDROID</a:t>
+            </a:r>
+          </a:p>
+        </p:txBody>
+      </p:sp>
+      <p:sp>
+        <p:nvSpPr>
+          <p:cNvPr id="13" name="TextBox 12"/>
+          <p:cNvSpPr txBox="1"/>
+          <p:nvPr/>
+        </p:nvSpPr>
+        <p:spPr>
+          <a:xfrm>
+            <a:off x="3108960" y="3605530"/>
+            <a:ext cx="8076895" cy="288544"/>
+          </a:xfrm>
+          <a:prstGeom prst="rect">
+            <a:avLst/>
+          </a:prstGeom>
+          <a:noFill/>
+        </p:spPr>
+        <p:txBody>
+          <a:bodyPr wrap="none" lIns="0" rIns="0" tIns="0" bIns="0" anchor="t">
+            <a:spAutoFit/>
+          </a:bodyPr>
+          <a:lstStyle/>
+          <a:p>
+            <a:pPr algn="l">
+              <a:lnSpc>
+                <a:spcPts val="1600"/>
+              </a:lnSpc>
+            </a:pPr>
+            <a:r>
+              <a:rPr sz="1100">
+                <a:solidFill>
+                  <a:srgbClr val="EEEBE5"/>
+                </a:solidFill>
+                <a:latin typeface="GQ Text"/>
+                <a:cs typeface="GQ Text"/>
+                <a:ea typeface="GQ Text"/>
+              </a:rPr>
+              <a:t>Готовый файл лежит здесь: github.com/s-chaikovskiy/grammarquest-web/releases</a:t>
+            </a:r>
+          </a:p>
+        </p:txBody>
+      </p:sp>
+      <p:sp>
+        <p:nvSpPr>
+          <p:cNvPr id="15" name="TextBox 14"/>
+          <p:cNvSpPr txBox="1"/>
+          <p:nvPr/>
+        </p:nvSpPr>
+        <p:spPr>
+          <a:xfrm>
+            <a:off x="749808" y="4504466"/>
+            <a:ext cx="3177384" cy="565546"/>
+          </a:xfrm>
+          <a:prstGeom prst="rect">
+            <a:avLst/>
+          </a:prstGeom>
+          <a:noFill/>
+        </p:spPr>
+        <p:txBody>
+          <a:bodyPr wrap="none" lIns="0" rIns="0" tIns="0" bIns="0" anchor="t">
+            <a:spAutoFit/>
+          </a:bodyPr>
+          <a:lstStyle/>
+          <a:p>
+            <a:pPr algn="l">
+              <a:lnSpc>
+                <a:spcPts val="3136"/>
+              </a:lnSpc>
+            </a:pPr>
+            <a:r>
+              <a:rPr sz="3200" spc="-96">
+                <a:solidFill>
+                  <a:srgbClr val="EEEBE5"/>
+                </a:solidFill>
+                <a:latin typeface="GQ Text Bold"/>
+                <a:cs typeface="GQ Text Bold"/>
+                <a:ea typeface="GQ Text Bold"/>
+              </a:rPr>
+              <a:t>202</a:t>
+            </a:r>
+          </a:p>
+        </p:txBody>
+      </p:sp>
+      <p:sp>
+        <p:nvSpPr>
+          <p:cNvPr id="16" name="TextBox 15"/>
+          <p:cNvSpPr txBox="1"/>
+          <p:nvPr/>
+        </p:nvSpPr>
+        <p:spPr>
+          <a:xfrm>
+            <a:off x="749808" y="5033517"/>
+            <a:ext cx="3177384" cy="216408"/>
+          </a:xfrm>
+          <a:prstGeom prst="rect">
+            <a:avLst/>
+          </a:prstGeom>
+          <a:noFill/>
+        </p:spPr>
+        <p:txBody>
+          <a:bodyPr wrap="none" lIns="0" rIns="0" tIns="0" bIns="0" anchor="t">
+            <a:spAutoFit/>
+          </a:bodyPr>
+          <a:lstStyle/>
+          <a:p>
+            <a:pPr algn="l">
+              <a:lnSpc>
+                <a:spcPts val="1200"/>
+              </a:lnSpc>
+            </a:pPr>
+            <a:r>
+              <a:rPr sz="800" spc="64">
+                <a:solidFill>
+                  <a:srgbClr val="A6ADB6"/>
                 </a:solidFill>
                 <a:latin typeface="IBM Plex Mono Medium"/>
                 <a:cs typeface="IBM Plex Mono Medium"/>
                 <a:ea typeface="IBM Plex Mono Medium"/>
               </a:rPr>
-              <a:t>—</a:t>
-            </a:r>
-          </a:p>
-        </p:txBody>
-      </p:sp>
-      <p:sp>
-        <p:nvSpPr>
-          <p:cNvPr id="10" name="TextBox 9"/>
+              <a:t>КБ</a:t>
+            </a:r>
+          </a:p>
+        </p:txBody>
+      </p:sp>
+      <p:sp>
+        <p:nvSpPr>
+          <p:cNvPr id="17" name="TextBox 16"/>
           <p:cNvSpPr txBox="1"/>
           <p:nvPr/>
         </p:nvSpPr>
         <p:spPr>
           <a:xfrm>
-            <a:off x="966724" y="2348661"/>
-            <a:ext cx="6569760" cy="511174"/>
+            <a:off x="749808" y="5274330"/>
+            <a:ext cx="3177384" cy="243278"/>
           </a:xfrm>
           <a:prstGeom prst="rect">
             <a:avLst/>
@@ -15134,62 +15680,156 @@
           <a:p>
             <a:pPr algn="l">
               <a:lnSpc>
-                <a:spcPts val="1610"/>
-              </a:lnSpc>
-            </a:pPr>
-            <a:r>
-              <a:rPr sz="1150">
-                <a:solidFill>
-                  <a:srgbClr val="1B222B"/>
-                </a:solidFill>
-                <a:latin typeface="GQ Text SemiBold"/>
-                <a:cs typeface="GQ Text SemiBold"/>
-                <a:ea typeface="GQ Text SemiBold"/>
-              </a:rPr>
-              <a:t>Сингармонизм. </a:t>
-            </a:r>
-            <a:r>
-              <a:rPr sz="1150">
-                <a:solidFill>
-                  <a:srgbClr val="1B222B"/>
+                <a:spcPts val="1349"/>
+              </a:lnSpc>
+            </a:pPr>
+            <a:r>
+              <a:rPr sz="950">
+                <a:solidFill>
+                  <a:srgbClr val="A6ADB6"/>
                 </a:solidFill>
                 <a:latin typeface="GQ Text"/>
                 <a:cs typeface="GQ Text"/>
                 <a:ea typeface="GQ Text"/>
               </a:rPr>
-              <a:t> Ряд гласного в окончании берётся от основы слова, а не от последней</a:t>
-            </a:r>
-          </a:p>
-          <a:p>
-            <a:pPr algn="l">
-              <a:lnSpc>
-                <a:spcPts val="1610"/>
-              </a:lnSpc>
-            </a:pPr>
-            <a:r>
-              <a:rPr sz="1150">
-                <a:solidFill>
-                  <a:srgbClr val="1B222B"/>
+              <a:t>код и стили в сжатом виде</a:t>
+            </a:r>
+          </a:p>
+        </p:txBody>
+      </p:sp>
+      <p:sp>
+        <p:nvSpPr>
+          <p:cNvPr id="18" name="TextBox 17"/>
+          <p:cNvSpPr txBox="1"/>
+          <p:nvPr/>
+        </p:nvSpPr>
+        <p:spPr>
+          <a:xfrm>
+            <a:off x="4201512" y="4504466"/>
+            <a:ext cx="3177384" cy="565546"/>
+          </a:xfrm>
+          <a:prstGeom prst="rect">
+            <a:avLst/>
+          </a:prstGeom>
+          <a:noFill/>
+        </p:spPr>
+        <p:txBody>
+          <a:bodyPr wrap="none" lIns="0" rIns="0" tIns="0" bIns="0" anchor="t">
+            <a:spAutoFit/>
+          </a:bodyPr>
+          <a:lstStyle/>
+          <a:p>
+            <a:pPr algn="l">
+              <a:lnSpc>
+                <a:spcPts val="3136"/>
+              </a:lnSpc>
+            </a:pPr>
+            <a:r>
+              <a:rPr sz="3200" spc="-96">
+                <a:solidFill>
+                  <a:srgbClr val="EEEBE5"/>
+                </a:solidFill>
+                <a:latin typeface="GQ Text Bold"/>
+                <a:cs typeface="GQ Text Bold"/>
+                <a:ea typeface="GQ Text Bold"/>
+              </a:rPr>
+              <a:t>0</a:t>
+            </a:r>
+          </a:p>
+        </p:txBody>
+      </p:sp>
+      <p:sp>
+        <p:nvSpPr>
+          <p:cNvPr id="19" name="TextBox 18"/>
+          <p:cNvSpPr txBox="1"/>
+          <p:nvPr/>
+        </p:nvSpPr>
+        <p:spPr>
+          <a:xfrm>
+            <a:off x="4201512" y="5033517"/>
+            <a:ext cx="3177384" cy="216408"/>
+          </a:xfrm>
+          <a:prstGeom prst="rect">
+            <a:avLst/>
+          </a:prstGeom>
+          <a:noFill/>
+        </p:spPr>
+        <p:txBody>
+          <a:bodyPr wrap="none" lIns="0" rIns="0" tIns="0" bIns="0" anchor="t">
+            <a:spAutoFit/>
+          </a:bodyPr>
+          <a:lstStyle/>
+          <a:p>
+            <a:pPr algn="l">
+              <a:lnSpc>
+                <a:spcPts val="1200"/>
+              </a:lnSpc>
+            </a:pPr>
+            <a:r>
+              <a:rPr sz="800" spc="64">
+                <a:solidFill>
+                  <a:srgbClr val="A6ADB6"/>
+                </a:solidFill>
+                <a:latin typeface="IBM Plex Mono Medium"/>
+                <a:cs typeface="IBM Plex Mono Medium"/>
+                <a:ea typeface="IBM Plex Mono Medium"/>
+              </a:rPr>
+              <a:t>ЗАПРОСОВ В СЕТЬ</a:t>
+            </a:r>
+          </a:p>
+        </p:txBody>
+      </p:sp>
+      <p:sp>
+        <p:nvSpPr>
+          <p:cNvPr id="20" name="TextBox 19"/>
+          <p:cNvSpPr txBox="1"/>
+          <p:nvPr/>
+        </p:nvSpPr>
+        <p:spPr>
+          <a:xfrm>
+            <a:off x="4201512" y="5274330"/>
+            <a:ext cx="3177384" cy="243278"/>
+          </a:xfrm>
+          <a:prstGeom prst="rect">
+            <a:avLst/>
+          </a:prstGeom>
+          <a:noFill/>
+        </p:spPr>
+        <p:txBody>
+          <a:bodyPr wrap="none" lIns="0" rIns="0" tIns="0" bIns="0" anchor="t">
+            <a:spAutoFit/>
+          </a:bodyPr>
+          <a:lstStyle/>
+          <a:p>
+            <a:pPr algn="l">
+              <a:lnSpc>
+                <a:spcPts val="1349"/>
+              </a:lnSpc>
+            </a:pPr>
+            <a:r>
+              <a:rPr sz="950">
+                <a:solidFill>
+                  <a:srgbClr val="A6ADB6"/>
                 </a:solidFill>
                 <a:latin typeface="GQ Text"/>
                 <a:cs typeface="GQ Text"/>
                 <a:ea typeface="GQ Text"/>
               </a:rPr>
-              <a:t>буквы.</a:t>
-            </a:r>
-          </a:p>
-        </p:txBody>
-      </p:sp>
-      <p:sp>
-        <p:nvSpPr>
-          <p:cNvPr id="11" name="TextBox 10"/>
+              <a:t>после первой загрузки</a:t>
+            </a:r>
+          </a:p>
+        </p:txBody>
+      </p:sp>
+      <p:sp>
+        <p:nvSpPr>
+          <p:cNvPr id="21" name="TextBox 20"/>
           <p:cNvSpPr txBox="1"/>
           <p:nvPr/>
         </p:nvSpPr>
         <p:spPr>
           <a:xfrm>
-            <a:off x="749808" y="2940481"/>
-            <a:ext cx="216916" cy="290347"/>
+            <a:off x="749808" y="6285788"/>
+            <a:ext cx="10692079" cy="209194"/>
           </a:xfrm>
           <a:prstGeom prst="rect">
             <a:avLst/>
@@ -15204,712 +15844,19 @@
           <a:p>
             <a:pPr algn="l">
               <a:lnSpc>
-                <a:spcPts val="1610"/>
-              </a:lnSpc>
-            </a:pPr>
-            <a:r>
-              <a:rPr sz="1150">
-                <a:solidFill>
-                  <a:srgbClr val="0064B9"/>
-                </a:solidFill>
-                <a:latin typeface="IBM Plex Mono Medium"/>
-                <a:cs typeface="IBM Plex Mono Medium"/>
-                <a:ea typeface="IBM Plex Mono Medium"/>
-              </a:rPr>
-              <a:t>—</a:t>
-            </a:r>
-          </a:p>
-        </p:txBody>
-      </p:sp>
-      <p:sp>
-        <p:nvSpPr>
-          <p:cNvPr id="12" name="TextBox 11"/>
-          <p:cNvSpPr txBox="1"/>
-          <p:nvPr/>
-        </p:nvSpPr>
-        <p:spPr>
-          <a:xfrm>
-            <a:off x="966724" y="2940481"/>
-            <a:ext cx="6569760" cy="511174"/>
-          </a:xfrm>
-          <a:prstGeom prst="rect">
-            <a:avLst/>
-          </a:prstGeom>
-          <a:noFill/>
-        </p:spPr>
-        <p:txBody>
-          <a:bodyPr wrap="none" lIns="0" rIns="0" tIns="0" bIns="0" anchor="t">
-            <a:spAutoFit/>
-          </a:bodyPr>
-          <a:lstStyle/>
-          <a:p>
-            <a:pPr algn="l">
-              <a:lnSpc>
-                <a:spcPts val="1610"/>
-              </a:lnSpc>
-            </a:pPr>
-            <a:r>
-              <a:rPr sz="1150">
-                <a:solidFill>
-                  <a:srgbClr val="1B222B"/>
-                </a:solidFill>
-                <a:latin typeface="GQ Text SemiBold"/>
-                <a:cs typeface="GQ Text SemiBold"/>
-                <a:ea typeface="GQ Text SemiBold"/>
-              </a:rPr>
-              <a:t>Озвончение. </a:t>
-            </a:r>
-            <a:r>
-              <a:rPr sz="1150">
-                <a:solidFill>
-                  <a:srgbClr val="1B222B"/>
+                <a:spcPts val="1160"/>
+              </a:lnSpc>
+            </a:pPr>
+            <a:r>
+              <a:rPr sz="850">
+                <a:solidFill>
+                  <a:srgbClr val="A6ADB6"/>
                 </a:solidFill>
                 <a:latin typeface="GQ Text"/>
                 <a:cs typeface="GQ Text"/>
                 <a:ea typeface="GQ Text"/>
               </a:rPr>
-              <a:t> «кітап» + «ым» даёт «кітабым»: қ, к, п перед гласным окончанием</a:t>
-            </a:r>
-          </a:p>
-          <a:p>
-            <a:pPr algn="l">
-              <a:lnSpc>
-                <a:spcPts val="1610"/>
-              </a:lnSpc>
-            </a:pPr>
-            <a:r>
-              <a:rPr sz="1150">
-                <a:solidFill>
-                  <a:srgbClr val="1B222B"/>
-                </a:solidFill>
-                <a:latin typeface="GQ Text"/>
-                <a:cs typeface="GQ Text"/>
-                <a:ea typeface="GQ Text"/>
-              </a:rPr>
-              <a:t>озвончаются.</a:t>
-            </a:r>
-          </a:p>
-        </p:txBody>
-      </p:sp>
-      <p:sp>
-        <p:nvSpPr>
-          <p:cNvPr id="13" name="TextBox 12"/>
-          <p:cNvSpPr txBox="1"/>
-          <p:nvPr/>
-        </p:nvSpPr>
-        <p:spPr>
-          <a:xfrm>
-            <a:off x="749808" y="3532301"/>
-            <a:ext cx="216916" cy="290347"/>
-          </a:xfrm>
-          <a:prstGeom prst="rect">
-            <a:avLst/>
-          </a:prstGeom>
-          <a:noFill/>
-        </p:spPr>
-        <p:txBody>
-          <a:bodyPr wrap="none" lIns="0" rIns="0" tIns="0" bIns="0" anchor="t">
-            <a:spAutoFit/>
-          </a:bodyPr>
-          <a:lstStyle/>
-          <a:p>
-            <a:pPr algn="l">
-              <a:lnSpc>
-                <a:spcPts val="1610"/>
-              </a:lnSpc>
-            </a:pPr>
-            <a:r>
-              <a:rPr sz="1150">
-                <a:solidFill>
-                  <a:srgbClr val="0064B9"/>
-                </a:solidFill>
-                <a:latin typeface="IBM Plex Mono Medium"/>
-                <a:cs typeface="IBM Plex Mono Medium"/>
-                <a:ea typeface="IBM Plex Mono Medium"/>
-              </a:rPr>
-              <a:t>—</a:t>
-            </a:r>
-          </a:p>
-        </p:txBody>
-      </p:sp>
-      <p:sp>
-        <p:nvSpPr>
-          <p:cNvPr id="14" name="TextBox 13"/>
-          <p:cNvSpPr txBox="1"/>
-          <p:nvPr/>
-        </p:nvSpPr>
-        <p:spPr>
-          <a:xfrm>
-            <a:off x="966724" y="3532301"/>
-            <a:ext cx="6569760" cy="306705"/>
-          </a:xfrm>
-          <a:prstGeom prst="rect">
-            <a:avLst/>
-          </a:prstGeom>
-          <a:noFill/>
-        </p:spPr>
-        <p:txBody>
-          <a:bodyPr wrap="none" lIns="0" rIns="0" tIns="0" bIns="0" anchor="t">
-            <a:spAutoFit/>
-          </a:bodyPr>
-          <a:lstStyle/>
-          <a:p>
-            <a:pPr algn="l">
-              <a:lnSpc>
-                <a:spcPts val="1610"/>
-              </a:lnSpc>
-            </a:pPr>
-            <a:r>
-              <a:rPr sz="1150">
-                <a:solidFill>
-                  <a:srgbClr val="1B222B"/>
-                </a:solidFill>
-                <a:latin typeface="GQ Text SemiBold"/>
-                <a:cs typeface="GQ Text SemiBold"/>
-                <a:ea typeface="GQ Text SemiBold"/>
-              </a:rPr>
-              <a:t>Последний звук. </a:t>
-            </a:r>
-            <a:r>
-              <a:rPr sz="1150">
-                <a:solidFill>
-                  <a:srgbClr val="1B222B"/>
-                </a:solidFill>
-                <a:latin typeface="GQ Text"/>
-                <a:cs typeface="GQ Text"/>
-                <a:ea typeface="GQ Text"/>
-              </a:rPr>
-              <a:t> После р, й, у ставится -лар/-лер, после л, м, н, ң — -дар/-дер.</a:t>
-            </a:r>
-          </a:p>
-        </p:txBody>
-      </p:sp>
-      <p:sp>
-        <p:nvSpPr>
-          <p:cNvPr id="15" name="TextBox 14"/>
-          <p:cNvSpPr txBox="1"/>
-          <p:nvPr/>
-        </p:nvSpPr>
-        <p:spPr>
-          <a:xfrm>
-            <a:off x="8011972" y="2321636"/>
-            <a:ext cx="1009192" cy="530199"/>
-          </a:xfrm>
-          <a:prstGeom prst="rect">
-            <a:avLst/>
-          </a:prstGeom>
-          <a:noFill/>
-        </p:spPr>
-        <p:txBody>
-          <a:bodyPr wrap="none" lIns="0" rIns="0" tIns="0" bIns="0" anchor="t">
-            <a:spAutoFit/>
-          </a:bodyPr>
-          <a:lstStyle/>
-          <a:p>
-            <a:pPr algn="l">
-              <a:lnSpc>
-                <a:spcPts val="2940"/>
-              </a:lnSpc>
-            </a:pPr>
-            <a:r>
-              <a:rPr sz="3000" spc="-90">
-                <a:solidFill>
-                  <a:srgbClr val="1B222B"/>
-                </a:solidFill>
-                <a:latin typeface="GQ Text Bold"/>
-                <a:cs typeface="GQ Text Bold"/>
-                <a:ea typeface="GQ Text Bold"/>
-              </a:rPr>
-              <a:t>7</a:t>
-            </a:r>
-          </a:p>
-        </p:txBody>
-      </p:sp>
-      <p:sp>
-        <p:nvSpPr>
-          <p:cNvPr id="16" name="TextBox 15"/>
-          <p:cNvSpPr txBox="1"/>
-          <p:nvPr/>
-        </p:nvSpPr>
-        <p:spPr>
-          <a:xfrm>
-            <a:off x="8011972" y="2821812"/>
-            <a:ext cx="1009192" cy="216408"/>
-          </a:xfrm>
-          <a:prstGeom prst="rect">
-            <a:avLst/>
-          </a:prstGeom>
-          <a:noFill/>
-        </p:spPr>
-        <p:txBody>
-          <a:bodyPr wrap="none" lIns="0" rIns="0" tIns="0" bIns="0" anchor="t">
-            <a:spAutoFit/>
-          </a:bodyPr>
-          <a:lstStyle/>
-          <a:p>
-            <a:pPr algn="l">
-              <a:lnSpc>
-                <a:spcPts val="1200"/>
-              </a:lnSpc>
-            </a:pPr>
-            <a:r>
-              <a:rPr sz="800" spc="64">
-                <a:solidFill>
-                  <a:srgbClr val="535C66"/>
-                </a:solidFill>
-                <a:latin typeface="IBM Plex Mono Medium"/>
-                <a:cs typeface="IBM Plex Mono Medium"/>
-                <a:ea typeface="IBM Plex Mono Medium"/>
-              </a:rPr>
-              <a:t>СЕПТІК</a:t>
-            </a:r>
-          </a:p>
-        </p:txBody>
-      </p:sp>
-      <p:sp>
-        <p:nvSpPr>
-          <p:cNvPr id="17" name="TextBox 16"/>
-          <p:cNvSpPr txBox="1"/>
-          <p:nvPr/>
-        </p:nvSpPr>
-        <p:spPr>
-          <a:xfrm>
-            <a:off x="8011972" y="3062625"/>
-            <a:ext cx="1009192" cy="414601"/>
-          </a:xfrm>
-          <a:prstGeom prst="rect">
-            <a:avLst/>
-          </a:prstGeom>
-          <a:noFill/>
-        </p:spPr>
-        <p:txBody>
-          <a:bodyPr wrap="none" lIns="0" rIns="0" tIns="0" bIns="0" anchor="t">
-            <a:spAutoFit/>
-          </a:bodyPr>
-          <a:lstStyle/>
-          <a:p>
-            <a:pPr algn="l">
-              <a:lnSpc>
-                <a:spcPts val="1349"/>
-              </a:lnSpc>
-            </a:pPr>
-            <a:r>
-              <a:rPr sz="950">
-                <a:solidFill>
-                  <a:srgbClr val="535C66"/>
-                </a:solidFill>
-                <a:latin typeface="GQ Text"/>
-                <a:cs typeface="GQ Text"/>
-                <a:ea typeface="GQ Text"/>
-              </a:rPr>
-              <a:t>падежей в</a:t>
-            </a:r>
-          </a:p>
-          <a:p>
-            <a:pPr algn="l">
-              <a:lnSpc>
-                <a:spcPts val="1349"/>
-              </a:lnSpc>
-            </a:pPr>
-            <a:r>
-              <a:rPr sz="950">
-                <a:solidFill>
-                  <a:srgbClr val="535C66"/>
-                </a:solidFill>
-                <a:latin typeface="GQ Text"/>
-                <a:cs typeface="GQ Text"/>
-                <a:ea typeface="GQ Text"/>
-              </a:rPr>
-              <a:t>казахском</a:t>
-            </a:r>
-          </a:p>
-        </p:txBody>
-      </p:sp>
-      <p:sp>
-        <p:nvSpPr>
-          <p:cNvPr id="18" name="TextBox 17"/>
-          <p:cNvSpPr txBox="1"/>
-          <p:nvPr/>
-        </p:nvSpPr>
-        <p:spPr>
-          <a:xfrm>
-            <a:off x="9222333" y="2321636"/>
-            <a:ext cx="1009192" cy="530199"/>
-          </a:xfrm>
-          <a:prstGeom prst="rect">
-            <a:avLst/>
-          </a:prstGeom>
-          <a:noFill/>
-        </p:spPr>
-        <p:txBody>
-          <a:bodyPr wrap="none" lIns="0" rIns="0" tIns="0" bIns="0" anchor="t">
-            <a:spAutoFit/>
-          </a:bodyPr>
-          <a:lstStyle/>
-          <a:p>
-            <a:pPr algn="l">
-              <a:lnSpc>
-                <a:spcPts val="2940"/>
-              </a:lnSpc>
-            </a:pPr>
-            <a:r>
-              <a:rPr sz="3000" spc="-90">
-                <a:solidFill>
-                  <a:srgbClr val="1B222B"/>
-                </a:solidFill>
-                <a:latin typeface="GQ Text Bold"/>
-                <a:cs typeface="GQ Text Bold"/>
-                <a:ea typeface="GQ Text Bold"/>
-              </a:rPr>
-              <a:t>21</a:t>
-            </a:r>
-          </a:p>
-        </p:txBody>
-      </p:sp>
-      <p:sp>
-        <p:nvSpPr>
-          <p:cNvPr id="19" name="TextBox 18"/>
-          <p:cNvSpPr txBox="1"/>
-          <p:nvPr/>
-        </p:nvSpPr>
-        <p:spPr>
-          <a:xfrm>
-            <a:off x="9222333" y="2821812"/>
-            <a:ext cx="1009192" cy="368808"/>
-          </a:xfrm>
-          <a:prstGeom prst="rect">
-            <a:avLst/>
-          </a:prstGeom>
-          <a:noFill/>
-        </p:spPr>
-        <p:txBody>
-          <a:bodyPr wrap="none" lIns="0" rIns="0" tIns="0" bIns="0" anchor="t">
-            <a:spAutoFit/>
-          </a:bodyPr>
-          <a:lstStyle/>
-          <a:p>
-            <a:pPr algn="l">
-              <a:lnSpc>
-                <a:spcPts val="1200"/>
-              </a:lnSpc>
-            </a:pPr>
-            <a:r>
-              <a:rPr sz="800" spc="64">
-                <a:solidFill>
-                  <a:srgbClr val="535C66"/>
-                </a:solidFill>
-                <a:latin typeface="IBM Plex Mono Medium"/>
-                <a:cs typeface="IBM Plex Mono Medium"/>
-                <a:ea typeface="IBM Plex Mono Medium"/>
-              </a:rPr>
-              <a:t>ТЕСТ НА</a:t>
-            </a:r>
-          </a:p>
-          <a:p>
-            <a:pPr algn="l">
-              <a:lnSpc>
-                <a:spcPts val="1200"/>
-              </a:lnSpc>
-            </a:pPr>
-            <a:r>
-              <a:rPr sz="800" spc="64">
-                <a:solidFill>
-                  <a:srgbClr val="535C66"/>
-                </a:solidFill>
-                <a:latin typeface="IBM Plex Mono Medium"/>
-                <a:cs typeface="IBM Plex Mono Medium"/>
-                <a:ea typeface="IBM Plex Mono Medium"/>
-              </a:rPr>
-              <a:t>ПРАВИЛАХ</a:t>
-            </a:r>
-          </a:p>
-        </p:txBody>
-      </p:sp>
-      <p:sp>
-        <p:nvSpPr>
-          <p:cNvPr id="20" name="TextBox 19"/>
-          <p:cNvSpPr txBox="1"/>
-          <p:nvPr/>
-        </p:nvSpPr>
-        <p:spPr>
-          <a:xfrm>
-            <a:off x="9222333" y="3215025"/>
-            <a:ext cx="1009192" cy="414601"/>
-          </a:xfrm>
-          <a:prstGeom prst="rect">
-            <a:avLst/>
-          </a:prstGeom>
-          <a:noFill/>
-        </p:spPr>
-        <p:txBody>
-          <a:bodyPr wrap="none" lIns="0" rIns="0" tIns="0" bIns="0" anchor="t">
-            <a:spAutoFit/>
-          </a:bodyPr>
-          <a:lstStyle/>
-          <a:p>
-            <a:pPr algn="l">
-              <a:lnSpc>
-                <a:spcPts val="1349"/>
-              </a:lnSpc>
-            </a:pPr>
-            <a:r>
-              <a:rPr sz="950">
-                <a:solidFill>
-                  <a:srgbClr val="535C66"/>
-                </a:solidFill>
-                <a:latin typeface="GQ Text"/>
-                <a:cs typeface="GQ Text"/>
-                <a:ea typeface="GQ Text"/>
-              </a:rPr>
-              <a:t>на учебниковых</a:t>
-            </a:r>
-          </a:p>
-          <a:p>
-            <a:pPr algn="l">
-              <a:lnSpc>
-                <a:spcPts val="1349"/>
-              </a:lnSpc>
-            </a:pPr>
-            <a:r>
-              <a:rPr sz="950">
-                <a:solidFill>
-                  <a:srgbClr val="535C66"/>
-                </a:solidFill>
-                <a:latin typeface="GQ Text"/>
-                <a:cs typeface="GQ Text"/>
-                <a:ea typeface="GQ Text"/>
-              </a:rPr>
-              <a:t>формах</a:t>
-            </a:r>
-          </a:p>
-        </p:txBody>
-      </p:sp>
-      <p:sp>
-        <p:nvSpPr>
-          <p:cNvPr id="21" name="TextBox 20"/>
-          <p:cNvSpPr txBox="1"/>
-          <p:nvPr/>
-        </p:nvSpPr>
-        <p:spPr>
-          <a:xfrm>
-            <a:off x="10432694" y="2321636"/>
-            <a:ext cx="1009192" cy="530199"/>
-          </a:xfrm>
-          <a:prstGeom prst="rect">
-            <a:avLst/>
-          </a:prstGeom>
-          <a:noFill/>
-        </p:spPr>
-        <p:txBody>
-          <a:bodyPr wrap="none" lIns="0" rIns="0" tIns="0" bIns="0" anchor="t">
-            <a:spAutoFit/>
-          </a:bodyPr>
-          <a:lstStyle/>
-          <a:p>
-            <a:pPr algn="l">
-              <a:lnSpc>
-                <a:spcPts val="2940"/>
-              </a:lnSpc>
-            </a:pPr>
-            <a:r>
-              <a:rPr sz="3000" spc="-90">
-                <a:solidFill>
-                  <a:srgbClr val="1B222B"/>
-                </a:solidFill>
-                <a:latin typeface="GQ Text Bold"/>
-                <a:cs typeface="GQ Text Bold"/>
-                <a:ea typeface="GQ Text Bold"/>
-              </a:rPr>
-              <a:t>162</a:t>
-            </a:r>
-          </a:p>
-        </p:txBody>
-      </p:sp>
-      <p:sp>
-        <p:nvSpPr>
-          <p:cNvPr id="22" name="TextBox 21"/>
-          <p:cNvSpPr txBox="1"/>
-          <p:nvPr/>
-        </p:nvSpPr>
-        <p:spPr>
-          <a:xfrm>
-            <a:off x="10432694" y="2821812"/>
-            <a:ext cx="1009192" cy="368808"/>
-          </a:xfrm>
-          <a:prstGeom prst="rect">
-            <a:avLst/>
-          </a:prstGeom>
-          <a:noFill/>
-        </p:spPr>
-        <p:txBody>
-          <a:bodyPr wrap="none" lIns="0" rIns="0" tIns="0" bIns="0" anchor="t">
-            <a:spAutoFit/>
-          </a:bodyPr>
-          <a:lstStyle/>
-          <a:p>
-            <a:pPr algn="l">
-              <a:lnSpc>
-                <a:spcPts val="1200"/>
-              </a:lnSpc>
-            </a:pPr>
-            <a:r>
-              <a:rPr sz="800" spc="64">
-                <a:solidFill>
-                  <a:srgbClr val="535C66"/>
-                </a:solidFill>
-                <a:latin typeface="IBM Plex Mono Medium"/>
-                <a:cs typeface="IBM Plex Mono Medium"/>
-                <a:ea typeface="IBM Plex Mono Medium"/>
-              </a:rPr>
-              <a:t>СТАТЬИ В</a:t>
-            </a:r>
-          </a:p>
-          <a:p>
-            <a:pPr algn="l">
-              <a:lnSpc>
-                <a:spcPts val="1200"/>
-              </a:lnSpc>
-            </a:pPr>
-            <a:r>
-              <a:rPr sz="800" spc="64">
-                <a:solidFill>
-                  <a:srgbClr val="535C66"/>
-                </a:solidFill>
-                <a:latin typeface="IBM Plex Mono Medium"/>
-                <a:cs typeface="IBM Plex Mono Medium"/>
-                <a:ea typeface="IBM Plex Mono Medium"/>
-              </a:rPr>
-              <a:t>СЛОВАРЕ</a:t>
-            </a:r>
-          </a:p>
-        </p:txBody>
-      </p:sp>
-      <p:sp>
-        <p:nvSpPr>
-          <p:cNvPr id="23" name="TextBox 22"/>
-          <p:cNvSpPr txBox="1"/>
-          <p:nvPr/>
-        </p:nvSpPr>
-        <p:spPr>
-          <a:xfrm>
-            <a:off x="10432694" y="3215025"/>
-            <a:ext cx="1009192" cy="414601"/>
-          </a:xfrm>
-          <a:prstGeom prst="rect">
-            <a:avLst/>
-          </a:prstGeom>
-          <a:noFill/>
-        </p:spPr>
-        <p:txBody>
-          <a:bodyPr wrap="none" lIns="0" rIns="0" tIns="0" bIns="0" anchor="t">
-            <a:spAutoFit/>
-          </a:bodyPr>
-          <a:lstStyle/>
-          <a:p>
-            <a:pPr algn="l">
-              <a:lnSpc>
-                <a:spcPts val="1349"/>
-              </a:lnSpc>
-            </a:pPr>
-            <a:r>
-              <a:rPr sz="950">
-                <a:solidFill>
-                  <a:srgbClr val="535C66"/>
-                </a:solidFill>
-                <a:latin typeface="GQ Text"/>
-                <a:cs typeface="GQ Text"/>
-                <a:ea typeface="GQ Text"/>
-              </a:rPr>
-              <a:t>и любое своё</a:t>
-            </a:r>
-          </a:p>
-          <a:p>
-            <a:pPr algn="l">
-              <a:lnSpc>
-                <a:spcPts val="1349"/>
-              </a:lnSpc>
-            </a:pPr>
-            <a:r>
-              <a:rPr sz="950">
-                <a:solidFill>
-                  <a:srgbClr val="535C66"/>
-                </a:solidFill>
-                <a:latin typeface="GQ Text"/>
-                <a:cs typeface="GQ Text"/>
-                <a:ea typeface="GQ Text"/>
-              </a:rPr>
-              <a:t>сверх того</a:t>
-            </a:r>
-          </a:p>
-        </p:txBody>
-      </p:sp>
-      <p:sp>
-        <p:nvSpPr>
-          <p:cNvPr id="24" name="Rectangle 23"/>
-          <p:cNvSpPr/>
-          <p:nvPr/>
-        </p:nvSpPr>
-        <p:spPr>
-          <a:xfrm>
-            <a:off x="749808" y="4226687"/>
-            <a:ext cx="10692079" cy="710247"/>
-          </a:xfrm>
-          <a:prstGeom prst="rect">
-            <a:avLst/>
-          </a:prstGeom>
-          <a:solidFill>
-            <a:srgbClr val="0064B9"/>
-          </a:solidFill>
-          <a:ln>
-            <a:noFill/>
-          </a:ln>
-          <a:effectLst/>
-        </p:spPr>
-        <p:txBody>
-          <a:bodyPr rtlCol="0" anchor="ctr" wrap="none"/>
-          <a:lstStyle/>
-          <a:p>
-            <a:pPr algn="ctr"/>
-          </a:p>
-        </p:txBody>
-      </p:sp>
-      <p:sp>
-        <p:nvSpPr>
-          <p:cNvPr id="25" name="TextBox 24"/>
-          <p:cNvSpPr txBox="1"/>
-          <p:nvPr/>
-        </p:nvSpPr>
-        <p:spPr>
-          <a:xfrm>
-            <a:off x="1024127" y="4425772"/>
-            <a:ext cx="10143439" cy="345281"/>
-          </a:xfrm>
-          <a:prstGeom prst="rect">
-            <a:avLst/>
-          </a:prstGeom>
-          <a:noFill/>
-        </p:spPr>
-        <p:txBody>
-          <a:bodyPr wrap="none" lIns="0" rIns="0" tIns="0" bIns="0" anchor="t">
-            <a:spAutoFit/>
-          </a:bodyPr>
-          <a:lstStyle/>
-          <a:p>
-            <a:pPr algn="l">
-              <a:lnSpc>
-                <a:spcPts val="1812"/>
-              </a:lnSpc>
-            </a:pPr>
-            <a:r>
-              <a:rPr sz="1250">
-                <a:solidFill>
-                  <a:srgbClr val="FFFFFF"/>
-                </a:solidFill>
-                <a:latin typeface="GQ Text SemiBold"/>
-                <a:cs typeface="GQ Text SemiBold"/>
-                <a:ea typeface="GQ Text SemiBold"/>
-              </a:rPr>
-              <a:t>Правила покрыты автотестами: сломать их незаметно нельзя — сборка не пройдёт.</a:t>
+              <a:t>Приложение целиком, вместе со шрифтом и изображениями, занимает около 1,4 МБ. Скачивается один раз и дальше работает без интернета — проверено замером.</a:t>
             </a:r>
           </a:p>
         </p:txBody>
@@ -15964,947 +15911,14 @@
       </p:sp>
       <p:sp>
         <p:nvSpPr>
-          <p:cNvPr id="3" name="Rectangle 2"/>
-          <p:cNvSpPr/>
-          <p:nvPr/>
-        </p:nvSpPr>
-        <p:spPr>
-          <a:xfrm>
-            <a:off x="749808" y="475488"/>
-            <a:ext cx="10692079" cy="7315"/>
-          </a:xfrm>
-          <a:prstGeom prst="rect">
-            <a:avLst/>
-          </a:prstGeom>
-          <a:solidFill>
-            <a:srgbClr val="3B434D"/>
-          </a:solidFill>
-          <a:ln>
-            <a:noFill/>
-          </a:ln>
-          <a:effectLst/>
-        </p:spPr>
-        <p:txBody>
-          <a:bodyPr rtlCol="0" anchor="ctr" wrap="none"/>
-          <a:lstStyle/>
-          <a:p>
-            <a:pPr algn="ctr"/>
-          </a:p>
-        </p:txBody>
-      </p:sp>
-      <p:sp>
-        <p:nvSpPr>
-          <p:cNvPr id="4" name="TextBox 3"/>
-          <p:cNvSpPr txBox="1"/>
-          <p:nvPr/>
-        </p:nvSpPr>
-        <p:spPr>
-          <a:xfrm>
-            <a:off x="749808" y="559308"/>
-            <a:ext cx="7484455" cy="189357"/>
-          </a:xfrm>
-          <a:prstGeom prst="rect">
-            <a:avLst/>
-          </a:prstGeom>
-          <a:noFill/>
-        </p:spPr>
-        <p:txBody>
-          <a:bodyPr wrap="none" lIns="0" rIns="0" tIns="0" bIns="0" anchor="t">
-            <a:spAutoFit/>
-          </a:bodyPr>
-          <a:lstStyle/>
-          <a:p>
-            <a:pPr algn="l">
-              <a:lnSpc>
-                <a:spcPts val="1050"/>
-              </a:lnSpc>
-            </a:pPr>
-            <a:r>
-              <a:rPr sz="850" spc="136">
-                <a:solidFill>
-                  <a:srgbClr val="59AAF8"/>
-                </a:solidFill>
-                <a:latin typeface="IBM Plex Mono SemiBold"/>
-                <a:cs typeface="IBM Plex Mono SemiBold"/>
-                <a:ea typeface="IBM Plex Mono SemiBold"/>
-              </a:rPr>
-              <a:t>ЧТО ВНУТРИ</a:t>
-            </a:r>
-          </a:p>
-        </p:txBody>
-      </p:sp>
-      <p:sp>
-        <p:nvSpPr>
-          <p:cNvPr id="5" name="TextBox 4"/>
-          <p:cNvSpPr txBox="1"/>
-          <p:nvPr/>
-        </p:nvSpPr>
-        <p:spPr>
-          <a:xfrm>
-            <a:off x="10914329" y="559308"/>
-            <a:ext cx="618998" cy="189357"/>
-          </a:xfrm>
-          <a:prstGeom prst="rect">
-            <a:avLst/>
-          </a:prstGeom>
-          <a:noFill/>
-        </p:spPr>
-        <p:txBody>
-          <a:bodyPr wrap="none" lIns="0" rIns="0" tIns="0" bIns="0" anchor="t">
-            <a:spAutoFit/>
-          </a:bodyPr>
-          <a:lstStyle/>
-          <a:p>
-            <a:pPr algn="l">
-              <a:lnSpc>
-                <a:spcPts val="1050"/>
-              </a:lnSpc>
-            </a:pPr>
-            <a:r>
-              <a:rPr sz="850" spc="85">
-                <a:solidFill>
-                  <a:srgbClr val="A6ADB6"/>
-                </a:solidFill>
-                <a:latin typeface="IBM Plex Mono Medium"/>
-                <a:cs typeface="IBM Plex Mono Medium"/>
-                <a:ea typeface="IBM Plex Mono Medium"/>
-              </a:rPr>
-              <a:t>08 / 10</a:t>
-            </a:r>
-          </a:p>
-        </p:txBody>
-      </p:sp>
-      <p:sp>
-        <p:nvSpPr>
-          <p:cNvPr id="6" name="TextBox 5"/>
-          <p:cNvSpPr txBox="1"/>
-          <p:nvPr/>
-        </p:nvSpPr>
-        <p:spPr>
-          <a:xfrm>
-            <a:off x="749808" y="793028"/>
-            <a:ext cx="10692079" cy="752558"/>
-          </a:xfrm>
-          <a:prstGeom prst="rect">
-            <a:avLst/>
-          </a:prstGeom>
-          <a:noFill/>
-        </p:spPr>
-        <p:txBody>
-          <a:bodyPr wrap="none" lIns="0" rIns="0" tIns="0" bIns="0" anchor="t">
-            <a:spAutoFit/>
-          </a:bodyPr>
-          <a:lstStyle/>
-          <a:p>
-            <a:pPr algn="l">
-              <a:lnSpc>
-                <a:spcPts val="4173"/>
-              </a:lnSpc>
-            </a:pPr>
-            <a:r>
-              <a:rPr sz="3900" spc="-86">
-                <a:solidFill>
-                  <a:srgbClr val="EEEBE5"/>
-                </a:solidFill>
-                <a:latin typeface="GQ Text Bold"/>
-                <a:cs typeface="GQ Text Bold"/>
-                <a:ea typeface="GQ Text Bold"/>
-              </a:rPr>
-              <a:t>Пять разделов и повторение по расписанию</a:t>
-            </a:r>
-          </a:p>
-        </p:txBody>
-      </p:sp>
-      <p:sp>
-        <p:nvSpPr>
-          <p:cNvPr id="7" name="TextBox 6"/>
-          <p:cNvSpPr txBox="1"/>
-          <p:nvPr/>
-        </p:nvSpPr>
-        <p:spPr>
-          <a:xfrm>
-            <a:off x="749808" y="1516588"/>
-            <a:ext cx="9195188" cy="567349"/>
-          </a:xfrm>
-          <a:prstGeom prst="rect">
-            <a:avLst/>
-          </a:prstGeom>
-          <a:noFill/>
-        </p:spPr>
-        <p:txBody>
-          <a:bodyPr wrap="none" lIns="0" rIns="0" tIns="0" bIns="0" anchor="t">
-            <a:spAutoFit/>
-          </a:bodyPr>
-          <a:lstStyle/>
-          <a:p>
-            <a:pPr algn="l">
-              <a:lnSpc>
-                <a:spcPts val="1846"/>
-              </a:lnSpc>
-            </a:pPr>
-            <a:r>
-              <a:rPr sz="1300">
-                <a:solidFill>
-                  <a:srgbClr val="A6ADB6"/>
-                </a:solidFill>
-                <a:latin typeface="GQ Text"/>
-                <a:cs typeface="GQ Text"/>
-                <a:ea typeface="GQ Text"/>
-              </a:rPr>
-              <a:t>Каждое задание становится карточкой. Ответил верно — приложение вернёт её через день, потом через три,</a:t>
-            </a:r>
-          </a:p>
-          <a:p>
-            <a:pPr algn="l">
-              <a:lnSpc>
-                <a:spcPts val="1846"/>
-              </a:lnSpc>
-            </a:pPr>
-            <a:r>
-              <a:rPr sz="1300">
-                <a:solidFill>
-                  <a:srgbClr val="A6ADB6"/>
-                </a:solidFill>
-                <a:latin typeface="GQ Text"/>
-                <a:cs typeface="GQ Text"/>
-                <a:ea typeface="GQ Text"/>
-              </a:rPr>
-              <a:t>дальше реже. Ошибся — вернёт сегодня же.</a:t>
-            </a:r>
-          </a:p>
-        </p:txBody>
-      </p:sp>
-      <p:sp>
-        <p:nvSpPr>
-          <p:cNvPr id="8" name="Rectangle 7"/>
-          <p:cNvSpPr/>
-          <p:nvPr/>
-        </p:nvSpPr>
-        <p:spPr>
-          <a:xfrm>
-            <a:off x="749808" y="2260726"/>
-            <a:ext cx="10692079" cy="7315"/>
-          </a:xfrm>
-          <a:prstGeom prst="rect">
-            <a:avLst/>
-          </a:prstGeom>
-          <a:solidFill>
-            <a:srgbClr val="3B434D"/>
-          </a:solidFill>
-          <a:ln>
-            <a:noFill/>
-          </a:ln>
-          <a:effectLst/>
-        </p:spPr>
-        <p:txBody>
-          <a:bodyPr rtlCol="0" anchor="ctr" wrap="none"/>
-          <a:lstStyle/>
-          <a:p>
-            <a:pPr algn="ctr"/>
-          </a:p>
-        </p:txBody>
-      </p:sp>
-      <p:sp>
-        <p:nvSpPr>
-          <p:cNvPr id="9" name="TextBox 8"/>
-          <p:cNvSpPr txBox="1"/>
-          <p:nvPr/>
-        </p:nvSpPr>
-        <p:spPr>
-          <a:xfrm>
-            <a:off x="749808" y="2535209"/>
-            <a:ext cx="1962851" cy="323169"/>
-          </a:xfrm>
-          <a:prstGeom prst="rect">
-            <a:avLst/>
-          </a:prstGeom>
-          <a:noFill/>
-        </p:spPr>
-        <p:txBody>
-          <a:bodyPr wrap="none" lIns="0" rIns="0" tIns="0" bIns="0" anchor="t">
-            <a:spAutoFit/>
-          </a:bodyPr>
-          <a:lstStyle/>
-          <a:p>
-            <a:pPr algn="l">
-              <a:lnSpc>
-                <a:spcPts val="1792"/>
-              </a:lnSpc>
-            </a:pPr>
-            <a:r>
-              <a:rPr sz="1600" spc="-24">
-                <a:solidFill>
-                  <a:srgbClr val="EEEBE5"/>
-                </a:solidFill>
-                <a:latin typeface="GQ Text Bold"/>
-                <a:cs typeface="GQ Text Bold"/>
-                <a:ea typeface="GQ Text Bold"/>
-              </a:rPr>
-              <a:t>Учиться</a:t>
-            </a:r>
-          </a:p>
-        </p:txBody>
-      </p:sp>
-      <p:sp>
-        <p:nvSpPr>
-          <p:cNvPr id="10" name="TextBox 9"/>
-          <p:cNvSpPr txBox="1"/>
-          <p:nvPr/>
-        </p:nvSpPr>
-        <p:spPr>
-          <a:xfrm>
-            <a:off x="749808" y="2896743"/>
-            <a:ext cx="1962851" cy="651509"/>
-          </a:xfrm>
-          <a:prstGeom prst="rect">
-            <a:avLst/>
-          </a:prstGeom>
-          <a:noFill/>
-        </p:spPr>
-        <p:txBody>
-          <a:bodyPr wrap="none" lIns="0" rIns="0" tIns="0" bIns="0" anchor="t">
-            <a:spAutoFit/>
-          </a:bodyPr>
-          <a:lstStyle/>
-          <a:p>
-            <a:pPr algn="l">
-              <a:lnSpc>
-                <a:spcPts val="1500"/>
-              </a:lnSpc>
-            </a:pPr>
-            <a:r>
-              <a:rPr sz="1050">
-                <a:solidFill>
-                  <a:srgbClr val="A6ADB6"/>
-                </a:solidFill>
-                <a:latin typeface="GQ Text"/>
-                <a:cs typeface="GQ Text"/>
-                <a:ea typeface="GQ Text"/>
-              </a:rPr>
-              <a:t>Дорожка уроков: видно</a:t>
-            </a:r>
-          </a:p>
-          <a:p>
-            <a:pPr algn="l">
-              <a:lnSpc>
-                <a:spcPts val="1500"/>
-              </a:lnSpc>
-            </a:pPr>
-            <a:r>
-              <a:rPr sz="1050">
-                <a:solidFill>
-                  <a:srgbClr val="A6ADB6"/>
-                </a:solidFill>
-                <a:latin typeface="GQ Text"/>
-                <a:cs typeface="GQ Text"/>
-                <a:ea typeface="GQ Text"/>
-              </a:rPr>
-              <a:t>пройденное и следующий</a:t>
-            </a:r>
-          </a:p>
-          <a:p>
-            <a:pPr algn="l">
-              <a:lnSpc>
-                <a:spcPts val="1500"/>
-              </a:lnSpc>
-            </a:pPr>
-            <a:r>
-              <a:rPr sz="1050">
-                <a:solidFill>
-                  <a:srgbClr val="A6ADB6"/>
-                </a:solidFill>
-                <a:latin typeface="GQ Text"/>
-                <a:cs typeface="GQ Text"/>
-                <a:ea typeface="GQ Text"/>
-              </a:rPr>
-              <a:t>шаг</a:t>
-            </a:r>
-          </a:p>
-        </p:txBody>
-      </p:sp>
-      <p:sp>
-        <p:nvSpPr>
-          <p:cNvPr id="11" name="TextBox 10"/>
-          <p:cNvSpPr txBox="1"/>
-          <p:nvPr/>
-        </p:nvSpPr>
-        <p:spPr>
-          <a:xfrm>
-            <a:off x="2932115" y="2535209"/>
-            <a:ext cx="1962851" cy="323169"/>
-          </a:xfrm>
-          <a:prstGeom prst="rect">
-            <a:avLst/>
-          </a:prstGeom>
-          <a:noFill/>
-        </p:spPr>
-        <p:txBody>
-          <a:bodyPr wrap="none" lIns="0" rIns="0" tIns="0" bIns="0" anchor="t">
-            <a:spAutoFit/>
-          </a:bodyPr>
-          <a:lstStyle/>
-          <a:p>
-            <a:pPr algn="l">
-              <a:lnSpc>
-                <a:spcPts val="1792"/>
-              </a:lnSpc>
-            </a:pPr>
-            <a:r>
-              <a:rPr sz="1600" spc="-24">
-                <a:solidFill>
-                  <a:srgbClr val="EEEBE5"/>
-                </a:solidFill>
-                <a:latin typeface="GQ Text Bold"/>
-                <a:cs typeface="GQ Text Bold"/>
-                <a:ea typeface="GQ Text Bold"/>
-              </a:rPr>
-              <a:t>Практика</a:t>
-            </a:r>
-          </a:p>
-        </p:txBody>
-      </p:sp>
-      <p:sp>
-        <p:nvSpPr>
-          <p:cNvPr id="12" name="TextBox 11"/>
-          <p:cNvSpPr txBox="1"/>
-          <p:nvPr/>
-        </p:nvSpPr>
-        <p:spPr>
-          <a:xfrm>
-            <a:off x="2932115" y="2896743"/>
-            <a:ext cx="1962851" cy="651509"/>
-          </a:xfrm>
-          <a:prstGeom prst="rect">
-            <a:avLst/>
-          </a:prstGeom>
-          <a:noFill/>
-        </p:spPr>
-        <p:txBody>
-          <a:bodyPr wrap="none" lIns="0" rIns="0" tIns="0" bIns="0" anchor="t">
-            <a:spAutoFit/>
-          </a:bodyPr>
-          <a:lstStyle/>
-          <a:p>
-            <a:pPr algn="l">
-              <a:lnSpc>
-                <a:spcPts val="1500"/>
-              </a:lnSpc>
-            </a:pPr>
-            <a:r>
-              <a:rPr sz="1050">
-                <a:solidFill>
-                  <a:srgbClr val="A6ADB6"/>
-                </a:solidFill>
-                <a:latin typeface="GQ Text"/>
-                <a:cs typeface="GQ Text"/>
-                <a:ea typeface="GQ Text"/>
-              </a:rPr>
-              <a:t>Цель на день, повторение,</a:t>
-            </a:r>
-          </a:p>
-          <a:p>
-            <a:pPr algn="l">
-              <a:lnSpc>
-                <a:spcPts val="1500"/>
-              </a:lnSpc>
-            </a:pPr>
-            <a:r>
-              <a:rPr sz="1050">
-                <a:solidFill>
-                  <a:srgbClr val="A6ADB6"/>
-                </a:solidFill>
-                <a:latin typeface="GQ Text"/>
-                <a:cs typeface="GQ Text"/>
-                <a:ea typeface="GQ Text"/>
-              </a:rPr>
-              <a:t>карточки слов, спринт на 60</a:t>
-            </a:r>
-          </a:p>
-          <a:p>
-            <a:pPr algn="l">
-              <a:lnSpc>
-                <a:spcPts val="1500"/>
-              </a:lnSpc>
-            </a:pPr>
-            <a:r>
-              <a:rPr sz="1050">
-                <a:solidFill>
-                  <a:srgbClr val="A6ADB6"/>
-                </a:solidFill>
-                <a:latin typeface="GQ Text"/>
-                <a:cs typeface="GQ Text"/>
-                <a:ea typeface="GQ Text"/>
-              </a:rPr>
-              <a:t>секунд</a:t>
-            </a:r>
-          </a:p>
-        </p:txBody>
-      </p:sp>
-      <p:sp>
-        <p:nvSpPr>
-          <p:cNvPr id="13" name="TextBox 12"/>
-          <p:cNvSpPr txBox="1"/>
-          <p:nvPr/>
-        </p:nvSpPr>
-        <p:spPr>
-          <a:xfrm>
-            <a:off x="5114422" y="2535209"/>
-            <a:ext cx="1962851" cy="323169"/>
-          </a:xfrm>
-          <a:prstGeom prst="rect">
-            <a:avLst/>
-          </a:prstGeom>
-          <a:noFill/>
-        </p:spPr>
-        <p:txBody>
-          <a:bodyPr wrap="none" lIns="0" rIns="0" tIns="0" bIns="0" anchor="t">
-            <a:spAutoFit/>
-          </a:bodyPr>
-          <a:lstStyle/>
-          <a:p>
-            <a:pPr algn="l">
-              <a:lnSpc>
-                <a:spcPts val="1792"/>
-              </a:lnSpc>
-            </a:pPr>
-            <a:r>
-              <a:rPr sz="1600" spc="-24">
-                <a:solidFill>
-                  <a:srgbClr val="EEEBE5"/>
-                </a:solidFill>
-                <a:latin typeface="GQ Text Bold"/>
-                <a:cs typeface="GQ Text Bold"/>
-                <a:ea typeface="GQ Text Bold"/>
-              </a:rPr>
-              <a:t>Словарь</a:t>
-            </a:r>
-          </a:p>
-        </p:txBody>
-      </p:sp>
-      <p:sp>
-        <p:nvSpPr>
-          <p:cNvPr id="14" name="TextBox 13"/>
-          <p:cNvSpPr txBox="1"/>
-          <p:nvPr/>
-        </p:nvSpPr>
-        <p:spPr>
-          <a:xfrm>
-            <a:off x="5114422" y="2896743"/>
-            <a:ext cx="1962851" cy="651509"/>
-          </a:xfrm>
-          <a:prstGeom prst="rect">
-            <a:avLst/>
-          </a:prstGeom>
-          <a:noFill/>
-        </p:spPr>
-        <p:txBody>
-          <a:bodyPr wrap="none" lIns="0" rIns="0" tIns="0" bIns="0" anchor="t">
-            <a:spAutoFit/>
-          </a:bodyPr>
-          <a:lstStyle/>
-          <a:p>
-            <a:pPr algn="l">
-              <a:lnSpc>
-                <a:spcPts val="1500"/>
-              </a:lnSpc>
-            </a:pPr>
-            <a:r>
-              <a:rPr sz="1050">
-                <a:solidFill>
-                  <a:srgbClr val="A6ADB6"/>
-                </a:solidFill>
-                <a:latin typeface="GQ Text"/>
-                <a:cs typeface="GQ Text"/>
-                <a:ea typeface="GQ Text"/>
-              </a:rPr>
-              <a:t>162 статьи из уроков, поиск</a:t>
-            </a:r>
-          </a:p>
-          <a:p>
-            <a:pPr algn="l">
-              <a:lnSpc>
-                <a:spcPts val="1500"/>
-              </a:lnSpc>
-            </a:pPr>
-            <a:r>
-              <a:rPr sz="1050">
-                <a:solidFill>
-                  <a:srgbClr val="A6ADB6"/>
-                </a:solidFill>
-                <a:latin typeface="GQ Text"/>
-                <a:cs typeface="GQ Text"/>
-                <a:ea typeface="GQ Text"/>
-              </a:rPr>
-              <a:t>работает с русской</a:t>
-            </a:r>
-          </a:p>
-          <a:p>
-            <a:pPr algn="l">
-              <a:lnSpc>
-                <a:spcPts val="1500"/>
-              </a:lnSpc>
-            </a:pPr>
-            <a:r>
-              <a:rPr sz="1050">
-                <a:solidFill>
-                  <a:srgbClr val="A6ADB6"/>
-                </a:solidFill>
-                <a:latin typeface="GQ Text"/>
-                <a:cs typeface="GQ Text"/>
-                <a:ea typeface="GQ Text"/>
-              </a:rPr>
-              <a:t>раскладки</a:t>
-            </a:r>
-          </a:p>
-        </p:txBody>
-      </p:sp>
-      <p:sp>
-        <p:nvSpPr>
-          <p:cNvPr id="15" name="TextBox 14"/>
-          <p:cNvSpPr txBox="1"/>
-          <p:nvPr/>
-        </p:nvSpPr>
-        <p:spPr>
-          <a:xfrm>
-            <a:off x="7296729" y="2535209"/>
-            <a:ext cx="1962851" cy="323169"/>
-          </a:xfrm>
-          <a:prstGeom prst="rect">
-            <a:avLst/>
-          </a:prstGeom>
-          <a:noFill/>
-        </p:spPr>
-        <p:txBody>
-          <a:bodyPr wrap="none" lIns="0" rIns="0" tIns="0" bIns="0" anchor="t">
-            <a:spAutoFit/>
-          </a:bodyPr>
-          <a:lstStyle/>
-          <a:p>
-            <a:pPr algn="l">
-              <a:lnSpc>
-                <a:spcPts val="1792"/>
-              </a:lnSpc>
-            </a:pPr>
-            <a:r>
-              <a:rPr sz="1600" spc="-24">
-                <a:solidFill>
-                  <a:srgbClr val="EEEBE5"/>
-                </a:solidFill>
-                <a:latin typeface="GQ Text Bold"/>
-                <a:cs typeface="GQ Text Bold"/>
-                <a:ea typeface="GQ Text Bold"/>
-              </a:rPr>
-              <a:t>Справка</a:t>
-            </a:r>
-          </a:p>
-        </p:txBody>
-      </p:sp>
-      <p:sp>
-        <p:nvSpPr>
-          <p:cNvPr id="16" name="TextBox 15"/>
-          <p:cNvSpPr txBox="1"/>
-          <p:nvPr/>
-        </p:nvSpPr>
-        <p:spPr>
-          <a:xfrm>
-            <a:off x="7296729" y="2896743"/>
-            <a:ext cx="1962851" cy="461010"/>
-          </a:xfrm>
-          <a:prstGeom prst="rect">
-            <a:avLst/>
-          </a:prstGeom>
-          <a:noFill/>
-        </p:spPr>
-        <p:txBody>
-          <a:bodyPr wrap="none" lIns="0" rIns="0" tIns="0" bIns="0" anchor="t">
-            <a:spAutoFit/>
-          </a:bodyPr>
-          <a:lstStyle/>
-          <a:p>
-            <a:pPr algn="l">
-              <a:lnSpc>
-                <a:spcPts val="1500"/>
-              </a:lnSpc>
-            </a:pPr>
-            <a:r>
-              <a:rPr sz="1050">
-                <a:solidFill>
-                  <a:srgbClr val="A6ADB6"/>
-                </a:solidFill>
-                <a:latin typeface="GQ Text"/>
-                <a:cs typeface="GQ Text"/>
-                <a:ea typeface="GQ Text"/>
-              </a:rPr>
-              <a:t>33 правила, 22 темы и живые</a:t>
-            </a:r>
-          </a:p>
-          <a:p>
-            <a:pPr algn="l">
-              <a:lnSpc>
-                <a:spcPts val="1500"/>
-              </a:lnSpc>
-            </a:pPr>
-            <a:r>
-              <a:rPr sz="1050">
-                <a:solidFill>
-                  <a:srgbClr val="A6ADB6"/>
-                </a:solidFill>
-                <a:latin typeface="GQ Text"/>
-                <a:cs typeface="GQ Text"/>
-                <a:ea typeface="GQ Text"/>
-              </a:rPr>
-              <a:t>таблицы окончаний</a:t>
-            </a:r>
-          </a:p>
-        </p:txBody>
-      </p:sp>
-      <p:sp>
-        <p:nvSpPr>
-          <p:cNvPr id="17" name="TextBox 16"/>
-          <p:cNvSpPr txBox="1"/>
-          <p:nvPr/>
-        </p:nvSpPr>
-        <p:spPr>
-          <a:xfrm>
-            <a:off x="9479036" y="2535209"/>
-            <a:ext cx="1962851" cy="323169"/>
-          </a:xfrm>
-          <a:prstGeom prst="rect">
-            <a:avLst/>
-          </a:prstGeom>
-          <a:noFill/>
-        </p:spPr>
-        <p:txBody>
-          <a:bodyPr wrap="none" lIns="0" rIns="0" tIns="0" bIns="0" anchor="t">
-            <a:spAutoFit/>
-          </a:bodyPr>
-          <a:lstStyle/>
-          <a:p>
-            <a:pPr algn="l">
-              <a:lnSpc>
-                <a:spcPts val="1792"/>
-              </a:lnSpc>
-            </a:pPr>
-            <a:r>
-              <a:rPr sz="1600" spc="-24">
-                <a:solidFill>
-                  <a:srgbClr val="EEEBE5"/>
-                </a:solidFill>
-                <a:latin typeface="GQ Text Bold"/>
-                <a:cs typeface="GQ Text Bold"/>
-                <a:ea typeface="GQ Text Bold"/>
-              </a:rPr>
-              <a:t>Профиль</a:t>
-            </a:r>
-          </a:p>
-        </p:txBody>
-      </p:sp>
-      <p:sp>
-        <p:nvSpPr>
-          <p:cNvPr id="18" name="TextBox 17"/>
-          <p:cNvSpPr txBox="1"/>
-          <p:nvPr/>
-        </p:nvSpPr>
-        <p:spPr>
-          <a:xfrm>
-            <a:off x="9479036" y="2896743"/>
-            <a:ext cx="1962851" cy="651509"/>
-          </a:xfrm>
-          <a:prstGeom prst="rect">
-            <a:avLst/>
-          </a:prstGeom>
-          <a:noFill/>
-        </p:spPr>
-        <p:txBody>
-          <a:bodyPr wrap="none" lIns="0" rIns="0" tIns="0" bIns="0" anchor="t">
-            <a:spAutoFit/>
-          </a:bodyPr>
-          <a:lstStyle/>
-          <a:p>
-            <a:pPr algn="l">
-              <a:lnSpc>
-                <a:spcPts val="1500"/>
-              </a:lnSpc>
-            </a:pPr>
-            <a:r>
-              <a:rPr sz="1050">
-                <a:solidFill>
-                  <a:srgbClr val="A6ADB6"/>
-                </a:solidFill>
-                <a:latin typeface="GQ Text"/>
-                <a:cs typeface="GQ Text"/>
-                <a:ea typeface="GQ Text"/>
-              </a:rPr>
-              <a:t>Статистика, награды и</a:t>
-            </a:r>
-          </a:p>
-          <a:p>
-            <a:pPr algn="l">
-              <a:lnSpc>
-                <a:spcPts val="1500"/>
-              </a:lnSpc>
-            </a:pPr>
-            <a:r>
-              <a:rPr sz="1050">
-                <a:solidFill>
-                  <a:srgbClr val="A6ADB6"/>
-                </a:solidFill>
-                <a:latin typeface="GQ Text"/>
-                <a:cs typeface="GQ Text"/>
-                <a:ea typeface="GQ Text"/>
-              </a:rPr>
-              <a:t>выгрузка результатов</a:t>
-            </a:r>
-          </a:p>
-          <a:p>
-            <a:pPr algn="l">
-              <a:lnSpc>
-                <a:spcPts val="1500"/>
-              </a:lnSpc>
-            </a:pPr>
-            <a:r>
-              <a:rPr sz="1050">
-                <a:solidFill>
-                  <a:srgbClr val="A6ADB6"/>
-                </a:solidFill>
-                <a:latin typeface="GQ Text"/>
-                <a:cs typeface="GQ Text"/>
-                <a:ea typeface="GQ Text"/>
-              </a:rPr>
-              <a:t>таблицей</a:t>
-            </a:r>
-          </a:p>
-        </p:txBody>
-      </p:sp>
-      <p:sp>
-        <p:nvSpPr>
           <p:cNvPr id="19" name="Rectangle 18"/>
           <p:cNvSpPr/>
           <p:nvPr/>
         </p:nvSpPr>
         <p:spPr>
           <a:xfrm>
-            <a:off x="749808" y="3919347"/>
-            <a:ext cx="10692079" cy="710247"/>
-          </a:xfrm>
-          <a:prstGeom prst="rect">
-            <a:avLst/>
-          </a:prstGeom>
-          <a:solidFill>
-            <a:srgbClr val="0064B9"/>
-          </a:solidFill>
-          <a:ln>
-            <a:noFill/>
-          </a:ln>
-          <a:effectLst/>
-        </p:spPr>
-        <p:txBody>
-          <a:bodyPr rtlCol="0" anchor="ctr" wrap="none"/>
-          <a:lstStyle/>
-          <a:p>
-            <a:pPr algn="ctr"/>
-          </a:p>
-        </p:txBody>
-      </p:sp>
-      <p:sp>
-        <p:nvSpPr>
-          <p:cNvPr id="20" name="TextBox 19"/>
-          <p:cNvSpPr txBox="1"/>
-          <p:nvPr/>
-        </p:nvSpPr>
-        <p:spPr>
-          <a:xfrm>
-            <a:off x="1024127" y="4118432"/>
-            <a:ext cx="10143439" cy="345281"/>
-          </a:xfrm>
-          <a:prstGeom prst="rect">
-            <a:avLst/>
-          </a:prstGeom>
-          <a:noFill/>
-        </p:spPr>
-        <p:txBody>
-          <a:bodyPr wrap="none" lIns="0" rIns="0" tIns="0" bIns="0" anchor="t">
-            <a:spAutoFit/>
-          </a:bodyPr>
-          <a:lstStyle/>
-          <a:p>
-            <a:pPr algn="l">
-              <a:lnSpc>
-                <a:spcPts val="1812"/>
-              </a:lnSpc>
-            </a:pPr>
-            <a:r>
-              <a:rPr sz="1250">
-                <a:solidFill>
-                  <a:srgbClr val="FFFFFF"/>
-                </a:solidFill>
-                <a:latin typeface="GQ Text SemiBold"/>
-                <a:cs typeface="GQ Text SemiBold"/>
-                <a:ea typeface="GQ Text SemiBold"/>
-              </a:rPr>
-              <a:t>Разбор ошибок в конце урока не начисляет очки намеренно: он нужен, чтобы разобраться, а не чтобы набрать их.</a:t>
-            </a:r>
-          </a:p>
-        </p:txBody>
-      </p:sp>
-    </p:spTree>
-  </p:cSld>
-  <p:clrMapOvr>
-    <a:masterClrMapping/>
-  </p:clrMapOvr>
-</p:sld>
-</file>
-
-<file path=ppt/slides/slide9.xml><?xml version="1.0" encoding="utf-8"?>
-<p:sld xmlns:a="http://schemas.openxmlformats.org/drawingml/2006/main" xmlns:p="http://schemas.openxmlformats.org/presentationml/2006/main" xmlns:r="http://schemas.openxmlformats.org/officeDocument/2006/relationships">
-  <p:cSld>
-    <p:spTree>
-      <p:nvGrpSpPr>
-        <p:cNvPr id="1" name=""/>
-        <p:cNvGrpSpPr/>
-        <p:nvPr/>
-      </p:nvGrpSpPr>
-      <p:grpSpPr/>
-      <p:sp>
-        <p:nvSpPr>
-          <p:cNvPr id="2" name="Rectangle 1"/>
-          <p:cNvSpPr/>
-          <p:nvPr/>
-        </p:nvSpPr>
-        <p:spPr>
-          <a:xfrm>
-            <a:off x="0" y="0"/>
-            <a:ext cx="12191695" cy="6858000"/>
-          </a:xfrm>
-          <a:prstGeom prst="rect">
-            <a:avLst/>
-          </a:prstGeom>
-          <a:solidFill>
-            <a:srgbClr val="1B222B"/>
-          </a:solidFill>
-          <a:ln>
-            <a:noFill/>
-          </a:ln>
-          <a:effectLst/>
-        </p:spPr>
-        <p:txBody>
-          <a:bodyPr rtlCol="0" anchor="ctr" wrap="none"/>
-          <a:lstStyle/>
-          <a:p>
-            <a:pPr algn="ctr"/>
-          </a:p>
-        </p:txBody>
-      </p:sp>
-      <p:sp>
-        <p:nvSpPr>
-          <p:cNvPr id="14" name="Rectangle 13"/>
-          <p:cNvSpPr/>
-          <p:nvPr/>
-        </p:nvSpPr>
-        <p:spPr>
-          <a:xfrm>
-            <a:off x="2852928" y="2259330"/>
-            <a:ext cx="8588959" cy="1929384"/>
+            <a:off x="7104202" y="1960626"/>
+            <a:ext cx="4337684" cy="2065019"/>
           </a:xfrm>
           <a:prstGeom prst="rect">
             <a:avLst/>
@@ -16929,6 +15943,36 @@
       </p:sp>
       <p:sp>
         <p:nvSpPr>
+          <p:cNvPr id="9" name="Rectangle 8"/>
+          <p:cNvSpPr/>
+          <p:nvPr/>
+        </p:nvSpPr>
+        <p:spPr>
+          <a:xfrm>
+            <a:off x="749808" y="1960626"/>
+            <a:ext cx="6153226" cy="2122931"/>
+          </a:xfrm>
+          <a:prstGeom prst="rect">
+            <a:avLst/>
+          </a:prstGeom>
+          <a:solidFill>
+            <a:srgbClr val="0064B9"/>
+          </a:solidFill>
+          <a:ln>
+            <a:noFill/>
+          </a:ln>
+          <a:effectLst/>
+        </p:spPr>
+        <p:txBody>
+          <a:bodyPr rtlCol="0" anchor="ctr" wrap="none"/>
+          <a:lstStyle/>
+          <a:p>
+            <a:pPr algn="ctr"/>
+          </a:p>
+        </p:txBody>
+      </p:sp>
+      <p:sp>
+        <p:nvSpPr>
           <p:cNvPr id="3" name="Rectangle 2"/>
           <p:cNvSpPr/>
           <p:nvPr/>
@@ -16993,7 +16037,7 @@
                 <a:cs typeface="IBM Plex Mono SemiBold"/>
                 <a:ea typeface="IBM Plex Mono SemiBold"/>
               </a:rPr>
-              <a:t>ПОКАЖУ ВЖИВУЮ</a:t>
+              <a:t>ИТОГИ</a:t>
             </a:r>
           </a:p>
         </p:txBody>
@@ -17034,7 +16078,7 @@
                 <a:cs typeface="IBM Plex Mono Medium"/>
                 <a:ea typeface="IBM Plex Mono Medium"/>
               </a:rPr>
-              <a:t>09 / 10</a:t>
+              <a:t>08 / 08</a:t>
             </a:r>
           </a:p>
         </p:txBody>
@@ -17047,8 +16091,8 @@
         </p:nvSpPr>
         <p:spPr>
           <a:xfrm>
-            <a:off x="749808" y="790854"/>
-            <a:ext cx="10692079" cy="771855"/>
+            <a:off x="749808" y="786505"/>
+            <a:ext cx="10692079" cy="810447"/>
           </a:xfrm>
           <a:prstGeom prst="rect">
             <a:avLst/>
@@ -17063,11 +16107,11 @@
           <a:p>
             <a:pPr algn="l">
               <a:lnSpc>
-                <a:spcPts val="4280"/>
-              </a:lnSpc>
-            </a:pPr>
-            <a:r>
-              <a:rPr sz="4000" spc="-88">
+                <a:spcPts val="4494"/>
+              </a:lnSpc>
+            </a:pPr>
+            <a:r>
+              <a:rPr sz="4200" spc="-92">
                 <a:solidFill>
                   <a:srgbClr val="EEEBE5"/>
                 </a:solidFill>
@@ -17075,7 +16119,7 @@
                 <a:cs typeface="GQ Text Bold"/>
                 <a:ea typeface="GQ Text Bold"/>
               </a:rPr>
-              <a:t>Откройте на своём телефоне прямо сейчас</a:t>
+              <a:t>Что получилось и что дальше</a:t>
             </a:r>
           </a:p>
         </p:txBody>
@@ -17088,8 +16132,8 @@
         </p:nvSpPr>
         <p:spPr>
           <a:xfrm>
-            <a:off x="749808" y="1530177"/>
-            <a:ext cx="8553663" cy="332907"/>
+            <a:off x="1024127" y="2212594"/>
+            <a:ext cx="5604586" cy="198374"/>
           </a:xfrm>
           <a:prstGeom prst="rect">
             <a:avLst/>
@@ -17104,57 +16148,251 @@
           <a:p>
             <a:pPr algn="l">
               <a:lnSpc>
-                <a:spcPts val="1846"/>
-              </a:lnSpc>
-            </a:pPr>
-            <a:r>
-              <a:rPr sz="1300">
-                <a:solidFill>
-                  <a:srgbClr val="A6ADB6"/>
+                <a:spcPts val="1100"/>
+              </a:lnSpc>
+            </a:pPr>
+            <a:r>
+              <a:rPr sz="850" spc="136">
+                <a:solidFill>
+                  <a:srgbClr val="59AAF8"/>
+                </a:solidFill>
+                <a:latin typeface="IBM Plex Mono SemiBold"/>
+                <a:cs typeface="IBM Plex Mono SemiBold"/>
+                <a:ea typeface="IBM Plex Mono SemiBold"/>
+              </a:rPr>
+              <a:t>ВЫВОД</a:t>
+            </a:r>
+          </a:p>
+        </p:txBody>
+      </p:sp>
+      <p:sp>
+        <p:nvSpPr>
+          <p:cNvPr id="8" name="TextBox 7"/>
+          <p:cNvSpPr txBox="1"/>
+          <p:nvPr/>
+        </p:nvSpPr>
+        <p:spPr>
+          <a:xfrm>
+            <a:off x="1024127" y="2488438"/>
+            <a:ext cx="5604586" cy="1403350"/>
+          </a:xfrm>
+          <a:prstGeom prst="rect">
+            <a:avLst/>
+          </a:prstGeom>
+          <a:noFill/>
+        </p:spPr>
+        <p:txBody>
+          <a:bodyPr wrap="none" lIns="0" rIns="0" tIns="0" bIns="0" anchor="t">
+            <a:spAutoFit/>
+          </a:bodyPr>
+          <a:lstStyle/>
+          <a:p>
+            <a:pPr algn="l">
+              <a:lnSpc>
+                <a:spcPts val="2500"/>
+              </a:lnSpc>
+            </a:pPr>
+            <a:r>
+              <a:rPr sz="1900" spc="-34">
+                <a:solidFill>
+                  <a:srgbClr val="EEEBE5"/>
+                </a:solidFill>
+                <a:latin typeface="GQ Text Bold"/>
+                <a:cs typeface="GQ Text Bold"/>
+                <a:ea typeface="GQ Text Bold"/>
+              </a:rPr>
+              <a:t>Ученикам мешала не сложность казахского</a:t>
+            </a:r>
+          </a:p>
+          <a:p>
+            <a:pPr algn="l">
+              <a:lnSpc>
+                <a:spcPts val="2500"/>
+              </a:lnSpc>
+            </a:pPr>
+            <a:r>
+              <a:rPr sz="1900" spc="-34">
+                <a:solidFill>
+                  <a:srgbClr val="EEEBE5"/>
+                </a:solidFill>
+                <a:latin typeface="GQ Text Bold"/>
+                <a:cs typeface="GQ Text Bold"/>
+                <a:ea typeface="GQ Text Bold"/>
+              </a:rPr>
+              <a:t>языка, а технические барьеры: нельзя было</a:t>
+            </a:r>
+          </a:p>
+          <a:p>
+            <a:pPr algn="l">
+              <a:lnSpc>
+                <a:spcPts val="2500"/>
+              </a:lnSpc>
+            </a:pPr>
+            <a:r>
+              <a:rPr sz="1900" spc="-34">
+                <a:solidFill>
+                  <a:srgbClr val="EEEBE5"/>
+                </a:solidFill>
+                <a:latin typeface="GQ Text Bold"/>
+                <a:cs typeface="GQ Text Bold"/>
+                <a:ea typeface="GQ Text Bold"/>
+              </a:rPr>
+              <a:t>ввести правильный ответ. Их удалось снять,</a:t>
+            </a:r>
+          </a:p>
+          <a:p>
+            <a:pPr algn="l">
+              <a:lnSpc>
+                <a:spcPts val="2500"/>
+              </a:lnSpc>
+            </a:pPr>
+            <a:r>
+              <a:rPr sz="1900" spc="-34">
+                <a:solidFill>
+                  <a:srgbClr val="EEEBE5"/>
+                </a:solidFill>
+                <a:latin typeface="GQ Text Bold"/>
+                <a:cs typeface="GQ Text Bold"/>
+                <a:ea typeface="GQ Text Bold"/>
+              </a:rPr>
+              <a:t>и ни один не потребовал упрощать сам язык.</a:t>
+            </a:r>
+          </a:p>
+        </p:txBody>
+      </p:sp>
+      <p:sp>
+        <p:nvSpPr>
+          <p:cNvPr id="10" name="TextBox 9"/>
+          <p:cNvSpPr txBox="1"/>
+          <p:nvPr/>
+        </p:nvSpPr>
+        <p:spPr>
+          <a:xfrm>
+            <a:off x="7378522" y="2212594"/>
+            <a:ext cx="3789045" cy="198374"/>
+          </a:xfrm>
+          <a:prstGeom prst="rect">
+            <a:avLst/>
+          </a:prstGeom>
+          <a:noFill/>
+        </p:spPr>
+        <p:txBody>
+          <a:bodyPr wrap="none" lIns="0" rIns="0" tIns="0" bIns="0" anchor="t">
+            <a:spAutoFit/>
+          </a:bodyPr>
+          <a:lstStyle/>
+          <a:p>
+            <a:pPr algn="l">
+              <a:lnSpc>
+                <a:spcPts val="1100"/>
+              </a:lnSpc>
+            </a:pPr>
+            <a:r>
+              <a:rPr sz="850" spc="136">
+                <a:solidFill>
+                  <a:srgbClr val="59AAF8"/>
+                </a:solidFill>
+                <a:latin typeface="IBM Plex Mono SemiBold"/>
+                <a:cs typeface="IBM Plex Mono SemiBold"/>
+                <a:ea typeface="IBM Plex Mono SemiBold"/>
+              </a:rPr>
+              <a:t>ЧТО ДАЛЬШЕ</a:t>
+            </a:r>
+          </a:p>
+        </p:txBody>
+      </p:sp>
+      <p:sp>
+        <p:nvSpPr>
+          <p:cNvPr id="11" name="TextBox 10"/>
+          <p:cNvSpPr txBox="1"/>
+          <p:nvPr/>
+        </p:nvSpPr>
+        <p:spPr>
+          <a:xfrm>
+            <a:off x="7378522" y="2526233"/>
+            <a:ext cx="210566" cy="277723"/>
+          </a:xfrm>
+          <a:prstGeom prst="rect">
+            <a:avLst/>
+          </a:prstGeom>
+          <a:noFill/>
+        </p:spPr>
+        <p:txBody>
+          <a:bodyPr wrap="none" lIns="0" rIns="0" tIns="0" bIns="0" anchor="t">
+            <a:spAutoFit/>
+          </a:bodyPr>
+          <a:lstStyle/>
+          <a:p>
+            <a:pPr algn="l">
+              <a:lnSpc>
+                <a:spcPts val="1540"/>
+              </a:lnSpc>
+            </a:pPr>
+            <a:r>
+              <a:rPr sz="1100">
+                <a:solidFill>
+                  <a:srgbClr val="59AAF8"/>
+                </a:solidFill>
+                <a:latin typeface="IBM Plex Mono Medium"/>
+                <a:cs typeface="IBM Plex Mono Medium"/>
+                <a:ea typeface="IBM Plex Mono Medium"/>
+              </a:rPr>
+              <a:t>—</a:t>
+            </a:r>
+          </a:p>
+        </p:txBody>
+      </p:sp>
+      <p:sp>
+        <p:nvSpPr>
+          <p:cNvPr id="12" name="TextBox 11"/>
+          <p:cNvSpPr txBox="1"/>
+          <p:nvPr/>
+        </p:nvSpPr>
+        <p:spPr>
+          <a:xfrm>
+            <a:off x="7589088" y="2526233"/>
+            <a:ext cx="3578479" cy="277723"/>
+          </a:xfrm>
+          <a:prstGeom prst="rect">
+            <a:avLst/>
+          </a:prstGeom>
+          <a:noFill/>
+        </p:spPr>
+        <p:txBody>
+          <a:bodyPr wrap="none" lIns="0" rIns="0" tIns="0" bIns="0" anchor="t">
+            <a:spAutoFit/>
+          </a:bodyPr>
+          <a:lstStyle/>
+          <a:p>
+            <a:pPr algn="l">
+              <a:lnSpc>
+                <a:spcPts val="1540"/>
+              </a:lnSpc>
+            </a:pPr>
+            <a:r>
+              <a:rPr sz="1100">
+                <a:solidFill>
+                  <a:srgbClr val="EEEBE5"/>
                 </a:solidFill>
                 <a:latin typeface="GQ Text"/>
                 <a:cs typeface="GQ Text"/>
                 <a:ea typeface="GQ Text"/>
               </a:rPr>
-              <a:t>Наведите камеру на код. Приложение откроется сразу — устанавливать ничего не нужно.</a:t>
-            </a:r>
-          </a:p>
-        </p:txBody>
-      </p:sp>
-      <p:pic>
-        <p:nvPicPr>
-          <p:cNvPr id="8" name="Picture 7" descr="image.png"/>
-          <p:cNvPicPr>
-            <a:picLocks noChangeAspect="1"/>
-          </p:cNvPicPr>
-          <p:nvPr/>
-        </p:nvPicPr>
-        <p:blipFill>
-          <a:blip r:embed="rId2"/>
-          <a:stretch>
-            <a:fillRect/>
-          </a:stretch>
-        </p:blipFill>
-        <p:spPr>
-          <a:xfrm>
-            <a:off x="749808" y="2259330"/>
-            <a:ext cx="1417320" cy="1417320"/>
-          </a:xfrm>
-          <a:prstGeom prst="rect">
-            <a:avLst/>
-          </a:prstGeom>
-        </p:spPr>
-      </p:pic>
-      <p:sp>
-        <p:nvSpPr>
-          <p:cNvPr id="9" name="TextBox 8"/>
+              <a:t>Проверка всего казахского текста учителем</a:t>
+            </a:r>
+          </a:p>
+        </p:txBody>
+      </p:sp>
+      <p:sp>
+        <p:nvSpPr>
+          <p:cNvPr id="13" name="TextBox 12"/>
           <p:cNvSpPr txBox="1"/>
           <p:nvPr/>
         </p:nvSpPr>
         <p:spPr>
           <a:xfrm>
-            <a:off x="749808" y="3777233"/>
-            <a:ext cx="2057400" cy="414909"/>
+            <a:off x="7378522" y="2858973"/>
+            <a:ext cx="210566" cy="277723"/>
           </a:xfrm>
           <a:prstGeom prst="rect">
             <a:avLst/>
@@ -17169,51 +16407,156 @@
           <a:p>
             <a:pPr algn="l">
               <a:lnSpc>
-                <a:spcPts val="1350"/>
-              </a:lnSpc>
-            </a:pPr>
-            <a:r>
-              <a:rPr sz="950">
-                <a:solidFill>
-                  <a:srgbClr val="A6ADB6"/>
+                <a:spcPts val="1540"/>
+              </a:lnSpc>
+            </a:pPr>
+            <a:r>
+              <a:rPr sz="1100">
+                <a:solidFill>
+                  <a:srgbClr val="59AAF8"/>
+                </a:solidFill>
+                <a:latin typeface="IBM Plex Mono Medium"/>
+                <a:cs typeface="IBM Plex Mono Medium"/>
+                <a:ea typeface="IBM Plex Mono Medium"/>
+              </a:rPr>
+              <a:t>—</a:t>
+            </a:r>
+          </a:p>
+        </p:txBody>
+      </p:sp>
+      <p:sp>
+        <p:nvSpPr>
+          <p:cNvPr id="14" name="TextBox 13"/>
+          <p:cNvSpPr txBox="1"/>
+          <p:nvPr/>
+        </p:nvSpPr>
+        <p:spPr>
+          <a:xfrm>
+            <a:off x="7589088" y="2858973"/>
+            <a:ext cx="3578479" cy="277723"/>
+          </a:xfrm>
+          <a:prstGeom prst="rect">
+            <a:avLst/>
+          </a:prstGeom>
+          <a:noFill/>
+        </p:spPr>
+        <p:txBody>
+          <a:bodyPr wrap="none" lIns="0" rIns="0" tIns="0" bIns="0" anchor="t">
+            <a:spAutoFit/>
+          </a:bodyPr>
+          <a:lstStyle/>
+          <a:p>
+            <a:pPr algn="l">
+              <a:lnSpc>
+                <a:spcPts val="1540"/>
+              </a:lnSpc>
+            </a:pPr>
+            <a:r>
+              <a:rPr sz="1100">
+                <a:solidFill>
+                  <a:srgbClr val="EEEBE5"/>
                 </a:solidFill>
                 <a:latin typeface="GQ Text"/>
                 <a:cs typeface="GQ Text"/>
                 <a:ea typeface="GQ Text"/>
               </a:rPr>
-              <a:t>Открыть приложение:</a:t>
-            </a:r>
-          </a:p>
-          <a:p>
-            <a:pPr algn="l">
-              <a:lnSpc>
-                <a:spcPts val="1350"/>
-              </a:lnSpc>
-            </a:pPr>
-            <a:r>
-              <a:rPr sz="950">
-                <a:solidFill>
-                  <a:srgbClr val="A6ADB6"/>
+              <a:t>Апробация на классе и настоящие цифры</a:t>
+            </a:r>
+          </a:p>
+        </p:txBody>
+      </p:sp>
+      <p:sp>
+        <p:nvSpPr>
+          <p:cNvPr id="15" name="TextBox 14"/>
+          <p:cNvSpPr txBox="1"/>
+          <p:nvPr/>
+        </p:nvSpPr>
+        <p:spPr>
+          <a:xfrm>
+            <a:off x="7378522" y="3191713"/>
+            <a:ext cx="210566" cy="277723"/>
+          </a:xfrm>
+          <a:prstGeom prst="rect">
+            <a:avLst/>
+          </a:prstGeom>
+          <a:noFill/>
+        </p:spPr>
+        <p:txBody>
+          <a:bodyPr wrap="none" lIns="0" rIns="0" tIns="0" bIns="0" anchor="t">
+            <a:spAutoFit/>
+          </a:bodyPr>
+          <a:lstStyle/>
+          <a:p>
+            <a:pPr algn="l">
+              <a:lnSpc>
+                <a:spcPts val="1540"/>
+              </a:lnSpc>
+            </a:pPr>
+            <a:r>
+              <a:rPr sz="1100">
+                <a:solidFill>
+                  <a:srgbClr val="59AAF8"/>
+                </a:solidFill>
+                <a:latin typeface="IBM Plex Mono Medium"/>
+                <a:cs typeface="IBM Plex Mono Medium"/>
+                <a:ea typeface="IBM Plex Mono Medium"/>
+              </a:rPr>
+              <a:t>—</a:t>
+            </a:r>
+          </a:p>
+        </p:txBody>
+      </p:sp>
+      <p:sp>
+        <p:nvSpPr>
+          <p:cNvPr id="16" name="TextBox 15"/>
+          <p:cNvSpPr txBox="1"/>
+          <p:nvPr/>
+        </p:nvSpPr>
+        <p:spPr>
+          <a:xfrm>
+            <a:off x="7589088" y="3191713"/>
+            <a:ext cx="3578479" cy="277723"/>
+          </a:xfrm>
+          <a:prstGeom prst="rect">
+            <a:avLst/>
+          </a:prstGeom>
+          <a:noFill/>
+        </p:spPr>
+        <p:txBody>
+          <a:bodyPr wrap="none" lIns="0" rIns="0" tIns="0" bIns="0" anchor="t">
+            <a:spAutoFit/>
+          </a:bodyPr>
+          <a:lstStyle/>
+          <a:p>
+            <a:pPr algn="l">
+              <a:lnSpc>
+                <a:spcPts val="1540"/>
+              </a:lnSpc>
+            </a:pPr>
+            <a:r>
+              <a:rPr sz="1100">
+                <a:solidFill>
+                  <a:srgbClr val="EEEBE5"/>
                 </a:solidFill>
                 <a:latin typeface="GQ Text"/>
                 <a:cs typeface="GQ Text"/>
                 <a:ea typeface="GQ Text"/>
               </a:rPr>
-              <a:t>tilashar-kz.vercel.app</a:t>
-            </a:r>
-          </a:p>
-        </p:txBody>
-      </p:sp>
-      <p:sp>
-        <p:nvSpPr>
-          <p:cNvPr id="10" name="TextBox 9"/>
+              <a:t>Озвучка: 589 фраз, каждая своим голосом</a:t>
+            </a:r>
+          </a:p>
+        </p:txBody>
+      </p:sp>
+      <p:sp>
+        <p:nvSpPr>
+          <p:cNvPr id="17" name="TextBox 16"/>
           <p:cNvSpPr txBox="1"/>
           <p:nvPr/>
         </p:nvSpPr>
         <p:spPr>
           <a:xfrm>
-            <a:off x="3108960" y="2493010"/>
-            <a:ext cx="8076895" cy="198374"/>
+            <a:off x="7378522" y="3524453"/>
+            <a:ext cx="210566" cy="277723"/>
           </a:xfrm>
           <a:prstGeom prst="rect">
             <a:avLst/>
@@ -17228,33 +16571,33 @@
           <a:p>
             <a:pPr algn="l">
               <a:lnSpc>
-                <a:spcPts val="1100"/>
-              </a:lnSpc>
-            </a:pPr>
-            <a:r>
-              <a:rPr sz="850" spc="136">
+                <a:spcPts val="1540"/>
+              </a:lnSpc>
+            </a:pPr>
+            <a:r>
+              <a:rPr sz="1100">
                 <a:solidFill>
                   <a:srgbClr val="59AAF8"/>
                 </a:solidFill>
-                <a:latin typeface="IBM Plex Mono SemiBold"/>
-                <a:cs typeface="IBM Plex Mono SemiBold"/>
-                <a:ea typeface="IBM Plex Mono SemiBold"/>
-              </a:rPr>
-              <a:t>ПОСТАВИТЬ НА ТЕЛЕФОН</a:t>
-            </a:r>
-          </a:p>
-        </p:txBody>
-      </p:sp>
-      <p:sp>
-        <p:nvSpPr>
-          <p:cNvPr id="11" name="TextBox 10"/>
+                <a:latin typeface="IBM Plex Mono Medium"/>
+                <a:cs typeface="IBM Plex Mono Medium"/>
+                <a:ea typeface="IBM Plex Mono Medium"/>
+              </a:rPr>
+              <a:t>—</a:t>
+            </a:r>
+          </a:p>
+        </p:txBody>
+      </p:sp>
+      <p:sp>
+        <p:nvSpPr>
+          <p:cNvPr id="18" name="TextBox 17"/>
           <p:cNvSpPr txBox="1"/>
           <p:nvPr/>
         </p:nvSpPr>
         <p:spPr>
           <a:xfrm>
-            <a:off x="3108960" y="2768854"/>
-            <a:ext cx="8076895" cy="288544"/>
+            <a:off x="7589088" y="3524453"/>
+            <a:ext cx="3578479" cy="277723"/>
           </a:xfrm>
           <a:prstGeom prst="rect">
             <a:avLst/>
@@ -17269,7 +16612,7 @@
           <a:p>
             <a:pPr algn="l">
               <a:lnSpc>
-                <a:spcPts val="1600"/>
+                <a:spcPts val="1540"/>
               </a:lnSpc>
             </a:pPr>
             <a:r>
@@ -17281,21 +16624,21 @@
                 <a:cs typeface="GQ Text"/>
                 <a:ea typeface="GQ Text"/>
               </a:rPr>
-              <a:t>Android: меню → «Установить приложение». iPhone: «Поделиться» → «На экран „Домой“»</a:t>
-            </a:r>
-          </a:p>
-        </p:txBody>
-      </p:sp>
-      <p:sp>
-        <p:nvSpPr>
-          <p:cNvPr id="12" name="TextBox 11"/>
+              <a:t>Открытый доступ: бесплатно и по ссылке</a:t>
+            </a:r>
+          </a:p>
+        </p:txBody>
+      </p:sp>
+      <p:sp>
+        <p:nvSpPr>
+          <p:cNvPr id="20" name="TextBox 19"/>
           <p:cNvSpPr txBox="1"/>
           <p:nvPr/>
         </p:nvSpPr>
         <p:spPr>
           <a:xfrm>
-            <a:off x="3108960" y="3329686"/>
-            <a:ext cx="8076895" cy="198374"/>
+            <a:off x="749808" y="6323584"/>
+            <a:ext cx="10692079" cy="198374"/>
           </a:xfrm>
           <a:prstGeom prst="rect">
             <a:avLst/>
@@ -17314,130 +16657,7 @@
               </a:lnSpc>
             </a:pPr>
             <a:r>
-              <a:rPr sz="850" spc="136">
-                <a:solidFill>
-                  <a:srgbClr val="59AAF8"/>
-                </a:solidFill>
-                <a:latin typeface="IBM Plex Mono SemiBold"/>
-                <a:cs typeface="IBM Plex Mono SemiBold"/>
-                <a:ea typeface="IBM Plex Mono SemiBold"/>
-              </a:rPr>
-              <a:t>ФАЙЛОМ ДЛЯ ANDROID</a:t>
-            </a:r>
-          </a:p>
-        </p:txBody>
-      </p:sp>
-      <p:sp>
-        <p:nvSpPr>
-          <p:cNvPr id="13" name="TextBox 12"/>
-          <p:cNvSpPr txBox="1"/>
-          <p:nvPr/>
-        </p:nvSpPr>
-        <p:spPr>
-          <a:xfrm>
-            <a:off x="3108960" y="3605530"/>
-            <a:ext cx="8076895" cy="288544"/>
-          </a:xfrm>
-          <a:prstGeom prst="rect">
-            <a:avLst/>
-          </a:prstGeom>
-          <a:noFill/>
-        </p:spPr>
-        <p:txBody>
-          <a:bodyPr wrap="none" lIns="0" rIns="0" tIns="0" bIns="0" anchor="t">
-            <a:spAutoFit/>
-          </a:bodyPr>
-          <a:lstStyle/>
-          <a:p>
-            <a:pPr algn="l">
-              <a:lnSpc>
-                <a:spcPts val="1600"/>
-              </a:lnSpc>
-            </a:pPr>
-            <a:r>
-              <a:rPr sz="1100">
-                <a:solidFill>
-                  <a:srgbClr val="EEEBE5"/>
-                </a:solidFill>
-                <a:latin typeface="GQ Text"/>
-                <a:cs typeface="GQ Text"/>
-                <a:ea typeface="GQ Text"/>
-              </a:rPr>
-              <a:t>Готовый файл лежит здесь: github.com/s-chaikovskiy/grammarquest-web/releases</a:t>
-            </a:r>
-          </a:p>
-        </p:txBody>
-      </p:sp>
-      <p:sp>
-        <p:nvSpPr>
-          <p:cNvPr id="15" name="TextBox 14"/>
-          <p:cNvSpPr txBox="1"/>
-          <p:nvPr/>
-        </p:nvSpPr>
-        <p:spPr>
-          <a:xfrm>
-            <a:off x="749808" y="4504466"/>
-            <a:ext cx="3177384" cy="565546"/>
-          </a:xfrm>
-          <a:prstGeom prst="rect">
-            <a:avLst/>
-          </a:prstGeom>
-          <a:noFill/>
-        </p:spPr>
-        <p:txBody>
-          <a:bodyPr wrap="none" lIns="0" rIns="0" tIns="0" bIns="0" anchor="t">
-            <a:spAutoFit/>
-          </a:bodyPr>
-          <a:lstStyle/>
-          <a:p>
-            <a:pPr algn="l">
-              <a:lnSpc>
-                <a:spcPts val="3136"/>
-              </a:lnSpc>
-            </a:pPr>
-            <a:r>
-              <a:rPr sz="3200" spc="-96">
-                <a:solidFill>
-                  <a:srgbClr val="EEEBE5"/>
-                </a:solidFill>
-                <a:latin typeface="GQ Text Bold"/>
-                <a:cs typeface="GQ Text Bold"/>
-                <a:ea typeface="GQ Text Bold"/>
-              </a:rPr>
-              <a:t>202</a:t>
-            </a:r>
-          </a:p>
-        </p:txBody>
-      </p:sp>
-      <p:sp>
-        <p:nvSpPr>
-          <p:cNvPr id="16" name="TextBox 15"/>
-          <p:cNvSpPr txBox="1"/>
-          <p:nvPr/>
-        </p:nvSpPr>
-        <p:spPr>
-          <a:xfrm>
-            <a:off x="749808" y="5033517"/>
-            <a:ext cx="3177384" cy="216408"/>
-          </a:xfrm>
-          <a:prstGeom prst="rect">
-            <a:avLst/>
-          </a:prstGeom>
-          <a:noFill/>
-        </p:spPr>
-        <p:txBody>
-          <a:bodyPr wrap="none" lIns="0" rIns="0" tIns="0" bIns="0" anchor="t">
-            <a:spAutoFit/>
-          </a:bodyPr>
-          <a:lstStyle/>
-          <a:p>
-            <a:pPr algn="l">
-              <a:lnSpc>
-                <a:spcPts val="1200"/>
-              </a:lnSpc>
-            </a:pPr>
-            <a:r>
-              <a:rPr sz="800" spc="64">
+              <a:rPr sz="850" spc="85">
                 <a:solidFill>
                   <a:srgbClr val="A6ADB6"/>
                 </a:solidFill>
@@ -17445,212 +16665,7 @@
                 <a:cs typeface="IBM Plex Mono Medium"/>
                 <a:ea typeface="IBM Plex Mono Medium"/>
               </a:rPr>
-              <a:t>КБ</a:t>
-            </a:r>
-          </a:p>
-        </p:txBody>
-      </p:sp>
-      <p:sp>
-        <p:nvSpPr>
-          <p:cNvPr id="17" name="TextBox 16"/>
-          <p:cNvSpPr txBox="1"/>
-          <p:nvPr/>
-        </p:nvSpPr>
-        <p:spPr>
-          <a:xfrm>
-            <a:off x="749808" y="5274330"/>
-            <a:ext cx="3177384" cy="243278"/>
-          </a:xfrm>
-          <a:prstGeom prst="rect">
-            <a:avLst/>
-          </a:prstGeom>
-          <a:noFill/>
-        </p:spPr>
-        <p:txBody>
-          <a:bodyPr wrap="none" lIns="0" rIns="0" tIns="0" bIns="0" anchor="t">
-            <a:spAutoFit/>
-          </a:bodyPr>
-          <a:lstStyle/>
-          <a:p>
-            <a:pPr algn="l">
-              <a:lnSpc>
-                <a:spcPts val="1349"/>
-              </a:lnSpc>
-            </a:pPr>
-            <a:r>
-              <a:rPr sz="950">
-                <a:solidFill>
-                  <a:srgbClr val="A6ADB6"/>
-                </a:solidFill>
-                <a:latin typeface="GQ Text"/>
-                <a:cs typeface="GQ Text"/>
-                <a:ea typeface="GQ Text"/>
-              </a:rPr>
-              <a:t>код и стили в сжатом виде</a:t>
-            </a:r>
-          </a:p>
-        </p:txBody>
-      </p:sp>
-      <p:sp>
-        <p:nvSpPr>
-          <p:cNvPr id="18" name="TextBox 17"/>
-          <p:cNvSpPr txBox="1"/>
-          <p:nvPr/>
-        </p:nvSpPr>
-        <p:spPr>
-          <a:xfrm>
-            <a:off x="4201512" y="4504466"/>
-            <a:ext cx="3177384" cy="565546"/>
-          </a:xfrm>
-          <a:prstGeom prst="rect">
-            <a:avLst/>
-          </a:prstGeom>
-          <a:noFill/>
-        </p:spPr>
-        <p:txBody>
-          <a:bodyPr wrap="none" lIns="0" rIns="0" tIns="0" bIns="0" anchor="t">
-            <a:spAutoFit/>
-          </a:bodyPr>
-          <a:lstStyle/>
-          <a:p>
-            <a:pPr algn="l">
-              <a:lnSpc>
-                <a:spcPts val="3136"/>
-              </a:lnSpc>
-            </a:pPr>
-            <a:r>
-              <a:rPr sz="3200" spc="-96">
-                <a:solidFill>
-                  <a:srgbClr val="EEEBE5"/>
-                </a:solidFill>
-                <a:latin typeface="GQ Text Bold"/>
-                <a:cs typeface="GQ Text Bold"/>
-                <a:ea typeface="GQ Text Bold"/>
-              </a:rPr>
-              <a:t>0</a:t>
-            </a:r>
-          </a:p>
-        </p:txBody>
-      </p:sp>
-      <p:sp>
-        <p:nvSpPr>
-          <p:cNvPr id="19" name="TextBox 18"/>
-          <p:cNvSpPr txBox="1"/>
-          <p:nvPr/>
-        </p:nvSpPr>
-        <p:spPr>
-          <a:xfrm>
-            <a:off x="4201512" y="5033517"/>
-            <a:ext cx="3177384" cy="216408"/>
-          </a:xfrm>
-          <a:prstGeom prst="rect">
-            <a:avLst/>
-          </a:prstGeom>
-          <a:noFill/>
-        </p:spPr>
-        <p:txBody>
-          <a:bodyPr wrap="none" lIns="0" rIns="0" tIns="0" bIns="0" anchor="t">
-            <a:spAutoFit/>
-          </a:bodyPr>
-          <a:lstStyle/>
-          <a:p>
-            <a:pPr algn="l">
-              <a:lnSpc>
-                <a:spcPts val="1200"/>
-              </a:lnSpc>
-            </a:pPr>
-            <a:r>
-              <a:rPr sz="800" spc="64">
-                <a:solidFill>
-                  <a:srgbClr val="A6ADB6"/>
-                </a:solidFill>
-                <a:latin typeface="IBM Plex Mono Medium"/>
-                <a:cs typeface="IBM Plex Mono Medium"/>
-                <a:ea typeface="IBM Plex Mono Medium"/>
-              </a:rPr>
-              <a:t>ЗАПРОСОВ В СЕТЬ</a:t>
-            </a:r>
-          </a:p>
-        </p:txBody>
-      </p:sp>
-      <p:sp>
-        <p:nvSpPr>
-          <p:cNvPr id="20" name="TextBox 19"/>
-          <p:cNvSpPr txBox="1"/>
-          <p:nvPr/>
-        </p:nvSpPr>
-        <p:spPr>
-          <a:xfrm>
-            <a:off x="4201512" y="5274330"/>
-            <a:ext cx="3177384" cy="243278"/>
-          </a:xfrm>
-          <a:prstGeom prst="rect">
-            <a:avLst/>
-          </a:prstGeom>
-          <a:noFill/>
-        </p:spPr>
-        <p:txBody>
-          <a:bodyPr wrap="none" lIns="0" rIns="0" tIns="0" bIns="0" anchor="t">
-            <a:spAutoFit/>
-          </a:bodyPr>
-          <a:lstStyle/>
-          <a:p>
-            <a:pPr algn="l">
-              <a:lnSpc>
-                <a:spcPts val="1349"/>
-              </a:lnSpc>
-            </a:pPr>
-            <a:r>
-              <a:rPr sz="950">
-                <a:solidFill>
-                  <a:srgbClr val="A6ADB6"/>
-                </a:solidFill>
-                <a:latin typeface="GQ Text"/>
-                <a:cs typeface="GQ Text"/>
-                <a:ea typeface="GQ Text"/>
-              </a:rPr>
-              <a:t>после первой загрузки</a:t>
-            </a:r>
-          </a:p>
-        </p:txBody>
-      </p:sp>
-      <p:sp>
-        <p:nvSpPr>
-          <p:cNvPr id="21" name="TextBox 20"/>
-          <p:cNvSpPr txBox="1"/>
-          <p:nvPr/>
-        </p:nvSpPr>
-        <p:spPr>
-          <a:xfrm>
-            <a:off x="749808" y="6285788"/>
-            <a:ext cx="10692079" cy="209194"/>
-          </a:xfrm>
-          <a:prstGeom prst="rect">
-            <a:avLst/>
-          </a:prstGeom>
-          <a:noFill/>
-        </p:spPr>
-        <p:txBody>
-          <a:bodyPr wrap="none" lIns="0" rIns="0" tIns="0" bIns="0" anchor="t">
-            <a:spAutoFit/>
-          </a:bodyPr>
-          <a:lstStyle/>
-          <a:p>
-            <a:pPr algn="l">
-              <a:lnSpc>
-                <a:spcPts val="1160"/>
-              </a:lnSpc>
-            </a:pPr>
-            <a:r>
-              <a:rPr sz="850">
-                <a:solidFill>
-                  <a:srgbClr val="A6ADB6"/>
-                </a:solidFill>
-                <a:latin typeface="GQ Text"/>
-                <a:cs typeface="GQ Text"/>
-                <a:ea typeface="GQ Text"/>
-              </a:rPr>
-              <a:t>Приложение целиком, вместе со шрифтом и изображениями, занимает около 1,4 МБ. Скачивается один раз и дальше работает без интернета — проверено замером.</a:t>
+              <a:t>TILASHAR-KZ.VERCEL.APP  ·  МАЛЫШКО МАКАР ЕВГЕНЬЕВИЧ · 6 «Б» КЛАСС · ШКОЛА №35</a:t>
             </a:r>
           </a:p>
         </p:txBody>

--- a/презентация/Тілашар-защита.pptx
+++ b/презентация/Тілашар-защита.pptx
@@ -509,34 +509,34 @@
           <a:lstStyle/>
           <a:p>
             <a:r>
-              <a:t>Здравствуйте. Меня зовут Макар Малышко, я учусь в 6 «б» классе школы №35.</a:t>
+              <a:t>Здравствуйте. Меня зовут Малышко Макар, я учусь в 6 «б» классе школы №35.</a:t>
             </a:r>
           </a:p>
           <a:p/>
           <a:p>
             <a:r>
-              <a:t>Я сделал приложение для изучения казахского языка. Первая версия победила</a:t>
-            </a:r>
-          </a:p>
-          <a:p>
-            <a:r>
-              <a:t>на школьной олимпиаде — сегодня показываю вторую и рассказываю, что в ней</a:t>
-            </a:r>
-          </a:p>
-          <a:p>
-            <a:r>
-              <a:t>появилось и почему.</a:t>
+              <a:t>Я прошёл краткий курс по искусственному интеллекту и сделал приложение</a:t>
+            </a:r>
+          </a:p>
+          <a:p>
+            <a:r>
+              <a:t>для изучения казахского языка — «Тілашар». Оно рассчитано на учеников</a:t>
+            </a:r>
+          </a:p>
+          <a:p>
+            <a:r>
+              <a:t>с 5 по 11 класс.</a:t>
             </a:r>
           </a:p>
           <a:p/>
           <a:p>
             <a:r>
-              <a:t>Доклад займёт около семи минут. Отвечу на четыре вопроса: что создано,</a:t>
-            </a:r>
-          </a:p>
-          <a:p>
-            <a:r>
-              <a:t>для чего, как и что здесь особенного.</a:t>
+              <a:t>Доклад займёт около семи минут. Расскажу: как я его сделал, зачем оно</a:t>
+            </a:r>
+          </a:p>
+          <a:p>
+            <a:r>
+              <a:t>нужно, что внутри и что я хочу делать дальше.</a:t>
             </a:r>
           </a:p>
         </p:txBody>
@@ -606,23 +606,34 @@
           <a:lstStyle/>
           <a:p>
             <a:r>
-              <a:t>Здесь важно показать масштаб одним взглядом: это не демонстрационный пример</a:t>
-            </a:r>
-          </a:p>
-          <a:p>
-            <a:r>
-              <a:t>из трёх уроков, а курс, которым можно заниматься весь учебный год.</a:t>
+              <a:t>Здесь важно сказать своими словами и спокойно.</a:t>
             </a:r>
           </a:p>
           <a:p/>
           <a:p>
             <a:r>
-              <a:t>Если спросят про уровни: уровень — ориентир, а не замок. Уроки не запираются,</a:t>
-            </a:r>
-          </a:p>
-          <a:p>
-            <a:r>
-              <a:t>переключиться можно в одно касание.</a:t>
+              <a:t>Курс по искусственному интеллекту дал главное: как правильно поставить</a:t>
+            </a:r>
+          </a:p>
+          <a:p>
+            <a:r>
+              <a:t>задачу нейросети и как проверить то, что она сделала. Код помогала писать</a:t>
+            </a:r>
+          </a:p>
+          <a:p>
+            <a:r>
+              <a:t>нейросеть — но что именно делать, зачем и правильно ли получилось, решал я.</a:t>
+            </a:r>
+          </a:p>
+          <a:p/>
+          <a:p>
+            <a:r>
+              <a:t>Если спросят «а что здесь твоего?» — отвечать так же прямо: замысел,</a:t>
+            </a:r>
+          </a:p>
+          <a:p>
+            <a:r>
+              <a:t>содержание уроков, проверка и все решения.</a:t>
             </a:r>
           </a:p>
         </p:txBody>
@@ -697,23 +708,34 @@
           </a:p>
           <a:p>
             <a:r>
-              <a:t>аудиторией, и это нормально. Ниша казахского остаётся незакрытой — её я</a:t>
-            </a:r>
-          </a:p>
-          <a:p>
-            <a:r>
-              <a:t>и попробовал закрыть.</a:t>
+              <a:t>аудиторией, и это нормально. Место для казахского осталось пустым — его</a:t>
+            </a:r>
+          </a:p>
+          <a:p>
+            <a:r>
+              <a:t>я и попробовал занять.</a:t>
             </a:r>
           </a:p>
           <a:p/>
           <a:p>
             <a:r>
-              <a:t>Список курсов я проверил на их сайте в день подготовки и поставил дату.</a:t>
-            </a:r>
-          </a:p>
-          <a:p>
-            <a:r>
-              <a:t>Если жюри захочет — можно открыть сайт прямо сейчас.</a:t>
+              <a:t>Главная мысль слайда: приложение должно усилить интерес к языку и дать</a:t>
+            </a:r>
+          </a:p>
+          <a:p>
+            <a:r>
+              <a:t>больше практики, а не заменить учителя.</a:t>
+            </a:r>
+          </a:p>
+          <a:p/>
+          <a:p>
+            <a:r>
+              <a:t>Список курсов я проверил на их сайте и поставил дату. Если жюри захочет —</a:t>
+            </a:r>
+          </a:p>
+          <a:p>
+            <a:r>
+              <a:t>можно открыть сайт прямо сейчас.</a:t>
             </a:r>
           </a:p>
         </p:txBody>
@@ -783,34 +805,28 @@
           <a:lstStyle/>
           <a:p>
             <a:r>
-              <a:t>Самый частый вопрос жюри: «что здесь сделал ты, а что нейросеть?».</a:t>
-            </a:r>
-          </a:p>
-          <a:p>
-            <a:r>
-              <a:t>Отвечать спокойно и честно.</a:t>
+              <a:t>Не перечислять все пять — назвать «Учиться» и «Практику», остальное видно</a:t>
+            </a:r>
+          </a:p>
+          <a:p>
+            <a:r>
+              <a:t>на слайде.</a:t>
             </a:r>
           </a:p>
           <a:p/>
           <a:p>
             <a:r>
-              <a:t>Код помогала писать нейросеть. Моя работа — поставить вопрос, измерить,</a:t>
-            </a:r>
-          </a:p>
-          <a:p>
-            <a:r>
-              <a:t>найти причины и проверить результат. Первая версия писалась без такой</a:t>
-            </a:r>
-          </a:p>
-          <a:p>
-            <a:r>
-              <a:t>проверки, и в ней половина задуманного просто не работала.</a:t>
-            </a:r>
-          </a:p>
-          <a:p/>
-          <a:p>
-            <a:r>
-              <a:t>Именно поэтому я и сделал так, чтобы приложение проверяло себя само.</a:t>
+              <a:t>Смысл: это не список уроков, а курс на весь учебный год с тремя уровнями —</a:t>
+            </a:r>
+          </a:p>
+          <a:p>
+            <a:r>
+              <a:t>5–7, 7–9 и 9–11 класс. Уровень подсказывает, откуда начать, но ничего</a:t>
+            </a:r>
+          </a:p>
+          <a:p>
+            <a:r>
+              <a:t>не запирает: перейти можно в одно касание.</a:t>
             </a:r>
           </a:p>
         </p:txBody>
@@ -880,44 +896,44 @@
           <a:lstStyle/>
           <a:p>
             <a:r>
-              <a:t>Это ядро доклада. Не читать по пунктам — рассказать про первый и третий,</a:t>
-            </a:r>
-          </a:p>
-          <a:p>
-            <a:r>
-              <a:t>остальные видны на слайде.</a:t>
+              <a:t>Самый частый вопрос жюри: «что здесь сделал ты, а что нейросеть?».</a:t>
+            </a:r>
+          </a:p>
+          <a:p>
+            <a:r>
+              <a:t>Отвечать спокойно и честно.</a:t>
             </a:r>
           </a:p>
           <a:p/>
           <a:p>
             <a:r>
-              <a:t>Про первый стоит сделать паузу: в казахском есть буквы, которых физически</a:t>
-            </a:r>
-          </a:p>
-          <a:p>
-            <a:r>
-              <a:t>нет на русской клавиатуре. Обычный тренажёр сравнивает ответ буква в букву,</a:t>
-            </a:r>
-          </a:p>
-          <a:p>
-            <a:r>
-              <a:t>и ученик получает «неверно» за правильный ответ. Именно из-за этого первую</a:t>
-            </a:r>
-          </a:p>
-          <a:p>
-            <a:r>
-              <a:t>версию бросали.</a:t>
+              <a:t>Код помогала писать нейросеть. Моя работа — поставить задачу, проверить</a:t>
+            </a:r>
+          </a:p>
+          <a:p>
+            <a:r>
+              <a:t>результат и найти причину, если что-то не работает. В первой версии такой</a:t>
+            </a:r>
+          </a:p>
+          <a:p>
+            <a:r>
+              <a:t>проверки не было, и часть задуманного просто не работала. Поэтому во второй</a:t>
+            </a:r>
+          </a:p>
+          <a:p>
+            <a:r>
+              <a:t>версии приложение проверяет себя само при каждом изменении.</a:t>
             </a:r>
           </a:p>
           <a:p/>
           <a:p>
             <a:r>
-              <a:t>Если спросят подробнее про окончания — можно показать вживую на слайде 07:</a:t>
-            </a:r>
-          </a:p>
-          <a:p>
-            <a:r>
-              <a:t>подставить любое слово прямо при жюри.</a:t>
+              <a:t>Про деньги: все сервисы бесплатные. Это важно — значит, повторить может</a:t>
+            </a:r>
+          </a:p>
+          <a:p>
+            <a:r>
+              <a:t>любой школьник.</a:t>
             </a:r>
           </a:p>
         </p:txBody>
@@ -987,23 +1003,44 @@
           <a:lstStyle/>
           <a:p>
             <a:r>
-              <a:t>Коротко: это не список уроков, а система, которая возвращает материал тогда,</a:t>
-            </a:r>
-          </a:p>
-          <a:p>
-            <a:r>
-              <a:t>когда он начинает забываться.</a:t>
+              <a:t>Это ядро доклада. Не читать по пунктам — рассказать про первый и третий,</a:t>
+            </a:r>
+          </a:p>
+          <a:p>
+            <a:r>
+              <a:t>остальные видны на слайде.</a:t>
             </a:r>
           </a:p>
           <a:p/>
           <a:p>
             <a:r>
-              <a:t>Если останется время — можно показать «Таблицы окончаний»: подставить любое</a:t>
-            </a:r>
-          </a:p>
-          <a:p>
-            <a:r>
-              <a:t>слово прямо при жюри.</a:t>
+              <a:t>Про первый сделать паузу: в казахском есть буквы, которых физически нет</a:t>
+            </a:r>
+          </a:p>
+          <a:p>
+            <a:r>
+              <a:t>на русской клавиатуре. Обычный тренажёр сравнивает ответ буква в букву,</a:t>
+            </a:r>
+          </a:p>
+          <a:p>
+            <a:r>
+              <a:t>и ученик получает «неверно» за правильный ответ. Именно из-за этого первую</a:t>
+            </a:r>
+          </a:p>
+          <a:p>
+            <a:r>
+              <a:t>версию бросали.</a:t>
+            </a:r>
+          </a:p>
+          <a:p/>
+          <a:p>
+            <a:r>
+              <a:t>Про третий: приложение само помнит, что начинает забываться, и возвращает</a:t>
+            </a:r>
+          </a:p>
+          <a:p>
+            <a:r>
+              <a:t>это задание. Ученику не нужно решать, что повторять.</a:t>
             </a:r>
           </a:p>
         </p:txBody>
@@ -1201,7 +1238,17 @@
           </a:p>
           <a:p>
             <a:r>
-              <a:t>мешало то, что он не мог нажать нужную букву.</a:t>
+              <a:t>мешало то, что он не мог нажать нужную букву. Это я убрал — а дальше</a:t>
+            </a:r>
+          </a:p>
+          <a:p>
+            <a:r>
+              <a:t>приложение нужно проверить на живом классе, и без учителей мне это</a:t>
+            </a:r>
+          </a:p>
+          <a:p>
+            <a:r>
+              <a:t>не сделать.</a:t>
             </a:r>
           </a:p>
           <a:p/>
@@ -1218,17 +1265,17 @@
           </a:p>
           <a:p>
             <a:r>
-              <a:t>   Код помогала писать нейросеть. Я поставил вопрос, измерил, нашёл причины</a:t>
-            </a:r>
-          </a:p>
-          <a:p>
-            <a:r>
-              <a:t>   и проверил результат. Первая версия писалась без такой проверки — потому</a:t>
-            </a:r>
-          </a:p>
-          <a:p>
-            <a:r>
-              <a:t>   в ней половина задуманного и не работала.</a:t>
+              <a:t>   Код помогала писать нейросеть. Я ставил задачу, проверял результат</a:t>
+            </a:r>
+          </a:p>
+          <a:p>
+            <a:r>
+              <a:t>   и искал причину, если что-то не работало. Содержание уроков и все</a:t>
+            </a:r>
+          </a:p>
+          <a:p>
+            <a:r>
+              <a:t>   решения — мои.</a:t>
             </a:r>
           </a:p>
           <a:p/>
@@ -1239,12 +1286,12 @@
           </a:p>
           <a:p>
             <a:r>
-              <a:t>   Тогда я показывал замысел, и он победил. Сейчас показываю проверку этого</a:t>
-            </a:r>
-          </a:p>
-          <a:p>
-            <a:r>
-              <a:t>   замысла на данных и то, что из неё вышло.</a:t>
+              <a:t>   Тогда я показывал замысел, и он победил. Сейчас показываю работающее</a:t>
+            </a:r>
+          </a:p>
+          <a:p>
+            <a:r>
+              <a:t>   приложение и то, что в нём проверено.</a:t>
             </a:r>
           </a:p>
           <a:p/>
@@ -1271,17 +1318,12 @@
           </a:p>
           <a:p>
             <a:r>
-              <a:t>   Нет, и это касается всего текста. Носитель языка не видел ни одной строки,</a:t>
-            </a:r>
-          </a:p>
-          <a:p>
-            <a:r>
-              <a:t>   поэтому весь казахский текст — 168 тысяч знаков — выгружен учителю</a:t>
-            </a:r>
-          </a:p>
-          <a:p>
-            <a:r>
-              <a:t>   на проверку.</a:t>
+              <a:t>   Нет. Весь казахский текст выгружен учителю на проверку — это первый</a:t>
+            </a:r>
+          </a:p>
+          <a:p>
+            <a:r>
+              <a:t>   пункт плана развития.</a:t>
             </a:r>
           </a:p>
           <a:p/>
@@ -1293,6 +1335,11 @@
           <a:p>
             <a:r>
               <a:t>   Нет. Открывается по ссылке, работает без интернета, ставится на телефон.</a:t>
+            </a:r>
+          </a:p>
+          <a:p>
+            <a:r>
+              <a:t>   Все сервисы, на которых оно сделано, тоже бесплатные.</a:t>
             </a:r>
           </a:p>
         </p:txBody>
@@ -8507,7 +8554,7 @@
                 <a:cs typeface="GQ Text"/>
                 <a:ea typeface="GQ Text"/>
               </a:rPr>
-              <a:t>Приложение, которое учит казахскому языку тех, кто говорит по-русски.</a:t>
+              <a:t>Приложение для учеников 5–11 классов, которые говорят по-русски и учат</a:t>
             </a:r>
           </a:p>
           <a:p>
@@ -8525,7 +8572,7 @@
                 <a:cs typeface="GQ Text"/>
                 <a:ea typeface="GQ Text"/>
               </a:rPr>
-              <a:t>Вторая версия: первая победила на школьной олимпиаде.</a:t>
+              <a:t>казахский язык. Бесплатное, открывается по ссылке.</a:t>
             </a:r>
           </a:p>
         </p:txBody>
@@ -8842,7 +8889,7 @@
                 <a:cs typeface="GQ Text Bold"/>
                 <a:ea typeface="GQ Text Bold"/>
               </a:rPr>
-              <a:t>3</a:t>
+              <a:t>5–11</a:t>
             </a:r>
           </a:p>
         </p:txBody>
@@ -8883,7 +8930,7 @@
                 <a:cs typeface="IBM Plex Mono Medium"/>
                 <a:ea typeface="IBM Plex Mono Medium"/>
               </a:rPr>
-              <a:t>УРОВНЯ ПО КЛАССАМ</a:t>
+              <a:t>КЛАССЫ</a:t>
             </a:r>
           </a:p>
         </p:txBody>
@@ -9043,7 +9090,7 @@
                 <a:cs typeface="IBM Plex Mono SemiBold"/>
                 <a:ea typeface="IBM Plex Mono SemiBold"/>
               </a:rPr>
-              <a:t>ЧТО СОЗДАНО</a:t>
+              <a:t>КАК ЭТО ПОЯВИЛОСЬ</a:t>
             </a:r>
           </a:p>
         </p:txBody>
@@ -9097,8 +9144,8 @@
         </p:nvSpPr>
         <p:spPr>
           <a:xfrm>
-            <a:off x="749808" y="795202"/>
-            <a:ext cx="10692079" cy="1249644"/>
+            <a:off x="749808" y="802812"/>
+            <a:ext cx="10692079" cy="1134545"/>
           </a:xfrm>
           <a:prstGeom prst="rect">
             <a:avLst/>
@@ -9113,11 +9160,11 @@
           <a:p>
             <a:pPr algn="l">
               <a:lnSpc>
-                <a:spcPts val="4066"/>
-              </a:lnSpc>
-            </a:pPr>
-            <a:r>
-              <a:rPr sz="3800" spc="-84">
+                <a:spcPts val="3692"/>
+              </a:lnSpc>
+            </a:pPr>
+            <a:r>
+              <a:rPr sz="3450" spc="-76">
                 <a:solidFill>
                   <a:srgbClr val="1B222B"/>
                 </a:solidFill>
@@ -9125,17 +9172,17 @@
                 <a:cs typeface="GQ Text Bold"/>
                 <a:ea typeface="GQ Text Bold"/>
               </a:rPr>
-              <a:t>Приложение, в котором казахский учат</a:t>
-            </a:r>
-          </a:p>
-          <a:p>
-            <a:pPr algn="l">
-              <a:lnSpc>
-                <a:spcPts val="4066"/>
-              </a:lnSpc>
-            </a:pPr>
-            <a:r>
-              <a:rPr sz="3800" spc="-84">
+              <a:t>Прошёл краткий курс по искусственному</a:t>
+            </a:r>
+          </a:p>
+          <a:p>
+            <a:pPr algn="l">
+              <a:lnSpc>
+                <a:spcPts val="3692"/>
+              </a:lnSpc>
+            </a:pPr>
+            <a:r>
+              <a:rPr sz="3450" spc="-76">
                 <a:solidFill>
                   <a:srgbClr val="1B222B"/>
                 </a:solidFill>
@@ -9143,7 +9190,7 @@
                 <a:cs typeface="GQ Text Bold"/>
                 <a:ea typeface="GQ Text Bold"/>
               </a:rPr>
-              <a:t>каждый день по десять минут</a:t>
+              <a:t>интеллекту — и сделал приложение, а не реферат</a:t>
             </a:r>
           </a:p>
         </p:txBody>
@@ -9156,7 +9203,7 @@
         </p:nvSpPr>
         <p:spPr>
           <a:xfrm>
-            <a:off x="749808" y="2019381"/>
+            <a:off x="749808" y="1924258"/>
             <a:ext cx="9195188" cy="567349"/>
           </a:xfrm>
           <a:prstGeom prst="rect">
@@ -9184,7 +9231,7 @@
                 <a:cs typeface="GQ Text"/>
                 <a:ea typeface="GQ Text"/>
               </a:rPr>
-              <a:t>Открывается в браузере и ставится на телефон. После первой загрузки работает без интернета — им можно</a:t>
+              <a:t>Я хотел проверить, может ли школьник с помощью нейросети довести идею до готовой программы, которой</a:t>
             </a:r>
           </a:p>
           <a:p>
@@ -9202,7 +9249,7 @@
                 <a:cs typeface="GQ Text"/>
                 <a:ea typeface="GQ Text"/>
               </a:rPr>
-              <a:t>заниматься где угодно.</a:t>
+              <a:t>действительно пользуются. Оказалось — может.</a:t>
             </a:r>
           </a:p>
         </p:txBody>
@@ -9215,8 +9262,8 @@
         </p:nvSpPr>
         <p:spPr>
           <a:xfrm>
-            <a:off x="749808" y="2946400"/>
-            <a:ext cx="2522143" cy="1770888"/>
+            <a:off x="749808" y="2851277"/>
+            <a:ext cx="2522143" cy="1948688"/>
           </a:xfrm>
           <a:prstGeom prst="rect">
             <a:avLst/>
@@ -9247,8 +9294,8 @@
         </p:nvSpPr>
         <p:spPr>
           <a:xfrm>
-            <a:off x="749808" y="2946400"/>
-            <a:ext cx="32004" cy="1770888"/>
+            <a:off x="749808" y="2851277"/>
+            <a:ext cx="32004" cy="1948688"/>
           </a:xfrm>
           <a:prstGeom prst="rect">
             <a:avLst/>
@@ -9277,7 +9324,7 @@
         </p:nvSpPr>
         <p:spPr>
           <a:xfrm>
-            <a:off x="1005840" y="3181096"/>
+            <a:off x="1005840" y="3085973"/>
             <a:ext cx="2010079" cy="189357"/>
           </a:xfrm>
           <a:prstGeom prst="rect">
@@ -9305,7 +9352,7 @@
                 <a:cs typeface="IBM Plex Mono SemiBold"/>
                 <a:ea typeface="IBM Plex Mono SemiBold"/>
               </a:rPr>
-              <a:t>КУРС</a:t>
+              <a:t>1</a:t>
             </a:r>
           </a:p>
         </p:txBody>
@@ -9318,7 +9365,7 @@
         </p:nvSpPr>
         <p:spPr>
           <a:xfrm>
-            <a:off x="1005840" y="3419906"/>
+            <a:off x="1005840" y="3324783"/>
             <a:ext cx="2010079" cy="308381"/>
           </a:xfrm>
           <a:prstGeom prst="rect">
@@ -9346,7 +9393,7 @@
                 <a:cs typeface="GQ Text Bold"/>
                 <a:ea typeface="GQ Text Bold"/>
               </a:rPr>
-              <a:t>26 уроков</a:t>
+              <a:t>Научился</a:t>
             </a:r>
           </a:p>
         </p:txBody>
@@ -9359,7 +9406,7 @@
         </p:nvSpPr>
         <p:spPr>
           <a:xfrm>
-            <a:off x="1005840" y="3798824"/>
+            <a:off x="1005840" y="3703701"/>
             <a:ext cx="204216" cy="252475"/>
           </a:xfrm>
           <a:prstGeom prst="rect">
@@ -9400,7 +9447,7 @@
         </p:nvSpPr>
         <p:spPr>
           <a:xfrm>
-            <a:off x="1210056" y="3798824"/>
+            <a:off x="1210056" y="3703701"/>
             <a:ext cx="1805863" cy="430276"/>
           </a:xfrm>
           <a:prstGeom prst="rect">
@@ -9428,7 +9475,7 @@
                 <a:cs typeface="GQ Text"/>
                 <a:ea typeface="GQ Text"/>
               </a:rPr>
-              <a:t>Три уровня: 5–7, 7–9 и 9–11</a:t>
+              <a:t>Краткий курс по</a:t>
             </a:r>
           </a:p>
           <a:p>
@@ -9446,7 +9493,7 @@
                 <a:cs typeface="GQ Text"/>
                 <a:ea typeface="GQ Text"/>
               </a:rPr>
-              <a:t>класс</a:t>
+              <a:t>искусственному интеллекту</a:t>
             </a:r>
           </a:p>
         </p:txBody>
@@ -9459,7 +9506,7 @@
         </p:nvSpPr>
         <p:spPr>
           <a:xfrm>
-            <a:off x="1005840" y="4255008"/>
+            <a:off x="1005840" y="4159885"/>
             <a:ext cx="204216" cy="252475"/>
           </a:xfrm>
           <a:prstGeom prst="rect">
@@ -9500,8 +9547,8 @@
         </p:nvSpPr>
         <p:spPr>
           <a:xfrm>
-            <a:off x="1210056" y="4255008"/>
-            <a:ext cx="1805863" cy="252475"/>
+            <a:off x="1210056" y="4159885"/>
+            <a:ext cx="1805863" cy="430276"/>
           </a:xfrm>
           <a:prstGeom prst="rect">
             <a:avLst/>
@@ -9528,7 +9575,25 @@
                 <a:cs typeface="GQ Text"/>
                 <a:ea typeface="GQ Text"/>
               </a:rPr>
-              <a:t>Урок идёт четырьмя шагами</a:t>
+              <a:t>Как поставить задачу и</a:t>
+            </a:r>
+          </a:p>
+          <a:p>
+            <a:pPr algn="l">
+              <a:lnSpc>
+                <a:spcPts val="1400"/>
+              </a:lnSpc>
+            </a:pPr>
+            <a:r>
+              <a:rPr sz="1000">
+                <a:solidFill>
+                  <a:srgbClr val="1B222B"/>
+                </a:solidFill>
+                <a:latin typeface="GQ Text"/>
+                <a:cs typeface="GQ Text"/>
+                <a:ea typeface="GQ Text"/>
+              </a:rPr>
+              <a:t>проверить ответ</a:t>
             </a:r>
           </a:p>
         </p:txBody>
@@ -9541,8 +9606,8 @@
         </p:nvSpPr>
         <p:spPr>
           <a:xfrm>
-            <a:off x="3473119" y="2946400"/>
-            <a:ext cx="2522143" cy="1770888"/>
+            <a:off x="3473119" y="2851277"/>
+            <a:ext cx="2522143" cy="1948688"/>
           </a:xfrm>
           <a:prstGeom prst="rect">
             <a:avLst/>
@@ -9573,8 +9638,8 @@
         </p:nvSpPr>
         <p:spPr>
           <a:xfrm>
-            <a:off x="3473119" y="2946400"/>
-            <a:ext cx="32004" cy="1770888"/>
+            <a:off x="3473119" y="2851277"/>
+            <a:ext cx="32004" cy="1948688"/>
           </a:xfrm>
           <a:prstGeom prst="rect">
             <a:avLst/>
@@ -9603,7 +9668,7 @@
         </p:nvSpPr>
         <p:spPr>
           <a:xfrm>
-            <a:off x="3729151" y="3181096"/>
+            <a:off x="3729151" y="3085973"/>
             <a:ext cx="2010079" cy="189357"/>
           </a:xfrm>
           <a:prstGeom prst="rect">
@@ -9631,7 +9696,7 @@
                 <a:cs typeface="IBM Plex Mono SemiBold"/>
                 <a:ea typeface="IBM Plex Mono SemiBold"/>
               </a:rPr>
-              <a:t>ЗАДАНИЯ</a:t>
+              <a:t>2</a:t>
             </a:r>
           </a:p>
         </p:txBody>
@@ -9644,7 +9709,7 @@
         </p:nvSpPr>
         <p:spPr>
           <a:xfrm>
-            <a:off x="3729151" y="3419906"/>
+            <a:off x="3729151" y="3324783"/>
             <a:ext cx="2010079" cy="308381"/>
           </a:xfrm>
           <a:prstGeom prst="rect">
@@ -9672,7 +9737,7 @@
                 <a:cs typeface="GQ Text Bold"/>
                 <a:ea typeface="GQ Text Bold"/>
               </a:rPr>
-              <a:t>225 упражнений</a:t>
+              <a:t>Сделал</a:t>
             </a:r>
           </a:p>
         </p:txBody>
@@ -9685,7 +9750,7 @@
         </p:nvSpPr>
         <p:spPr>
           <a:xfrm>
-            <a:off x="3729151" y="3798824"/>
+            <a:off x="3729151" y="3703701"/>
             <a:ext cx="204216" cy="252475"/>
           </a:xfrm>
           <a:prstGeom prst="rect">
@@ -9726,8 +9791,8 @@
         </p:nvSpPr>
         <p:spPr>
           <a:xfrm>
-            <a:off x="3933367" y="3798824"/>
-            <a:ext cx="1805863" cy="252475"/>
+            <a:off x="3933367" y="3703701"/>
+            <a:ext cx="1805863" cy="430276"/>
           </a:xfrm>
           <a:prstGeom prst="rect">
             <a:avLst/>
@@ -9754,7 +9819,25 @@
                 <a:cs typeface="GQ Text"/>
                 <a:ea typeface="GQ Text"/>
               </a:rPr>
-              <a:t>Семь разных типов</a:t>
+              <a:t>Приложение, а не доклад о</a:t>
+            </a:r>
+          </a:p>
+          <a:p>
+            <a:pPr algn="l">
+              <a:lnSpc>
+                <a:spcPts val="1400"/>
+              </a:lnSpc>
+            </a:pPr>
+            <a:r>
+              <a:rPr sz="1000">
+                <a:solidFill>
+                  <a:srgbClr val="1B222B"/>
+                </a:solidFill>
+                <a:latin typeface="GQ Text"/>
+                <a:cs typeface="GQ Text"/>
+                <a:ea typeface="GQ Text"/>
+              </a:rPr>
+              <a:t>приложении</a:t>
             </a:r>
           </a:p>
         </p:txBody>
@@ -9767,7 +9850,7 @@
         </p:nvSpPr>
         <p:spPr>
           <a:xfrm>
-            <a:off x="3729151" y="4077208"/>
+            <a:off x="3729151" y="4159885"/>
             <a:ext cx="204216" cy="252475"/>
           </a:xfrm>
           <a:prstGeom prst="rect">
@@ -9808,7 +9891,7 @@
         </p:nvSpPr>
         <p:spPr>
           <a:xfrm>
-            <a:off x="3933367" y="4077208"/>
+            <a:off x="3933367" y="4159885"/>
             <a:ext cx="1805863" cy="252475"/>
           </a:xfrm>
           <a:prstGeom prst="rect">
@@ -9836,7 +9919,7 @@
                 <a:cs typeface="GQ Text"/>
                 <a:ea typeface="GQ Text"/>
               </a:rPr>
-              <a:t>Разбор каждой ошибки</a:t>
+              <a:t>26 уроков и 225 заданий</a:t>
             </a:r>
           </a:p>
         </p:txBody>
@@ -9849,8 +9932,8 @@
         </p:nvSpPr>
         <p:spPr>
           <a:xfrm>
-            <a:off x="6196431" y="2946400"/>
-            <a:ext cx="2522143" cy="1770888"/>
+            <a:off x="6196431" y="2851277"/>
+            <a:ext cx="2522143" cy="1948688"/>
           </a:xfrm>
           <a:prstGeom prst="rect">
             <a:avLst/>
@@ -9881,8 +9964,8 @@
         </p:nvSpPr>
         <p:spPr>
           <a:xfrm>
-            <a:off x="6196431" y="2946400"/>
-            <a:ext cx="32004" cy="1770888"/>
+            <a:off x="6196431" y="2851277"/>
+            <a:ext cx="32004" cy="1948688"/>
           </a:xfrm>
           <a:prstGeom prst="rect">
             <a:avLst/>
@@ -9911,7 +9994,7 @@
         </p:nvSpPr>
         <p:spPr>
           <a:xfrm>
-            <a:off x="6452463" y="3181096"/>
+            <a:off x="6452463" y="3085973"/>
             <a:ext cx="2010079" cy="189357"/>
           </a:xfrm>
           <a:prstGeom prst="rect">
@@ -9939,7 +10022,7 @@
                 <a:cs typeface="IBM Plex Mono SemiBold"/>
                 <a:ea typeface="IBM Plex Mono SemiBold"/>
               </a:rPr>
-              <a:t>СПРАВКА</a:t>
+              <a:t>3</a:t>
             </a:r>
           </a:p>
         </p:txBody>
@@ -9952,7 +10035,7 @@
         </p:nvSpPr>
         <p:spPr>
           <a:xfrm>
-            <a:off x="6452463" y="3419906"/>
+            <a:off x="6452463" y="3324783"/>
             <a:ext cx="2010079" cy="308381"/>
           </a:xfrm>
           <a:prstGeom prst="rect">
@@ -9980,7 +10063,7 @@
                 <a:cs typeface="GQ Text Bold"/>
                 <a:ea typeface="GQ Text Bold"/>
               </a:rPr>
-              <a:t>33 правила</a:t>
+              <a:t>Проверил</a:t>
             </a:r>
           </a:p>
         </p:txBody>
@@ -9993,7 +10076,7 @@
         </p:nvSpPr>
         <p:spPr>
           <a:xfrm>
-            <a:off x="6452463" y="3798824"/>
+            <a:off x="6452463" y="3703701"/>
             <a:ext cx="204216" cy="252475"/>
           </a:xfrm>
           <a:prstGeom prst="rect">
@@ -10034,8 +10117,8 @@
         </p:nvSpPr>
         <p:spPr>
           <a:xfrm>
-            <a:off x="6656679" y="3798824"/>
-            <a:ext cx="1805863" cy="252475"/>
+            <a:off x="6656679" y="3703701"/>
+            <a:ext cx="1805863" cy="430276"/>
           </a:xfrm>
           <a:prstGeom prst="rect">
             <a:avLst/>
@@ -10062,7 +10145,25 @@
                 <a:cs typeface="GQ Text"/>
                 <a:ea typeface="GQ Text"/>
               </a:rPr>
-              <a:t>22 темы с примерами</a:t>
+              <a:t>Первая версия победила на</a:t>
+            </a:r>
+          </a:p>
+          <a:p>
+            <a:pPr algn="l">
+              <a:lnSpc>
+                <a:spcPts val="1400"/>
+              </a:lnSpc>
+            </a:pPr>
+            <a:r>
+              <a:rPr sz="1000">
+                <a:solidFill>
+                  <a:srgbClr val="1B222B"/>
+                </a:solidFill>
+                <a:latin typeface="GQ Text"/>
+                <a:cs typeface="GQ Text"/>
+                <a:ea typeface="GQ Text"/>
+              </a:rPr>
+              <a:t>школьной олимпиаде</a:t>
             </a:r>
           </a:p>
         </p:txBody>
@@ -10075,7 +10176,7 @@
         </p:nvSpPr>
         <p:spPr>
           <a:xfrm>
-            <a:off x="6452463" y="4077208"/>
+            <a:off x="6452463" y="4159885"/>
             <a:ext cx="204216" cy="252475"/>
           </a:xfrm>
           <a:prstGeom prst="rect">
@@ -10116,8 +10217,8 @@
         </p:nvSpPr>
         <p:spPr>
           <a:xfrm>
-            <a:off x="6656679" y="4077208"/>
-            <a:ext cx="1805863" cy="252475"/>
+            <a:off x="6656679" y="4159885"/>
+            <a:ext cx="1805863" cy="430276"/>
           </a:xfrm>
           <a:prstGeom prst="rect">
             <a:avLst/>
@@ -10144,7 +10245,25 @@
                 <a:cs typeface="GQ Text"/>
                 <a:ea typeface="GQ Text"/>
               </a:rPr>
-              <a:t>Живые таблицы окончаний</a:t>
+              <a:t>Эта — вторая,</a:t>
+            </a:r>
+          </a:p>
+          <a:p>
+            <a:pPr algn="l">
+              <a:lnSpc>
+                <a:spcPts val="1400"/>
+              </a:lnSpc>
+            </a:pPr>
+            <a:r>
+              <a:rPr sz="1000">
+                <a:solidFill>
+                  <a:srgbClr val="1B222B"/>
+                </a:solidFill>
+                <a:latin typeface="GQ Text"/>
+                <a:cs typeface="GQ Text"/>
+                <a:ea typeface="GQ Text"/>
+              </a:rPr>
+              <a:t>переработанная</a:t>
             </a:r>
           </a:p>
         </p:txBody>
@@ -10157,8 +10276,8 @@
         </p:nvSpPr>
         <p:spPr>
           <a:xfrm>
-            <a:off x="8919743" y="2946400"/>
-            <a:ext cx="2522143" cy="1770888"/>
+            <a:off x="8919743" y="2851277"/>
+            <a:ext cx="2522143" cy="1948688"/>
           </a:xfrm>
           <a:prstGeom prst="rect">
             <a:avLst/>
@@ -10189,8 +10308,8 @@
         </p:nvSpPr>
         <p:spPr>
           <a:xfrm>
-            <a:off x="8919743" y="2946400"/>
-            <a:ext cx="32004" cy="1770888"/>
+            <a:off x="8919743" y="2851277"/>
+            <a:ext cx="32004" cy="1948688"/>
           </a:xfrm>
           <a:prstGeom prst="rect">
             <a:avLst/>
@@ -10219,7 +10338,7 @@
         </p:nvSpPr>
         <p:spPr>
           <a:xfrm>
-            <a:off x="9175775" y="3181096"/>
+            <a:off x="9175775" y="3085973"/>
             <a:ext cx="2010079" cy="189357"/>
           </a:xfrm>
           <a:prstGeom prst="rect">
@@ -10247,7 +10366,7 @@
                 <a:cs typeface="IBM Plex Mono SemiBold"/>
                 <a:ea typeface="IBM Plex Mono SemiBold"/>
               </a:rPr>
-              <a:t>СЛОВАРЬ</a:t>
+              <a:t>4</a:t>
             </a:r>
           </a:p>
         </p:txBody>
@@ -10260,7 +10379,7 @@
         </p:nvSpPr>
         <p:spPr>
           <a:xfrm>
-            <a:off x="9175775" y="3419906"/>
+            <a:off x="9175775" y="3324783"/>
             <a:ext cx="2010079" cy="308381"/>
           </a:xfrm>
           <a:prstGeom prst="rect">
@@ -10288,7 +10407,7 @@
                 <a:cs typeface="GQ Text Bold"/>
                 <a:ea typeface="GQ Text Bold"/>
               </a:rPr>
-              <a:t>162 статьи</a:t>
+              <a:t>Открыл</a:t>
             </a:r>
           </a:p>
         </p:txBody>
@@ -10301,7 +10420,7 @@
         </p:nvSpPr>
         <p:spPr>
           <a:xfrm>
-            <a:off x="9175775" y="3798824"/>
+            <a:off x="9175775" y="3703701"/>
             <a:ext cx="204216" cy="252475"/>
           </a:xfrm>
           <a:prstGeom prst="rect">
@@ -10342,8 +10461,8 @@
         </p:nvSpPr>
         <p:spPr>
           <a:xfrm>
-            <a:off x="9379991" y="3798824"/>
-            <a:ext cx="1805863" cy="252475"/>
+            <a:off x="9379991" y="3703701"/>
+            <a:ext cx="1805863" cy="430276"/>
           </a:xfrm>
           <a:prstGeom prst="rect">
             <a:avLst/>
@@ -10370,7 +10489,25 @@
                 <a:cs typeface="GQ Text"/>
                 <a:ea typeface="GQ Text"/>
               </a:rPr>
-              <a:t>Собран из самих уроков</a:t>
+              <a:t>Бесплатно и по ссылке, без</a:t>
+            </a:r>
+          </a:p>
+          <a:p>
+            <a:pPr algn="l">
+              <a:lnSpc>
+                <a:spcPts val="1400"/>
+              </a:lnSpc>
+            </a:pPr>
+            <a:r>
+              <a:rPr sz="1000">
+                <a:solidFill>
+                  <a:srgbClr val="1B222B"/>
+                </a:solidFill>
+                <a:latin typeface="GQ Text"/>
+                <a:cs typeface="GQ Text"/>
+                <a:ea typeface="GQ Text"/>
+              </a:rPr>
+              <a:t>установки</a:t>
             </a:r>
           </a:p>
         </p:txBody>
@@ -10383,7 +10520,7 @@
         </p:nvSpPr>
         <p:spPr>
           <a:xfrm>
-            <a:off x="9175775" y="4077208"/>
+            <a:off x="9175775" y="4159885"/>
             <a:ext cx="204216" cy="252475"/>
           </a:xfrm>
           <a:prstGeom prst="rect">
@@ -10424,8 +10561,8 @@
         </p:nvSpPr>
         <p:spPr>
           <a:xfrm>
-            <a:off x="9379991" y="4077208"/>
-            <a:ext cx="1805863" cy="252475"/>
+            <a:off x="9379991" y="4159885"/>
+            <a:ext cx="1805863" cy="430276"/>
           </a:xfrm>
           <a:prstGeom prst="rect">
             <a:avLst/>
@@ -10452,7 +10589,25 @@
                 <a:cs typeface="GQ Text"/>
                 <a:ea typeface="GQ Text"/>
               </a:rPr>
-              <a:t>Поиск с русской раскладки</a:t>
+              <a:t>Ученикам 5–11 классов</a:t>
+            </a:r>
+          </a:p>
+          <a:p>
+            <a:pPr algn="l">
+              <a:lnSpc>
+                <a:spcPts val="1400"/>
+              </a:lnSpc>
+            </a:pPr>
+            <a:r>
+              <a:rPr sz="1000">
+                <a:solidFill>
+                  <a:srgbClr val="1B222B"/>
+                </a:solidFill>
+                <a:latin typeface="GQ Text"/>
+                <a:cs typeface="GQ Text"/>
+                <a:ea typeface="GQ Text"/>
+              </a:rPr>
+              <a:t>любой школы</a:t>
             </a:r>
           </a:p>
         </p:txBody>
@@ -10465,7 +10620,7 @@
         </p:nvSpPr>
         <p:spPr>
           <a:xfrm>
-            <a:off x="749808" y="5101336"/>
+            <a:off x="749808" y="5184013"/>
             <a:ext cx="10692079" cy="710247"/>
           </a:xfrm>
           <a:prstGeom prst="rect">
@@ -10495,7 +10650,7 @@
         </p:nvSpPr>
         <p:spPr>
           <a:xfrm>
-            <a:off x="1024127" y="5300421"/>
+            <a:off x="1024127" y="5383098"/>
             <a:ext cx="10143439" cy="345281"/>
           </a:xfrm>
           <a:prstGeom prst="rect">
@@ -10523,7 +10678,7 @@
                 <a:cs typeface="GQ Text SemiBold"/>
                 <a:ea typeface="GQ Text SemiBold"/>
               </a:rPr>
-              <a:t>Приложение бесплатное и открыто по ссылке. Устанавливать ничего не обязательно.</a:t>
+              <a:t>Приложение работает прямо сейчас: сайт открыт, любой может зайти и позаниматься.</a:t>
             </a:r>
           </a:p>
         </p:txBody>
@@ -10585,7 +10740,7 @@
         <p:spPr>
           <a:xfrm>
             <a:off x="6196431" y="2964688"/>
-            <a:ext cx="5245455" cy="1234439"/>
+            <a:ext cx="5245455" cy="1463039"/>
           </a:xfrm>
           <a:prstGeom prst="rect">
             <a:avLst/>
@@ -10617,7 +10772,7 @@
         <p:spPr>
           <a:xfrm>
             <a:off x="749808" y="2964688"/>
-            <a:ext cx="5245455" cy="1755139"/>
+            <a:ext cx="5245455" cy="1513840"/>
           </a:xfrm>
           <a:prstGeom prst="rect">
             <a:avLst/>
@@ -10649,7 +10804,7 @@
         <p:spPr>
           <a:xfrm>
             <a:off x="749808" y="2964688"/>
-            <a:ext cx="32004" cy="1755139"/>
+            <a:ext cx="32004" cy="1513840"/>
           </a:xfrm>
           <a:prstGeom prst="rect">
             <a:avLst/>
@@ -10736,7 +10891,7 @@
                 <a:cs typeface="IBM Plex Mono SemiBold"/>
                 <a:ea typeface="IBM Plex Mono SemiBold"/>
               </a:rPr>
-              <a:t>ДЛЯ ЧЕГО СОЗДАНО</a:t>
+              <a:t>ЗАЧЕМ ЭТО НУЖНО</a:t>
             </a:r>
           </a:p>
         </p:txBody>
@@ -10818,7 +10973,7 @@
                 <a:cs typeface="GQ Text Bold"/>
                 <a:ea typeface="GQ Text Bold"/>
               </a:rPr>
-              <a:t>Казахский учат все, а тренажёра для</a:t>
+              <a:t>Казахский учат в каждой школе, а удобно</a:t>
             </a:r>
           </a:p>
           <a:p>
@@ -10836,7 +10991,7 @@
                 <a:cs typeface="GQ Text Bold"/>
                 <a:ea typeface="GQ Text Bold"/>
               </a:rPr>
-              <a:t>русскоязычного ученика почти нет</a:t>
+              <a:t>тренироваться негде</a:t>
             </a:r>
           </a:p>
         </p:txBody>
@@ -10877,7 +11032,7 @@
                 <a:cs typeface="GQ Text"/>
                 <a:ea typeface="GQ Text"/>
               </a:rPr>
-              <a:t>Казахский изучают во всех школах страны, в том числе там, где обучение идёт на русском. Цифровых</a:t>
+              <a:t>Казахский — государственный язык, обязательный предмет во всех школах страны, в том числе там, где обучение</a:t>
             </a:r>
           </a:p>
           <a:p>
@@ -10895,7 +11050,7 @@
                 <a:cs typeface="GQ Text"/>
                 <a:ea typeface="GQ Text"/>
               </a:rPr>
-              <a:t>тренажёров, где объяснение даётся по-русски, а учат казахскому, крайне мало.</a:t>
+              <a:t>идёт на русском.</a:t>
             </a:r>
           </a:p>
         </p:txBody>
@@ -10939,7 +11094,7 @@
         <p:spPr>
           <a:xfrm>
             <a:off x="1005840" y="3200400"/>
-            <a:ext cx="4733391" cy="1307846"/>
+            <a:ext cx="4733391" cy="1066546"/>
           </a:xfrm>
           <a:prstGeom prst="rect">
             <a:avLst/>
@@ -10966,7 +11121,7 @@
                 <a:cs typeface="GQ Text SemiBold"/>
                 <a:ea typeface="GQ Text SemiBold"/>
               </a:rPr>
-              <a:t>На duolingo.com в разделе курсов для говорящих</a:t>
+              <a:t>Язык даётся не объёмом, а повторением: десять минут</a:t>
             </a:r>
           </a:p>
           <a:p>
@@ -10984,7 +11139,7 @@
                 <a:cs typeface="GQ Text SemiBold"/>
                 <a:ea typeface="GQ Text SemiBold"/>
               </a:rPr>
-              <a:t>по-русски доступно девять языков: английский,</a:t>
+              <a:t>каждый день дают больше, чем два часа раз в неделю.</a:t>
             </a:r>
           </a:p>
           <a:p>
@@ -11002,7 +11157,7 @@
                 <a:cs typeface="GQ Text SemiBold"/>
                 <a:ea typeface="GQ Text SemiBold"/>
               </a:rPr>
-              <a:t>немецкий, французский, испанский, китайский,</a:t>
+              <a:t>Телефон для этого подходит идеально — он всегда с</a:t>
             </a:r>
           </a:p>
           <a:p>
@@ -11020,25 +11175,7 @@
                 <a:cs typeface="GQ Text SemiBold"/>
                 <a:ea typeface="GQ Text SemiBold"/>
               </a:rPr>
-              <a:t>корейский, японский, итальянский, португальский.</a:t>
-            </a:r>
-          </a:p>
-          <a:p>
-            <a:pPr algn="l">
-              <a:lnSpc>
-                <a:spcPts val="1900"/>
-              </a:lnSpc>
-            </a:pPr>
-            <a:r>
-              <a:rPr sz="1300">
-                <a:solidFill>
-                  <a:srgbClr val="1B222B"/>
-                </a:solidFill>
-                <a:latin typeface="GQ Text SemiBold"/>
-                <a:cs typeface="GQ Text SemiBold"/>
-                <a:ea typeface="GQ Text SemiBold"/>
-              </a:rPr>
-              <a:t>Казахского в этом списке нет.</a:t>
+              <a:t>собой.</a:t>
             </a:r>
           </a:p>
         </p:txBody>
@@ -11052,7 +11189,7 @@
         <p:spPr>
           <a:xfrm>
             <a:off x="6452463" y="3202432"/>
-            <a:ext cx="4733391" cy="781812"/>
+            <a:ext cx="4733391" cy="1010412"/>
           </a:xfrm>
           <a:prstGeom prst="rect">
             <a:avLst/>
@@ -11079,7 +11216,7 @@
                 <a:cs typeface="GQ Text"/>
                 <a:ea typeface="GQ Text"/>
               </a:rPr>
-              <a:t>Значит, школьнику остаются учебник и тетрадь. А язык</a:t>
+              <a:t>Но тренажёров, где объяснение по-русски, а учат</a:t>
             </a:r>
           </a:p>
           <a:p>
@@ -11097,7 +11234,7 @@
                 <a:cs typeface="GQ Text"/>
                 <a:ea typeface="GQ Text"/>
               </a:rPr>
-              <a:t>даёт именно короткая ежедневная практика — то, что</a:t>
+              <a:t>казахскому, почти нет. На duolingo.com говорящим</a:t>
             </a:r>
           </a:p>
           <a:p>
@@ -11115,7 +11252,25 @@
                 <a:cs typeface="GQ Text"/>
                 <a:ea typeface="GQ Text"/>
               </a:rPr>
-              <a:t>удобно делать с телефона.</a:t>
+              <a:t>по-русски доступно девять языков — казахского среди них</a:t>
+            </a:r>
+          </a:p>
+          <a:p>
+            <a:pPr algn="l">
+              <a:lnSpc>
+                <a:spcPts val="1800"/>
+              </a:lnSpc>
+            </a:pPr>
+            <a:r>
+              <a:rPr sz="1250">
+                <a:solidFill>
+                  <a:srgbClr val="535C66"/>
+                </a:solidFill>
+                <a:latin typeface="GQ Text"/>
+                <a:cs typeface="GQ Text"/>
+                <a:ea typeface="GQ Text"/>
+              </a:rPr>
+              <a:t>нет. Остаются учебник и тетрадь.</a:t>
             </a:r>
           </a:p>
         </p:txBody>
@@ -11211,130 +11366,6 @@
       </p:sp>
       <p:sp>
         <p:nvSpPr>
-          <p:cNvPr id="26" name="Rectangle 25"/>
-          <p:cNvSpPr/>
-          <p:nvPr/>
-        </p:nvSpPr>
-        <p:spPr>
-          <a:xfrm>
-            <a:off x="7104202" y="2473388"/>
-            <a:ext cx="4337684" cy="2037587"/>
-          </a:xfrm>
-          <a:prstGeom prst="rect">
-            <a:avLst/>
-          </a:prstGeom>
-          <a:solidFill>
-            <a:srgbClr val="11161E"/>
-          </a:solidFill>
-          <a:ln w="9525">
-            <a:solidFill>
-              <a:srgbClr val="3B434D"/>
-            </a:solidFill>
-          </a:ln>
-          <a:effectLst/>
-        </p:spPr>
-        <p:txBody>
-          <a:bodyPr rtlCol="0" anchor="ctr" wrap="none"/>
-          <a:lstStyle/>
-          <a:p>
-            <a:pPr algn="ctr"/>
-          </a:p>
-        </p:txBody>
-      </p:sp>
-      <p:sp>
-        <p:nvSpPr>
-          <p:cNvPr id="27" name="Rectangle 26"/>
-          <p:cNvSpPr/>
-          <p:nvPr/>
-        </p:nvSpPr>
-        <p:spPr>
-          <a:xfrm>
-            <a:off x="7104202" y="2473388"/>
-            <a:ext cx="32004" cy="2037587"/>
-          </a:xfrm>
-          <a:prstGeom prst="rect">
-            <a:avLst/>
-          </a:prstGeom>
-          <a:solidFill>
-            <a:srgbClr val="00793D"/>
-          </a:solidFill>
-          <a:ln>
-            <a:noFill/>
-          </a:ln>
-          <a:effectLst/>
-        </p:spPr>
-        <p:txBody>
-          <a:bodyPr rtlCol="0" anchor="ctr" wrap="none"/>
-          <a:lstStyle/>
-          <a:p>
-            <a:pPr algn="ctr"/>
-          </a:p>
-        </p:txBody>
-      </p:sp>
-      <p:sp>
-        <p:nvSpPr>
-          <p:cNvPr id="15" name="Rectangle 14"/>
-          <p:cNvSpPr/>
-          <p:nvPr/>
-        </p:nvSpPr>
-        <p:spPr>
-          <a:xfrm>
-            <a:off x="749808" y="2473388"/>
-            <a:ext cx="6153226" cy="2390647"/>
-          </a:xfrm>
-          <a:prstGeom prst="rect">
-            <a:avLst/>
-          </a:prstGeom>
-          <a:solidFill>
-            <a:srgbClr val="11161E"/>
-          </a:solidFill>
-          <a:ln w="9525">
-            <a:solidFill>
-              <a:srgbClr val="3B434D"/>
-            </a:solidFill>
-          </a:ln>
-          <a:effectLst/>
-        </p:spPr>
-        <p:txBody>
-          <a:bodyPr rtlCol="0" anchor="ctr" wrap="none"/>
-          <a:lstStyle/>
-          <a:p>
-            <a:pPr algn="ctr"/>
-          </a:p>
-        </p:txBody>
-      </p:sp>
-      <p:sp>
-        <p:nvSpPr>
-          <p:cNvPr id="16" name="Rectangle 15"/>
-          <p:cNvSpPr/>
-          <p:nvPr/>
-        </p:nvSpPr>
-        <p:spPr>
-          <a:xfrm>
-            <a:off x="749808" y="2473388"/>
-            <a:ext cx="32004" cy="2390647"/>
-          </a:xfrm>
-          <a:prstGeom prst="rect">
-            <a:avLst/>
-          </a:prstGeom>
-          <a:solidFill>
-            <a:srgbClr val="0064B9"/>
-          </a:solidFill>
-          <a:ln>
-            <a:noFill/>
-          </a:ln>
-          <a:effectLst/>
-        </p:spPr>
-        <p:txBody>
-          <a:bodyPr rtlCol="0" anchor="ctr" wrap="none"/>
-          <a:lstStyle/>
-          <a:p>
-            <a:pPr algn="ctr"/>
-          </a:p>
-        </p:txBody>
-      </p:sp>
-      <p:sp>
-        <p:nvSpPr>
           <p:cNvPr id="3" name="Rectangle 2"/>
           <p:cNvSpPr/>
           <p:nvPr/>
@@ -11399,7 +11430,7 @@
                 <a:cs typeface="IBM Plex Mono SemiBold"/>
                 <a:ea typeface="IBM Plex Mono SemiBold"/>
               </a:rPr>
-              <a:t>КАК СОЗДАНО</a:t>
+              <a:t>ЧТО СОЗДАНО</a:t>
             </a:r>
           </a:p>
         </p:txBody>
@@ -11453,8 +11484,8 @@
         </p:nvSpPr>
         <p:spPr>
           <a:xfrm>
-            <a:off x="749808" y="794115"/>
-            <a:ext cx="10692079" cy="742910"/>
+            <a:off x="749808" y="796290"/>
+            <a:ext cx="10692079" cy="723614"/>
           </a:xfrm>
           <a:prstGeom prst="rect">
             <a:avLst/>
@@ -11469,11 +11500,11 @@
           <a:p>
             <a:pPr algn="l">
               <a:lnSpc>
-                <a:spcPts val="4120"/>
-              </a:lnSpc>
-            </a:pPr>
-            <a:r>
-              <a:rPr sz="3850" spc="-85">
+                <a:spcPts val="4012"/>
+              </a:lnSpc>
+            </a:pPr>
+            <a:r>
+              <a:rPr sz="3750" spc="-82">
                 <a:solidFill>
                   <a:srgbClr val="EEEBE5"/>
                 </a:solidFill>
@@ -11481,7 +11512,7 @@
                 <a:cs typeface="GQ Text Bold"/>
                 <a:ea typeface="GQ Text Bold"/>
               </a:rPr>
-              <a:t>Как оно устроено и что проверяет себя само</a:t>
+              <a:t>Пять разделов и понятный экран для каждого</a:t>
             </a:r>
           </a:p>
         </p:txBody>
@@ -11494,7 +11525,7 @@
         </p:nvSpPr>
         <p:spPr>
           <a:xfrm>
-            <a:off x="749808" y="1509793"/>
+            <a:off x="749808" y="1496204"/>
             <a:ext cx="9195188" cy="567349"/>
           </a:xfrm>
           <a:prstGeom prst="rect">
@@ -11522,7 +11553,7 @@
                 <a:cs typeface="GQ Text"/>
                 <a:ea typeface="GQ Text"/>
               </a:rPr>
-              <a:t>Содержание уроков лежит отдельно от кода и собирается скриптами. Каждое обновление проходит проверку</a:t>
+              <a:t>Ученик открывает приложение и сразу видит, где он остановился и что делать дальше. Разбираться в меню не</a:t>
             </a:r>
           </a:p>
           <a:p>
@@ -11540,21 +11571,51 @@
                 <a:cs typeface="GQ Text"/>
                 <a:ea typeface="GQ Text"/>
               </a:rPr>
-              <a:t>прежде, чем попасть к ученикам.</a:t>
-            </a:r>
-          </a:p>
-        </p:txBody>
-      </p:sp>
-      <p:sp>
-        <p:nvSpPr>
-          <p:cNvPr id="8" name="TextBox 7"/>
+              <a:t>нужно.</a:t>
+            </a:r>
+          </a:p>
+        </p:txBody>
+      </p:sp>
+      <p:sp>
+        <p:nvSpPr>
+          <p:cNvPr id="8" name="Rectangle 7"/>
+          <p:cNvSpPr/>
+          <p:nvPr/>
+        </p:nvSpPr>
+        <p:spPr>
+          <a:xfrm>
+            <a:off x="749808" y="2240343"/>
+            <a:ext cx="10692079" cy="7315"/>
+          </a:xfrm>
+          <a:prstGeom prst="rect">
+            <a:avLst/>
+          </a:prstGeom>
+          <a:solidFill>
+            <a:srgbClr val="3B434D"/>
+          </a:solidFill>
+          <a:ln>
+            <a:noFill/>
+          </a:ln>
+          <a:effectLst/>
+        </p:spPr>
+        <p:txBody>
+          <a:bodyPr rtlCol="0" anchor="ctr" wrap="none"/>
+          <a:lstStyle/>
+          <a:p>
+            <a:pPr algn="ctr"/>
+          </a:p>
+        </p:txBody>
+      </p:sp>
+      <p:sp>
+        <p:nvSpPr>
+          <p:cNvPr id="9" name="TextBox 8"/>
           <p:cNvSpPr txBox="1"/>
           <p:nvPr/>
         </p:nvSpPr>
         <p:spPr>
           <a:xfrm>
-            <a:off x="1024127" y="2725356"/>
-            <a:ext cx="5604586" cy="198374"/>
+            <a:off x="749808" y="2514826"/>
+            <a:ext cx="1962851" cy="323169"/>
           </a:xfrm>
           <a:prstGeom prst="rect">
             <a:avLst/>
@@ -11569,33 +11630,33 @@
           <a:p>
             <a:pPr algn="l">
               <a:lnSpc>
-                <a:spcPts val="1100"/>
-              </a:lnSpc>
-            </a:pPr>
-            <a:r>
-              <a:rPr sz="850" spc="136">
-                <a:solidFill>
-                  <a:srgbClr val="59AAF8"/>
-                </a:solidFill>
-                <a:latin typeface="IBM Plex Mono SemiBold"/>
-                <a:cs typeface="IBM Plex Mono SemiBold"/>
-                <a:ea typeface="IBM Plex Mono SemiBold"/>
-              </a:rPr>
-              <a:t>ИЗ ЧЕГО СОБРАНО</a:t>
-            </a:r>
-          </a:p>
-        </p:txBody>
-      </p:sp>
-      <p:sp>
-        <p:nvSpPr>
-          <p:cNvPr id="9" name="TextBox 8"/>
+                <a:spcPts val="1792"/>
+              </a:lnSpc>
+            </a:pPr>
+            <a:r>
+              <a:rPr sz="1600" spc="-24">
+                <a:solidFill>
+                  <a:srgbClr val="EEEBE5"/>
+                </a:solidFill>
+                <a:latin typeface="GQ Text Bold"/>
+                <a:cs typeface="GQ Text Bold"/>
+                <a:ea typeface="GQ Text Bold"/>
+              </a:rPr>
+              <a:t>Учиться</a:t>
+            </a:r>
+          </a:p>
+        </p:txBody>
+      </p:sp>
+      <p:sp>
+        <p:nvSpPr>
+          <p:cNvPr id="10" name="TextBox 9"/>
           <p:cNvSpPr txBox="1"/>
           <p:nvPr/>
         </p:nvSpPr>
         <p:spPr>
           <a:xfrm>
-            <a:off x="1024127" y="3037573"/>
-            <a:ext cx="216916" cy="290347"/>
+            <a:off x="749808" y="2876359"/>
+            <a:ext cx="1962851" cy="651509"/>
           </a:xfrm>
           <a:prstGeom prst="rect">
             <a:avLst/>
@@ -11610,33 +11671,676 @@
           <a:p>
             <a:pPr algn="l">
               <a:lnSpc>
-                <a:spcPts val="1610"/>
-              </a:lnSpc>
-            </a:pPr>
-            <a:r>
-              <a:rPr sz="1150">
-                <a:solidFill>
-                  <a:srgbClr val="59AAF8"/>
+                <a:spcPts val="1500"/>
+              </a:lnSpc>
+            </a:pPr>
+            <a:r>
+              <a:rPr sz="1050">
+                <a:solidFill>
+                  <a:srgbClr val="A6ADB6"/>
+                </a:solidFill>
+                <a:latin typeface="GQ Text"/>
+                <a:cs typeface="GQ Text"/>
+                <a:ea typeface="GQ Text"/>
+              </a:rPr>
+              <a:t>Дорожка уроков: видно</a:t>
+            </a:r>
+          </a:p>
+          <a:p>
+            <a:pPr algn="l">
+              <a:lnSpc>
+                <a:spcPts val="1500"/>
+              </a:lnSpc>
+            </a:pPr>
+            <a:r>
+              <a:rPr sz="1050">
+                <a:solidFill>
+                  <a:srgbClr val="A6ADB6"/>
+                </a:solidFill>
+                <a:latin typeface="GQ Text"/>
+                <a:cs typeface="GQ Text"/>
+                <a:ea typeface="GQ Text"/>
+              </a:rPr>
+              <a:t>пройденное и следующий</a:t>
+            </a:r>
+          </a:p>
+          <a:p>
+            <a:pPr algn="l">
+              <a:lnSpc>
+                <a:spcPts val="1500"/>
+              </a:lnSpc>
+            </a:pPr>
+            <a:r>
+              <a:rPr sz="1050">
+                <a:solidFill>
+                  <a:srgbClr val="A6ADB6"/>
+                </a:solidFill>
+                <a:latin typeface="GQ Text"/>
+                <a:cs typeface="GQ Text"/>
+                <a:ea typeface="GQ Text"/>
+              </a:rPr>
+              <a:t>шаг</a:t>
+            </a:r>
+          </a:p>
+        </p:txBody>
+      </p:sp>
+      <p:sp>
+        <p:nvSpPr>
+          <p:cNvPr id="11" name="TextBox 10"/>
+          <p:cNvSpPr txBox="1"/>
+          <p:nvPr/>
+        </p:nvSpPr>
+        <p:spPr>
+          <a:xfrm>
+            <a:off x="2932115" y="2514826"/>
+            <a:ext cx="1962851" cy="323169"/>
+          </a:xfrm>
+          <a:prstGeom prst="rect">
+            <a:avLst/>
+          </a:prstGeom>
+          <a:noFill/>
+        </p:spPr>
+        <p:txBody>
+          <a:bodyPr wrap="none" lIns="0" rIns="0" tIns="0" bIns="0" anchor="t">
+            <a:spAutoFit/>
+          </a:bodyPr>
+          <a:lstStyle/>
+          <a:p>
+            <a:pPr algn="l">
+              <a:lnSpc>
+                <a:spcPts val="1792"/>
+              </a:lnSpc>
+            </a:pPr>
+            <a:r>
+              <a:rPr sz="1600" spc="-24">
+                <a:solidFill>
+                  <a:srgbClr val="EEEBE5"/>
+                </a:solidFill>
+                <a:latin typeface="GQ Text Bold"/>
+                <a:cs typeface="GQ Text Bold"/>
+                <a:ea typeface="GQ Text Bold"/>
+              </a:rPr>
+              <a:t>Практика</a:t>
+            </a:r>
+          </a:p>
+        </p:txBody>
+      </p:sp>
+      <p:sp>
+        <p:nvSpPr>
+          <p:cNvPr id="12" name="TextBox 11"/>
+          <p:cNvSpPr txBox="1"/>
+          <p:nvPr/>
+        </p:nvSpPr>
+        <p:spPr>
+          <a:xfrm>
+            <a:off x="2932115" y="2876359"/>
+            <a:ext cx="1962851" cy="651509"/>
+          </a:xfrm>
+          <a:prstGeom prst="rect">
+            <a:avLst/>
+          </a:prstGeom>
+          <a:noFill/>
+        </p:spPr>
+        <p:txBody>
+          <a:bodyPr wrap="none" lIns="0" rIns="0" tIns="0" bIns="0" anchor="t">
+            <a:spAutoFit/>
+          </a:bodyPr>
+          <a:lstStyle/>
+          <a:p>
+            <a:pPr algn="l">
+              <a:lnSpc>
+                <a:spcPts val="1500"/>
+              </a:lnSpc>
+            </a:pPr>
+            <a:r>
+              <a:rPr sz="1050">
+                <a:solidFill>
+                  <a:srgbClr val="A6ADB6"/>
+                </a:solidFill>
+                <a:latin typeface="GQ Text"/>
+                <a:cs typeface="GQ Text"/>
+                <a:ea typeface="GQ Text"/>
+              </a:rPr>
+              <a:t>Цель на день, повторение,</a:t>
+            </a:r>
+          </a:p>
+          <a:p>
+            <a:pPr algn="l">
+              <a:lnSpc>
+                <a:spcPts val="1500"/>
+              </a:lnSpc>
+            </a:pPr>
+            <a:r>
+              <a:rPr sz="1050">
+                <a:solidFill>
+                  <a:srgbClr val="A6ADB6"/>
+                </a:solidFill>
+                <a:latin typeface="GQ Text"/>
+                <a:cs typeface="GQ Text"/>
+                <a:ea typeface="GQ Text"/>
+              </a:rPr>
+              <a:t>карточки слов, спринт на 60</a:t>
+            </a:r>
+          </a:p>
+          <a:p>
+            <a:pPr algn="l">
+              <a:lnSpc>
+                <a:spcPts val="1500"/>
+              </a:lnSpc>
+            </a:pPr>
+            <a:r>
+              <a:rPr sz="1050">
+                <a:solidFill>
+                  <a:srgbClr val="A6ADB6"/>
+                </a:solidFill>
+                <a:latin typeface="GQ Text"/>
+                <a:cs typeface="GQ Text"/>
+                <a:ea typeface="GQ Text"/>
+              </a:rPr>
+              <a:t>секунд</a:t>
+            </a:r>
+          </a:p>
+        </p:txBody>
+      </p:sp>
+      <p:sp>
+        <p:nvSpPr>
+          <p:cNvPr id="13" name="TextBox 12"/>
+          <p:cNvSpPr txBox="1"/>
+          <p:nvPr/>
+        </p:nvSpPr>
+        <p:spPr>
+          <a:xfrm>
+            <a:off x="5114422" y="2514826"/>
+            <a:ext cx="1962851" cy="323169"/>
+          </a:xfrm>
+          <a:prstGeom prst="rect">
+            <a:avLst/>
+          </a:prstGeom>
+          <a:noFill/>
+        </p:spPr>
+        <p:txBody>
+          <a:bodyPr wrap="none" lIns="0" rIns="0" tIns="0" bIns="0" anchor="t">
+            <a:spAutoFit/>
+          </a:bodyPr>
+          <a:lstStyle/>
+          <a:p>
+            <a:pPr algn="l">
+              <a:lnSpc>
+                <a:spcPts val="1792"/>
+              </a:lnSpc>
+            </a:pPr>
+            <a:r>
+              <a:rPr sz="1600" spc="-24">
+                <a:solidFill>
+                  <a:srgbClr val="EEEBE5"/>
+                </a:solidFill>
+                <a:latin typeface="GQ Text Bold"/>
+                <a:cs typeface="GQ Text Bold"/>
+                <a:ea typeface="GQ Text Bold"/>
+              </a:rPr>
+              <a:t>Словарь</a:t>
+            </a:r>
+          </a:p>
+        </p:txBody>
+      </p:sp>
+      <p:sp>
+        <p:nvSpPr>
+          <p:cNvPr id="14" name="TextBox 13"/>
+          <p:cNvSpPr txBox="1"/>
+          <p:nvPr/>
+        </p:nvSpPr>
+        <p:spPr>
+          <a:xfrm>
+            <a:off x="5114422" y="2876359"/>
+            <a:ext cx="1962851" cy="651509"/>
+          </a:xfrm>
+          <a:prstGeom prst="rect">
+            <a:avLst/>
+          </a:prstGeom>
+          <a:noFill/>
+        </p:spPr>
+        <p:txBody>
+          <a:bodyPr wrap="none" lIns="0" rIns="0" tIns="0" bIns="0" anchor="t">
+            <a:spAutoFit/>
+          </a:bodyPr>
+          <a:lstStyle/>
+          <a:p>
+            <a:pPr algn="l">
+              <a:lnSpc>
+                <a:spcPts val="1500"/>
+              </a:lnSpc>
+            </a:pPr>
+            <a:r>
+              <a:rPr sz="1050">
+                <a:solidFill>
+                  <a:srgbClr val="A6ADB6"/>
+                </a:solidFill>
+                <a:latin typeface="GQ Text"/>
+                <a:cs typeface="GQ Text"/>
+                <a:ea typeface="GQ Text"/>
+              </a:rPr>
+              <a:t>162 слова из уроков, поиск</a:t>
+            </a:r>
+          </a:p>
+          <a:p>
+            <a:pPr algn="l">
+              <a:lnSpc>
+                <a:spcPts val="1500"/>
+              </a:lnSpc>
+            </a:pPr>
+            <a:r>
+              <a:rPr sz="1050">
+                <a:solidFill>
+                  <a:srgbClr val="A6ADB6"/>
+                </a:solidFill>
+                <a:latin typeface="GQ Text"/>
+                <a:cs typeface="GQ Text"/>
+                <a:ea typeface="GQ Text"/>
+              </a:rPr>
+              <a:t>работает с русской</a:t>
+            </a:r>
+          </a:p>
+          <a:p>
+            <a:pPr algn="l">
+              <a:lnSpc>
+                <a:spcPts val="1500"/>
+              </a:lnSpc>
+            </a:pPr>
+            <a:r>
+              <a:rPr sz="1050">
+                <a:solidFill>
+                  <a:srgbClr val="A6ADB6"/>
+                </a:solidFill>
+                <a:latin typeface="GQ Text"/>
+                <a:cs typeface="GQ Text"/>
+                <a:ea typeface="GQ Text"/>
+              </a:rPr>
+              <a:t>раскладки</a:t>
+            </a:r>
+          </a:p>
+        </p:txBody>
+      </p:sp>
+      <p:sp>
+        <p:nvSpPr>
+          <p:cNvPr id="15" name="TextBox 14"/>
+          <p:cNvSpPr txBox="1"/>
+          <p:nvPr/>
+        </p:nvSpPr>
+        <p:spPr>
+          <a:xfrm>
+            <a:off x="7296729" y="2514826"/>
+            <a:ext cx="1962851" cy="323169"/>
+          </a:xfrm>
+          <a:prstGeom prst="rect">
+            <a:avLst/>
+          </a:prstGeom>
+          <a:noFill/>
+        </p:spPr>
+        <p:txBody>
+          <a:bodyPr wrap="none" lIns="0" rIns="0" tIns="0" bIns="0" anchor="t">
+            <a:spAutoFit/>
+          </a:bodyPr>
+          <a:lstStyle/>
+          <a:p>
+            <a:pPr algn="l">
+              <a:lnSpc>
+                <a:spcPts val="1792"/>
+              </a:lnSpc>
+            </a:pPr>
+            <a:r>
+              <a:rPr sz="1600" spc="-24">
+                <a:solidFill>
+                  <a:srgbClr val="EEEBE5"/>
+                </a:solidFill>
+                <a:latin typeface="GQ Text Bold"/>
+                <a:cs typeface="GQ Text Bold"/>
+                <a:ea typeface="GQ Text Bold"/>
+              </a:rPr>
+              <a:t>Справка</a:t>
+            </a:r>
+          </a:p>
+        </p:txBody>
+      </p:sp>
+      <p:sp>
+        <p:nvSpPr>
+          <p:cNvPr id="16" name="TextBox 15"/>
+          <p:cNvSpPr txBox="1"/>
+          <p:nvPr/>
+        </p:nvSpPr>
+        <p:spPr>
+          <a:xfrm>
+            <a:off x="7296729" y="2876359"/>
+            <a:ext cx="1962851" cy="461010"/>
+          </a:xfrm>
+          <a:prstGeom prst="rect">
+            <a:avLst/>
+          </a:prstGeom>
+          <a:noFill/>
+        </p:spPr>
+        <p:txBody>
+          <a:bodyPr wrap="none" lIns="0" rIns="0" tIns="0" bIns="0" anchor="t">
+            <a:spAutoFit/>
+          </a:bodyPr>
+          <a:lstStyle/>
+          <a:p>
+            <a:pPr algn="l">
+              <a:lnSpc>
+                <a:spcPts val="1500"/>
+              </a:lnSpc>
+            </a:pPr>
+            <a:r>
+              <a:rPr sz="1050">
+                <a:solidFill>
+                  <a:srgbClr val="A6ADB6"/>
+                </a:solidFill>
+                <a:latin typeface="GQ Text"/>
+                <a:cs typeface="GQ Text"/>
+                <a:ea typeface="GQ Text"/>
+              </a:rPr>
+              <a:t>33 правила, 22 темы и живые</a:t>
+            </a:r>
+          </a:p>
+          <a:p>
+            <a:pPr algn="l">
+              <a:lnSpc>
+                <a:spcPts val="1500"/>
+              </a:lnSpc>
+            </a:pPr>
+            <a:r>
+              <a:rPr sz="1050">
+                <a:solidFill>
+                  <a:srgbClr val="A6ADB6"/>
+                </a:solidFill>
+                <a:latin typeface="GQ Text"/>
+                <a:cs typeface="GQ Text"/>
+                <a:ea typeface="GQ Text"/>
+              </a:rPr>
+              <a:t>таблицы окончаний</a:t>
+            </a:r>
+          </a:p>
+        </p:txBody>
+      </p:sp>
+      <p:sp>
+        <p:nvSpPr>
+          <p:cNvPr id="17" name="TextBox 16"/>
+          <p:cNvSpPr txBox="1"/>
+          <p:nvPr/>
+        </p:nvSpPr>
+        <p:spPr>
+          <a:xfrm>
+            <a:off x="9479036" y="2514826"/>
+            <a:ext cx="1962851" cy="323169"/>
+          </a:xfrm>
+          <a:prstGeom prst="rect">
+            <a:avLst/>
+          </a:prstGeom>
+          <a:noFill/>
+        </p:spPr>
+        <p:txBody>
+          <a:bodyPr wrap="none" lIns="0" rIns="0" tIns="0" bIns="0" anchor="t">
+            <a:spAutoFit/>
+          </a:bodyPr>
+          <a:lstStyle/>
+          <a:p>
+            <a:pPr algn="l">
+              <a:lnSpc>
+                <a:spcPts val="1792"/>
+              </a:lnSpc>
+            </a:pPr>
+            <a:r>
+              <a:rPr sz="1600" spc="-24">
+                <a:solidFill>
+                  <a:srgbClr val="EEEBE5"/>
+                </a:solidFill>
+                <a:latin typeface="GQ Text Bold"/>
+                <a:cs typeface="GQ Text Bold"/>
+                <a:ea typeface="GQ Text Bold"/>
+              </a:rPr>
+              <a:t>Профиль</a:t>
+            </a:r>
+          </a:p>
+        </p:txBody>
+      </p:sp>
+      <p:sp>
+        <p:nvSpPr>
+          <p:cNvPr id="18" name="TextBox 17"/>
+          <p:cNvSpPr txBox="1"/>
+          <p:nvPr/>
+        </p:nvSpPr>
+        <p:spPr>
+          <a:xfrm>
+            <a:off x="9479036" y="2876359"/>
+            <a:ext cx="1962851" cy="651509"/>
+          </a:xfrm>
+          <a:prstGeom prst="rect">
+            <a:avLst/>
+          </a:prstGeom>
+          <a:noFill/>
+        </p:spPr>
+        <p:txBody>
+          <a:bodyPr wrap="none" lIns="0" rIns="0" tIns="0" bIns="0" anchor="t">
+            <a:spAutoFit/>
+          </a:bodyPr>
+          <a:lstStyle/>
+          <a:p>
+            <a:pPr algn="l">
+              <a:lnSpc>
+                <a:spcPts val="1500"/>
+              </a:lnSpc>
+            </a:pPr>
+            <a:r>
+              <a:rPr sz="1050">
+                <a:solidFill>
+                  <a:srgbClr val="A6ADB6"/>
+                </a:solidFill>
+                <a:latin typeface="GQ Text"/>
+                <a:cs typeface="GQ Text"/>
+                <a:ea typeface="GQ Text"/>
+              </a:rPr>
+              <a:t>Статистика, награды и</a:t>
+            </a:r>
+          </a:p>
+          <a:p>
+            <a:pPr algn="l">
+              <a:lnSpc>
+                <a:spcPts val="1500"/>
+              </a:lnSpc>
+            </a:pPr>
+            <a:r>
+              <a:rPr sz="1050">
+                <a:solidFill>
+                  <a:srgbClr val="A6ADB6"/>
+                </a:solidFill>
+                <a:latin typeface="GQ Text"/>
+                <a:cs typeface="GQ Text"/>
+                <a:ea typeface="GQ Text"/>
+              </a:rPr>
+              <a:t>выгрузка результатов</a:t>
+            </a:r>
+          </a:p>
+          <a:p>
+            <a:pPr algn="l">
+              <a:lnSpc>
+                <a:spcPts val="1500"/>
+              </a:lnSpc>
+            </a:pPr>
+            <a:r>
+              <a:rPr sz="1050">
+                <a:solidFill>
+                  <a:srgbClr val="A6ADB6"/>
+                </a:solidFill>
+                <a:latin typeface="GQ Text"/>
+                <a:cs typeface="GQ Text"/>
+                <a:ea typeface="GQ Text"/>
+              </a:rPr>
+              <a:t>таблицей</a:t>
+            </a:r>
+          </a:p>
+        </p:txBody>
+      </p:sp>
+      <p:sp>
+        <p:nvSpPr>
+          <p:cNvPr id="19" name="Rectangle 18"/>
+          <p:cNvSpPr/>
+          <p:nvPr/>
+        </p:nvSpPr>
+        <p:spPr>
+          <a:xfrm>
+            <a:off x="749808" y="3898963"/>
+            <a:ext cx="10692079" cy="710247"/>
+          </a:xfrm>
+          <a:prstGeom prst="rect">
+            <a:avLst/>
+          </a:prstGeom>
+          <a:solidFill>
+            <a:srgbClr val="0064B9"/>
+          </a:solidFill>
+          <a:ln>
+            <a:noFill/>
+          </a:ln>
+          <a:effectLst/>
+        </p:spPr>
+        <p:txBody>
+          <a:bodyPr rtlCol="0" anchor="ctr" wrap="none"/>
+          <a:lstStyle/>
+          <a:p>
+            <a:pPr algn="ctr"/>
+          </a:p>
+        </p:txBody>
+      </p:sp>
+      <p:sp>
+        <p:nvSpPr>
+          <p:cNvPr id="20" name="TextBox 19"/>
+          <p:cNvSpPr txBox="1"/>
+          <p:nvPr/>
+        </p:nvSpPr>
+        <p:spPr>
+          <a:xfrm>
+            <a:off x="1024127" y="4098048"/>
+            <a:ext cx="10143439" cy="345281"/>
+          </a:xfrm>
+          <a:prstGeom prst="rect">
+            <a:avLst/>
+          </a:prstGeom>
+          <a:noFill/>
+        </p:spPr>
+        <p:txBody>
+          <a:bodyPr wrap="none" lIns="0" rIns="0" tIns="0" bIns="0" anchor="t">
+            <a:spAutoFit/>
+          </a:bodyPr>
+          <a:lstStyle/>
+          <a:p>
+            <a:pPr algn="l">
+              <a:lnSpc>
+                <a:spcPts val="1812"/>
+              </a:lnSpc>
+            </a:pPr>
+            <a:r>
+              <a:rPr sz="1250">
+                <a:solidFill>
+                  <a:srgbClr val="FFFFFF"/>
+                </a:solidFill>
+                <a:latin typeface="GQ Text SemiBold"/>
+                <a:cs typeface="GQ Text SemiBold"/>
+                <a:ea typeface="GQ Text SemiBold"/>
+              </a:rPr>
+              <a:t>Крупные кнопки, подсказка после каждой ошибки, возврат на главный экран с любого места, светлая и тёмная тема.</a:t>
+            </a:r>
+          </a:p>
+        </p:txBody>
+      </p:sp>
+      <p:sp>
+        <p:nvSpPr>
+          <p:cNvPr id="21" name="TextBox 20"/>
+          <p:cNvSpPr txBox="1"/>
+          <p:nvPr/>
+        </p:nvSpPr>
+        <p:spPr>
+          <a:xfrm>
+            <a:off x="749808" y="5071856"/>
+            <a:ext cx="2383219" cy="600892"/>
+          </a:xfrm>
+          <a:prstGeom prst="rect">
+            <a:avLst/>
+          </a:prstGeom>
+          <a:noFill/>
+        </p:spPr>
+        <p:txBody>
+          <a:bodyPr wrap="none" lIns="0" rIns="0" tIns="0" bIns="0" anchor="t">
+            <a:spAutoFit/>
+          </a:bodyPr>
+          <a:lstStyle/>
+          <a:p>
+            <a:pPr algn="l">
+              <a:lnSpc>
+                <a:spcPts val="3332"/>
+              </a:lnSpc>
+            </a:pPr>
+            <a:r>
+              <a:rPr sz="3400" spc="-102">
+                <a:solidFill>
+                  <a:srgbClr val="EEEBE5"/>
+                </a:solidFill>
+                <a:latin typeface="GQ Text Bold"/>
+                <a:cs typeface="GQ Text Bold"/>
+                <a:ea typeface="GQ Text Bold"/>
+              </a:rPr>
+              <a:t>12</a:t>
+            </a:r>
+          </a:p>
+        </p:txBody>
+      </p:sp>
+      <p:sp>
+        <p:nvSpPr>
+          <p:cNvPr id="22" name="TextBox 21"/>
+          <p:cNvSpPr txBox="1"/>
+          <p:nvPr/>
+        </p:nvSpPr>
+        <p:spPr>
+          <a:xfrm>
+            <a:off x="749808" y="5629783"/>
+            <a:ext cx="2383219" cy="216408"/>
+          </a:xfrm>
+          <a:prstGeom prst="rect">
+            <a:avLst/>
+          </a:prstGeom>
+          <a:noFill/>
+        </p:spPr>
+        <p:txBody>
+          <a:bodyPr wrap="none" lIns="0" rIns="0" tIns="0" bIns="0" anchor="t">
+            <a:spAutoFit/>
+          </a:bodyPr>
+          <a:lstStyle/>
+          <a:p>
+            <a:pPr algn="l">
+              <a:lnSpc>
+                <a:spcPts val="1200"/>
+              </a:lnSpc>
+            </a:pPr>
+            <a:r>
+              <a:rPr sz="800" spc="64">
+                <a:solidFill>
+                  <a:srgbClr val="A6ADB6"/>
                 </a:solidFill>
                 <a:latin typeface="IBM Plex Mono Medium"/>
                 <a:cs typeface="IBM Plex Mono Medium"/>
                 <a:ea typeface="IBM Plex Mono Medium"/>
               </a:rPr>
-              <a:t>—</a:t>
-            </a:r>
-          </a:p>
-        </p:txBody>
-      </p:sp>
-      <p:sp>
-        <p:nvSpPr>
-          <p:cNvPr id="10" name="TextBox 9"/>
+              <a:t>УРОКОВ · 5–7 КЛАСС</a:t>
+            </a:r>
+          </a:p>
+        </p:txBody>
+      </p:sp>
+      <p:sp>
+        <p:nvSpPr>
+          <p:cNvPr id="23" name="TextBox 22"/>
           <p:cNvSpPr txBox="1"/>
           <p:nvPr/>
         </p:nvSpPr>
         <p:spPr>
           <a:xfrm>
-            <a:off x="1241044" y="3037573"/>
-            <a:ext cx="5387670" cy="511174"/>
+            <a:off x="3407347" y="5071856"/>
+            <a:ext cx="2383219" cy="600892"/>
           </a:xfrm>
           <a:prstGeom prst="rect">
             <a:avLst/>
@@ -11651,62 +12355,33 @@
           <a:p>
             <a:pPr algn="l">
               <a:lnSpc>
-                <a:spcPts val="1610"/>
-              </a:lnSpc>
-            </a:pPr>
-            <a:r>
-              <a:rPr sz="1150">
+                <a:spcPts val="3332"/>
+              </a:lnSpc>
+            </a:pPr>
+            <a:r>
+              <a:rPr sz="3400" spc="-102">
                 <a:solidFill>
                   <a:srgbClr val="EEEBE5"/>
                 </a:solidFill>
-                <a:latin typeface="GQ Text SemiBold"/>
-                <a:cs typeface="GQ Text SemiBold"/>
-                <a:ea typeface="GQ Text SemiBold"/>
-              </a:rPr>
-              <a:t>Приложение. </a:t>
-            </a:r>
-            <a:r>
-              <a:rPr sz="1150">
-                <a:solidFill>
-                  <a:srgbClr val="EEEBE5"/>
-                </a:solidFill>
-                <a:latin typeface="GQ Text"/>
-                <a:cs typeface="GQ Text"/>
-                <a:ea typeface="GQ Text"/>
-              </a:rPr>
-              <a:t> Работает в браузере, ставится на телефон, живёт без</a:t>
-            </a:r>
-          </a:p>
-          <a:p>
-            <a:pPr algn="l">
-              <a:lnSpc>
-                <a:spcPts val="1610"/>
-              </a:lnSpc>
-            </a:pPr>
-            <a:r>
-              <a:rPr sz="1150">
-                <a:solidFill>
-                  <a:srgbClr val="EEEBE5"/>
-                </a:solidFill>
-                <a:latin typeface="GQ Text"/>
-                <a:cs typeface="GQ Text"/>
-                <a:ea typeface="GQ Text"/>
-              </a:rPr>
-              <a:t>интернета.</a:t>
-            </a:r>
-          </a:p>
-        </p:txBody>
-      </p:sp>
-      <p:sp>
-        <p:nvSpPr>
-          <p:cNvPr id="11" name="TextBox 10"/>
+                <a:latin typeface="GQ Text Bold"/>
+                <a:cs typeface="GQ Text Bold"/>
+                <a:ea typeface="GQ Text Bold"/>
+              </a:rPr>
+              <a:t>7</a:t>
+            </a:r>
+          </a:p>
+        </p:txBody>
+      </p:sp>
+      <p:sp>
+        <p:nvSpPr>
+          <p:cNvPr id="24" name="TextBox 23"/>
           <p:cNvSpPr txBox="1"/>
           <p:nvPr/>
         </p:nvSpPr>
         <p:spPr>
           <a:xfrm>
-            <a:off x="1024127" y="3592817"/>
-            <a:ext cx="216916" cy="290347"/>
+            <a:off x="3407347" y="5629783"/>
+            <a:ext cx="2383219" cy="216408"/>
           </a:xfrm>
           <a:prstGeom prst="rect">
             <a:avLst/>
@@ -11721,33 +12396,33 @@
           <a:p>
             <a:pPr algn="l">
               <a:lnSpc>
-                <a:spcPts val="1610"/>
-              </a:lnSpc>
-            </a:pPr>
-            <a:r>
-              <a:rPr sz="1150">
-                <a:solidFill>
-                  <a:srgbClr val="59AAF8"/>
+                <a:spcPts val="1200"/>
+              </a:lnSpc>
+            </a:pPr>
+            <a:r>
+              <a:rPr sz="800" spc="64">
+                <a:solidFill>
+                  <a:srgbClr val="A6ADB6"/>
                 </a:solidFill>
                 <a:latin typeface="IBM Plex Mono Medium"/>
                 <a:cs typeface="IBM Plex Mono Medium"/>
                 <a:ea typeface="IBM Plex Mono Medium"/>
               </a:rPr>
-              <a:t>—</a:t>
-            </a:r>
-          </a:p>
-        </p:txBody>
-      </p:sp>
-      <p:sp>
-        <p:nvSpPr>
-          <p:cNvPr id="12" name="TextBox 11"/>
+              <a:t>УРОКОВ · 7–9 КЛАСС</a:t>
+            </a:r>
+          </a:p>
+        </p:txBody>
+      </p:sp>
+      <p:sp>
+        <p:nvSpPr>
+          <p:cNvPr id="25" name="TextBox 24"/>
           <p:cNvSpPr txBox="1"/>
           <p:nvPr/>
         </p:nvSpPr>
         <p:spPr>
           <a:xfrm>
-            <a:off x="1241044" y="3592817"/>
-            <a:ext cx="5387670" cy="511174"/>
+            <a:off x="6064886" y="5071856"/>
+            <a:ext cx="2383219" cy="600892"/>
           </a:xfrm>
           <a:prstGeom prst="rect">
             <a:avLst/>
@@ -11762,62 +12437,33 @@
           <a:p>
             <a:pPr algn="l">
               <a:lnSpc>
-                <a:spcPts val="1610"/>
-              </a:lnSpc>
-            </a:pPr>
-            <a:r>
-              <a:rPr sz="1150">
+                <a:spcPts val="3332"/>
+              </a:lnSpc>
+            </a:pPr>
+            <a:r>
+              <a:rPr sz="3400" spc="-102">
                 <a:solidFill>
                   <a:srgbClr val="EEEBE5"/>
                 </a:solidFill>
-                <a:latin typeface="GQ Text SemiBold"/>
-                <a:cs typeface="GQ Text SemiBold"/>
-                <a:ea typeface="GQ Text SemiBold"/>
-              </a:rPr>
-              <a:t>Содержание. </a:t>
-            </a:r>
-            <a:r>
-              <a:rPr sz="1150">
-                <a:solidFill>
-                  <a:srgbClr val="EEEBE5"/>
-                </a:solidFill>
-                <a:latin typeface="GQ Text"/>
-                <a:cs typeface="GQ Text"/>
-                <a:ea typeface="GQ Text"/>
-              </a:rPr>
-              <a:t> Уроки, правила и словарь — отдельные файлы, а не текст</a:t>
-            </a:r>
-          </a:p>
-          <a:p>
-            <a:pPr algn="l">
-              <a:lnSpc>
-                <a:spcPts val="1610"/>
-              </a:lnSpc>
-            </a:pPr>
-            <a:r>
-              <a:rPr sz="1150">
-                <a:solidFill>
-                  <a:srgbClr val="EEEBE5"/>
-                </a:solidFill>
-                <a:latin typeface="GQ Text"/>
-                <a:cs typeface="GQ Text"/>
-                <a:ea typeface="GQ Text"/>
-              </a:rPr>
-              <a:t>внутри кода.</a:t>
-            </a:r>
-          </a:p>
-        </p:txBody>
-      </p:sp>
-      <p:sp>
-        <p:nvSpPr>
-          <p:cNvPr id="13" name="TextBox 12"/>
+                <a:latin typeface="GQ Text Bold"/>
+                <a:cs typeface="GQ Text Bold"/>
+                <a:ea typeface="GQ Text Bold"/>
+              </a:rPr>
+              <a:t>7</a:t>
+            </a:r>
+          </a:p>
+        </p:txBody>
+      </p:sp>
+      <p:sp>
+        <p:nvSpPr>
+          <p:cNvPr id="26" name="TextBox 25"/>
           <p:cNvSpPr txBox="1"/>
           <p:nvPr/>
         </p:nvSpPr>
         <p:spPr>
           <a:xfrm>
-            <a:off x="1024127" y="4148061"/>
-            <a:ext cx="216916" cy="290347"/>
+            <a:off x="6064886" y="5629783"/>
+            <a:ext cx="2383219" cy="216408"/>
           </a:xfrm>
           <a:prstGeom prst="rect">
             <a:avLst/>
@@ -11832,529 +12478,19 @@
           <a:p>
             <a:pPr algn="l">
               <a:lnSpc>
-                <a:spcPts val="1610"/>
-              </a:lnSpc>
-            </a:pPr>
-            <a:r>
-              <a:rPr sz="1150">
-                <a:solidFill>
-                  <a:srgbClr val="59AAF8"/>
+                <a:spcPts val="1200"/>
+              </a:lnSpc>
+            </a:pPr>
+            <a:r>
+              <a:rPr sz="800" spc="64">
+                <a:solidFill>
+                  <a:srgbClr val="A6ADB6"/>
                 </a:solidFill>
                 <a:latin typeface="IBM Plex Mono Medium"/>
                 <a:cs typeface="IBM Plex Mono Medium"/>
                 <a:ea typeface="IBM Plex Mono Medium"/>
               </a:rPr>
-              <a:t>—</a:t>
-            </a:r>
-          </a:p>
-        </p:txBody>
-      </p:sp>
-      <p:sp>
-        <p:nvSpPr>
-          <p:cNvPr id="14" name="TextBox 13"/>
-          <p:cNvSpPr txBox="1"/>
-          <p:nvPr/>
-        </p:nvSpPr>
-        <p:spPr>
-          <a:xfrm>
-            <a:off x="1241044" y="4148061"/>
-            <a:ext cx="5387670" cy="511174"/>
-          </a:xfrm>
-          <a:prstGeom prst="rect">
-            <a:avLst/>
-          </a:prstGeom>
-          <a:noFill/>
-        </p:spPr>
-        <p:txBody>
-          <a:bodyPr wrap="none" lIns="0" rIns="0" tIns="0" bIns="0" anchor="t">
-            <a:spAutoFit/>
-          </a:bodyPr>
-          <a:lstStyle/>
-          <a:p>
-            <a:pPr algn="l">
-              <a:lnSpc>
-                <a:spcPts val="1610"/>
-              </a:lnSpc>
-            </a:pPr>
-            <a:r>
-              <a:rPr sz="1150">
-                <a:solidFill>
-                  <a:srgbClr val="EEEBE5"/>
-                </a:solidFill>
-                <a:latin typeface="GQ Text SemiBold"/>
-                <a:cs typeface="GQ Text SemiBold"/>
-                <a:ea typeface="GQ Text SemiBold"/>
-              </a:rPr>
-              <a:t>Хранение. </a:t>
-            </a:r>
-            <a:r>
-              <a:rPr sz="1150">
-                <a:solidFill>
-                  <a:srgbClr val="EEEBE5"/>
-                </a:solidFill>
-                <a:latin typeface="GQ Text"/>
-                <a:cs typeface="GQ Text"/>
-                <a:ea typeface="GQ Text"/>
-              </a:rPr>
-              <a:t> Код и вся история изменений — на GitHub, сайт обновляет</a:t>
-            </a:r>
-          </a:p>
-          <a:p>
-            <a:pPr algn="l">
-              <a:lnSpc>
-                <a:spcPts val="1610"/>
-              </a:lnSpc>
-            </a:pPr>
-            <a:r>
-              <a:rPr sz="1150">
-                <a:solidFill>
-                  <a:srgbClr val="EEEBE5"/>
-                </a:solidFill>
-                <a:latin typeface="GQ Text"/>
-                <a:cs typeface="GQ Text"/>
-                <a:ea typeface="GQ Text"/>
-              </a:rPr>
-              <a:t>Vercel сам.</a:t>
-            </a:r>
-          </a:p>
-        </p:txBody>
-      </p:sp>
-      <p:sp>
-        <p:nvSpPr>
-          <p:cNvPr id="17" name="TextBox 16"/>
-          <p:cNvSpPr txBox="1"/>
-          <p:nvPr/>
-        </p:nvSpPr>
-        <p:spPr>
-          <a:xfrm>
-            <a:off x="7378522" y="2725356"/>
-            <a:ext cx="3789045" cy="198374"/>
-          </a:xfrm>
-          <a:prstGeom prst="rect">
-            <a:avLst/>
-          </a:prstGeom>
-          <a:noFill/>
-        </p:spPr>
-        <p:txBody>
-          <a:bodyPr wrap="none" lIns="0" rIns="0" tIns="0" bIns="0" anchor="t">
-            <a:spAutoFit/>
-          </a:bodyPr>
-          <a:lstStyle/>
-          <a:p>
-            <a:pPr algn="l">
-              <a:lnSpc>
-                <a:spcPts val="1100"/>
-              </a:lnSpc>
-            </a:pPr>
-            <a:r>
-              <a:rPr sz="850" spc="136">
-                <a:solidFill>
-                  <a:srgbClr val="48CD8C"/>
-                </a:solidFill>
-                <a:latin typeface="IBM Plex Mono SemiBold"/>
-                <a:cs typeface="IBM Plex Mono SemiBold"/>
-                <a:ea typeface="IBM Plex Mono SemiBold"/>
-              </a:rPr>
-              <a:t>ЧТО ПРОВЕРЯЕТСЯ САМО</a:t>
-            </a:r>
-          </a:p>
-        </p:txBody>
-      </p:sp>
-      <p:sp>
-        <p:nvSpPr>
-          <p:cNvPr id="18" name="TextBox 17"/>
-          <p:cNvSpPr txBox="1"/>
-          <p:nvPr/>
-        </p:nvSpPr>
-        <p:spPr>
-          <a:xfrm>
-            <a:off x="7378522" y="3038995"/>
-            <a:ext cx="210566" cy="277723"/>
-          </a:xfrm>
-          <a:prstGeom prst="rect">
-            <a:avLst/>
-          </a:prstGeom>
-          <a:noFill/>
-        </p:spPr>
-        <p:txBody>
-          <a:bodyPr wrap="none" lIns="0" rIns="0" tIns="0" bIns="0" anchor="t">
-            <a:spAutoFit/>
-          </a:bodyPr>
-          <a:lstStyle/>
-          <a:p>
-            <a:pPr algn="l">
-              <a:lnSpc>
-                <a:spcPts val="1540"/>
-              </a:lnSpc>
-            </a:pPr>
-            <a:r>
-              <a:rPr sz="1100">
-                <a:solidFill>
-                  <a:srgbClr val="48CD8C"/>
-                </a:solidFill>
-                <a:latin typeface="IBM Plex Mono Medium"/>
-                <a:cs typeface="IBM Plex Mono Medium"/>
-                <a:ea typeface="IBM Plex Mono Medium"/>
-              </a:rPr>
-              <a:t>—</a:t>
-            </a:r>
-          </a:p>
-        </p:txBody>
-      </p:sp>
-      <p:sp>
-        <p:nvSpPr>
-          <p:cNvPr id="19" name="TextBox 18"/>
-          <p:cNvSpPr txBox="1"/>
-          <p:nvPr/>
-        </p:nvSpPr>
-        <p:spPr>
-          <a:xfrm>
-            <a:off x="7589088" y="3038995"/>
-            <a:ext cx="3578479" cy="277723"/>
-          </a:xfrm>
-          <a:prstGeom prst="rect">
-            <a:avLst/>
-          </a:prstGeom>
-          <a:noFill/>
-        </p:spPr>
-        <p:txBody>
-          <a:bodyPr wrap="none" lIns="0" rIns="0" tIns="0" bIns="0" anchor="t">
-            <a:spAutoFit/>
-          </a:bodyPr>
-          <a:lstStyle/>
-          <a:p>
-            <a:pPr algn="l">
-              <a:lnSpc>
-                <a:spcPts val="1540"/>
-              </a:lnSpc>
-            </a:pPr>
-            <a:r>
-              <a:rPr sz="1100">
-                <a:solidFill>
-                  <a:srgbClr val="EEEBE5"/>
-                </a:solidFill>
-                <a:latin typeface="GQ Text"/>
-                <a:cs typeface="GQ Text"/>
-                <a:ea typeface="GQ Text"/>
-              </a:rPr>
-              <a:t>70 автотестов при каждом изменении</a:t>
-            </a:r>
-          </a:p>
-        </p:txBody>
-      </p:sp>
-      <p:sp>
-        <p:nvSpPr>
-          <p:cNvPr id="20" name="TextBox 19"/>
-          <p:cNvSpPr txBox="1"/>
-          <p:nvPr/>
-        </p:nvSpPr>
-        <p:spPr>
-          <a:xfrm>
-            <a:off x="7378522" y="3362591"/>
-            <a:ext cx="210566" cy="277723"/>
-          </a:xfrm>
-          <a:prstGeom prst="rect">
-            <a:avLst/>
-          </a:prstGeom>
-          <a:noFill/>
-        </p:spPr>
-        <p:txBody>
-          <a:bodyPr wrap="none" lIns="0" rIns="0" tIns="0" bIns="0" anchor="t">
-            <a:spAutoFit/>
-          </a:bodyPr>
-          <a:lstStyle/>
-          <a:p>
-            <a:pPr algn="l">
-              <a:lnSpc>
-                <a:spcPts val="1540"/>
-              </a:lnSpc>
-            </a:pPr>
-            <a:r>
-              <a:rPr sz="1100">
-                <a:solidFill>
-                  <a:srgbClr val="48CD8C"/>
-                </a:solidFill>
-                <a:latin typeface="IBM Plex Mono Medium"/>
-                <a:cs typeface="IBM Plex Mono Medium"/>
-                <a:ea typeface="IBM Plex Mono Medium"/>
-              </a:rPr>
-              <a:t>—</a:t>
-            </a:r>
-          </a:p>
-        </p:txBody>
-      </p:sp>
-      <p:sp>
-        <p:nvSpPr>
-          <p:cNvPr id="21" name="TextBox 20"/>
-          <p:cNvSpPr txBox="1"/>
-          <p:nvPr/>
-        </p:nvSpPr>
-        <p:spPr>
-          <a:xfrm>
-            <a:off x="7589088" y="3362591"/>
-            <a:ext cx="3578479" cy="277723"/>
-          </a:xfrm>
-          <a:prstGeom prst="rect">
-            <a:avLst/>
-          </a:prstGeom>
-          <a:noFill/>
-        </p:spPr>
-        <p:txBody>
-          <a:bodyPr wrap="none" lIns="0" rIns="0" tIns="0" bIns="0" anchor="t">
-            <a:spAutoFit/>
-          </a:bodyPr>
-          <a:lstStyle/>
-          <a:p>
-            <a:pPr algn="l">
-              <a:lnSpc>
-                <a:spcPts val="1540"/>
-              </a:lnSpc>
-            </a:pPr>
-            <a:r>
-              <a:rPr sz="1100">
-                <a:solidFill>
-                  <a:srgbClr val="EEEBE5"/>
-                </a:solidFill>
-                <a:latin typeface="GQ Text"/>
-                <a:cs typeface="GQ Text"/>
-                <a:ea typeface="GQ Text"/>
-              </a:rPr>
-              <a:t>28 проверок контраста цветов</a:t>
-            </a:r>
-          </a:p>
-        </p:txBody>
-      </p:sp>
-      <p:sp>
-        <p:nvSpPr>
-          <p:cNvPr id="22" name="TextBox 21"/>
-          <p:cNvSpPr txBox="1"/>
-          <p:nvPr/>
-        </p:nvSpPr>
-        <p:spPr>
-          <a:xfrm>
-            <a:off x="7378522" y="3686187"/>
-            <a:ext cx="210566" cy="277723"/>
-          </a:xfrm>
-          <a:prstGeom prst="rect">
-            <a:avLst/>
-          </a:prstGeom>
-          <a:noFill/>
-        </p:spPr>
-        <p:txBody>
-          <a:bodyPr wrap="none" lIns="0" rIns="0" tIns="0" bIns="0" anchor="t">
-            <a:spAutoFit/>
-          </a:bodyPr>
-          <a:lstStyle/>
-          <a:p>
-            <a:pPr algn="l">
-              <a:lnSpc>
-                <a:spcPts val="1540"/>
-              </a:lnSpc>
-            </a:pPr>
-            <a:r>
-              <a:rPr sz="1100">
-                <a:solidFill>
-                  <a:srgbClr val="48CD8C"/>
-                </a:solidFill>
-                <a:latin typeface="IBM Plex Mono Medium"/>
-                <a:cs typeface="IBM Plex Mono Medium"/>
-                <a:ea typeface="IBM Plex Mono Medium"/>
-              </a:rPr>
-              <a:t>—</a:t>
-            </a:r>
-          </a:p>
-        </p:txBody>
-      </p:sp>
-      <p:sp>
-        <p:nvSpPr>
-          <p:cNvPr id="23" name="TextBox 22"/>
-          <p:cNvSpPr txBox="1"/>
-          <p:nvPr/>
-        </p:nvSpPr>
-        <p:spPr>
-          <a:xfrm>
-            <a:off x="7589088" y="3686187"/>
-            <a:ext cx="3578479" cy="277723"/>
-          </a:xfrm>
-          <a:prstGeom prst="rect">
-            <a:avLst/>
-          </a:prstGeom>
-          <a:noFill/>
-        </p:spPr>
-        <p:txBody>
-          <a:bodyPr wrap="none" lIns="0" rIns="0" tIns="0" bIns="0" anchor="t">
-            <a:spAutoFit/>
-          </a:bodyPr>
-          <a:lstStyle/>
-          <a:p>
-            <a:pPr algn="l">
-              <a:lnSpc>
-                <a:spcPts val="1540"/>
-              </a:lnSpc>
-            </a:pPr>
-            <a:r>
-              <a:rPr sz="1100">
-                <a:solidFill>
-                  <a:srgbClr val="EEEBE5"/>
-                </a:solidFill>
-                <a:latin typeface="GQ Text"/>
-                <a:cs typeface="GQ Text"/>
-                <a:ea typeface="GQ Text"/>
-              </a:rPr>
-              <a:t>Проверка формулировок заданий</a:t>
-            </a:r>
-          </a:p>
-        </p:txBody>
-      </p:sp>
-      <p:sp>
-        <p:nvSpPr>
-          <p:cNvPr id="24" name="TextBox 23"/>
-          <p:cNvSpPr txBox="1"/>
-          <p:nvPr/>
-        </p:nvSpPr>
-        <p:spPr>
-          <a:xfrm>
-            <a:off x="7378522" y="4009783"/>
-            <a:ext cx="210566" cy="277723"/>
-          </a:xfrm>
-          <a:prstGeom prst="rect">
-            <a:avLst/>
-          </a:prstGeom>
-          <a:noFill/>
-        </p:spPr>
-        <p:txBody>
-          <a:bodyPr wrap="none" lIns="0" rIns="0" tIns="0" bIns="0" anchor="t">
-            <a:spAutoFit/>
-          </a:bodyPr>
-          <a:lstStyle/>
-          <a:p>
-            <a:pPr algn="l">
-              <a:lnSpc>
-                <a:spcPts val="1540"/>
-              </a:lnSpc>
-            </a:pPr>
-            <a:r>
-              <a:rPr sz="1100">
-                <a:solidFill>
-                  <a:srgbClr val="48CD8C"/>
-                </a:solidFill>
-                <a:latin typeface="IBM Plex Mono Medium"/>
-                <a:cs typeface="IBM Plex Mono Medium"/>
-                <a:ea typeface="IBM Plex Mono Medium"/>
-              </a:rPr>
-              <a:t>—</a:t>
-            </a:r>
-          </a:p>
-        </p:txBody>
-      </p:sp>
-      <p:sp>
-        <p:nvSpPr>
-          <p:cNvPr id="25" name="TextBox 24"/>
-          <p:cNvSpPr txBox="1"/>
-          <p:nvPr/>
-        </p:nvSpPr>
-        <p:spPr>
-          <a:xfrm>
-            <a:off x="7589088" y="4009783"/>
-            <a:ext cx="3578479" cy="277723"/>
-          </a:xfrm>
-          <a:prstGeom prst="rect">
-            <a:avLst/>
-          </a:prstGeom>
-          <a:noFill/>
-        </p:spPr>
-        <p:txBody>
-          <a:bodyPr wrap="none" lIns="0" rIns="0" tIns="0" bIns="0" anchor="t">
-            <a:spAutoFit/>
-          </a:bodyPr>
-          <a:lstStyle/>
-          <a:p>
-            <a:pPr algn="l">
-              <a:lnSpc>
-                <a:spcPts val="1540"/>
-              </a:lnSpc>
-            </a:pPr>
-            <a:r>
-              <a:rPr sz="1100">
-                <a:solidFill>
-                  <a:srgbClr val="EEEBE5"/>
-                </a:solidFill>
-                <a:latin typeface="GQ Text"/>
-                <a:cs typeface="GQ Text"/>
-                <a:ea typeface="GQ Text"/>
-              </a:rPr>
-              <a:t>Сверка каждого числа этого доклада</a:t>
-            </a:r>
-          </a:p>
-        </p:txBody>
-      </p:sp>
-      <p:sp>
-        <p:nvSpPr>
-          <p:cNvPr id="28" name="Rectangle 27"/>
-          <p:cNvSpPr/>
-          <p:nvPr/>
-        </p:nvSpPr>
-        <p:spPr>
-          <a:xfrm>
-            <a:off x="749808" y="5010340"/>
-            <a:ext cx="10692079" cy="710247"/>
-          </a:xfrm>
-          <a:prstGeom prst="rect">
-            <a:avLst/>
-          </a:prstGeom>
-          <a:solidFill>
-            <a:srgbClr val="0064B9"/>
-          </a:solidFill>
-          <a:ln>
-            <a:noFill/>
-          </a:ln>
-          <a:effectLst/>
-        </p:spPr>
-        <p:txBody>
-          <a:bodyPr rtlCol="0" anchor="ctr" wrap="none"/>
-          <a:lstStyle/>
-          <a:p>
-            <a:pPr algn="ctr"/>
-          </a:p>
-        </p:txBody>
-      </p:sp>
-      <p:sp>
-        <p:nvSpPr>
-          <p:cNvPr id="29" name="TextBox 28"/>
-          <p:cNvSpPr txBox="1"/>
-          <p:nvPr/>
-        </p:nvSpPr>
-        <p:spPr>
-          <a:xfrm>
-            <a:off x="1024127" y="5209425"/>
-            <a:ext cx="10143439" cy="345281"/>
-          </a:xfrm>
-          <a:prstGeom prst="rect">
-            <a:avLst/>
-          </a:prstGeom>
-          <a:noFill/>
-        </p:spPr>
-        <p:txBody>
-          <a:bodyPr wrap="none" lIns="0" rIns="0" tIns="0" bIns="0" anchor="t">
-            <a:spAutoFit/>
-          </a:bodyPr>
-          <a:lstStyle/>
-          <a:p>
-            <a:pPr algn="l">
-              <a:lnSpc>
-                <a:spcPts val="1812"/>
-              </a:lnSpc>
-            </a:pPr>
-            <a:r>
-              <a:rPr sz="1250">
-                <a:solidFill>
-                  <a:srgbClr val="FFFFFF"/>
-                </a:solidFill>
-                <a:latin typeface="GQ Text SemiBold"/>
-                <a:cs typeface="GQ Text SemiBold"/>
-                <a:ea typeface="GQ Text SemiBold"/>
-              </a:rPr>
-              <a:t>Код открыт: любой может посмотреть, как это сделано, и запустить проверки заново.</a:t>
+              <a:t>УРОКОВ · 9–11 КЛАСС</a:t>
             </a:r>
           </a:p>
         </p:txBody>
@@ -12409,208 +12545,14 @@
       </p:sp>
       <p:sp>
         <p:nvSpPr>
-          <p:cNvPr id="3" name="Rectangle 2"/>
-          <p:cNvSpPr/>
-          <p:nvPr/>
-        </p:nvSpPr>
-        <p:spPr>
-          <a:xfrm>
-            <a:off x="749808" y="475488"/>
-            <a:ext cx="10692079" cy="7315"/>
-          </a:xfrm>
-          <a:prstGeom prst="rect">
-            <a:avLst/>
-          </a:prstGeom>
-          <a:solidFill>
-            <a:srgbClr val="3B434D"/>
-          </a:solidFill>
-          <a:ln>
-            <a:noFill/>
-          </a:ln>
-          <a:effectLst/>
-        </p:spPr>
-        <p:txBody>
-          <a:bodyPr rtlCol="0" anchor="ctr" wrap="none"/>
-          <a:lstStyle/>
-          <a:p>
-            <a:pPr algn="ctr"/>
-          </a:p>
-        </p:txBody>
-      </p:sp>
-      <p:sp>
-        <p:nvSpPr>
-          <p:cNvPr id="4" name="TextBox 3"/>
-          <p:cNvSpPr txBox="1"/>
-          <p:nvPr/>
-        </p:nvSpPr>
-        <p:spPr>
-          <a:xfrm>
-            <a:off x="749808" y="559308"/>
-            <a:ext cx="7484455" cy="189357"/>
-          </a:xfrm>
-          <a:prstGeom prst="rect">
-            <a:avLst/>
-          </a:prstGeom>
-          <a:noFill/>
-        </p:spPr>
-        <p:txBody>
-          <a:bodyPr wrap="none" lIns="0" rIns="0" tIns="0" bIns="0" anchor="t">
-            <a:spAutoFit/>
-          </a:bodyPr>
-          <a:lstStyle/>
-          <a:p>
-            <a:pPr algn="l">
-              <a:lnSpc>
-                <a:spcPts val="1050"/>
-              </a:lnSpc>
-            </a:pPr>
-            <a:r>
-              <a:rPr sz="850" spc="136">
-                <a:solidFill>
-                  <a:srgbClr val="59AAF8"/>
-                </a:solidFill>
-                <a:latin typeface="IBM Plex Mono SemiBold"/>
-                <a:cs typeface="IBM Plex Mono SemiBold"/>
-                <a:ea typeface="IBM Plex Mono SemiBold"/>
-              </a:rPr>
-              <a:t>ЧТО ОСОБЕННОГО</a:t>
-            </a:r>
-          </a:p>
-        </p:txBody>
-      </p:sp>
-      <p:sp>
-        <p:nvSpPr>
-          <p:cNvPr id="5" name="TextBox 4"/>
-          <p:cNvSpPr txBox="1"/>
-          <p:nvPr/>
-        </p:nvSpPr>
-        <p:spPr>
-          <a:xfrm>
-            <a:off x="10914329" y="559308"/>
-            <a:ext cx="618998" cy="189357"/>
-          </a:xfrm>
-          <a:prstGeom prst="rect">
-            <a:avLst/>
-          </a:prstGeom>
-          <a:noFill/>
-        </p:spPr>
-        <p:txBody>
-          <a:bodyPr wrap="none" lIns="0" rIns="0" tIns="0" bIns="0" anchor="t">
-            <a:spAutoFit/>
-          </a:bodyPr>
-          <a:lstStyle/>
-          <a:p>
-            <a:pPr algn="l">
-              <a:lnSpc>
-                <a:spcPts val="1050"/>
-              </a:lnSpc>
-            </a:pPr>
-            <a:r>
-              <a:rPr sz="850" spc="85">
-                <a:solidFill>
-                  <a:srgbClr val="A6ADB6"/>
-                </a:solidFill>
-                <a:latin typeface="IBM Plex Mono Medium"/>
-                <a:cs typeface="IBM Plex Mono Medium"/>
-                <a:ea typeface="IBM Plex Mono Medium"/>
-              </a:rPr>
-              <a:t>05 / 08</a:t>
-            </a:r>
-          </a:p>
-        </p:txBody>
-      </p:sp>
-      <p:sp>
-        <p:nvSpPr>
-          <p:cNvPr id="6" name="TextBox 5"/>
-          <p:cNvSpPr txBox="1"/>
-          <p:nvPr/>
-        </p:nvSpPr>
-        <p:spPr>
-          <a:xfrm>
-            <a:off x="749808" y="801725"/>
-            <a:ext cx="10692079" cy="675373"/>
-          </a:xfrm>
-          <a:prstGeom prst="rect">
-            <a:avLst/>
-          </a:prstGeom>
-          <a:noFill/>
-        </p:spPr>
-        <p:txBody>
-          <a:bodyPr wrap="none" lIns="0" rIns="0" tIns="0" bIns="0" anchor="t">
-            <a:spAutoFit/>
-          </a:bodyPr>
-          <a:lstStyle/>
-          <a:p>
-            <a:pPr algn="l">
-              <a:lnSpc>
-                <a:spcPts val="3745"/>
-              </a:lnSpc>
-            </a:pPr>
-            <a:r>
-              <a:rPr sz="3500" spc="-77">
-                <a:solidFill>
-                  <a:srgbClr val="EEEBE5"/>
-                </a:solidFill>
-                <a:latin typeface="GQ Text Bold"/>
-                <a:cs typeface="GQ Text Bold"/>
-                <a:ea typeface="GQ Text Bold"/>
-              </a:rPr>
-              <a:t>Четыре вещи, которых нет в обычном тренажёре</a:t>
-            </a:r>
-          </a:p>
-        </p:txBody>
-      </p:sp>
-      <p:sp>
-        <p:nvSpPr>
-          <p:cNvPr id="7" name="TextBox 6"/>
-          <p:cNvSpPr txBox="1"/>
-          <p:nvPr/>
-        </p:nvSpPr>
-        <p:spPr>
-          <a:xfrm>
-            <a:off x="749808" y="1480520"/>
-            <a:ext cx="8767504" cy="332907"/>
-          </a:xfrm>
-          <a:prstGeom prst="rect">
-            <a:avLst/>
-          </a:prstGeom>
-          <a:noFill/>
-        </p:spPr>
-        <p:txBody>
-          <a:bodyPr wrap="none" lIns="0" rIns="0" tIns="0" bIns="0" anchor="t">
-            <a:spAutoFit/>
-          </a:bodyPr>
-          <a:lstStyle/>
-          <a:p>
-            <a:pPr algn="l">
-              <a:lnSpc>
-                <a:spcPts val="1846"/>
-              </a:lnSpc>
-            </a:pPr>
-            <a:r>
-              <a:rPr sz="1300">
-                <a:solidFill>
-                  <a:srgbClr val="A6ADB6"/>
-                </a:solidFill>
-                <a:latin typeface="GQ Text"/>
-                <a:cs typeface="GQ Text"/>
-                <a:ea typeface="GQ Text"/>
-              </a:rPr>
-              <a:t>Каждая появилась не для красоты, а потому что без неё ученик переставал заниматься.</a:t>
-            </a:r>
-          </a:p>
-        </p:txBody>
-      </p:sp>
-      <p:sp>
-        <p:nvSpPr>
-          <p:cNvPr id="8" name="Rectangle 7"/>
-          <p:cNvSpPr/>
-          <p:nvPr/>
-        </p:nvSpPr>
-        <p:spPr>
-          <a:xfrm>
-            <a:off x="749808" y="2227961"/>
-            <a:ext cx="2522143" cy="2521458"/>
+          <p:cNvPr id="28" name="Rectangle 27"/>
+          <p:cNvSpPr/>
+          <p:nvPr/>
+        </p:nvSpPr>
+        <p:spPr>
+          <a:xfrm>
+            <a:off x="7104202" y="2259330"/>
+            <a:ext cx="4337684" cy="2037587"/>
           </a:xfrm>
           <a:prstGeom prst="rect">
             <a:avLst/>
@@ -12635,20 +12577,20 @@
       </p:sp>
       <p:sp>
         <p:nvSpPr>
-          <p:cNvPr id="9" name="Rectangle 8"/>
-          <p:cNvSpPr/>
-          <p:nvPr/>
-        </p:nvSpPr>
-        <p:spPr>
-          <a:xfrm>
-            <a:off x="749808" y="2227961"/>
-            <a:ext cx="32004" cy="2521458"/>
-          </a:xfrm>
-          <a:prstGeom prst="rect">
-            <a:avLst/>
-          </a:prstGeom>
-          <a:solidFill>
-            <a:srgbClr val="0064B9"/>
+          <p:cNvPr id="29" name="Rectangle 28"/>
+          <p:cNvSpPr/>
+          <p:nvPr/>
+        </p:nvSpPr>
+        <p:spPr>
+          <a:xfrm>
+            <a:off x="7104202" y="2259330"/>
+            <a:ext cx="32004" cy="2037587"/>
+          </a:xfrm>
+          <a:prstGeom prst="rect">
+            <a:avLst/>
+          </a:prstGeom>
+          <a:solidFill>
+            <a:srgbClr val="00793D"/>
           </a:solidFill>
           <a:ln>
             <a:noFill/>
@@ -12665,350 +12607,14 @@
       </p:sp>
       <p:sp>
         <p:nvSpPr>
-          <p:cNvPr id="10" name="TextBox 9"/>
-          <p:cNvSpPr txBox="1"/>
-          <p:nvPr/>
-        </p:nvSpPr>
-        <p:spPr>
-          <a:xfrm>
-            <a:off x="1005840" y="2462656"/>
-            <a:ext cx="2010079" cy="189357"/>
-          </a:xfrm>
-          <a:prstGeom prst="rect">
-            <a:avLst/>
-          </a:prstGeom>
-          <a:noFill/>
-        </p:spPr>
-        <p:txBody>
-          <a:bodyPr wrap="none" lIns="0" rIns="0" tIns="0" bIns="0" anchor="t">
-            <a:spAutoFit/>
-          </a:bodyPr>
-          <a:lstStyle/>
-          <a:p>
-            <a:pPr algn="l">
-              <a:lnSpc>
-                <a:spcPts val="1050"/>
-              </a:lnSpc>
-            </a:pPr>
-            <a:r>
-              <a:rPr sz="850" spc="136">
-                <a:solidFill>
-                  <a:srgbClr val="59AAF8"/>
-                </a:solidFill>
-                <a:latin typeface="IBM Plex Mono SemiBold"/>
-                <a:cs typeface="IBM Plex Mono SemiBold"/>
-                <a:ea typeface="IBM Plex Mono SemiBold"/>
-              </a:rPr>
-              <a:t>1</a:t>
-            </a:r>
-          </a:p>
-        </p:txBody>
-      </p:sp>
-      <p:sp>
-        <p:nvSpPr>
-          <p:cNvPr id="11" name="TextBox 10"/>
-          <p:cNvSpPr txBox="1"/>
-          <p:nvPr/>
-        </p:nvSpPr>
-        <p:spPr>
-          <a:xfrm>
-            <a:off x="1005840" y="2701467"/>
-            <a:ext cx="2010079" cy="525551"/>
-          </a:xfrm>
-          <a:prstGeom prst="rect">
-            <a:avLst/>
-          </a:prstGeom>
-          <a:noFill/>
-        </p:spPr>
-        <p:txBody>
-          <a:bodyPr wrap="none" lIns="0" rIns="0" tIns="0" bIns="0" anchor="t">
-            <a:spAutoFit/>
-          </a:bodyPr>
-          <a:lstStyle/>
-          <a:p>
-            <a:pPr algn="l">
-              <a:lnSpc>
-                <a:spcPts val="1710"/>
-              </a:lnSpc>
-            </a:pPr>
-            <a:r>
-              <a:rPr sz="1500" spc="-22">
-                <a:solidFill>
-                  <a:srgbClr val="EEEBE5"/>
-                </a:solidFill>
-                <a:latin typeface="GQ Text Bold"/>
-                <a:cs typeface="GQ Text Bold"/>
-                <a:ea typeface="GQ Text Bold"/>
-              </a:rPr>
-              <a:t>Принимает русские</a:t>
-            </a:r>
-          </a:p>
-          <a:p>
-            <a:pPr algn="l">
-              <a:lnSpc>
-                <a:spcPts val="1710"/>
-              </a:lnSpc>
-            </a:pPr>
-            <a:r>
-              <a:rPr sz="1500" spc="-22">
-                <a:solidFill>
-                  <a:srgbClr val="EEEBE5"/>
-                </a:solidFill>
-                <a:latin typeface="GQ Text Bold"/>
-                <a:cs typeface="GQ Text Bold"/>
-                <a:ea typeface="GQ Text Bold"/>
-              </a:rPr>
-              <a:t>буквы</a:t>
-            </a:r>
-          </a:p>
-        </p:txBody>
-      </p:sp>
-      <p:sp>
-        <p:nvSpPr>
-          <p:cNvPr id="12" name="TextBox 11"/>
-          <p:cNvSpPr txBox="1"/>
-          <p:nvPr/>
-        </p:nvSpPr>
-        <p:spPr>
-          <a:xfrm>
-            <a:off x="1005840" y="3297554"/>
-            <a:ext cx="204216" cy="252475"/>
-          </a:xfrm>
-          <a:prstGeom prst="rect">
-            <a:avLst/>
-          </a:prstGeom>
-          <a:noFill/>
-        </p:spPr>
-        <p:txBody>
-          <a:bodyPr wrap="none" lIns="0" rIns="0" tIns="0" bIns="0" anchor="t">
-            <a:spAutoFit/>
-          </a:bodyPr>
-          <a:lstStyle/>
-          <a:p>
-            <a:pPr algn="l">
-              <a:lnSpc>
-                <a:spcPts val="1400"/>
-              </a:lnSpc>
-            </a:pPr>
-            <a:r>
-              <a:rPr sz="1000">
-                <a:solidFill>
-                  <a:srgbClr val="59AAF8"/>
-                </a:solidFill>
-                <a:latin typeface="IBM Plex Mono Medium"/>
-                <a:cs typeface="IBM Plex Mono Medium"/>
-                <a:ea typeface="IBM Plex Mono Medium"/>
-              </a:rPr>
-              <a:t>—</a:t>
-            </a:r>
-          </a:p>
-        </p:txBody>
-      </p:sp>
-      <p:sp>
-        <p:nvSpPr>
-          <p:cNvPr id="13" name="TextBox 12"/>
-          <p:cNvSpPr txBox="1"/>
-          <p:nvPr/>
-        </p:nvSpPr>
-        <p:spPr>
-          <a:xfrm>
-            <a:off x="1210056" y="3297554"/>
-            <a:ext cx="1805863" cy="608076"/>
-          </a:xfrm>
-          <a:prstGeom prst="rect">
-            <a:avLst/>
-          </a:prstGeom>
-          <a:noFill/>
-        </p:spPr>
-        <p:txBody>
-          <a:bodyPr wrap="none" lIns="0" rIns="0" tIns="0" bIns="0" anchor="t">
-            <a:spAutoFit/>
-          </a:bodyPr>
-          <a:lstStyle/>
-          <a:p>
-            <a:pPr algn="l">
-              <a:lnSpc>
-                <a:spcPts val="1400"/>
-              </a:lnSpc>
-            </a:pPr>
-            <a:r>
-              <a:rPr sz="1000">
-                <a:solidFill>
-                  <a:srgbClr val="EEEBE5"/>
-                </a:solidFill>
-                <a:latin typeface="GQ Text"/>
-                <a:cs typeface="GQ Text"/>
-                <a:ea typeface="GQ Text"/>
-              </a:rPr>
-              <a:t>В казахском девять букв,</a:t>
-            </a:r>
-          </a:p>
-          <a:p>
-            <a:pPr algn="l">
-              <a:lnSpc>
-                <a:spcPts val="1400"/>
-              </a:lnSpc>
-            </a:pPr>
-            <a:r>
-              <a:rPr sz="1000">
-                <a:solidFill>
-                  <a:srgbClr val="EEEBE5"/>
-                </a:solidFill>
-                <a:latin typeface="GQ Text"/>
-                <a:cs typeface="GQ Text"/>
-                <a:ea typeface="GQ Text"/>
-              </a:rPr>
-              <a:t>которых нет на русской</a:t>
-            </a:r>
-          </a:p>
-          <a:p>
-            <a:pPr algn="l">
-              <a:lnSpc>
-                <a:spcPts val="1400"/>
-              </a:lnSpc>
-            </a:pPr>
-            <a:r>
-              <a:rPr sz="1000">
-                <a:solidFill>
-                  <a:srgbClr val="EEEBE5"/>
-                </a:solidFill>
-                <a:latin typeface="GQ Text"/>
-                <a:cs typeface="GQ Text"/>
-                <a:ea typeface="GQ Text"/>
-              </a:rPr>
-              <a:t>раскладке</a:t>
-            </a:r>
-          </a:p>
-        </p:txBody>
-      </p:sp>
-      <p:sp>
-        <p:nvSpPr>
-          <p:cNvPr id="14" name="TextBox 13"/>
-          <p:cNvSpPr txBox="1"/>
-          <p:nvPr/>
-        </p:nvSpPr>
-        <p:spPr>
-          <a:xfrm>
-            <a:off x="1005840" y="3931538"/>
-            <a:ext cx="204216" cy="252475"/>
-          </a:xfrm>
-          <a:prstGeom prst="rect">
-            <a:avLst/>
-          </a:prstGeom>
-          <a:noFill/>
-        </p:spPr>
-        <p:txBody>
-          <a:bodyPr wrap="none" lIns="0" rIns="0" tIns="0" bIns="0" anchor="t">
-            <a:spAutoFit/>
-          </a:bodyPr>
-          <a:lstStyle/>
-          <a:p>
-            <a:pPr algn="l">
-              <a:lnSpc>
-                <a:spcPts val="1400"/>
-              </a:lnSpc>
-            </a:pPr>
-            <a:r>
-              <a:rPr sz="1000">
-                <a:solidFill>
-                  <a:srgbClr val="59AAF8"/>
-                </a:solidFill>
-                <a:latin typeface="IBM Plex Mono Medium"/>
-                <a:cs typeface="IBM Plex Mono Medium"/>
-                <a:ea typeface="IBM Plex Mono Medium"/>
-              </a:rPr>
-              <a:t>—</a:t>
-            </a:r>
-          </a:p>
-        </p:txBody>
-      </p:sp>
-      <p:sp>
-        <p:nvSpPr>
-          <p:cNvPr id="15" name="TextBox 14"/>
-          <p:cNvSpPr txBox="1"/>
-          <p:nvPr/>
-        </p:nvSpPr>
-        <p:spPr>
-          <a:xfrm>
-            <a:off x="1210056" y="3931538"/>
-            <a:ext cx="1805863" cy="608076"/>
-          </a:xfrm>
-          <a:prstGeom prst="rect">
-            <a:avLst/>
-          </a:prstGeom>
-          <a:noFill/>
-        </p:spPr>
-        <p:txBody>
-          <a:bodyPr wrap="none" lIns="0" rIns="0" tIns="0" bIns="0" anchor="t">
-            <a:spAutoFit/>
-          </a:bodyPr>
-          <a:lstStyle/>
-          <a:p>
-            <a:pPr algn="l">
-              <a:lnSpc>
-                <a:spcPts val="1400"/>
-              </a:lnSpc>
-            </a:pPr>
-            <a:r>
-              <a:rPr sz="1000">
-                <a:solidFill>
-                  <a:srgbClr val="EEEBE5"/>
-                </a:solidFill>
-                <a:latin typeface="GQ Text"/>
-                <a:cs typeface="GQ Text"/>
-                <a:ea typeface="GQ Text"/>
-              </a:rPr>
-              <a:t>Ответ засчитывается,</a:t>
-            </a:r>
-          </a:p>
-          <a:p>
-            <a:pPr algn="l">
-              <a:lnSpc>
-                <a:spcPts val="1400"/>
-              </a:lnSpc>
-            </a:pPr>
-            <a:r>
-              <a:rPr sz="1000">
-                <a:solidFill>
-                  <a:srgbClr val="EEEBE5"/>
-                </a:solidFill>
-                <a:latin typeface="GQ Text"/>
-                <a:cs typeface="GQ Text"/>
-                <a:ea typeface="GQ Text"/>
-              </a:rPr>
-              <a:t>правильное написание</a:t>
-            </a:r>
-          </a:p>
-          <a:p>
-            <a:pPr algn="l">
-              <a:lnSpc>
-                <a:spcPts val="1400"/>
-              </a:lnSpc>
-            </a:pPr>
-            <a:r>
-              <a:rPr sz="1000">
-                <a:solidFill>
-                  <a:srgbClr val="EEEBE5"/>
-                </a:solidFill>
-                <a:latin typeface="GQ Text"/>
-                <a:cs typeface="GQ Text"/>
-                <a:ea typeface="GQ Text"/>
-              </a:rPr>
-              <a:t>показывается</a:t>
-            </a:r>
-          </a:p>
-        </p:txBody>
-      </p:sp>
-      <p:sp>
-        <p:nvSpPr>
-          <p:cNvPr id="16" name="Rectangle 15"/>
-          <p:cNvSpPr/>
-          <p:nvPr/>
-        </p:nvSpPr>
-        <p:spPr>
-          <a:xfrm>
-            <a:off x="3473119" y="2227961"/>
-            <a:ext cx="2522143" cy="2521458"/>
+          <p:cNvPr id="17" name="Rectangle 16"/>
+          <p:cNvSpPr/>
+          <p:nvPr/>
+        </p:nvSpPr>
+        <p:spPr>
+          <a:xfrm>
+            <a:off x="749808" y="2259330"/>
+            <a:ext cx="6153226" cy="2741421"/>
           </a:xfrm>
           <a:prstGeom prst="rect">
             <a:avLst/>
@@ -13033,14 +12639,14 @@
       </p:sp>
       <p:sp>
         <p:nvSpPr>
-          <p:cNvPr id="17" name="Rectangle 16"/>
-          <p:cNvSpPr/>
-          <p:nvPr/>
-        </p:nvSpPr>
-        <p:spPr>
-          <a:xfrm>
-            <a:off x="3473119" y="2227961"/>
-            <a:ext cx="32004" cy="2521458"/>
+          <p:cNvPr id="18" name="Rectangle 17"/>
+          <p:cNvSpPr/>
+          <p:nvPr/>
+        </p:nvSpPr>
+        <p:spPr>
+          <a:xfrm>
+            <a:off x="749808" y="2259330"/>
+            <a:ext cx="32004" cy="2741421"/>
           </a:xfrm>
           <a:prstGeom prst="rect">
             <a:avLst/>
@@ -13063,14 +12669,44 @@
       </p:sp>
       <p:sp>
         <p:nvSpPr>
-          <p:cNvPr id="18" name="TextBox 17"/>
+          <p:cNvPr id="3" name="Rectangle 2"/>
+          <p:cNvSpPr/>
+          <p:nvPr/>
+        </p:nvSpPr>
+        <p:spPr>
+          <a:xfrm>
+            <a:off x="749808" y="475488"/>
+            <a:ext cx="10692079" cy="7315"/>
+          </a:xfrm>
+          <a:prstGeom prst="rect">
+            <a:avLst/>
+          </a:prstGeom>
+          <a:solidFill>
+            <a:srgbClr val="3B434D"/>
+          </a:solidFill>
+          <a:ln>
+            <a:noFill/>
+          </a:ln>
+          <a:effectLst/>
+        </p:spPr>
+        <p:txBody>
+          <a:bodyPr rtlCol="0" anchor="ctr" wrap="none"/>
+          <a:lstStyle/>
+          <a:p>
+            <a:pPr algn="ctr"/>
+          </a:p>
+        </p:txBody>
+      </p:sp>
+      <p:sp>
+        <p:nvSpPr>
+          <p:cNvPr id="4" name="TextBox 3"/>
           <p:cNvSpPr txBox="1"/>
           <p:nvPr/>
         </p:nvSpPr>
         <p:spPr>
           <a:xfrm>
-            <a:off x="3729151" y="2462656"/>
-            <a:ext cx="2010079" cy="189357"/>
+            <a:off x="749808" y="559308"/>
+            <a:ext cx="7484455" cy="189357"/>
           </a:xfrm>
           <a:prstGeom prst="rect">
             <a:avLst/>
@@ -13097,21 +12733,21 @@
                 <a:cs typeface="IBM Plex Mono SemiBold"/>
                 <a:ea typeface="IBM Plex Mono SemiBold"/>
               </a:rPr>
-              <a:t>2</a:t>
-            </a:r>
-          </a:p>
-        </p:txBody>
-      </p:sp>
-      <p:sp>
-        <p:nvSpPr>
-          <p:cNvPr id="19" name="TextBox 18"/>
+              <a:t>КАК СОЗДАНО</a:t>
+            </a:r>
+          </a:p>
+        </p:txBody>
+      </p:sp>
+      <p:sp>
+        <p:nvSpPr>
+          <p:cNvPr id="5" name="TextBox 4"/>
           <p:cNvSpPr txBox="1"/>
           <p:nvPr/>
         </p:nvSpPr>
         <p:spPr>
           <a:xfrm>
-            <a:off x="3729151" y="2701467"/>
-            <a:ext cx="2010079" cy="525551"/>
+            <a:off x="10914329" y="559308"/>
+            <a:ext cx="618998" cy="189357"/>
           </a:xfrm>
           <a:prstGeom prst="rect">
             <a:avLst/>
@@ -13126,11 +12762,52 @@
           <a:p>
             <a:pPr algn="l">
               <a:lnSpc>
-                <a:spcPts val="1710"/>
-              </a:lnSpc>
-            </a:pPr>
-            <a:r>
-              <a:rPr sz="1500" spc="-22">
+                <a:spcPts val="1050"/>
+              </a:lnSpc>
+            </a:pPr>
+            <a:r>
+              <a:rPr sz="850" spc="85">
+                <a:solidFill>
+                  <a:srgbClr val="A6ADB6"/>
+                </a:solidFill>
+                <a:latin typeface="IBM Plex Mono Medium"/>
+                <a:cs typeface="IBM Plex Mono Medium"/>
+                <a:ea typeface="IBM Plex Mono Medium"/>
+              </a:rPr>
+              <a:t>05 / 08</a:t>
+            </a:r>
+          </a:p>
+        </p:txBody>
+      </p:sp>
+      <p:sp>
+        <p:nvSpPr>
+          <p:cNvPr id="6" name="TextBox 5"/>
+          <p:cNvSpPr txBox="1"/>
+          <p:nvPr/>
+        </p:nvSpPr>
+        <p:spPr>
+          <a:xfrm>
+            <a:off x="749808" y="790854"/>
+            <a:ext cx="10692079" cy="771855"/>
+          </a:xfrm>
+          <a:prstGeom prst="rect">
+            <a:avLst/>
+          </a:prstGeom>
+          <a:noFill/>
+        </p:spPr>
+        <p:txBody>
+          <a:bodyPr wrap="none" lIns="0" rIns="0" tIns="0" bIns="0" anchor="t">
+            <a:spAutoFit/>
+          </a:bodyPr>
+          <a:lstStyle/>
+          <a:p>
+            <a:pPr algn="l">
+              <a:lnSpc>
+                <a:spcPts val="4280"/>
+              </a:lnSpc>
+            </a:pPr>
+            <a:r>
+              <a:rPr sz="4000" spc="-88">
                 <a:solidFill>
                   <a:srgbClr val="EEEBE5"/>
                 </a:solidFill>
@@ -13138,39 +12815,21 @@
                 <a:cs typeface="GQ Text Bold"/>
                 <a:ea typeface="GQ Text Bold"/>
               </a:rPr>
-              <a:t>Считает окончания</a:t>
-            </a:r>
-          </a:p>
-          <a:p>
-            <a:pPr algn="l">
-              <a:lnSpc>
-                <a:spcPts val="1710"/>
-              </a:lnSpc>
-            </a:pPr>
-            <a:r>
-              <a:rPr sz="1500" spc="-22">
-                <a:solidFill>
-                  <a:srgbClr val="EEEBE5"/>
-                </a:solidFill>
-                <a:latin typeface="GQ Text Bold"/>
-                <a:cs typeface="GQ Text Bold"/>
-                <a:ea typeface="GQ Text Bold"/>
-              </a:rPr>
-              <a:t>по правилам</a:t>
-            </a:r>
-          </a:p>
-        </p:txBody>
-      </p:sp>
-      <p:sp>
-        <p:nvSpPr>
-          <p:cNvPr id="20" name="TextBox 19"/>
+              <a:t>Какими сервисами это сделано</a:t>
+            </a:r>
+          </a:p>
+        </p:txBody>
+      </p:sp>
+      <p:sp>
+        <p:nvSpPr>
+          <p:cNvPr id="7" name="TextBox 6"/>
           <p:cNvSpPr txBox="1"/>
           <p:nvPr/>
         </p:nvSpPr>
         <p:spPr>
           <a:xfrm>
-            <a:off x="3729151" y="3297554"/>
-            <a:ext cx="204216" cy="252475"/>
+            <a:off x="749808" y="1530177"/>
+            <a:ext cx="9195188" cy="332907"/>
           </a:xfrm>
           <a:prstGeom prst="rect">
             <a:avLst/>
@@ -13185,11 +12844,93 @@
           <a:p>
             <a:pPr algn="l">
               <a:lnSpc>
-                <a:spcPts val="1400"/>
-              </a:lnSpc>
-            </a:pPr>
-            <a:r>
-              <a:rPr sz="1000">
+                <a:spcPts val="1846"/>
+              </a:lnSpc>
+            </a:pPr>
+            <a:r>
+              <a:rPr sz="1300">
+                <a:solidFill>
+                  <a:srgbClr val="A6ADB6"/>
+                </a:solidFill>
+                <a:latin typeface="GQ Text"/>
+                <a:cs typeface="GQ Text"/>
+                <a:ea typeface="GQ Text"/>
+              </a:rPr>
+              <a:t>Все инструменты бесплатные и доступны школьнику. Ни за один сервис платить не пришлось.</a:t>
+            </a:r>
+          </a:p>
+        </p:txBody>
+      </p:sp>
+      <p:sp>
+        <p:nvSpPr>
+          <p:cNvPr id="8" name="TextBox 7"/>
+          <p:cNvSpPr txBox="1"/>
+          <p:nvPr/>
+        </p:nvSpPr>
+        <p:spPr>
+          <a:xfrm>
+            <a:off x="1024127" y="2511298"/>
+            <a:ext cx="5604586" cy="198374"/>
+          </a:xfrm>
+          <a:prstGeom prst="rect">
+            <a:avLst/>
+          </a:prstGeom>
+          <a:noFill/>
+        </p:spPr>
+        <p:txBody>
+          <a:bodyPr wrap="none" lIns="0" rIns="0" tIns="0" bIns="0" anchor="t">
+            <a:spAutoFit/>
+          </a:bodyPr>
+          <a:lstStyle/>
+          <a:p>
+            <a:pPr algn="l">
+              <a:lnSpc>
+                <a:spcPts val="1100"/>
+              </a:lnSpc>
+            </a:pPr>
+            <a:r>
+              <a:rPr sz="850" spc="136">
+                <a:solidFill>
+                  <a:srgbClr val="59AAF8"/>
+                </a:solidFill>
+                <a:latin typeface="IBM Plex Mono SemiBold"/>
+                <a:cs typeface="IBM Plex Mono SemiBold"/>
+                <a:ea typeface="IBM Plex Mono SemiBold"/>
+              </a:rPr>
+              <a:t>ЧЕМ СДЕЛАНО</a:t>
+            </a:r>
+          </a:p>
+        </p:txBody>
+      </p:sp>
+      <p:sp>
+        <p:nvSpPr>
+          <p:cNvPr id="9" name="TextBox 8"/>
+          <p:cNvSpPr txBox="1"/>
+          <p:nvPr/>
+        </p:nvSpPr>
+        <p:spPr>
+          <a:xfrm>
+            <a:off x="1024127" y="2823514"/>
+            <a:ext cx="216916" cy="290347"/>
+          </a:xfrm>
+          <a:prstGeom prst="rect">
+            <a:avLst/>
+          </a:prstGeom>
+          <a:noFill/>
+        </p:spPr>
+        <p:txBody>
+          <a:bodyPr wrap="none" lIns="0" rIns="0" tIns="0" bIns="0" anchor="t">
+            <a:spAutoFit/>
+          </a:bodyPr>
+          <a:lstStyle/>
+          <a:p>
+            <a:pPr algn="l">
+              <a:lnSpc>
+                <a:spcPts val="1610"/>
+              </a:lnSpc>
+            </a:pPr>
+            <a:r>
+              <a:rPr sz="1150">
                 <a:solidFill>
                   <a:srgbClr val="59AAF8"/>
                 </a:solidFill>
@@ -13204,14 +12945,14 @@
       </p:sp>
       <p:sp>
         <p:nvSpPr>
-          <p:cNvPr id="21" name="TextBox 20"/>
+          <p:cNvPr id="10" name="TextBox 9"/>
           <p:cNvSpPr txBox="1"/>
           <p:nvPr/>
         </p:nvSpPr>
         <p:spPr>
           <a:xfrm>
-            <a:off x="3933367" y="3297554"/>
-            <a:ext cx="1805863" cy="430276"/>
+            <a:off x="1241044" y="2823514"/>
+            <a:ext cx="5387670" cy="511174"/>
           </a:xfrm>
           <a:prstGeom prst="rect">
             <a:avLst/>
@@ -13226,11 +12967,22 @@
           <a:p>
             <a:pPr algn="l">
               <a:lnSpc>
-                <a:spcPts val="1400"/>
-              </a:lnSpc>
-            </a:pPr>
-            <a:r>
-              <a:rPr sz="1000">
+                <a:spcPts val="1610"/>
+              </a:lnSpc>
+            </a:pPr>
+            <a:r>
+              <a:rPr sz="1150">
+                <a:solidFill>
+                  <a:srgbClr val="EEEBE5"/>
+                </a:solidFill>
+                <a:latin typeface="GQ Text SemiBold"/>
+                <a:cs typeface="GQ Text SemiBold"/>
+                <a:ea typeface="GQ Text SemiBold"/>
+              </a:rPr>
+              <a:t>Нейросеть-помощник. </a:t>
+            </a:r>
+            <a:r>
+              <a:rPr sz="1150">
                 <a:solidFill>
                   <a:srgbClr val="EEEBE5"/>
                 </a:solidFill>
@@ -13238,17 +12990,17 @@
                 <a:cs typeface="GQ Text"/>
                 <a:ea typeface="GQ Text"/>
               </a:rPr>
-              <a:t>Подставь любое своё слово</a:t>
-            </a:r>
-          </a:p>
-          <a:p>
-            <a:pPr algn="l">
-              <a:lnSpc>
-                <a:spcPts val="1400"/>
-              </a:lnSpc>
-            </a:pPr>
-            <a:r>
-              <a:rPr sz="1000">
+              <a:t> Писала код по моим задачам — я ставил задачу и</a:t>
+            </a:r>
+          </a:p>
+          <a:p>
+            <a:pPr algn="l">
+              <a:lnSpc>
+                <a:spcPts val="1610"/>
+              </a:lnSpc>
+            </a:pPr>
+            <a:r>
+              <a:rPr sz="1150">
                 <a:solidFill>
                   <a:srgbClr val="EEEBE5"/>
                 </a:solidFill>
@@ -13256,21 +13008,21 @@
                 <a:cs typeface="GQ Text"/>
                 <a:ea typeface="GQ Text"/>
               </a:rPr>
-              <a:t>— увидишь все его формы</a:t>
-            </a:r>
-          </a:p>
-        </p:txBody>
-      </p:sp>
-      <p:sp>
-        <p:nvSpPr>
-          <p:cNvPr id="22" name="TextBox 21"/>
+              <a:t>проверял результат.</a:t>
+            </a:r>
+          </a:p>
+        </p:txBody>
+      </p:sp>
+      <p:sp>
+        <p:nvSpPr>
+          <p:cNvPr id="11" name="TextBox 10"/>
           <p:cNvSpPr txBox="1"/>
           <p:nvPr/>
         </p:nvSpPr>
         <p:spPr>
           <a:xfrm>
-            <a:off x="3729151" y="3753739"/>
-            <a:ext cx="204216" cy="252475"/>
+            <a:off x="1024127" y="3378758"/>
+            <a:ext cx="216916" cy="290347"/>
           </a:xfrm>
           <a:prstGeom prst="rect">
             <a:avLst/>
@@ -13285,11 +13037,11 @@
           <a:p>
             <a:pPr algn="l">
               <a:lnSpc>
-                <a:spcPts val="1400"/>
-              </a:lnSpc>
-            </a:pPr>
-            <a:r>
-              <a:rPr sz="1000">
+                <a:spcPts val="1610"/>
+              </a:lnSpc>
+            </a:pPr>
+            <a:r>
+              <a:rPr sz="1150">
                 <a:solidFill>
                   <a:srgbClr val="59AAF8"/>
                 </a:solidFill>
@@ -13304,14 +13056,14 @@
       </p:sp>
       <p:sp>
         <p:nvSpPr>
-          <p:cNvPr id="23" name="TextBox 22"/>
+          <p:cNvPr id="12" name="TextBox 11"/>
           <p:cNvSpPr txBox="1"/>
           <p:nvPr/>
         </p:nvSpPr>
         <p:spPr>
           <a:xfrm>
-            <a:off x="3933367" y="3753739"/>
-            <a:ext cx="1805863" cy="430276"/>
+            <a:off x="1241044" y="3378758"/>
+            <a:ext cx="5387670" cy="511174"/>
           </a:xfrm>
           <a:prstGeom prst="rect">
             <a:avLst/>
@@ -13326,11 +13078,22 @@
           <a:p>
             <a:pPr algn="l">
               <a:lnSpc>
-                <a:spcPts val="1400"/>
-              </a:lnSpc>
-            </a:pPr>
-            <a:r>
-              <a:rPr sz="1000">
+                <a:spcPts val="1610"/>
+              </a:lnSpc>
+            </a:pPr>
+            <a:r>
+              <a:rPr sz="1150">
+                <a:solidFill>
+                  <a:srgbClr val="EEEBE5"/>
+                </a:solidFill>
+                <a:latin typeface="GQ Text SemiBold"/>
+                <a:cs typeface="GQ Text SemiBold"/>
+                <a:ea typeface="GQ Text SemiBold"/>
+              </a:rPr>
+              <a:t>GitHub. </a:t>
+            </a:r>
+            <a:r>
+              <a:rPr sz="1150">
                 <a:solidFill>
                   <a:srgbClr val="EEEBE5"/>
                 </a:solidFill>
@@ -13338,17 +13101,17 @@
                 <a:cs typeface="GQ Text"/>
                 <a:ea typeface="GQ Text"/>
               </a:rPr>
-              <a:t>Не таблица, а правила</a:t>
-            </a:r>
-          </a:p>
-          <a:p>
-            <a:pPr algn="l">
-              <a:lnSpc>
-                <a:spcPts val="1400"/>
-              </a:lnSpc>
-            </a:pPr>
-            <a:r>
-              <a:rPr sz="1000">
+              <a:t> Хранит код и всю историю изменений, там же собирается</a:t>
+            </a:r>
+          </a:p>
+          <a:p>
+            <a:pPr algn="l">
+              <a:lnSpc>
+                <a:spcPts val="1610"/>
+              </a:lnSpc>
+            </a:pPr>
+            <a:r>
+              <a:rPr sz="1150">
                 <a:solidFill>
                   <a:srgbClr val="EEEBE5"/>
                 </a:solidFill>
@@ -13356,83 +13119,21 @@
                 <a:cs typeface="GQ Text"/>
                 <a:ea typeface="GQ Text"/>
               </a:rPr>
-              <a:t>казахского языка</a:t>
-            </a:r>
-          </a:p>
-        </p:txBody>
-      </p:sp>
-      <p:sp>
-        <p:nvSpPr>
-          <p:cNvPr id="24" name="Rectangle 23"/>
-          <p:cNvSpPr/>
-          <p:nvPr/>
-        </p:nvSpPr>
-        <p:spPr>
-          <a:xfrm>
-            <a:off x="6196431" y="2227961"/>
-            <a:ext cx="2522143" cy="2521458"/>
-          </a:xfrm>
-          <a:prstGeom prst="rect">
-            <a:avLst/>
-          </a:prstGeom>
-          <a:solidFill>
-            <a:srgbClr val="11161E"/>
-          </a:solidFill>
-          <a:ln w="9525">
-            <a:solidFill>
-              <a:srgbClr val="3B434D"/>
-            </a:solidFill>
-          </a:ln>
-          <a:effectLst/>
-        </p:spPr>
-        <p:txBody>
-          <a:bodyPr rtlCol="0" anchor="ctr" wrap="none"/>
-          <a:lstStyle/>
-          <a:p>
-            <a:pPr algn="ctr"/>
-          </a:p>
-        </p:txBody>
-      </p:sp>
-      <p:sp>
-        <p:nvSpPr>
-          <p:cNvPr id="25" name="Rectangle 24"/>
-          <p:cNvSpPr/>
-          <p:nvPr/>
-        </p:nvSpPr>
-        <p:spPr>
-          <a:xfrm>
-            <a:off x="6196431" y="2227961"/>
-            <a:ext cx="32004" cy="2521458"/>
-          </a:xfrm>
-          <a:prstGeom prst="rect">
-            <a:avLst/>
-          </a:prstGeom>
-          <a:solidFill>
-            <a:srgbClr val="0064B9"/>
-          </a:solidFill>
-          <a:ln>
-            <a:noFill/>
-          </a:ln>
-          <a:effectLst/>
-        </p:spPr>
-        <p:txBody>
-          <a:bodyPr rtlCol="0" anchor="ctr" wrap="none"/>
-          <a:lstStyle/>
-          <a:p>
-            <a:pPr algn="ctr"/>
-          </a:p>
-        </p:txBody>
-      </p:sp>
-      <p:sp>
-        <p:nvSpPr>
-          <p:cNvPr id="26" name="TextBox 25"/>
+              <a:t>версия для Android.</a:t>
+            </a:r>
+          </a:p>
+        </p:txBody>
+      </p:sp>
+      <p:sp>
+        <p:nvSpPr>
+          <p:cNvPr id="13" name="TextBox 12"/>
           <p:cNvSpPr txBox="1"/>
           <p:nvPr/>
         </p:nvSpPr>
         <p:spPr>
           <a:xfrm>
-            <a:off x="6452463" y="2462656"/>
-            <a:ext cx="2010079" cy="189357"/>
+            <a:off x="1024127" y="3934002"/>
+            <a:ext cx="216916" cy="290347"/>
           </a:xfrm>
           <a:prstGeom prst="rect">
             <a:avLst/>
@@ -13447,33 +13148,237 @@
           <a:p>
             <a:pPr algn="l">
               <a:lnSpc>
-                <a:spcPts val="1050"/>
+                <a:spcPts val="1610"/>
+              </a:lnSpc>
+            </a:pPr>
+            <a:r>
+              <a:rPr sz="1150">
+                <a:solidFill>
+                  <a:srgbClr val="59AAF8"/>
+                </a:solidFill>
+                <a:latin typeface="IBM Plex Mono Medium"/>
+                <a:cs typeface="IBM Plex Mono Medium"/>
+                <a:ea typeface="IBM Plex Mono Medium"/>
+              </a:rPr>
+              <a:t>—</a:t>
+            </a:r>
+          </a:p>
+        </p:txBody>
+      </p:sp>
+      <p:sp>
+        <p:nvSpPr>
+          <p:cNvPr id="14" name="TextBox 13"/>
+          <p:cNvSpPr txBox="1"/>
+          <p:nvPr/>
+        </p:nvSpPr>
+        <p:spPr>
+          <a:xfrm>
+            <a:off x="1241044" y="3934002"/>
+            <a:ext cx="5387670" cy="306705"/>
+          </a:xfrm>
+          <a:prstGeom prst="rect">
+            <a:avLst/>
+          </a:prstGeom>
+          <a:noFill/>
+        </p:spPr>
+        <p:txBody>
+          <a:bodyPr wrap="none" lIns="0" rIns="0" tIns="0" bIns="0" anchor="t">
+            <a:spAutoFit/>
+          </a:bodyPr>
+          <a:lstStyle/>
+          <a:p>
+            <a:pPr algn="l">
+              <a:lnSpc>
+                <a:spcPts val="1610"/>
+              </a:lnSpc>
+            </a:pPr>
+            <a:r>
+              <a:rPr sz="1150">
+                <a:solidFill>
+                  <a:srgbClr val="EEEBE5"/>
+                </a:solidFill>
+                <a:latin typeface="GQ Text SemiBold"/>
+                <a:cs typeface="GQ Text SemiBold"/>
+                <a:ea typeface="GQ Text SemiBold"/>
+              </a:rPr>
+              <a:t>Vercel. </a:t>
+            </a:r>
+            <a:r>
+              <a:rPr sz="1150">
+                <a:solidFill>
+                  <a:srgbClr val="EEEBE5"/>
+                </a:solidFill>
+                <a:latin typeface="GQ Text"/>
+                <a:cs typeface="GQ Text"/>
+                <a:ea typeface="GQ Text"/>
+              </a:rPr>
+              <a:t> Сам публикует сайт в интернете после каждого исправления.</a:t>
+            </a:r>
+          </a:p>
+        </p:txBody>
+      </p:sp>
+      <p:sp>
+        <p:nvSpPr>
+          <p:cNvPr id="15" name="TextBox 14"/>
+          <p:cNvSpPr txBox="1"/>
+          <p:nvPr/>
+        </p:nvSpPr>
+        <p:spPr>
+          <a:xfrm>
+            <a:off x="1024127" y="4284776"/>
+            <a:ext cx="216916" cy="290347"/>
+          </a:xfrm>
+          <a:prstGeom prst="rect">
+            <a:avLst/>
+          </a:prstGeom>
+          <a:noFill/>
+        </p:spPr>
+        <p:txBody>
+          <a:bodyPr wrap="none" lIns="0" rIns="0" tIns="0" bIns="0" anchor="t">
+            <a:spAutoFit/>
+          </a:bodyPr>
+          <a:lstStyle/>
+          <a:p>
+            <a:pPr algn="l">
+              <a:lnSpc>
+                <a:spcPts val="1610"/>
+              </a:lnSpc>
+            </a:pPr>
+            <a:r>
+              <a:rPr sz="1150">
+                <a:solidFill>
+                  <a:srgbClr val="59AAF8"/>
+                </a:solidFill>
+                <a:latin typeface="IBM Plex Mono Medium"/>
+                <a:cs typeface="IBM Plex Mono Medium"/>
+                <a:ea typeface="IBM Plex Mono Medium"/>
+              </a:rPr>
+              <a:t>—</a:t>
+            </a:r>
+          </a:p>
+        </p:txBody>
+      </p:sp>
+      <p:sp>
+        <p:nvSpPr>
+          <p:cNvPr id="16" name="TextBox 15"/>
+          <p:cNvSpPr txBox="1"/>
+          <p:nvPr/>
+        </p:nvSpPr>
+        <p:spPr>
+          <a:xfrm>
+            <a:off x="1241044" y="4284776"/>
+            <a:ext cx="5387670" cy="511174"/>
+          </a:xfrm>
+          <a:prstGeom prst="rect">
+            <a:avLst/>
+          </a:prstGeom>
+          <a:noFill/>
+        </p:spPr>
+        <p:txBody>
+          <a:bodyPr wrap="none" lIns="0" rIns="0" tIns="0" bIns="0" anchor="t">
+            <a:spAutoFit/>
+          </a:bodyPr>
+          <a:lstStyle/>
+          <a:p>
+            <a:pPr algn="l">
+              <a:lnSpc>
+                <a:spcPts val="1610"/>
+              </a:lnSpc>
+            </a:pPr>
+            <a:r>
+              <a:rPr sz="1150">
+                <a:solidFill>
+                  <a:srgbClr val="EEEBE5"/>
+                </a:solidFill>
+                <a:latin typeface="GQ Text SemiBold"/>
+                <a:cs typeface="GQ Text SemiBold"/>
+                <a:ea typeface="GQ Text SemiBold"/>
+              </a:rPr>
+              <a:t>Capacitor. </a:t>
+            </a:r>
+            <a:r>
+              <a:rPr sz="1150">
+                <a:solidFill>
+                  <a:srgbClr val="EEEBE5"/>
+                </a:solidFill>
+                <a:latin typeface="GQ Text"/>
+                <a:cs typeface="GQ Text"/>
+                <a:ea typeface="GQ Text"/>
+              </a:rPr>
+              <a:t> Превращает сайт в приложение, которое ставится на</a:t>
+            </a:r>
+          </a:p>
+          <a:p>
+            <a:pPr algn="l">
+              <a:lnSpc>
+                <a:spcPts val="1610"/>
+              </a:lnSpc>
+            </a:pPr>
+            <a:r>
+              <a:rPr sz="1150">
+                <a:solidFill>
+                  <a:srgbClr val="EEEBE5"/>
+                </a:solidFill>
+                <a:latin typeface="GQ Text"/>
+                <a:cs typeface="GQ Text"/>
+                <a:ea typeface="GQ Text"/>
+              </a:rPr>
+              <a:t>телефон.</a:t>
+            </a:r>
+          </a:p>
+        </p:txBody>
+      </p:sp>
+      <p:sp>
+        <p:nvSpPr>
+          <p:cNvPr id="19" name="TextBox 18"/>
+          <p:cNvSpPr txBox="1"/>
+          <p:nvPr/>
+        </p:nvSpPr>
+        <p:spPr>
+          <a:xfrm>
+            <a:off x="7378522" y="2511298"/>
+            <a:ext cx="3789045" cy="198374"/>
+          </a:xfrm>
+          <a:prstGeom prst="rect">
+            <a:avLst/>
+          </a:prstGeom>
+          <a:noFill/>
+        </p:spPr>
+        <p:txBody>
+          <a:bodyPr wrap="none" lIns="0" rIns="0" tIns="0" bIns="0" anchor="t">
+            <a:spAutoFit/>
+          </a:bodyPr>
+          <a:lstStyle/>
+          <a:p>
+            <a:pPr algn="l">
+              <a:lnSpc>
+                <a:spcPts val="1100"/>
               </a:lnSpc>
             </a:pPr>
             <a:r>
               <a:rPr sz="850" spc="136">
                 <a:solidFill>
-                  <a:srgbClr val="59AAF8"/>
+                  <a:srgbClr val="48CD8C"/>
                 </a:solidFill>
                 <a:latin typeface="IBM Plex Mono SemiBold"/>
                 <a:cs typeface="IBM Plex Mono SemiBold"/>
                 <a:ea typeface="IBM Plex Mono SemiBold"/>
               </a:rPr>
-              <a:t>3</a:t>
-            </a:r>
-          </a:p>
-        </p:txBody>
-      </p:sp>
-      <p:sp>
-        <p:nvSpPr>
-          <p:cNvPr id="27" name="TextBox 26"/>
+              <a:t>ЧТО ПРОВЕРЯЕТСЯ САМО</a:t>
+            </a:r>
+          </a:p>
+        </p:txBody>
+      </p:sp>
+      <p:sp>
+        <p:nvSpPr>
+          <p:cNvPr id="20" name="TextBox 19"/>
           <p:cNvSpPr txBox="1"/>
           <p:nvPr/>
         </p:nvSpPr>
         <p:spPr>
           <a:xfrm>
-            <a:off x="6452463" y="2701467"/>
-            <a:ext cx="2010079" cy="308381"/>
+            <a:off x="7378522" y="2824937"/>
+            <a:ext cx="210566" cy="277723"/>
           </a:xfrm>
           <a:prstGeom prst="rect">
             <a:avLst/>
@@ -13488,33 +13393,33 @@
           <a:p>
             <a:pPr algn="l">
               <a:lnSpc>
-                <a:spcPts val="1710"/>
-              </a:lnSpc>
-            </a:pPr>
-            <a:r>
-              <a:rPr sz="1500" spc="-22">
-                <a:solidFill>
-                  <a:srgbClr val="EEEBE5"/>
-                </a:solidFill>
-                <a:latin typeface="GQ Text Bold"/>
-                <a:cs typeface="GQ Text Bold"/>
-                <a:ea typeface="GQ Text Bold"/>
-              </a:rPr>
-              <a:t>Возвращает забытое</a:t>
-            </a:r>
-          </a:p>
-        </p:txBody>
-      </p:sp>
-      <p:sp>
-        <p:nvSpPr>
-          <p:cNvPr id="28" name="TextBox 27"/>
+                <a:spcPts val="1540"/>
+              </a:lnSpc>
+            </a:pPr>
+            <a:r>
+              <a:rPr sz="1100">
+                <a:solidFill>
+                  <a:srgbClr val="48CD8C"/>
+                </a:solidFill>
+                <a:latin typeface="IBM Plex Mono Medium"/>
+                <a:cs typeface="IBM Plex Mono Medium"/>
+                <a:ea typeface="IBM Plex Mono Medium"/>
+              </a:rPr>
+              <a:t>—</a:t>
+            </a:r>
+          </a:p>
+        </p:txBody>
+      </p:sp>
+      <p:sp>
+        <p:nvSpPr>
+          <p:cNvPr id="21" name="TextBox 20"/>
           <p:cNvSpPr txBox="1"/>
           <p:nvPr/>
         </p:nvSpPr>
         <p:spPr>
           <a:xfrm>
-            <a:off x="6452463" y="3080384"/>
-            <a:ext cx="204216" cy="252475"/>
+            <a:off x="7589088" y="2824937"/>
+            <a:ext cx="3578479" cy="277723"/>
           </a:xfrm>
           <a:prstGeom prst="rect">
             <a:avLst/>
@@ -13529,13 +13434,54 @@
           <a:p>
             <a:pPr algn="l">
               <a:lnSpc>
-                <a:spcPts val="1400"/>
-              </a:lnSpc>
-            </a:pPr>
-            <a:r>
-              <a:rPr sz="1000">
-                <a:solidFill>
-                  <a:srgbClr val="59AAF8"/>
+                <a:spcPts val="1540"/>
+              </a:lnSpc>
+            </a:pPr>
+            <a:r>
+              <a:rPr sz="1100">
+                <a:solidFill>
+                  <a:srgbClr val="EEEBE5"/>
+                </a:solidFill>
+                <a:latin typeface="GQ Text"/>
+                <a:cs typeface="GQ Text"/>
+                <a:ea typeface="GQ Text"/>
+              </a:rPr>
+              <a:t>70 автотестов при каждом изменении</a:t>
+            </a:r>
+          </a:p>
+        </p:txBody>
+      </p:sp>
+      <p:sp>
+        <p:nvSpPr>
+          <p:cNvPr id="22" name="TextBox 21"/>
+          <p:cNvSpPr txBox="1"/>
+          <p:nvPr/>
+        </p:nvSpPr>
+        <p:spPr>
+          <a:xfrm>
+            <a:off x="7378522" y="3148533"/>
+            <a:ext cx="210566" cy="277723"/>
+          </a:xfrm>
+          <a:prstGeom prst="rect">
+            <a:avLst/>
+          </a:prstGeom>
+          <a:noFill/>
+        </p:spPr>
+        <p:txBody>
+          <a:bodyPr wrap="none" lIns="0" rIns="0" tIns="0" bIns="0" anchor="t">
+            <a:spAutoFit/>
+          </a:bodyPr>
+          <a:lstStyle/>
+          <a:p>
+            <a:pPr algn="l">
+              <a:lnSpc>
+                <a:spcPts val="1540"/>
+              </a:lnSpc>
+            </a:pPr>
+            <a:r>
+              <a:rPr sz="1100">
+                <a:solidFill>
+                  <a:srgbClr val="48CD8C"/>
                 </a:solidFill>
                 <a:latin typeface="IBM Plex Mono Medium"/>
                 <a:cs typeface="IBM Plex Mono Medium"/>
@@ -13548,14 +13494,14 @@
       </p:sp>
       <p:sp>
         <p:nvSpPr>
-          <p:cNvPr id="29" name="TextBox 28"/>
+          <p:cNvPr id="23" name="TextBox 22"/>
           <p:cNvSpPr txBox="1"/>
           <p:nvPr/>
         </p:nvSpPr>
         <p:spPr>
           <a:xfrm>
-            <a:off x="6656679" y="3080384"/>
-            <a:ext cx="1805863" cy="430276"/>
+            <a:off x="7589088" y="3148533"/>
+            <a:ext cx="3578479" cy="277723"/>
           </a:xfrm>
           <a:prstGeom prst="rect">
             <a:avLst/>
@@ -13570,11 +13516,11 @@
           <a:p>
             <a:pPr algn="l">
               <a:lnSpc>
-                <a:spcPts val="1400"/>
-              </a:lnSpc>
-            </a:pPr>
-            <a:r>
-              <a:rPr sz="1000">
+                <a:spcPts val="1540"/>
+              </a:lnSpc>
+            </a:pPr>
+            <a:r>
+              <a:rPr sz="1100">
                 <a:solidFill>
                   <a:srgbClr val="EEEBE5"/>
                 </a:solidFill>
@@ -13582,17 +13528,81 @@
                 <a:cs typeface="GQ Text"/>
                 <a:ea typeface="GQ Text"/>
               </a:rPr>
-              <a:t>Ошибся — задание вернётся</a:t>
-            </a:r>
-          </a:p>
-          <a:p>
-            <a:pPr algn="l">
-              <a:lnSpc>
-                <a:spcPts val="1400"/>
-              </a:lnSpc>
-            </a:pPr>
-            <a:r>
-              <a:rPr sz="1000">
+              <a:t>28 проверок контраста цветов</a:t>
+            </a:r>
+          </a:p>
+        </p:txBody>
+      </p:sp>
+      <p:sp>
+        <p:nvSpPr>
+          <p:cNvPr id="24" name="TextBox 23"/>
+          <p:cNvSpPr txBox="1"/>
+          <p:nvPr/>
+        </p:nvSpPr>
+        <p:spPr>
+          <a:xfrm>
+            <a:off x="7378522" y="3472129"/>
+            <a:ext cx="210566" cy="277723"/>
+          </a:xfrm>
+          <a:prstGeom prst="rect">
+            <a:avLst/>
+          </a:prstGeom>
+          <a:noFill/>
+        </p:spPr>
+        <p:txBody>
+          <a:bodyPr wrap="none" lIns="0" rIns="0" tIns="0" bIns="0" anchor="t">
+            <a:spAutoFit/>
+          </a:bodyPr>
+          <a:lstStyle/>
+          <a:p>
+            <a:pPr algn="l">
+              <a:lnSpc>
+                <a:spcPts val="1540"/>
+              </a:lnSpc>
+            </a:pPr>
+            <a:r>
+              <a:rPr sz="1100">
+                <a:solidFill>
+                  <a:srgbClr val="48CD8C"/>
+                </a:solidFill>
+                <a:latin typeface="IBM Plex Mono Medium"/>
+                <a:cs typeface="IBM Plex Mono Medium"/>
+                <a:ea typeface="IBM Plex Mono Medium"/>
+              </a:rPr>
+              <a:t>—</a:t>
+            </a:r>
+          </a:p>
+        </p:txBody>
+      </p:sp>
+      <p:sp>
+        <p:nvSpPr>
+          <p:cNvPr id="25" name="TextBox 24"/>
+          <p:cNvSpPr txBox="1"/>
+          <p:nvPr/>
+        </p:nvSpPr>
+        <p:spPr>
+          <a:xfrm>
+            <a:off x="7589088" y="3472129"/>
+            <a:ext cx="3578479" cy="277723"/>
+          </a:xfrm>
+          <a:prstGeom prst="rect">
+            <a:avLst/>
+          </a:prstGeom>
+          <a:noFill/>
+        </p:spPr>
+        <p:txBody>
+          <a:bodyPr wrap="none" lIns="0" rIns="0" tIns="0" bIns="0" anchor="t">
+            <a:spAutoFit/>
+          </a:bodyPr>
+          <a:lstStyle/>
+          <a:p>
+            <a:pPr algn="l">
+              <a:lnSpc>
+                <a:spcPts val="1540"/>
+              </a:lnSpc>
+            </a:pPr>
+            <a:r>
+              <a:rPr sz="1100">
                 <a:solidFill>
                   <a:srgbClr val="EEEBE5"/>
                 </a:solidFill>
@@ -13600,21 +13610,21 @@
                 <a:cs typeface="GQ Text"/>
                 <a:ea typeface="GQ Text"/>
               </a:rPr>
-              <a:t>сегодня</a:t>
-            </a:r>
-          </a:p>
-        </p:txBody>
-      </p:sp>
-      <p:sp>
-        <p:nvSpPr>
-          <p:cNvPr id="30" name="TextBox 29"/>
+              <a:t>Проверка формулировок заданий</a:t>
+            </a:r>
+          </a:p>
+        </p:txBody>
+      </p:sp>
+      <p:sp>
+        <p:nvSpPr>
+          <p:cNvPr id="26" name="TextBox 25"/>
           <p:cNvSpPr txBox="1"/>
           <p:nvPr/>
         </p:nvSpPr>
         <p:spPr>
           <a:xfrm>
-            <a:off x="6452463" y="3536568"/>
-            <a:ext cx="204216" cy="252475"/>
+            <a:off x="7378522" y="3795725"/>
+            <a:ext cx="210566" cy="277723"/>
           </a:xfrm>
           <a:prstGeom prst="rect">
             <a:avLst/>
@@ -13629,13 +13639,13 @@
           <a:p>
             <a:pPr algn="l">
               <a:lnSpc>
-                <a:spcPts val="1400"/>
-              </a:lnSpc>
-            </a:pPr>
-            <a:r>
-              <a:rPr sz="1000">
-                <a:solidFill>
-                  <a:srgbClr val="59AAF8"/>
+                <a:spcPts val="1540"/>
+              </a:lnSpc>
+            </a:pPr>
+            <a:r>
+              <a:rPr sz="1100">
+                <a:solidFill>
+                  <a:srgbClr val="48CD8C"/>
                 </a:solidFill>
                 <a:latin typeface="IBM Plex Mono Medium"/>
                 <a:cs typeface="IBM Plex Mono Medium"/>
@@ -13648,14 +13658,14 @@
       </p:sp>
       <p:sp>
         <p:nvSpPr>
-          <p:cNvPr id="31" name="TextBox 30"/>
+          <p:cNvPr id="27" name="TextBox 26"/>
           <p:cNvSpPr txBox="1"/>
           <p:nvPr/>
         </p:nvSpPr>
         <p:spPr>
           <a:xfrm>
-            <a:off x="6656679" y="3536568"/>
-            <a:ext cx="1805863" cy="430276"/>
+            <a:off x="7589088" y="3795725"/>
+            <a:ext cx="3578479" cy="277723"/>
           </a:xfrm>
           <a:prstGeom prst="rect">
             <a:avLst/>
@@ -13670,11 +13680,11 @@
           <a:p>
             <a:pPr algn="l">
               <a:lnSpc>
-                <a:spcPts val="1400"/>
-              </a:lnSpc>
-            </a:pPr>
-            <a:r>
-              <a:rPr sz="1000">
+                <a:spcPts val="1540"/>
+              </a:lnSpc>
+            </a:pPr>
+            <a:r>
+              <a:rPr sz="1100">
                 <a:solidFill>
                   <a:srgbClr val="EEEBE5"/>
                 </a:solidFill>
@@ -13682,71 +13692,21 @@
                 <a:cs typeface="GQ Text"/>
                 <a:ea typeface="GQ Text"/>
               </a:rPr>
-              <a:t>Ответил верно — через день,</a:t>
-            </a:r>
-          </a:p>
-          <a:p>
-            <a:pPr algn="l">
-              <a:lnSpc>
-                <a:spcPts val="1400"/>
-              </a:lnSpc>
-            </a:pPr>
-            <a:r>
-              <a:rPr sz="1000">
-                <a:solidFill>
-                  <a:srgbClr val="EEEBE5"/>
-                </a:solidFill>
-                <a:latin typeface="GQ Text"/>
-                <a:cs typeface="GQ Text"/>
-                <a:ea typeface="GQ Text"/>
-              </a:rPr>
-              <a:t>потом через три</a:t>
-            </a:r>
-          </a:p>
-        </p:txBody>
-      </p:sp>
-      <p:sp>
-        <p:nvSpPr>
-          <p:cNvPr id="32" name="Rectangle 31"/>
-          <p:cNvSpPr/>
-          <p:nvPr/>
-        </p:nvSpPr>
-        <p:spPr>
-          <a:xfrm>
-            <a:off x="8919743" y="2227961"/>
-            <a:ext cx="2522143" cy="2521458"/>
-          </a:xfrm>
-          <a:prstGeom prst="rect">
-            <a:avLst/>
-          </a:prstGeom>
-          <a:solidFill>
-            <a:srgbClr val="11161E"/>
-          </a:solidFill>
-          <a:ln w="9525">
-            <a:solidFill>
-              <a:srgbClr val="3B434D"/>
-            </a:solidFill>
-          </a:ln>
-          <a:effectLst/>
-        </p:spPr>
-        <p:txBody>
-          <a:bodyPr rtlCol="0" anchor="ctr" wrap="none"/>
-          <a:lstStyle/>
-          <a:p>
-            <a:pPr algn="ctr"/>
-          </a:p>
-        </p:txBody>
-      </p:sp>
-      <p:sp>
-        <p:nvSpPr>
-          <p:cNvPr id="33" name="Rectangle 32"/>
-          <p:cNvSpPr/>
-          <p:nvPr/>
-        </p:nvSpPr>
-        <p:spPr>
-          <a:xfrm>
-            <a:off x="8919743" y="2227961"/>
-            <a:ext cx="32004" cy="2521458"/>
+              <a:t>Сверка каждого числа этого доклада</a:t>
+            </a:r>
+          </a:p>
+        </p:txBody>
+      </p:sp>
+      <p:sp>
+        <p:nvSpPr>
+          <p:cNvPr id="30" name="Rectangle 29"/>
+          <p:cNvSpPr/>
+          <p:nvPr/>
+        </p:nvSpPr>
+        <p:spPr>
+          <a:xfrm>
+            <a:off x="749808" y="5147056"/>
+            <a:ext cx="10692079" cy="710247"/>
           </a:xfrm>
           <a:prstGeom prst="rect">
             <a:avLst/>
@@ -13769,14 +13729,14 @@
       </p:sp>
       <p:sp>
         <p:nvSpPr>
-          <p:cNvPr id="34" name="TextBox 33"/>
+          <p:cNvPr id="31" name="TextBox 30"/>
           <p:cNvSpPr txBox="1"/>
           <p:nvPr/>
         </p:nvSpPr>
         <p:spPr>
           <a:xfrm>
-            <a:off x="9175775" y="2462656"/>
-            <a:ext cx="2010079" cy="189357"/>
+            <a:off x="1024127" y="5346141"/>
+            <a:ext cx="10143439" cy="345281"/>
           </a:xfrm>
           <a:prstGeom prst="rect">
             <a:avLst/>
@@ -13791,318 +13751,6 @@
           <a:p>
             <a:pPr algn="l">
               <a:lnSpc>
-                <a:spcPts val="1050"/>
-              </a:lnSpc>
-            </a:pPr>
-            <a:r>
-              <a:rPr sz="850" spc="136">
-                <a:solidFill>
-                  <a:srgbClr val="59AAF8"/>
-                </a:solidFill>
-                <a:latin typeface="IBM Plex Mono SemiBold"/>
-                <a:cs typeface="IBM Plex Mono SemiBold"/>
-                <a:ea typeface="IBM Plex Mono SemiBold"/>
-              </a:rPr>
-              <a:t>4</a:t>
-            </a:r>
-          </a:p>
-        </p:txBody>
-      </p:sp>
-      <p:sp>
-        <p:nvSpPr>
-          <p:cNvPr id="35" name="TextBox 34"/>
-          <p:cNvSpPr txBox="1"/>
-          <p:nvPr/>
-        </p:nvSpPr>
-        <p:spPr>
-          <a:xfrm>
-            <a:off x="9175775" y="2701467"/>
-            <a:ext cx="2010079" cy="525551"/>
-          </a:xfrm>
-          <a:prstGeom prst="rect">
-            <a:avLst/>
-          </a:prstGeom>
-          <a:noFill/>
-        </p:spPr>
-        <p:txBody>
-          <a:bodyPr wrap="none" lIns="0" rIns="0" tIns="0" bIns="0" anchor="t">
-            <a:spAutoFit/>
-          </a:bodyPr>
-          <a:lstStyle/>
-          <a:p>
-            <a:pPr algn="l">
-              <a:lnSpc>
-                <a:spcPts val="1710"/>
-              </a:lnSpc>
-            </a:pPr>
-            <a:r>
-              <a:rPr sz="1500" spc="-22">
-                <a:solidFill>
-                  <a:srgbClr val="EEEBE5"/>
-                </a:solidFill>
-                <a:latin typeface="GQ Text Bold"/>
-                <a:cs typeface="GQ Text Bold"/>
-                <a:ea typeface="GQ Text Bold"/>
-              </a:rPr>
-              <a:t>Работает без</a:t>
-            </a:r>
-          </a:p>
-          <a:p>
-            <a:pPr algn="l">
-              <a:lnSpc>
-                <a:spcPts val="1710"/>
-              </a:lnSpc>
-            </a:pPr>
-            <a:r>
-              <a:rPr sz="1500" spc="-22">
-                <a:solidFill>
-                  <a:srgbClr val="EEEBE5"/>
-                </a:solidFill>
-                <a:latin typeface="GQ Text Bold"/>
-                <a:cs typeface="GQ Text Bold"/>
-                <a:ea typeface="GQ Text Bold"/>
-              </a:rPr>
-              <a:t>интернета</a:t>
-            </a:r>
-          </a:p>
-        </p:txBody>
-      </p:sp>
-      <p:sp>
-        <p:nvSpPr>
-          <p:cNvPr id="36" name="TextBox 35"/>
-          <p:cNvSpPr txBox="1"/>
-          <p:nvPr/>
-        </p:nvSpPr>
-        <p:spPr>
-          <a:xfrm>
-            <a:off x="9175775" y="3297554"/>
-            <a:ext cx="204216" cy="252475"/>
-          </a:xfrm>
-          <a:prstGeom prst="rect">
-            <a:avLst/>
-          </a:prstGeom>
-          <a:noFill/>
-        </p:spPr>
-        <p:txBody>
-          <a:bodyPr wrap="none" lIns="0" rIns="0" tIns="0" bIns="0" anchor="t">
-            <a:spAutoFit/>
-          </a:bodyPr>
-          <a:lstStyle/>
-          <a:p>
-            <a:pPr algn="l">
-              <a:lnSpc>
-                <a:spcPts val="1400"/>
-              </a:lnSpc>
-            </a:pPr>
-            <a:r>
-              <a:rPr sz="1000">
-                <a:solidFill>
-                  <a:srgbClr val="59AAF8"/>
-                </a:solidFill>
-                <a:latin typeface="IBM Plex Mono Medium"/>
-                <a:cs typeface="IBM Plex Mono Medium"/>
-                <a:ea typeface="IBM Plex Mono Medium"/>
-              </a:rPr>
-              <a:t>—</a:t>
-            </a:r>
-          </a:p>
-        </p:txBody>
-      </p:sp>
-      <p:sp>
-        <p:nvSpPr>
-          <p:cNvPr id="37" name="TextBox 36"/>
-          <p:cNvSpPr txBox="1"/>
-          <p:nvPr/>
-        </p:nvSpPr>
-        <p:spPr>
-          <a:xfrm>
-            <a:off x="9379991" y="3297554"/>
-            <a:ext cx="1805863" cy="252475"/>
-          </a:xfrm>
-          <a:prstGeom prst="rect">
-            <a:avLst/>
-          </a:prstGeom>
-          <a:noFill/>
-        </p:spPr>
-        <p:txBody>
-          <a:bodyPr wrap="none" lIns="0" rIns="0" tIns="0" bIns="0" anchor="t">
-            <a:spAutoFit/>
-          </a:bodyPr>
-          <a:lstStyle/>
-          <a:p>
-            <a:pPr algn="l">
-              <a:lnSpc>
-                <a:spcPts val="1400"/>
-              </a:lnSpc>
-            </a:pPr>
-            <a:r>
-              <a:rPr sz="1000">
-                <a:solidFill>
-                  <a:srgbClr val="EEEBE5"/>
-                </a:solidFill>
-                <a:latin typeface="GQ Text"/>
-                <a:cs typeface="GQ Text"/>
-                <a:ea typeface="GQ Text"/>
-              </a:rPr>
-              <a:t>Скачивается один раз</a:t>
-            </a:r>
-          </a:p>
-        </p:txBody>
-      </p:sp>
-      <p:sp>
-        <p:nvSpPr>
-          <p:cNvPr id="38" name="TextBox 37"/>
-          <p:cNvSpPr txBox="1"/>
-          <p:nvPr/>
-        </p:nvSpPr>
-        <p:spPr>
-          <a:xfrm>
-            <a:off x="9175775" y="3575939"/>
-            <a:ext cx="204216" cy="252475"/>
-          </a:xfrm>
-          <a:prstGeom prst="rect">
-            <a:avLst/>
-          </a:prstGeom>
-          <a:noFill/>
-        </p:spPr>
-        <p:txBody>
-          <a:bodyPr wrap="none" lIns="0" rIns="0" tIns="0" bIns="0" anchor="t">
-            <a:spAutoFit/>
-          </a:bodyPr>
-          <a:lstStyle/>
-          <a:p>
-            <a:pPr algn="l">
-              <a:lnSpc>
-                <a:spcPts val="1400"/>
-              </a:lnSpc>
-            </a:pPr>
-            <a:r>
-              <a:rPr sz="1000">
-                <a:solidFill>
-                  <a:srgbClr val="59AAF8"/>
-                </a:solidFill>
-                <a:latin typeface="IBM Plex Mono Medium"/>
-                <a:cs typeface="IBM Plex Mono Medium"/>
-                <a:ea typeface="IBM Plex Mono Medium"/>
-              </a:rPr>
-              <a:t>—</a:t>
-            </a:r>
-          </a:p>
-        </p:txBody>
-      </p:sp>
-      <p:sp>
-        <p:nvSpPr>
-          <p:cNvPr id="39" name="TextBox 38"/>
-          <p:cNvSpPr txBox="1"/>
-          <p:nvPr/>
-        </p:nvSpPr>
-        <p:spPr>
-          <a:xfrm>
-            <a:off x="9379991" y="3575939"/>
-            <a:ext cx="1805863" cy="430276"/>
-          </a:xfrm>
-          <a:prstGeom prst="rect">
-            <a:avLst/>
-          </a:prstGeom>
-          <a:noFill/>
-        </p:spPr>
-        <p:txBody>
-          <a:bodyPr wrap="none" lIns="0" rIns="0" tIns="0" bIns="0" anchor="t">
-            <a:spAutoFit/>
-          </a:bodyPr>
-          <a:lstStyle/>
-          <a:p>
-            <a:pPr algn="l">
-              <a:lnSpc>
-                <a:spcPts val="1400"/>
-              </a:lnSpc>
-            </a:pPr>
-            <a:r>
-              <a:rPr sz="1000">
-                <a:solidFill>
-                  <a:srgbClr val="EEEBE5"/>
-                </a:solidFill>
-                <a:latin typeface="GQ Text"/>
-                <a:cs typeface="GQ Text"/>
-                <a:ea typeface="GQ Text"/>
-              </a:rPr>
-              <a:t>Дальше занимайся где</a:t>
-            </a:r>
-          </a:p>
-          <a:p>
-            <a:pPr algn="l">
-              <a:lnSpc>
-                <a:spcPts val="1400"/>
-              </a:lnSpc>
-            </a:pPr>
-            <a:r>
-              <a:rPr sz="1000">
-                <a:solidFill>
-                  <a:srgbClr val="EEEBE5"/>
-                </a:solidFill>
-                <a:latin typeface="GQ Text"/>
-                <a:cs typeface="GQ Text"/>
-                <a:ea typeface="GQ Text"/>
-              </a:rPr>
-              <a:t>угодно</a:t>
-            </a:r>
-          </a:p>
-        </p:txBody>
-      </p:sp>
-      <p:sp>
-        <p:nvSpPr>
-          <p:cNvPr id="40" name="Rectangle 39"/>
-          <p:cNvSpPr/>
-          <p:nvPr/>
-        </p:nvSpPr>
-        <p:spPr>
-          <a:xfrm>
-            <a:off x="749808" y="5151755"/>
-            <a:ext cx="10692079" cy="710247"/>
-          </a:xfrm>
-          <a:prstGeom prst="rect">
-            <a:avLst/>
-          </a:prstGeom>
-          <a:solidFill>
-            <a:srgbClr val="0064B9"/>
-          </a:solidFill>
-          <a:ln>
-            <a:noFill/>
-          </a:ln>
-          <a:effectLst/>
-        </p:spPr>
-        <p:txBody>
-          <a:bodyPr rtlCol="0" anchor="ctr" wrap="none"/>
-          <a:lstStyle/>
-          <a:p>
-            <a:pPr algn="ctr"/>
-          </a:p>
-        </p:txBody>
-      </p:sp>
-      <p:sp>
-        <p:nvSpPr>
-          <p:cNvPr id="41" name="TextBox 40"/>
-          <p:cNvSpPr txBox="1"/>
-          <p:nvPr/>
-        </p:nvSpPr>
-        <p:spPr>
-          <a:xfrm>
-            <a:off x="1024127" y="5350840"/>
-            <a:ext cx="10143439" cy="345281"/>
-          </a:xfrm>
-          <a:prstGeom prst="rect">
-            <a:avLst/>
-          </a:prstGeom>
-          <a:noFill/>
-        </p:spPr>
-        <p:txBody>
-          <a:bodyPr wrap="none" lIns="0" rIns="0" tIns="0" bIns="0" anchor="t">
-            <a:spAutoFit/>
-          </a:bodyPr>
-          <a:lstStyle/>
-          <a:p>
-            <a:pPr algn="l">
-              <a:lnSpc>
                 <a:spcPts val="1812"/>
               </a:lnSpc>
             </a:pPr>
@@ -14115,7 +13763,7 @@
                 <a:cs typeface="GQ Text SemiBold"/>
                 <a:ea typeface="GQ Text SemiBold"/>
               </a:rPr>
-              <a:t>Всё это проверяется автотестами при каждом обновлении: сломать незаметно нельзя.</a:t>
+              <a:t>Код открыт: любой может посмотреть, как это сделано, и запустить проверки заново.</a:t>
             </a:r>
           </a:p>
         </p:txBody>
@@ -14234,7 +13882,7 @@
                 <a:cs typeface="IBM Plex Mono SemiBold"/>
                 <a:ea typeface="IBM Plex Mono SemiBold"/>
               </a:rPr>
-              <a:t>ЧТО ВНУТРИ</a:t>
+              <a:t>ЧТО ОСОБЕННОГО</a:t>
             </a:r>
           </a:p>
         </p:txBody>
@@ -14288,8 +13936,8 @@
         </p:nvSpPr>
         <p:spPr>
           <a:xfrm>
-            <a:off x="749808" y="793028"/>
-            <a:ext cx="10692079" cy="752558"/>
+            <a:off x="749808" y="801725"/>
+            <a:ext cx="10692079" cy="675373"/>
           </a:xfrm>
           <a:prstGeom prst="rect">
             <a:avLst/>
@@ -14304,11 +13952,11 @@
           <a:p>
             <a:pPr algn="l">
               <a:lnSpc>
-                <a:spcPts val="4173"/>
-              </a:lnSpc>
-            </a:pPr>
-            <a:r>
-              <a:rPr sz="3900" spc="-86">
+                <a:spcPts val="3745"/>
+              </a:lnSpc>
+            </a:pPr>
+            <a:r>
+              <a:rPr sz="3500" spc="-77">
                 <a:solidFill>
                   <a:srgbClr val="EEEBE5"/>
                 </a:solidFill>
@@ -14316,7 +13964,7 @@
                 <a:cs typeface="GQ Text Bold"/>
                 <a:ea typeface="GQ Text Bold"/>
               </a:rPr>
-              <a:t>Пять разделов и повторение по расписанию</a:t>
+              <a:t>Четыре вещи, которых нет в обычном тренажёре</a:t>
             </a:r>
           </a:p>
         </p:txBody>
@@ -14329,8 +13977,8 @@
         </p:nvSpPr>
         <p:spPr>
           <a:xfrm>
-            <a:off x="749808" y="1516588"/>
-            <a:ext cx="9195188" cy="567349"/>
+            <a:off x="749808" y="1480520"/>
+            <a:ext cx="8767504" cy="332907"/>
           </a:xfrm>
           <a:prstGeom prst="rect">
             <a:avLst/>
@@ -14357,69 +14005,301 @@
                 <a:cs typeface="GQ Text"/>
                 <a:ea typeface="GQ Text"/>
               </a:rPr>
-              <a:t>Каждое задание становится карточкой. Ответил верно — приложение вернёт её через день, потом через три,</a:t>
-            </a:r>
-          </a:p>
-          <a:p>
-            <a:pPr algn="l">
-              <a:lnSpc>
-                <a:spcPts val="1846"/>
-              </a:lnSpc>
-            </a:pPr>
-            <a:r>
-              <a:rPr sz="1300">
-                <a:solidFill>
-                  <a:srgbClr val="A6ADB6"/>
+              <a:t>Каждая появилась не для красоты, а потому что без неё ученик переставал заниматься.</a:t>
+            </a:r>
+          </a:p>
+        </p:txBody>
+      </p:sp>
+      <p:sp>
+        <p:nvSpPr>
+          <p:cNvPr id="8" name="Rectangle 7"/>
+          <p:cNvSpPr/>
+          <p:nvPr/>
+        </p:nvSpPr>
+        <p:spPr>
+          <a:xfrm>
+            <a:off x="749808" y="2227961"/>
+            <a:ext cx="2522143" cy="2521458"/>
+          </a:xfrm>
+          <a:prstGeom prst="rect">
+            <a:avLst/>
+          </a:prstGeom>
+          <a:solidFill>
+            <a:srgbClr val="11161E"/>
+          </a:solidFill>
+          <a:ln w="9525">
+            <a:solidFill>
+              <a:srgbClr val="3B434D"/>
+            </a:solidFill>
+          </a:ln>
+          <a:effectLst/>
+        </p:spPr>
+        <p:txBody>
+          <a:bodyPr rtlCol="0" anchor="ctr" wrap="none"/>
+          <a:lstStyle/>
+          <a:p>
+            <a:pPr algn="ctr"/>
+          </a:p>
+        </p:txBody>
+      </p:sp>
+      <p:sp>
+        <p:nvSpPr>
+          <p:cNvPr id="9" name="Rectangle 8"/>
+          <p:cNvSpPr/>
+          <p:nvPr/>
+        </p:nvSpPr>
+        <p:spPr>
+          <a:xfrm>
+            <a:off x="749808" y="2227961"/>
+            <a:ext cx="32004" cy="2521458"/>
+          </a:xfrm>
+          <a:prstGeom prst="rect">
+            <a:avLst/>
+          </a:prstGeom>
+          <a:solidFill>
+            <a:srgbClr val="0064B9"/>
+          </a:solidFill>
+          <a:ln>
+            <a:noFill/>
+          </a:ln>
+          <a:effectLst/>
+        </p:spPr>
+        <p:txBody>
+          <a:bodyPr rtlCol="0" anchor="ctr" wrap="none"/>
+          <a:lstStyle/>
+          <a:p>
+            <a:pPr algn="ctr"/>
+          </a:p>
+        </p:txBody>
+      </p:sp>
+      <p:sp>
+        <p:nvSpPr>
+          <p:cNvPr id="10" name="TextBox 9"/>
+          <p:cNvSpPr txBox="1"/>
+          <p:nvPr/>
+        </p:nvSpPr>
+        <p:spPr>
+          <a:xfrm>
+            <a:off x="1005840" y="2462656"/>
+            <a:ext cx="2010079" cy="189357"/>
+          </a:xfrm>
+          <a:prstGeom prst="rect">
+            <a:avLst/>
+          </a:prstGeom>
+          <a:noFill/>
+        </p:spPr>
+        <p:txBody>
+          <a:bodyPr wrap="none" lIns="0" rIns="0" tIns="0" bIns="0" anchor="t">
+            <a:spAutoFit/>
+          </a:bodyPr>
+          <a:lstStyle/>
+          <a:p>
+            <a:pPr algn="l">
+              <a:lnSpc>
+                <a:spcPts val="1050"/>
+              </a:lnSpc>
+            </a:pPr>
+            <a:r>
+              <a:rPr sz="850" spc="136">
+                <a:solidFill>
+                  <a:srgbClr val="59AAF8"/>
+                </a:solidFill>
+                <a:latin typeface="IBM Plex Mono SemiBold"/>
+                <a:cs typeface="IBM Plex Mono SemiBold"/>
+                <a:ea typeface="IBM Plex Mono SemiBold"/>
+              </a:rPr>
+              <a:t>1</a:t>
+            </a:r>
+          </a:p>
+        </p:txBody>
+      </p:sp>
+      <p:sp>
+        <p:nvSpPr>
+          <p:cNvPr id="11" name="TextBox 10"/>
+          <p:cNvSpPr txBox="1"/>
+          <p:nvPr/>
+        </p:nvSpPr>
+        <p:spPr>
+          <a:xfrm>
+            <a:off x="1005840" y="2701467"/>
+            <a:ext cx="2010079" cy="525551"/>
+          </a:xfrm>
+          <a:prstGeom prst="rect">
+            <a:avLst/>
+          </a:prstGeom>
+          <a:noFill/>
+        </p:spPr>
+        <p:txBody>
+          <a:bodyPr wrap="none" lIns="0" rIns="0" tIns="0" bIns="0" anchor="t">
+            <a:spAutoFit/>
+          </a:bodyPr>
+          <a:lstStyle/>
+          <a:p>
+            <a:pPr algn="l">
+              <a:lnSpc>
+                <a:spcPts val="1710"/>
+              </a:lnSpc>
+            </a:pPr>
+            <a:r>
+              <a:rPr sz="1500" spc="-22">
+                <a:solidFill>
+                  <a:srgbClr val="EEEBE5"/>
+                </a:solidFill>
+                <a:latin typeface="GQ Text Bold"/>
+                <a:cs typeface="GQ Text Bold"/>
+                <a:ea typeface="GQ Text Bold"/>
+              </a:rPr>
+              <a:t>Принимает русские</a:t>
+            </a:r>
+          </a:p>
+          <a:p>
+            <a:pPr algn="l">
+              <a:lnSpc>
+                <a:spcPts val="1710"/>
+              </a:lnSpc>
+            </a:pPr>
+            <a:r>
+              <a:rPr sz="1500" spc="-22">
+                <a:solidFill>
+                  <a:srgbClr val="EEEBE5"/>
+                </a:solidFill>
+                <a:latin typeface="GQ Text Bold"/>
+                <a:cs typeface="GQ Text Bold"/>
+                <a:ea typeface="GQ Text Bold"/>
+              </a:rPr>
+              <a:t>буквы</a:t>
+            </a:r>
+          </a:p>
+        </p:txBody>
+      </p:sp>
+      <p:sp>
+        <p:nvSpPr>
+          <p:cNvPr id="12" name="TextBox 11"/>
+          <p:cNvSpPr txBox="1"/>
+          <p:nvPr/>
+        </p:nvSpPr>
+        <p:spPr>
+          <a:xfrm>
+            <a:off x="1005840" y="3297554"/>
+            <a:ext cx="204216" cy="252475"/>
+          </a:xfrm>
+          <a:prstGeom prst="rect">
+            <a:avLst/>
+          </a:prstGeom>
+          <a:noFill/>
+        </p:spPr>
+        <p:txBody>
+          <a:bodyPr wrap="none" lIns="0" rIns="0" tIns="0" bIns="0" anchor="t">
+            <a:spAutoFit/>
+          </a:bodyPr>
+          <a:lstStyle/>
+          <a:p>
+            <a:pPr algn="l">
+              <a:lnSpc>
+                <a:spcPts val="1400"/>
+              </a:lnSpc>
+            </a:pPr>
+            <a:r>
+              <a:rPr sz="1000">
+                <a:solidFill>
+                  <a:srgbClr val="59AAF8"/>
+                </a:solidFill>
+                <a:latin typeface="IBM Plex Mono Medium"/>
+                <a:cs typeface="IBM Plex Mono Medium"/>
+                <a:ea typeface="IBM Plex Mono Medium"/>
+              </a:rPr>
+              <a:t>—</a:t>
+            </a:r>
+          </a:p>
+        </p:txBody>
+      </p:sp>
+      <p:sp>
+        <p:nvSpPr>
+          <p:cNvPr id="13" name="TextBox 12"/>
+          <p:cNvSpPr txBox="1"/>
+          <p:nvPr/>
+        </p:nvSpPr>
+        <p:spPr>
+          <a:xfrm>
+            <a:off x="1210056" y="3297554"/>
+            <a:ext cx="1805863" cy="608076"/>
+          </a:xfrm>
+          <a:prstGeom prst="rect">
+            <a:avLst/>
+          </a:prstGeom>
+          <a:noFill/>
+        </p:spPr>
+        <p:txBody>
+          <a:bodyPr wrap="none" lIns="0" rIns="0" tIns="0" bIns="0" anchor="t">
+            <a:spAutoFit/>
+          </a:bodyPr>
+          <a:lstStyle/>
+          <a:p>
+            <a:pPr algn="l">
+              <a:lnSpc>
+                <a:spcPts val="1400"/>
+              </a:lnSpc>
+            </a:pPr>
+            <a:r>
+              <a:rPr sz="1000">
+                <a:solidFill>
+                  <a:srgbClr val="EEEBE5"/>
                 </a:solidFill>
                 <a:latin typeface="GQ Text"/>
                 <a:cs typeface="GQ Text"/>
                 <a:ea typeface="GQ Text"/>
               </a:rPr>
-              <a:t>дальше реже. Ошибся — вернёт сегодня же.</a:t>
-            </a:r>
-          </a:p>
-        </p:txBody>
-      </p:sp>
-      <p:sp>
-        <p:nvSpPr>
-          <p:cNvPr id="8" name="Rectangle 7"/>
-          <p:cNvSpPr/>
-          <p:nvPr/>
-        </p:nvSpPr>
-        <p:spPr>
-          <a:xfrm>
-            <a:off x="749808" y="2260726"/>
-            <a:ext cx="10692079" cy="7315"/>
-          </a:xfrm>
-          <a:prstGeom prst="rect">
-            <a:avLst/>
-          </a:prstGeom>
-          <a:solidFill>
-            <a:srgbClr val="3B434D"/>
-          </a:solidFill>
-          <a:ln>
-            <a:noFill/>
-          </a:ln>
-          <a:effectLst/>
-        </p:spPr>
-        <p:txBody>
-          <a:bodyPr rtlCol="0" anchor="ctr" wrap="none"/>
-          <a:lstStyle/>
-          <a:p>
-            <a:pPr algn="ctr"/>
-          </a:p>
-        </p:txBody>
-      </p:sp>
-      <p:sp>
-        <p:nvSpPr>
-          <p:cNvPr id="9" name="TextBox 8"/>
+              <a:t>В казахском девять букв,</a:t>
+            </a:r>
+          </a:p>
+          <a:p>
+            <a:pPr algn="l">
+              <a:lnSpc>
+                <a:spcPts val="1400"/>
+              </a:lnSpc>
+            </a:pPr>
+            <a:r>
+              <a:rPr sz="1000">
+                <a:solidFill>
+                  <a:srgbClr val="EEEBE5"/>
+                </a:solidFill>
+                <a:latin typeface="GQ Text"/>
+                <a:cs typeface="GQ Text"/>
+                <a:ea typeface="GQ Text"/>
+              </a:rPr>
+              <a:t>которых нет на русской</a:t>
+            </a:r>
+          </a:p>
+          <a:p>
+            <a:pPr algn="l">
+              <a:lnSpc>
+                <a:spcPts val="1400"/>
+              </a:lnSpc>
+            </a:pPr>
+            <a:r>
+              <a:rPr sz="1000">
+                <a:solidFill>
+                  <a:srgbClr val="EEEBE5"/>
+                </a:solidFill>
+                <a:latin typeface="GQ Text"/>
+                <a:cs typeface="GQ Text"/>
+                <a:ea typeface="GQ Text"/>
+              </a:rPr>
+              <a:t>раскладке</a:t>
+            </a:r>
+          </a:p>
+        </p:txBody>
+      </p:sp>
+      <p:sp>
+        <p:nvSpPr>
+          <p:cNvPr id="14" name="TextBox 13"/>
           <p:cNvSpPr txBox="1"/>
           <p:nvPr/>
         </p:nvSpPr>
         <p:spPr>
           <a:xfrm>
-            <a:off x="749808" y="2535209"/>
-            <a:ext cx="1962851" cy="323169"/>
+            <a:off x="1005840" y="3931538"/>
+            <a:ext cx="204216" cy="252475"/>
           </a:xfrm>
           <a:prstGeom prst="rect">
             <a:avLst/>
@@ -14434,11 +14314,232 @@
           <a:p>
             <a:pPr algn="l">
               <a:lnSpc>
-                <a:spcPts val="1792"/>
-              </a:lnSpc>
-            </a:pPr>
-            <a:r>
-              <a:rPr sz="1600" spc="-24">
+                <a:spcPts val="1400"/>
+              </a:lnSpc>
+            </a:pPr>
+            <a:r>
+              <a:rPr sz="1000">
+                <a:solidFill>
+                  <a:srgbClr val="59AAF8"/>
+                </a:solidFill>
+                <a:latin typeface="IBM Plex Mono Medium"/>
+                <a:cs typeface="IBM Plex Mono Medium"/>
+                <a:ea typeface="IBM Plex Mono Medium"/>
+              </a:rPr>
+              <a:t>—</a:t>
+            </a:r>
+          </a:p>
+        </p:txBody>
+      </p:sp>
+      <p:sp>
+        <p:nvSpPr>
+          <p:cNvPr id="15" name="TextBox 14"/>
+          <p:cNvSpPr txBox="1"/>
+          <p:nvPr/>
+        </p:nvSpPr>
+        <p:spPr>
+          <a:xfrm>
+            <a:off x="1210056" y="3931538"/>
+            <a:ext cx="1805863" cy="608076"/>
+          </a:xfrm>
+          <a:prstGeom prst="rect">
+            <a:avLst/>
+          </a:prstGeom>
+          <a:noFill/>
+        </p:spPr>
+        <p:txBody>
+          <a:bodyPr wrap="none" lIns="0" rIns="0" tIns="0" bIns="0" anchor="t">
+            <a:spAutoFit/>
+          </a:bodyPr>
+          <a:lstStyle/>
+          <a:p>
+            <a:pPr algn="l">
+              <a:lnSpc>
+                <a:spcPts val="1400"/>
+              </a:lnSpc>
+            </a:pPr>
+            <a:r>
+              <a:rPr sz="1000">
+                <a:solidFill>
+                  <a:srgbClr val="EEEBE5"/>
+                </a:solidFill>
+                <a:latin typeface="GQ Text"/>
+                <a:cs typeface="GQ Text"/>
+                <a:ea typeface="GQ Text"/>
+              </a:rPr>
+              <a:t>Ответ засчитывается,</a:t>
+            </a:r>
+          </a:p>
+          <a:p>
+            <a:pPr algn="l">
+              <a:lnSpc>
+                <a:spcPts val="1400"/>
+              </a:lnSpc>
+            </a:pPr>
+            <a:r>
+              <a:rPr sz="1000">
+                <a:solidFill>
+                  <a:srgbClr val="EEEBE5"/>
+                </a:solidFill>
+                <a:latin typeface="GQ Text"/>
+                <a:cs typeface="GQ Text"/>
+                <a:ea typeface="GQ Text"/>
+              </a:rPr>
+              <a:t>правильное написание</a:t>
+            </a:r>
+          </a:p>
+          <a:p>
+            <a:pPr algn="l">
+              <a:lnSpc>
+                <a:spcPts val="1400"/>
+              </a:lnSpc>
+            </a:pPr>
+            <a:r>
+              <a:rPr sz="1000">
+                <a:solidFill>
+                  <a:srgbClr val="EEEBE5"/>
+                </a:solidFill>
+                <a:latin typeface="GQ Text"/>
+                <a:cs typeface="GQ Text"/>
+                <a:ea typeface="GQ Text"/>
+              </a:rPr>
+              <a:t>показывается</a:t>
+            </a:r>
+          </a:p>
+        </p:txBody>
+      </p:sp>
+      <p:sp>
+        <p:nvSpPr>
+          <p:cNvPr id="16" name="Rectangle 15"/>
+          <p:cNvSpPr/>
+          <p:nvPr/>
+        </p:nvSpPr>
+        <p:spPr>
+          <a:xfrm>
+            <a:off x="3473119" y="2227961"/>
+            <a:ext cx="2522143" cy="2521458"/>
+          </a:xfrm>
+          <a:prstGeom prst="rect">
+            <a:avLst/>
+          </a:prstGeom>
+          <a:solidFill>
+            <a:srgbClr val="11161E"/>
+          </a:solidFill>
+          <a:ln w="9525">
+            <a:solidFill>
+              <a:srgbClr val="3B434D"/>
+            </a:solidFill>
+          </a:ln>
+          <a:effectLst/>
+        </p:spPr>
+        <p:txBody>
+          <a:bodyPr rtlCol="0" anchor="ctr" wrap="none"/>
+          <a:lstStyle/>
+          <a:p>
+            <a:pPr algn="ctr"/>
+          </a:p>
+        </p:txBody>
+      </p:sp>
+      <p:sp>
+        <p:nvSpPr>
+          <p:cNvPr id="17" name="Rectangle 16"/>
+          <p:cNvSpPr/>
+          <p:nvPr/>
+        </p:nvSpPr>
+        <p:spPr>
+          <a:xfrm>
+            <a:off x="3473119" y="2227961"/>
+            <a:ext cx="32004" cy="2521458"/>
+          </a:xfrm>
+          <a:prstGeom prst="rect">
+            <a:avLst/>
+          </a:prstGeom>
+          <a:solidFill>
+            <a:srgbClr val="0064B9"/>
+          </a:solidFill>
+          <a:ln>
+            <a:noFill/>
+          </a:ln>
+          <a:effectLst/>
+        </p:spPr>
+        <p:txBody>
+          <a:bodyPr rtlCol="0" anchor="ctr" wrap="none"/>
+          <a:lstStyle/>
+          <a:p>
+            <a:pPr algn="ctr"/>
+          </a:p>
+        </p:txBody>
+      </p:sp>
+      <p:sp>
+        <p:nvSpPr>
+          <p:cNvPr id="18" name="TextBox 17"/>
+          <p:cNvSpPr txBox="1"/>
+          <p:nvPr/>
+        </p:nvSpPr>
+        <p:spPr>
+          <a:xfrm>
+            <a:off x="3729151" y="2462656"/>
+            <a:ext cx="2010079" cy="189357"/>
+          </a:xfrm>
+          <a:prstGeom prst="rect">
+            <a:avLst/>
+          </a:prstGeom>
+          <a:noFill/>
+        </p:spPr>
+        <p:txBody>
+          <a:bodyPr wrap="none" lIns="0" rIns="0" tIns="0" bIns="0" anchor="t">
+            <a:spAutoFit/>
+          </a:bodyPr>
+          <a:lstStyle/>
+          <a:p>
+            <a:pPr algn="l">
+              <a:lnSpc>
+                <a:spcPts val="1050"/>
+              </a:lnSpc>
+            </a:pPr>
+            <a:r>
+              <a:rPr sz="850" spc="136">
+                <a:solidFill>
+                  <a:srgbClr val="59AAF8"/>
+                </a:solidFill>
+                <a:latin typeface="IBM Plex Mono SemiBold"/>
+                <a:cs typeface="IBM Plex Mono SemiBold"/>
+                <a:ea typeface="IBM Plex Mono SemiBold"/>
+              </a:rPr>
+              <a:t>2</a:t>
+            </a:r>
+          </a:p>
+        </p:txBody>
+      </p:sp>
+      <p:sp>
+        <p:nvSpPr>
+          <p:cNvPr id="19" name="TextBox 18"/>
+          <p:cNvSpPr txBox="1"/>
+          <p:nvPr/>
+        </p:nvSpPr>
+        <p:spPr>
+          <a:xfrm>
+            <a:off x="3729151" y="2701467"/>
+            <a:ext cx="2010079" cy="525551"/>
+          </a:xfrm>
+          <a:prstGeom prst="rect">
+            <a:avLst/>
+          </a:prstGeom>
+          <a:noFill/>
+        </p:spPr>
+        <p:txBody>
+          <a:bodyPr wrap="none" lIns="0" rIns="0" tIns="0" bIns="0" anchor="t">
+            <a:spAutoFit/>
+          </a:bodyPr>
+          <a:lstStyle/>
+          <a:p>
+            <a:pPr algn="l">
+              <a:lnSpc>
+                <a:spcPts val="1710"/>
+              </a:lnSpc>
+            </a:pPr>
+            <a:r>
+              <a:rPr sz="1500" spc="-22">
                 <a:solidFill>
                   <a:srgbClr val="EEEBE5"/>
                 </a:solidFill>
@@ -14446,21 +14547,39 @@
                 <a:cs typeface="GQ Text Bold"/>
                 <a:ea typeface="GQ Text Bold"/>
               </a:rPr>
-              <a:t>Учиться</a:t>
-            </a:r>
-          </a:p>
-        </p:txBody>
-      </p:sp>
-      <p:sp>
-        <p:nvSpPr>
-          <p:cNvPr id="10" name="TextBox 9"/>
+              <a:t>Считает окончания</a:t>
+            </a:r>
+          </a:p>
+          <a:p>
+            <a:pPr algn="l">
+              <a:lnSpc>
+                <a:spcPts val="1710"/>
+              </a:lnSpc>
+            </a:pPr>
+            <a:r>
+              <a:rPr sz="1500" spc="-22">
+                <a:solidFill>
+                  <a:srgbClr val="EEEBE5"/>
+                </a:solidFill>
+                <a:latin typeface="GQ Text Bold"/>
+                <a:cs typeface="GQ Text Bold"/>
+                <a:ea typeface="GQ Text Bold"/>
+              </a:rPr>
+              <a:t>по правилам</a:t>
+            </a:r>
+          </a:p>
+        </p:txBody>
+      </p:sp>
+      <p:sp>
+        <p:nvSpPr>
+          <p:cNvPr id="20" name="TextBox 19"/>
           <p:cNvSpPr txBox="1"/>
           <p:nvPr/>
         </p:nvSpPr>
         <p:spPr>
           <a:xfrm>
-            <a:off x="749808" y="2896743"/>
-            <a:ext cx="1962851" cy="651509"/>
+            <a:off x="3729151" y="3297554"/>
+            <a:ext cx="204216" cy="252475"/>
           </a:xfrm>
           <a:prstGeom prst="rect">
             <a:avLst/>
@@ -14475,69 +14594,254 @@
           <a:p>
             <a:pPr algn="l">
               <a:lnSpc>
-                <a:spcPts val="1500"/>
-              </a:lnSpc>
-            </a:pPr>
-            <a:r>
-              <a:rPr sz="1050">
-                <a:solidFill>
-                  <a:srgbClr val="A6ADB6"/>
+                <a:spcPts val="1400"/>
+              </a:lnSpc>
+            </a:pPr>
+            <a:r>
+              <a:rPr sz="1000">
+                <a:solidFill>
+                  <a:srgbClr val="59AAF8"/>
+                </a:solidFill>
+                <a:latin typeface="IBM Plex Mono Medium"/>
+                <a:cs typeface="IBM Plex Mono Medium"/>
+                <a:ea typeface="IBM Plex Mono Medium"/>
+              </a:rPr>
+              <a:t>—</a:t>
+            </a:r>
+          </a:p>
+        </p:txBody>
+      </p:sp>
+      <p:sp>
+        <p:nvSpPr>
+          <p:cNvPr id="21" name="TextBox 20"/>
+          <p:cNvSpPr txBox="1"/>
+          <p:nvPr/>
+        </p:nvSpPr>
+        <p:spPr>
+          <a:xfrm>
+            <a:off x="3933367" y="3297554"/>
+            <a:ext cx="1805863" cy="430276"/>
+          </a:xfrm>
+          <a:prstGeom prst="rect">
+            <a:avLst/>
+          </a:prstGeom>
+          <a:noFill/>
+        </p:spPr>
+        <p:txBody>
+          <a:bodyPr wrap="none" lIns="0" rIns="0" tIns="0" bIns="0" anchor="t">
+            <a:spAutoFit/>
+          </a:bodyPr>
+          <a:lstStyle/>
+          <a:p>
+            <a:pPr algn="l">
+              <a:lnSpc>
+                <a:spcPts val="1400"/>
+              </a:lnSpc>
+            </a:pPr>
+            <a:r>
+              <a:rPr sz="1000">
+                <a:solidFill>
+                  <a:srgbClr val="EEEBE5"/>
                 </a:solidFill>
                 <a:latin typeface="GQ Text"/>
                 <a:cs typeface="GQ Text"/>
                 <a:ea typeface="GQ Text"/>
               </a:rPr>
-              <a:t>Дорожка уроков: видно</a:t>
-            </a:r>
-          </a:p>
-          <a:p>
-            <a:pPr algn="l">
-              <a:lnSpc>
-                <a:spcPts val="1500"/>
-              </a:lnSpc>
-            </a:pPr>
-            <a:r>
-              <a:rPr sz="1050">
-                <a:solidFill>
-                  <a:srgbClr val="A6ADB6"/>
+              <a:t>Подставь любое своё слово</a:t>
+            </a:r>
+          </a:p>
+          <a:p>
+            <a:pPr algn="l">
+              <a:lnSpc>
+                <a:spcPts val="1400"/>
+              </a:lnSpc>
+            </a:pPr>
+            <a:r>
+              <a:rPr sz="1000">
+                <a:solidFill>
+                  <a:srgbClr val="EEEBE5"/>
                 </a:solidFill>
                 <a:latin typeface="GQ Text"/>
                 <a:cs typeface="GQ Text"/>
                 <a:ea typeface="GQ Text"/>
               </a:rPr>
-              <a:t>пройденное и следующий</a:t>
-            </a:r>
-          </a:p>
-          <a:p>
-            <a:pPr algn="l">
-              <a:lnSpc>
-                <a:spcPts val="1500"/>
-              </a:lnSpc>
-            </a:pPr>
-            <a:r>
-              <a:rPr sz="1050">
-                <a:solidFill>
-                  <a:srgbClr val="A6ADB6"/>
+              <a:t>— увидишь все его формы</a:t>
+            </a:r>
+          </a:p>
+        </p:txBody>
+      </p:sp>
+      <p:sp>
+        <p:nvSpPr>
+          <p:cNvPr id="22" name="TextBox 21"/>
+          <p:cNvSpPr txBox="1"/>
+          <p:nvPr/>
+        </p:nvSpPr>
+        <p:spPr>
+          <a:xfrm>
+            <a:off x="3729151" y="3753739"/>
+            <a:ext cx="204216" cy="252475"/>
+          </a:xfrm>
+          <a:prstGeom prst="rect">
+            <a:avLst/>
+          </a:prstGeom>
+          <a:noFill/>
+        </p:spPr>
+        <p:txBody>
+          <a:bodyPr wrap="none" lIns="0" rIns="0" tIns="0" bIns="0" anchor="t">
+            <a:spAutoFit/>
+          </a:bodyPr>
+          <a:lstStyle/>
+          <a:p>
+            <a:pPr algn="l">
+              <a:lnSpc>
+                <a:spcPts val="1400"/>
+              </a:lnSpc>
+            </a:pPr>
+            <a:r>
+              <a:rPr sz="1000">
+                <a:solidFill>
+                  <a:srgbClr val="59AAF8"/>
+                </a:solidFill>
+                <a:latin typeface="IBM Plex Mono Medium"/>
+                <a:cs typeface="IBM Plex Mono Medium"/>
+                <a:ea typeface="IBM Plex Mono Medium"/>
+              </a:rPr>
+              <a:t>—</a:t>
+            </a:r>
+          </a:p>
+        </p:txBody>
+      </p:sp>
+      <p:sp>
+        <p:nvSpPr>
+          <p:cNvPr id="23" name="TextBox 22"/>
+          <p:cNvSpPr txBox="1"/>
+          <p:nvPr/>
+        </p:nvSpPr>
+        <p:spPr>
+          <a:xfrm>
+            <a:off x="3933367" y="3753739"/>
+            <a:ext cx="1805863" cy="430276"/>
+          </a:xfrm>
+          <a:prstGeom prst="rect">
+            <a:avLst/>
+          </a:prstGeom>
+          <a:noFill/>
+        </p:spPr>
+        <p:txBody>
+          <a:bodyPr wrap="none" lIns="0" rIns="0" tIns="0" bIns="0" anchor="t">
+            <a:spAutoFit/>
+          </a:bodyPr>
+          <a:lstStyle/>
+          <a:p>
+            <a:pPr algn="l">
+              <a:lnSpc>
+                <a:spcPts val="1400"/>
+              </a:lnSpc>
+            </a:pPr>
+            <a:r>
+              <a:rPr sz="1000">
+                <a:solidFill>
+                  <a:srgbClr val="EEEBE5"/>
                 </a:solidFill>
                 <a:latin typeface="GQ Text"/>
                 <a:cs typeface="GQ Text"/>
                 <a:ea typeface="GQ Text"/>
               </a:rPr>
-              <a:t>шаг</a:t>
-            </a:r>
-          </a:p>
-        </p:txBody>
-      </p:sp>
-      <p:sp>
-        <p:nvSpPr>
-          <p:cNvPr id="11" name="TextBox 10"/>
+              <a:t>Не таблица, а правила</a:t>
+            </a:r>
+          </a:p>
+          <a:p>
+            <a:pPr algn="l">
+              <a:lnSpc>
+                <a:spcPts val="1400"/>
+              </a:lnSpc>
+            </a:pPr>
+            <a:r>
+              <a:rPr sz="1000">
+                <a:solidFill>
+                  <a:srgbClr val="EEEBE5"/>
+                </a:solidFill>
+                <a:latin typeface="GQ Text"/>
+                <a:cs typeface="GQ Text"/>
+                <a:ea typeface="GQ Text"/>
+              </a:rPr>
+              <a:t>казахского языка</a:t>
+            </a:r>
+          </a:p>
+        </p:txBody>
+      </p:sp>
+      <p:sp>
+        <p:nvSpPr>
+          <p:cNvPr id="24" name="Rectangle 23"/>
+          <p:cNvSpPr/>
+          <p:nvPr/>
+        </p:nvSpPr>
+        <p:spPr>
+          <a:xfrm>
+            <a:off x="6196431" y="2227961"/>
+            <a:ext cx="2522143" cy="2521458"/>
+          </a:xfrm>
+          <a:prstGeom prst="rect">
+            <a:avLst/>
+          </a:prstGeom>
+          <a:solidFill>
+            <a:srgbClr val="11161E"/>
+          </a:solidFill>
+          <a:ln w="9525">
+            <a:solidFill>
+              <a:srgbClr val="3B434D"/>
+            </a:solidFill>
+          </a:ln>
+          <a:effectLst/>
+        </p:spPr>
+        <p:txBody>
+          <a:bodyPr rtlCol="0" anchor="ctr" wrap="none"/>
+          <a:lstStyle/>
+          <a:p>
+            <a:pPr algn="ctr"/>
+          </a:p>
+        </p:txBody>
+      </p:sp>
+      <p:sp>
+        <p:nvSpPr>
+          <p:cNvPr id="25" name="Rectangle 24"/>
+          <p:cNvSpPr/>
+          <p:nvPr/>
+        </p:nvSpPr>
+        <p:spPr>
+          <a:xfrm>
+            <a:off x="6196431" y="2227961"/>
+            <a:ext cx="32004" cy="2521458"/>
+          </a:xfrm>
+          <a:prstGeom prst="rect">
+            <a:avLst/>
+          </a:prstGeom>
+          <a:solidFill>
+            <a:srgbClr val="0064B9"/>
+          </a:solidFill>
+          <a:ln>
+            <a:noFill/>
+          </a:ln>
+          <a:effectLst/>
+        </p:spPr>
+        <p:txBody>
+          <a:bodyPr rtlCol="0" anchor="ctr" wrap="none"/>
+          <a:lstStyle/>
+          <a:p>
+            <a:pPr algn="ctr"/>
+          </a:p>
+        </p:txBody>
+      </p:sp>
+      <p:sp>
+        <p:nvSpPr>
+          <p:cNvPr id="26" name="TextBox 25"/>
           <p:cNvSpPr txBox="1"/>
           <p:nvPr/>
         </p:nvSpPr>
         <p:spPr>
           <a:xfrm>
-            <a:off x="2932115" y="2535209"/>
-            <a:ext cx="1962851" cy="323169"/>
+            <a:off x="6452463" y="2462656"/>
+            <a:ext cx="2010079" cy="189357"/>
           </a:xfrm>
           <a:prstGeom prst="rect">
             <a:avLst/>
@@ -14552,11 +14856,52 @@
           <a:p>
             <a:pPr algn="l">
               <a:lnSpc>
-                <a:spcPts val="1792"/>
-              </a:lnSpc>
-            </a:pPr>
-            <a:r>
-              <a:rPr sz="1600" spc="-24">
+                <a:spcPts val="1050"/>
+              </a:lnSpc>
+            </a:pPr>
+            <a:r>
+              <a:rPr sz="850" spc="136">
+                <a:solidFill>
+                  <a:srgbClr val="59AAF8"/>
+                </a:solidFill>
+                <a:latin typeface="IBM Plex Mono SemiBold"/>
+                <a:cs typeface="IBM Plex Mono SemiBold"/>
+                <a:ea typeface="IBM Plex Mono SemiBold"/>
+              </a:rPr>
+              <a:t>3</a:t>
+            </a:r>
+          </a:p>
+        </p:txBody>
+      </p:sp>
+      <p:sp>
+        <p:nvSpPr>
+          <p:cNvPr id="27" name="TextBox 26"/>
+          <p:cNvSpPr txBox="1"/>
+          <p:nvPr/>
+        </p:nvSpPr>
+        <p:spPr>
+          <a:xfrm>
+            <a:off x="6452463" y="2701467"/>
+            <a:ext cx="2010079" cy="308381"/>
+          </a:xfrm>
+          <a:prstGeom prst="rect">
+            <a:avLst/>
+          </a:prstGeom>
+          <a:noFill/>
+        </p:spPr>
+        <p:txBody>
+          <a:bodyPr wrap="none" lIns="0" rIns="0" tIns="0" bIns="0" anchor="t">
+            <a:spAutoFit/>
+          </a:bodyPr>
+          <a:lstStyle/>
+          <a:p>
+            <a:pPr algn="l">
+              <a:lnSpc>
+                <a:spcPts val="1710"/>
+              </a:lnSpc>
+            </a:pPr>
+            <a:r>
+              <a:rPr sz="1500" spc="-22">
                 <a:solidFill>
                   <a:srgbClr val="EEEBE5"/>
                 </a:solidFill>
@@ -14564,21 +14909,21 @@
                 <a:cs typeface="GQ Text Bold"/>
                 <a:ea typeface="GQ Text Bold"/>
               </a:rPr>
-              <a:t>Практика</a:t>
-            </a:r>
-          </a:p>
-        </p:txBody>
-      </p:sp>
-      <p:sp>
-        <p:nvSpPr>
-          <p:cNvPr id="12" name="TextBox 11"/>
+              <a:t>Возвращает забытое</a:t>
+            </a:r>
+          </a:p>
+        </p:txBody>
+      </p:sp>
+      <p:sp>
+        <p:nvSpPr>
+          <p:cNvPr id="28" name="TextBox 27"/>
           <p:cNvSpPr txBox="1"/>
           <p:nvPr/>
         </p:nvSpPr>
         <p:spPr>
           <a:xfrm>
-            <a:off x="2932115" y="2896743"/>
-            <a:ext cx="1962851" cy="651509"/>
+            <a:off x="6452463" y="3080384"/>
+            <a:ext cx="204216" cy="252475"/>
           </a:xfrm>
           <a:prstGeom prst="rect">
             <a:avLst/>
@@ -14593,69 +14938,254 @@
           <a:p>
             <a:pPr algn="l">
               <a:lnSpc>
-                <a:spcPts val="1500"/>
-              </a:lnSpc>
-            </a:pPr>
-            <a:r>
-              <a:rPr sz="1050">
-                <a:solidFill>
-                  <a:srgbClr val="A6ADB6"/>
+                <a:spcPts val="1400"/>
+              </a:lnSpc>
+            </a:pPr>
+            <a:r>
+              <a:rPr sz="1000">
+                <a:solidFill>
+                  <a:srgbClr val="59AAF8"/>
+                </a:solidFill>
+                <a:latin typeface="IBM Plex Mono Medium"/>
+                <a:cs typeface="IBM Plex Mono Medium"/>
+                <a:ea typeface="IBM Plex Mono Medium"/>
+              </a:rPr>
+              <a:t>—</a:t>
+            </a:r>
+          </a:p>
+        </p:txBody>
+      </p:sp>
+      <p:sp>
+        <p:nvSpPr>
+          <p:cNvPr id="29" name="TextBox 28"/>
+          <p:cNvSpPr txBox="1"/>
+          <p:nvPr/>
+        </p:nvSpPr>
+        <p:spPr>
+          <a:xfrm>
+            <a:off x="6656679" y="3080384"/>
+            <a:ext cx="1805863" cy="430276"/>
+          </a:xfrm>
+          <a:prstGeom prst="rect">
+            <a:avLst/>
+          </a:prstGeom>
+          <a:noFill/>
+        </p:spPr>
+        <p:txBody>
+          <a:bodyPr wrap="none" lIns="0" rIns="0" tIns="0" bIns="0" anchor="t">
+            <a:spAutoFit/>
+          </a:bodyPr>
+          <a:lstStyle/>
+          <a:p>
+            <a:pPr algn="l">
+              <a:lnSpc>
+                <a:spcPts val="1400"/>
+              </a:lnSpc>
+            </a:pPr>
+            <a:r>
+              <a:rPr sz="1000">
+                <a:solidFill>
+                  <a:srgbClr val="EEEBE5"/>
                 </a:solidFill>
                 <a:latin typeface="GQ Text"/>
                 <a:cs typeface="GQ Text"/>
                 <a:ea typeface="GQ Text"/>
               </a:rPr>
-              <a:t>Цель на день, повторение,</a:t>
-            </a:r>
-          </a:p>
-          <a:p>
-            <a:pPr algn="l">
-              <a:lnSpc>
-                <a:spcPts val="1500"/>
-              </a:lnSpc>
-            </a:pPr>
-            <a:r>
-              <a:rPr sz="1050">
-                <a:solidFill>
-                  <a:srgbClr val="A6ADB6"/>
+              <a:t>Ошибся — задание вернётся</a:t>
+            </a:r>
+          </a:p>
+          <a:p>
+            <a:pPr algn="l">
+              <a:lnSpc>
+                <a:spcPts val="1400"/>
+              </a:lnSpc>
+            </a:pPr>
+            <a:r>
+              <a:rPr sz="1000">
+                <a:solidFill>
+                  <a:srgbClr val="EEEBE5"/>
                 </a:solidFill>
                 <a:latin typeface="GQ Text"/>
                 <a:cs typeface="GQ Text"/>
                 <a:ea typeface="GQ Text"/>
               </a:rPr>
-              <a:t>карточки слов, спринт на 60</a:t>
-            </a:r>
-          </a:p>
-          <a:p>
-            <a:pPr algn="l">
-              <a:lnSpc>
-                <a:spcPts val="1500"/>
-              </a:lnSpc>
-            </a:pPr>
-            <a:r>
-              <a:rPr sz="1050">
-                <a:solidFill>
-                  <a:srgbClr val="A6ADB6"/>
+              <a:t>сегодня</a:t>
+            </a:r>
+          </a:p>
+        </p:txBody>
+      </p:sp>
+      <p:sp>
+        <p:nvSpPr>
+          <p:cNvPr id="30" name="TextBox 29"/>
+          <p:cNvSpPr txBox="1"/>
+          <p:nvPr/>
+        </p:nvSpPr>
+        <p:spPr>
+          <a:xfrm>
+            <a:off x="6452463" y="3536568"/>
+            <a:ext cx="204216" cy="252475"/>
+          </a:xfrm>
+          <a:prstGeom prst="rect">
+            <a:avLst/>
+          </a:prstGeom>
+          <a:noFill/>
+        </p:spPr>
+        <p:txBody>
+          <a:bodyPr wrap="none" lIns="0" rIns="0" tIns="0" bIns="0" anchor="t">
+            <a:spAutoFit/>
+          </a:bodyPr>
+          <a:lstStyle/>
+          <a:p>
+            <a:pPr algn="l">
+              <a:lnSpc>
+                <a:spcPts val="1400"/>
+              </a:lnSpc>
+            </a:pPr>
+            <a:r>
+              <a:rPr sz="1000">
+                <a:solidFill>
+                  <a:srgbClr val="59AAF8"/>
+                </a:solidFill>
+                <a:latin typeface="IBM Plex Mono Medium"/>
+                <a:cs typeface="IBM Plex Mono Medium"/>
+                <a:ea typeface="IBM Plex Mono Medium"/>
+              </a:rPr>
+              <a:t>—</a:t>
+            </a:r>
+          </a:p>
+        </p:txBody>
+      </p:sp>
+      <p:sp>
+        <p:nvSpPr>
+          <p:cNvPr id="31" name="TextBox 30"/>
+          <p:cNvSpPr txBox="1"/>
+          <p:nvPr/>
+        </p:nvSpPr>
+        <p:spPr>
+          <a:xfrm>
+            <a:off x="6656679" y="3536568"/>
+            <a:ext cx="1805863" cy="430276"/>
+          </a:xfrm>
+          <a:prstGeom prst="rect">
+            <a:avLst/>
+          </a:prstGeom>
+          <a:noFill/>
+        </p:spPr>
+        <p:txBody>
+          <a:bodyPr wrap="none" lIns="0" rIns="0" tIns="0" bIns="0" anchor="t">
+            <a:spAutoFit/>
+          </a:bodyPr>
+          <a:lstStyle/>
+          <a:p>
+            <a:pPr algn="l">
+              <a:lnSpc>
+                <a:spcPts val="1400"/>
+              </a:lnSpc>
+            </a:pPr>
+            <a:r>
+              <a:rPr sz="1000">
+                <a:solidFill>
+                  <a:srgbClr val="EEEBE5"/>
                 </a:solidFill>
                 <a:latin typeface="GQ Text"/>
                 <a:cs typeface="GQ Text"/>
                 <a:ea typeface="GQ Text"/>
               </a:rPr>
-              <a:t>секунд</a:t>
-            </a:r>
-          </a:p>
-        </p:txBody>
-      </p:sp>
-      <p:sp>
-        <p:nvSpPr>
-          <p:cNvPr id="13" name="TextBox 12"/>
+              <a:t>Ответил верно — через день,</a:t>
+            </a:r>
+          </a:p>
+          <a:p>
+            <a:pPr algn="l">
+              <a:lnSpc>
+                <a:spcPts val="1400"/>
+              </a:lnSpc>
+            </a:pPr>
+            <a:r>
+              <a:rPr sz="1000">
+                <a:solidFill>
+                  <a:srgbClr val="EEEBE5"/>
+                </a:solidFill>
+                <a:latin typeface="GQ Text"/>
+                <a:cs typeface="GQ Text"/>
+                <a:ea typeface="GQ Text"/>
+              </a:rPr>
+              <a:t>потом через три</a:t>
+            </a:r>
+          </a:p>
+        </p:txBody>
+      </p:sp>
+      <p:sp>
+        <p:nvSpPr>
+          <p:cNvPr id="32" name="Rectangle 31"/>
+          <p:cNvSpPr/>
+          <p:nvPr/>
+        </p:nvSpPr>
+        <p:spPr>
+          <a:xfrm>
+            <a:off x="8919743" y="2227961"/>
+            <a:ext cx="2522143" cy="2521458"/>
+          </a:xfrm>
+          <a:prstGeom prst="rect">
+            <a:avLst/>
+          </a:prstGeom>
+          <a:solidFill>
+            <a:srgbClr val="11161E"/>
+          </a:solidFill>
+          <a:ln w="9525">
+            <a:solidFill>
+              <a:srgbClr val="3B434D"/>
+            </a:solidFill>
+          </a:ln>
+          <a:effectLst/>
+        </p:spPr>
+        <p:txBody>
+          <a:bodyPr rtlCol="0" anchor="ctr" wrap="none"/>
+          <a:lstStyle/>
+          <a:p>
+            <a:pPr algn="ctr"/>
+          </a:p>
+        </p:txBody>
+      </p:sp>
+      <p:sp>
+        <p:nvSpPr>
+          <p:cNvPr id="33" name="Rectangle 32"/>
+          <p:cNvSpPr/>
+          <p:nvPr/>
+        </p:nvSpPr>
+        <p:spPr>
+          <a:xfrm>
+            <a:off x="8919743" y="2227961"/>
+            <a:ext cx="32004" cy="2521458"/>
+          </a:xfrm>
+          <a:prstGeom prst="rect">
+            <a:avLst/>
+          </a:prstGeom>
+          <a:solidFill>
+            <a:srgbClr val="0064B9"/>
+          </a:solidFill>
+          <a:ln>
+            <a:noFill/>
+          </a:ln>
+          <a:effectLst/>
+        </p:spPr>
+        <p:txBody>
+          <a:bodyPr rtlCol="0" anchor="ctr" wrap="none"/>
+          <a:lstStyle/>
+          <a:p>
+            <a:pPr algn="ctr"/>
+          </a:p>
+        </p:txBody>
+      </p:sp>
+      <p:sp>
+        <p:nvSpPr>
+          <p:cNvPr id="34" name="TextBox 33"/>
           <p:cNvSpPr txBox="1"/>
           <p:nvPr/>
         </p:nvSpPr>
         <p:spPr>
           <a:xfrm>
-            <a:off x="5114422" y="2535209"/>
-            <a:ext cx="1962851" cy="323169"/>
+            <a:off x="9175775" y="2462656"/>
+            <a:ext cx="2010079" cy="189357"/>
           </a:xfrm>
           <a:prstGeom prst="rect">
             <a:avLst/>
@@ -14670,11 +15200,52 @@
           <a:p>
             <a:pPr algn="l">
               <a:lnSpc>
-                <a:spcPts val="1792"/>
-              </a:lnSpc>
-            </a:pPr>
-            <a:r>
-              <a:rPr sz="1600" spc="-24">
+                <a:spcPts val="1050"/>
+              </a:lnSpc>
+            </a:pPr>
+            <a:r>
+              <a:rPr sz="850" spc="136">
+                <a:solidFill>
+                  <a:srgbClr val="59AAF8"/>
+                </a:solidFill>
+                <a:latin typeface="IBM Plex Mono SemiBold"/>
+                <a:cs typeface="IBM Plex Mono SemiBold"/>
+                <a:ea typeface="IBM Plex Mono SemiBold"/>
+              </a:rPr>
+              <a:t>4</a:t>
+            </a:r>
+          </a:p>
+        </p:txBody>
+      </p:sp>
+      <p:sp>
+        <p:nvSpPr>
+          <p:cNvPr id="35" name="TextBox 34"/>
+          <p:cNvSpPr txBox="1"/>
+          <p:nvPr/>
+        </p:nvSpPr>
+        <p:spPr>
+          <a:xfrm>
+            <a:off x="9175775" y="2701467"/>
+            <a:ext cx="2010079" cy="525551"/>
+          </a:xfrm>
+          <a:prstGeom prst="rect">
+            <a:avLst/>
+          </a:prstGeom>
+          <a:noFill/>
+        </p:spPr>
+        <p:txBody>
+          <a:bodyPr wrap="none" lIns="0" rIns="0" tIns="0" bIns="0" anchor="t">
+            <a:spAutoFit/>
+          </a:bodyPr>
+          <a:lstStyle/>
+          <a:p>
+            <a:pPr algn="l">
+              <a:lnSpc>
+                <a:spcPts val="1710"/>
+              </a:lnSpc>
+            </a:pPr>
+            <a:r>
+              <a:rPr sz="1500" spc="-22">
                 <a:solidFill>
                   <a:srgbClr val="EEEBE5"/>
                 </a:solidFill>
@@ -14682,21 +15253,39 @@
                 <a:cs typeface="GQ Text Bold"/>
                 <a:ea typeface="GQ Text Bold"/>
               </a:rPr>
-              <a:t>Словарь</a:t>
-            </a:r>
-          </a:p>
-        </p:txBody>
-      </p:sp>
-      <p:sp>
-        <p:nvSpPr>
-          <p:cNvPr id="14" name="TextBox 13"/>
+              <a:t>Работает без</a:t>
+            </a:r>
+          </a:p>
+          <a:p>
+            <a:pPr algn="l">
+              <a:lnSpc>
+                <a:spcPts val="1710"/>
+              </a:lnSpc>
+            </a:pPr>
+            <a:r>
+              <a:rPr sz="1500" spc="-22">
+                <a:solidFill>
+                  <a:srgbClr val="EEEBE5"/>
+                </a:solidFill>
+                <a:latin typeface="GQ Text Bold"/>
+                <a:cs typeface="GQ Text Bold"/>
+                <a:ea typeface="GQ Text Bold"/>
+              </a:rPr>
+              <a:t>интернета</a:t>
+            </a:r>
+          </a:p>
+        </p:txBody>
+      </p:sp>
+      <p:sp>
+        <p:nvSpPr>
+          <p:cNvPr id="36" name="TextBox 35"/>
           <p:cNvSpPr txBox="1"/>
           <p:nvPr/>
         </p:nvSpPr>
         <p:spPr>
           <a:xfrm>
-            <a:off x="5114422" y="2896743"/>
-            <a:ext cx="1962851" cy="651509"/>
+            <a:off x="9175775" y="3297554"/>
+            <a:ext cx="204216" cy="252475"/>
           </a:xfrm>
           <a:prstGeom prst="rect">
             <a:avLst/>
@@ -14711,69 +15300,204 @@
           <a:p>
             <a:pPr algn="l">
               <a:lnSpc>
-                <a:spcPts val="1500"/>
-              </a:lnSpc>
-            </a:pPr>
-            <a:r>
-              <a:rPr sz="1050">
-                <a:solidFill>
-                  <a:srgbClr val="A6ADB6"/>
+                <a:spcPts val="1400"/>
+              </a:lnSpc>
+            </a:pPr>
+            <a:r>
+              <a:rPr sz="1000">
+                <a:solidFill>
+                  <a:srgbClr val="59AAF8"/>
+                </a:solidFill>
+                <a:latin typeface="IBM Plex Mono Medium"/>
+                <a:cs typeface="IBM Plex Mono Medium"/>
+                <a:ea typeface="IBM Plex Mono Medium"/>
+              </a:rPr>
+              <a:t>—</a:t>
+            </a:r>
+          </a:p>
+        </p:txBody>
+      </p:sp>
+      <p:sp>
+        <p:nvSpPr>
+          <p:cNvPr id="37" name="TextBox 36"/>
+          <p:cNvSpPr txBox="1"/>
+          <p:nvPr/>
+        </p:nvSpPr>
+        <p:spPr>
+          <a:xfrm>
+            <a:off x="9379991" y="3297554"/>
+            <a:ext cx="1805863" cy="252475"/>
+          </a:xfrm>
+          <a:prstGeom prst="rect">
+            <a:avLst/>
+          </a:prstGeom>
+          <a:noFill/>
+        </p:spPr>
+        <p:txBody>
+          <a:bodyPr wrap="none" lIns="0" rIns="0" tIns="0" bIns="0" anchor="t">
+            <a:spAutoFit/>
+          </a:bodyPr>
+          <a:lstStyle/>
+          <a:p>
+            <a:pPr algn="l">
+              <a:lnSpc>
+                <a:spcPts val="1400"/>
+              </a:lnSpc>
+            </a:pPr>
+            <a:r>
+              <a:rPr sz="1000">
+                <a:solidFill>
+                  <a:srgbClr val="EEEBE5"/>
                 </a:solidFill>
                 <a:latin typeface="GQ Text"/>
                 <a:cs typeface="GQ Text"/>
                 <a:ea typeface="GQ Text"/>
               </a:rPr>
-              <a:t>162 статьи из уроков, поиск</a:t>
-            </a:r>
-          </a:p>
-          <a:p>
-            <a:pPr algn="l">
-              <a:lnSpc>
-                <a:spcPts val="1500"/>
-              </a:lnSpc>
-            </a:pPr>
-            <a:r>
-              <a:rPr sz="1050">
-                <a:solidFill>
-                  <a:srgbClr val="A6ADB6"/>
+              <a:t>Скачивается один раз</a:t>
+            </a:r>
+          </a:p>
+        </p:txBody>
+      </p:sp>
+      <p:sp>
+        <p:nvSpPr>
+          <p:cNvPr id="38" name="TextBox 37"/>
+          <p:cNvSpPr txBox="1"/>
+          <p:nvPr/>
+        </p:nvSpPr>
+        <p:spPr>
+          <a:xfrm>
+            <a:off x="9175775" y="3575939"/>
+            <a:ext cx="204216" cy="252475"/>
+          </a:xfrm>
+          <a:prstGeom prst="rect">
+            <a:avLst/>
+          </a:prstGeom>
+          <a:noFill/>
+        </p:spPr>
+        <p:txBody>
+          <a:bodyPr wrap="none" lIns="0" rIns="0" tIns="0" bIns="0" anchor="t">
+            <a:spAutoFit/>
+          </a:bodyPr>
+          <a:lstStyle/>
+          <a:p>
+            <a:pPr algn="l">
+              <a:lnSpc>
+                <a:spcPts val="1400"/>
+              </a:lnSpc>
+            </a:pPr>
+            <a:r>
+              <a:rPr sz="1000">
+                <a:solidFill>
+                  <a:srgbClr val="59AAF8"/>
+                </a:solidFill>
+                <a:latin typeface="IBM Plex Mono Medium"/>
+                <a:cs typeface="IBM Plex Mono Medium"/>
+                <a:ea typeface="IBM Plex Mono Medium"/>
+              </a:rPr>
+              <a:t>—</a:t>
+            </a:r>
+          </a:p>
+        </p:txBody>
+      </p:sp>
+      <p:sp>
+        <p:nvSpPr>
+          <p:cNvPr id="39" name="TextBox 38"/>
+          <p:cNvSpPr txBox="1"/>
+          <p:nvPr/>
+        </p:nvSpPr>
+        <p:spPr>
+          <a:xfrm>
+            <a:off x="9379991" y="3575939"/>
+            <a:ext cx="1805863" cy="430276"/>
+          </a:xfrm>
+          <a:prstGeom prst="rect">
+            <a:avLst/>
+          </a:prstGeom>
+          <a:noFill/>
+        </p:spPr>
+        <p:txBody>
+          <a:bodyPr wrap="none" lIns="0" rIns="0" tIns="0" bIns="0" anchor="t">
+            <a:spAutoFit/>
+          </a:bodyPr>
+          <a:lstStyle/>
+          <a:p>
+            <a:pPr algn="l">
+              <a:lnSpc>
+                <a:spcPts val="1400"/>
+              </a:lnSpc>
+            </a:pPr>
+            <a:r>
+              <a:rPr sz="1000">
+                <a:solidFill>
+                  <a:srgbClr val="EEEBE5"/>
                 </a:solidFill>
                 <a:latin typeface="GQ Text"/>
                 <a:cs typeface="GQ Text"/>
                 <a:ea typeface="GQ Text"/>
               </a:rPr>
-              <a:t>работает с русской</a:t>
-            </a:r>
-          </a:p>
-          <a:p>
-            <a:pPr algn="l">
-              <a:lnSpc>
-                <a:spcPts val="1500"/>
-              </a:lnSpc>
-            </a:pPr>
-            <a:r>
-              <a:rPr sz="1050">
-                <a:solidFill>
-                  <a:srgbClr val="A6ADB6"/>
+              <a:t>Дальше занимайся где</a:t>
+            </a:r>
+          </a:p>
+          <a:p>
+            <a:pPr algn="l">
+              <a:lnSpc>
+                <a:spcPts val="1400"/>
+              </a:lnSpc>
+            </a:pPr>
+            <a:r>
+              <a:rPr sz="1000">
+                <a:solidFill>
+                  <a:srgbClr val="EEEBE5"/>
                 </a:solidFill>
                 <a:latin typeface="GQ Text"/>
                 <a:cs typeface="GQ Text"/>
                 <a:ea typeface="GQ Text"/>
               </a:rPr>
-              <a:t>раскладки</a:t>
-            </a:r>
-          </a:p>
-        </p:txBody>
-      </p:sp>
-      <p:sp>
-        <p:nvSpPr>
-          <p:cNvPr id="15" name="TextBox 14"/>
+              <a:t>угодно</a:t>
+            </a:r>
+          </a:p>
+        </p:txBody>
+      </p:sp>
+      <p:sp>
+        <p:nvSpPr>
+          <p:cNvPr id="40" name="Rectangle 39"/>
+          <p:cNvSpPr/>
+          <p:nvPr/>
+        </p:nvSpPr>
+        <p:spPr>
+          <a:xfrm>
+            <a:off x="749808" y="5151755"/>
+            <a:ext cx="10692079" cy="710247"/>
+          </a:xfrm>
+          <a:prstGeom prst="rect">
+            <a:avLst/>
+          </a:prstGeom>
+          <a:solidFill>
+            <a:srgbClr val="0064B9"/>
+          </a:solidFill>
+          <a:ln>
+            <a:noFill/>
+          </a:ln>
+          <a:effectLst/>
+        </p:spPr>
+        <p:txBody>
+          <a:bodyPr rtlCol="0" anchor="ctr" wrap="none"/>
+          <a:lstStyle/>
+          <a:p>
+            <a:pPr algn="ctr"/>
+          </a:p>
+        </p:txBody>
+      </p:sp>
+      <p:sp>
+        <p:nvSpPr>
+          <p:cNvPr id="41" name="TextBox 40"/>
           <p:cNvSpPr txBox="1"/>
           <p:nvPr/>
         </p:nvSpPr>
         <p:spPr>
           <a:xfrm>
-            <a:off x="7296729" y="2535209"/>
-            <a:ext cx="1962851" cy="323169"/>
+            <a:off x="1024127" y="5350840"/>
+            <a:ext cx="10143439" cy="345281"/>
           </a:xfrm>
           <a:prstGeom prst="rect">
             <a:avLst/>
@@ -14788,254 +15512,6 @@
           <a:p>
             <a:pPr algn="l">
               <a:lnSpc>
-                <a:spcPts val="1792"/>
-              </a:lnSpc>
-            </a:pPr>
-            <a:r>
-              <a:rPr sz="1600" spc="-24">
-                <a:solidFill>
-                  <a:srgbClr val="EEEBE5"/>
-                </a:solidFill>
-                <a:latin typeface="GQ Text Bold"/>
-                <a:cs typeface="GQ Text Bold"/>
-                <a:ea typeface="GQ Text Bold"/>
-              </a:rPr>
-              <a:t>Справка</a:t>
-            </a:r>
-          </a:p>
-        </p:txBody>
-      </p:sp>
-      <p:sp>
-        <p:nvSpPr>
-          <p:cNvPr id="16" name="TextBox 15"/>
-          <p:cNvSpPr txBox="1"/>
-          <p:nvPr/>
-        </p:nvSpPr>
-        <p:spPr>
-          <a:xfrm>
-            <a:off x="7296729" y="2896743"/>
-            <a:ext cx="1962851" cy="461010"/>
-          </a:xfrm>
-          <a:prstGeom prst="rect">
-            <a:avLst/>
-          </a:prstGeom>
-          <a:noFill/>
-        </p:spPr>
-        <p:txBody>
-          <a:bodyPr wrap="none" lIns="0" rIns="0" tIns="0" bIns="0" anchor="t">
-            <a:spAutoFit/>
-          </a:bodyPr>
-          <a:lstStyle/>
-          <a:p>
-            <a:pPr algn="l">
-              <a:lnSpc>
-                <a:spcPts val="1500"/>
-              </a:lnSpc>
-            </a:pPr>
-            <a:r>
-              <a:rPr sz="1050">
-                <a:solidFill>
-                  <a:srgbClr val="A6ADB6"/>
-                </a:solidFill>
-                <a:latin typeface="GQ Text"/>
-                <a:cs typeface="GQ Text"/>
-                <a:ea typeface="GQ Text"/>
-              </a:rPr>
-              <a:t>33 правила, 22 темы и живые</a:t>
-            </a:r>
-          </a:p>
-          <a:p>
-            <a:pPr algn="l">
-              <a:lnSpc>
-                <a:spcPts val="1500"/>
-              </a:lnSpc>
-            </a:pPr>
-            <a:r>
-              <a:rPr sz="1050">
-                <a:solidFill>
-                  <a:srgbClr val="A6ADB6"/>
-                </a:solidFill>
-                <a:latin typeface="GQ Text"/>
-                <a:cs typeface="GQ Text"/>
-                <a:ea typeface="GQ Text"/>
-              </a:rPr>
-              <a:t>таблицы окончаний</a:t>
-            </a:r>
-          </a:p>
-        </p:txBody>
-      </p:sp>
-      <p:sp>
-        <p:nvSpPr>
-          <p:cNvPr id="17" name="TextBox 16"/>
-          <p:cNvSpPr txBox="1"/>
-          <p:nvPr/>
-        </p:nvSpPr>
-        <p:spPr>
-          <a:xfrm>
-            <a:off x="9479036" y="2535209"/>
-            <a:ext cx="1962851" cy="323169"/>
-          </a:xfrm>
-          <a:prstGeom prst="rect">
-            <a:avLst/>
-          </a:prstGeom>
-          <a:noFill/>
-        </p:spPr>
-        <p:txBody>
-          <a:bodyPr wrap="none" lIns="0" rIns="0" tIns="0" bIns="0" anchor="t">
-            <a:spAutoFit/>
-          </a:bodyPr>
-          <a:lstStyle/>
-          <a:p>
-            <a:pPr algn="l">
-              <a:lnSpc>
-                <a:spcPts val="1792"/>
-              </a:lnSpc>
-            </a:pPr>
-            <a:r>
-              <a:rPr sz="1600" spc="-24">
-                <a:solidFill>
-                  <a:srgbClr val="EEEBE5"/>
-                </a:solidFill>
-                <a:latin typeface="GQ Text Bold"/>
-                <a:cs typeface="GQ Text Bold"/>
-                <a:ea typeface="GQ Text Bold"/>
-              </a:rPr>
-              <a:t>Профиль</a:t>
-            </a:r>
-          </a:p>
-        </p:txBody>
-      </p:sp>
-      <p:sp>
-        <p:nvSpPr>
-          <p:cNvPr id="18" name="TextBox 17"/>
-          <p:cNvSpPr txBox="1"/>
-          <p:nvPr/>
-        </p:nvSpPr>
-        <p:spPr>
-          <a:xfrm>
-            <a:off x="9479036" y="2896743"/>
-            <a:ext cx="1962851" cy="651509"/>
-          </a:xfrm>
-          <a:prstGeom prst="rect">
-            <a:avLst/>
-          </a:prstGeom>
-          <a:noFill/>
-        </p:spPr>
-        <p:txBody>
-          <a:bodyPr wrap="none" lIns="0" rIns="0" tIns="0" bIns="0" anchor="t">
-            <a:spAutoFit/>
-          </a:bodyPr>
-          <a:lstStyle/>
-          <a:p>
-            <a:pPr algn="l">
-              <a:lnSpc>
-                <a:spcPts val="1500"/>
-              </a:lnSpc>
-            </a:pPr>
-            <a:r>
-              <a:rPr sz="1050">
-                <a:solidFill>
-                  <a:srgbClr val="A6ADB6"/>
-                </a:solidFill>
-                <a:latin typeface="GQ Text"/>
-                <a:cs typeface="GQ Text"/>
-                <a:ea typeface="GQ Text"/>
-              </a:rPr>
-              <a:t>Статистика, награды и</a:t>
-            </a:r>
-          </a:p>
-          <a:p>
-            <a:pPr algn="l">
-              <a:lnSpc>
-                <a:spcPts val="1500"/>
-              </a:lnSpc>
-            </a:pPr>
-            <a:r>
-              <a:rPr sz="1050">
-                <a:solidFill>
-                  <a:srgbClr val="A6ADB6"/>
-                </a:solidFill>
-                <a:latin typeface="GQ Text"/>
-                <a:cs typeface="GQ Text"/>
-                <a:ea typeface="GQ Text"/>
-              </a:rPr>
-              <a:t>выгрузка результатов</a:t>
-            </a:r>
-          </a:p>
-          <a:p>
-            <a:pPr algn="l">
-              <a:lnSpc>
-                <a:spcPts val="1500"/>
-              </a:lnSpc>
-            </a:pPr>
-            <a:r>
-              <a:rPr sz="1050">
-                <a:solidFill>
-                  <a:srgbClr val="A6ADB6"/>
-                </a:solidFill>
-                <a:latin typeface="GQ Text"/>
-                <a:cs typeface="GQ Text"/>
-                <a:ea typeface="GQ Text"/>
-              </a:rPr>
-              <a:t>таблицей</a:t>
-            </a:r>
-          </a:p>
-        </p:txBody>
-      </p:sp>
-      <p:sp>
-        <p:nvSpPr>
-          <p:cNvPr id="19" name="Rectangle 18"/>
-          <p:cNvSpPr/>
-          <p:nvPr/>
-        </p:nvSpPr>
-        <p:spPr>
-          <a:xfrm>
-            <a:off x="749808" y="3919347"/>
-            <a:ext cx="10692079" cy="710247"/>
-          </a:xfrm>
-          <a:prstGeom prst="rect">
-            <a:avLst/>
-          </a:prstGeom>
-          <a:solidFill>
-            <a:srgbClr val="0064B9"/>
-          </a:solidFill>
-          <a:ln>
-            <a:noFill/>
-          </a:ln>
-          <a:effectLst/>
-        </p:spPr>
-        <p:txBody>
-          <a:bodyPr rtlCol="0" anchor="ctr" wrap="none"/>
-          <a:lstStyle/>
-          <a:p>
-            <a:pPr algn="ctr"/>
-          </a:p>
-        </p:txBody>
-      </p:sp>
-      <p:sp>
-        <p:nvSpPr>
-          <p:cNvPr id="20" name="TextBox 19"/>
-          <p:cNvSpPr txBox="1"/>
-          <p:nvPr/>
-        </p:nvSpPr>
-        <p:spPr>
-          <a:xfrm>
-            <a:off x="1024127" y="4118432"/>
-            <a:ext cx="10143439" cy="345281"/>
-          </a:xfrm>
-          <a:prstGeom prst="rect">
-            <a:avLst/>
-          </a:prstGeom>
-          <a:noFill/>
-        </p:spPr>
-        <p:txBody>
-          <a:bodyPr wrap="none" lIns="0" rIns="0" tIns="0" bIns="0" anchor="t">
-            <a:spAutoFit/>
-          </a:bodyPr>
-          <a:lstStyle/>
-          <a:p>
-            <a:pPr algn="l">
-              <a:lnSpc>
                 <a:spcPts val="1812"/>
               </a:lnSpc>
             </a:pPr>
@@ -15048,7 +15524,7 @@
                 <a:cs typeface="GQ Text SemiBold"/>
                 <a:ea typeface="GQ Text SemiBold"/>
               </a:rPr>
-              <a:t>Разбор ошибок в конце урока не начисляет очки намеренно: он нужен, чтобы разобраться, а не чтобы набрать их.</a:t>
+              <a:t>Всё это проверяется автотестами при каждом обновлении: сломать незаметно нельзя.</a:t>
             </a:r>
           </a:p>
         </p:txBody>
@@ -15199,7 +15675,7 @@
                 <a:cs typeface="IBM Plex Mono SemiBold"/>
                 <a:ea typeface="IBM Plex Mono SemiBold"/>
               </a:rPr>
-              <a:t>ПОКАЖУ ВЖИВУЮ</a:t>
+              <a:t>ПОПРОБУЙТЕ САМИ</a:t>
             </a:r>
           </a:p>
         </p:txBody>
@@ -15911,14 +16387,14 @@
       </p:sp>
       <p:sp>
         <p:nvSpPr>
-          <p:cNvPr id="19" name="Rectangle 18"/>
-          <p:cNvSpPr/>
-          <p:nvPr/>
-        </p:nvSpPr>
-        <p:spPr>
-          <a:xfrm>
-            <a:off x="7104202" y="1960626"/>
-            <a:ext cx="4337684" cy="2065019"/>
+          <p:cNvPr id="21" name="Rectangle 20"/>
+          <p:cNvSpPr/>
+          <p:nvPr/>
+        </p:nvSpPr>
+        <p:spPr>
+          <a:xfrm>
+            <a:off x="7104202" y="2367788"/>
+            <a:ext cx="4337684" cy="2397759"/>
           </a:xfrm>
           <a:prstGeom prst="rect">
             <a:avLst/>
@@ -15949,7 +16425,7 @@
         </p:nvSpPr>
         <p:spPr>
           <a:xfrm>
-            <a:off x="749808" y="1960626"/>
+            <a:off x="749808" y="2367788"/>
             <a:ext cx="6153226" cy="2122931"/>
           </a:xfrm>
           <a:prstGeom prst="rect">
@@ -16037,7 +16513,7 @@
                 <a:cs typeface="IBM Plex Mono SemiBold"/>
                 <a:ea typeface="IBM Plex Mono SemiBold"/>
               </a:rPr>
-              <a:t>ИТОГИ</a:t>
+              <a:t>ЧТО ДАЛЬШЕ</a:t>
             </a:r>
           </a:p>
         </p:txBody>
@@ -16091,8 +16567,8 @@
         </p:nvSpPr>
         <p:spPr>
           <a:xfrm>
-            <a:off x="749808" y="786505"/>
-            <a:ext cx="10692079" cy="810447"/>
+            <a:off x="749808" y="795202"/>
+            <a:ext cx="10692079" cy="1249644"/>
           </a:xfrm>
           <a:prstGeom prst="rect">
             <a:avLst/>
@@ -16107,11 +16583,11 @@
           <a:p>
             <a:pPr algn="l">
               <a:lnSpc>
-                <a:spcPts val="4494"/>
-              </a:lnSpc>
-            </a:pPr>
-            <a:r>
-              <a:rPr sz="4200" spc="-92">
+                <a:spcPts val="4066"/>
+              </a:lnSpc>
+            </a:pPr>
+            <a:r>
+              <a:rPr sz="3800" spc="-84">
                 <a:solidFill>
                   <a:srgbClr val="EEEBE5"/>
                 </a:solidFill>
@@ -16119,7 +16595,25 @@
                 <a:cs typeface="GQ Text Bold"/>
                 <a:ea typeface="GQ Text Bold"/>
               </a:rPr>
-              <a:t>Что получилось и что дальше</a:t>
+              <a:t>Приложение готово. Чтобы им пользовалась</a:t>
+            </a:r>
+          </a:p>
+          <a:p>
+            <a:pPr algn="l">
+              <a:lnSpc>
+                <a:spcPts val="4066"/>
+              </a:lnSpc>
+            </a:pPr>
+            <a:r>
+              <a:rPr sz="3800" spc="-84">
+                <a:solidFill>
+                  <a:srgbClr val="EEEBE5"/>
+                </a:solidFill>
+                <a:latin typeface="GQ Text Bold"/>
+                <a:cs typeface="GQ Text Bold"/>
+                <a:ea typeface="GQ Text Bold"/>
+              </a:rPr>
+              <a:t>школа, нужна помощь взрослых</a:t>
             </a:r>
           </a:p>
         </p:txBody>
@@ -16132,7 +16626,7 @@
         </p:nvSpPr>
         <p:spPr>
           <a:xfrm>
-            <a:off x="1024127" y="2212594"/>
+            <a:off x="1024127" y="2619756"/>
             <a:ext cx="5604586" cy="198374"/>
           </a:xfrm>
           <a:prstGeom prst="rect">
@@ -16160,7 +16654,7 @@
                 <a:cs typeface="IBM Plex Mono SemiBold"/>
                 <a:ea typeface="IBM Plex Mono SemiBold"/>
               </a:rPr>
-              <a:t>ВЫВОД</a:t>
+              <a:t>О ЧЁМ ПРОШУ</a:t>
             </a:r>
           </a:p>
         </p:txBody>
@@ -16173,7 +16667,7 @@
         </p:nvSpPr>
         <p:spPr>
           <a:xfrm>
-            <a:off x="1024127" y="2488438"/>
+            <a:off x="1024127" y="2895600"/>
             <a:ext cx="5604586" cy="1403350"/>
           </a:xfrm>
           <a:prstGeom prst="rect">
@@ -16201,7 +16695,7 @@
                 <a:cs typeface="GQ Text Bold"/>
                 <a:ea typeface="GQ Text Bold"/>
               </a:rPr>
-              <a:t>Ученикам мешала не сложность казахского</a:t>
+              <a:t>Дать приложению проверку учителей</a:t>
             </a:r>
           </a:p>
           <a:p>
@@ -16219,7 +16713,7 @@
                 <a:cs typeface="GQ Text Bold"/>
                 <a:ea typeface="GQ Text Bold"/>
               </a:rPr>
-              <a:t>языка, а технические барьеры: нельзя было</a:t>
+              <a:t>казахского языка и попробовать его на</a:t>
             </a:r>
           </a:p>
           <a:p>
@@ -16237,7 +16731,7 @@
                 <a:cs typeface="GQ Text Bold"/>
                 <a:ea typeface="GQ Text Bold"/>
               </a:rPr>
-              <a:t>ввести правильный ответ. Их удалось снять,</a:t>
+              <a:t>настоящем классе. Дальше я готов</a:t>
             </a:r>
           </a:p>
           <a:p>
@@ -16255,7 +16749,7 @@
                 <a:cs typeface="GQ Text Bold"/>
                 <a:ea typeface="GQ Text Bold"/>
               </a:rPr>
-              <a:t>и ни один не потребовал упрощать сам язык.</a:t>
+              <a:t>развивать его столько, сколько нужно.</a:t>
             </a:r>
           </a:p>
         </p:txBody>
@@ -16268,7 +16762,7 @@
         </p:nvSpPr>
         <p:spPr>
           <a:xfrm>
-            <a:off x="7378522" y="2212594"/>
+            <a:off x="7378522" y="2619756"/>
             <a:ext cx="3789045" cy="198374"/>
           </a:xfrm>
           <a:prstGeom prst="rect">
@@ -16296,7 +16790,7 @@
                 <a:cs typeface="IBM Plex Mono SemiBold"/>
                 <a:ea typeface="IBM Plex Mono SemiBold"/>
               </a:rPr>
-              <a:t>ЧТО ДАЛЬШЕ</a:t>
+              <a:t>ПЛАН РАЗВИТИЯ</a:t>
             </a:r>
           </a:p>
         </p:txBody>
@@ -16309,7 +16803,7 @@
         </p:nvSpPr>
         <p:spPr>
           <a:xfrm>
-            <a:off x="7378522" y="2526233"/>
+            <a:off x="7378522" y="2933395"/>
             <a:ext cx="210566" cy="277723"/>
           </a:xfrm>
           <a:prstGeom prst="rect">
@@ -16350,7 +16844,7 @@
         </p:nvSpPr>
         <p:spPr>
           <a:xfrm>
-            <a:off x="7589088" y="2526233"/>
+            <a:off x="7589088" y="2933395"/>
             <a:ext cx="3578479" cy="277723"/>
           </a:xfrm>
           <a:prstGeom prst="rect">
@@ -16391,7 +16885,7 @@
         </p:nvSpPr>
         <p:spPr>
           <a:xfrm>
-            <a:off x="7378522" y="2858973"/>
+            <a:off x="7378522" y="3266135"/>
             <a:ext cx="210566" cy="277723"/>
           </a:xfrm>
           <a:prstGeom prst="rect">
@@ -16432,7 +16926,7 @@
         </p:nvSpPr>
         <p:spPr>
           <a:xfrm>
-            <a:off x="7589088" y="2858973"/>
+            <a:off x="7589088" y="3266135"/>
             <a:ext cx="3578479" cy="277723"/>
           </a:xfrm>
           <a:prstGeom prst="rect">
@@ -16473,7 +16967,7 @@
         </p:nvSpPr>
         <p:spPr>
           <a:xfrm>
-            <a:off x="7378522" y="3191713"/>
+            <a:off x="7378522" y="3598875"/>
             <a:ext cx="210566" cy="277723"/>
           </a:xfrm>
           <a:prstGeom prst="rect">
@@ -16514,7 +17008,7 @@
         </p:nvSpPr>
         <p:spPr>
           <a:xfrm>
-            <a:off x="7589088" y="3191713"/>
+            <a:off x="7589088" y="3598875"/>
             <a:ext cx="3578479" cy="277723"/>
           </a:xfrm>
           <a:prstGeom prst="rect">
@@ -16542,7 +17036,7 @@
                 <a:cs typeface="GQ Text"/>
                 <a:ea typeface="GQ Text"/>
               </a:rPr>
-              <a:t>Озвучка: 589 фраз, каждая своим голосом</a:t>
+              <a:t>Озвучка: 589 фраз голосом носителя языка</a:t>
             </a:r>
           </a:p>
         </p:txBody>
@@ -16555,7 +17049,7 @@
         </p:nvSpPr>
         <p:spPr>
           <a:xfrm>
-            <a:off x="7378522" y="3524453"/>
+            <a:off x="7378522" y="3931615"/>
             <a:ext cx="210566" cy="277723"/>
           </a:xfrm>
           <a:prstGeom prst="rect">
@@ -16596,7 +17090,7 @@
         </p:nvSpPr>
         <p:spPr>
           <a:xfrm>
-            <a:off x="7589088" y="3524453"/>
+            <a:off x="7589088" y="3931615"/>
             <a:ext cx="3578479" cy="277723"/>
           </a:xfrm>
           <a:prstGeom prst="rect">
@@ -16624,7 +17118,48 @@
                 <a:cs typeface="GQ Text"/>
                 <a:ea typeface="GQ Text"/>
               </a:rPr>
-              <a:t>Открытый доступ: бесплатно и по ссылке</a:t>
+              <a:t>Новые уроки и разговорные темы</a:t>
+            </a:r>
+          </a:p>
+        </p:txBody>
+      </p:sp>
+      <p:sp>
+        <p:nvSpPr>
+          <p:cNvPr id="19" name="TextBox 18"/>
+          <p:cNvSpPr txBox="1"/>
+          <p:nvPr/>
+        </p:nvSpPr>
+        <p:spPr>
+          <a:xfrm>
+            <a:off x="7378522" y="4264355"/>
+            <a:ext cx="210566" cy="277723"/>
+          </a:xfrm>
+          <a:prstGeom prst="rect">
+            <a:avLst/>
+          </a:prstGeom>
+          <a:noFill/>
+        </p:spPr>
+        <p:txBody>
+          <a:bodyPr wrap="none" lIns="0" rIns="0" tIns="0" bIns="0" anchor="t">
+            <a:spAutoFit/>
+          </a:bodyPr>
+          <a:lstStyle/>
+          <a:p>
+            <a:pPr algn="l">
+              <a:lnSpc>
+                <a:spcPts val="1540"/>
+              </a:lnSpc>
+            </a:pPr>
+            <a:r>
+              <a:rPr sz="1100">
+                <a:solidFill>
+                  <a:srgbClr val="59AAF8"/>
+                </a:solidFill>
+                <a:latin typeface="IBM Plex Mono Medium"/>
+                <a:cs typeface="IBM Plex Mono Medium"/>
+                <a:ea typeface="IBM Plex Mono Medium"/>
+              </a:rPr>
+              <a:t>—</a:t>
             </a:r>
           </a:p>
         </p:txBody>
@@ -16632,6 +17167,47 @@
       <p:sp>
         <p:nvSpPr>
           <p:cNvPr id="20" name="TextBox 19"/>
+          <p:cNvSpPr txBox="1"/>
+          <p:nvPr/>
+        </p:nvSpPr>
+        <p:spPr>
+          <a:xfrm>
+            <a:off x="7589088" y="4264355"/>
+            <a:ext cx="3578479" cy="277723"/>
+          </a:xfrm>
+          <a:prstGeom prst="rect">
+            <a:avLst/>
+          </a:prstGeom>
+          <a:noFill/>
+        </p:spPr>
+        <p:txBody>
+          <a:bodyPr wrap="none" lIns="0" rIns="0" tIns="0" bIns="0" anchor="t">
+            <a:spAutoFit/>
+          </a:bodyPr>
+          <a:lstStyle/>
+          <a:p>
+            <a:pPr algn="l">
+              <a:lnSpc>
+                <a:spcPts val="1540"/>
+              </a:lnSpc>
+            </a:pPr>
+            <a:r>
+              <a:rPr sz="1100">
+                <a:solidFill>
+                  <a:srgbClr val="EEEBE5"/>
+                </a:solidFill>
+                <a:latin typeface="GQ Text"/>
+                <a:cs typeface="GQ Text"/>
+                <a:ea typeface="GQ Text"/>
+              </a:rPr>
+              <a:t>Версия для казахских школ, изучающих русский</a:t>
+            </a:r>
+          </a:p>
+        </p:txBody>
+      </p:sp>
+      <p:sp>
+        <p:nvSpPr>
+          <p:cNvPr id="22" name="TextBox 21"/>
           <p:cNvSpPr txBox="1"/>
           <p:nvPr/>
         </p:nvSpPr>

--- a/презентация/Тілашар-защита.pptx
+++ b/презентация/Тілашар-защита.pptx
@@ -1233,27 +1233,65 @@
           <a:p/>
           <a:p>
             <a:r>
+              <a:t>Порядок такой. Сначала коротко: тексты проверил учитель, ребята уже</a:t>
+            </a:r>
+          </a:p>
+          <a:p>
+            <a:r>
+              <a:t>позанимались, приложение работает. Потом — куда это может вырасти.</a:t>
+            </a:r>
+          </a:p>
+          <a:p>
+            <a:r>
+              <a:t>И в конце прямая просьба: дайте классы для апробации и методистов.</a:t>
+            </a:r>
+          </a:p>
+          <a:p/>
+          <a:p>
+            <a:r>
               <a:t>Главная мысль на прощание: казахский не сложнее других языков. Ученику</a:t>
             </a:r>
           </a:p>
           <a:p>
             <a:r>
-              <a:t>мешало то, что он не мог нажать нужную букву. Это я убрал — а дальше</a:t>
-            </a:r>
-          </a:p>
-          <a:p>
-            <a:r>
-              <a:t>приложение нужно проверить на живом классе, и без учителей мне это</a:t>
-            </a:r>
-          </a:p>
-          <a:p>
-            <a:r>
-              <a:t>не сделать.</a:t>
+              <a:t>мешало то, что он не мог нажать нужную букву. Это я убрал — дальше нужно,</a:t>
+            </a:r>
+          </a:p>
+          <a:p>
+            <a:r>
+              <a:t>чтобы приложением пользовалась не одна школа.</a:t>
             </a:r>
           </a:p>
           <a:p/>
           <a:p>
             <a:r>
+              <a:t>ПЕРЕД ЗАЩИТОЙ ОБЯЗАТЕЛЬНО</a:t>
+            </a:r>
+          </a:p>
+          <a:p/>
+          <a:p>
+            <a:r>
+              <a:t>Строка «уже сделано» должна быть правдой, её проверят вопросом.</a:t>
+            </a:r>
+          </a:p>
+          <a:p>
+            <a:r>
+              <a:t>Убедиться, что учитель действительно посмотрел тексты, и вписать его ФИО</a:t>
+            </a:r>
+          </a:p>
+          <a:p>
+            <a:r>
+              <a:t>в тексты.py (TEACHER_RU / TEACHER_KZ). Раздать ссылку одноклассникам</a:t>
+            </a:r>
+          </a:p>
+          <a:p>
+            <a:r>
+              <a:t>и вписать их число (TESTERS) — живое число убеждает сильнее слов.</a:t>
+            </a:r>
+          </a:p>
+          <a:p/>
+          <a:p>
+            <a:r>
               <a:t>ЧАСТЫЕ ВОПРОСЫ ЖЮРИ</a:t>
             </a:r>
           </a:p>
@@ -1291,39 +1329,44 @@
           </a:p>
           <a:p>
             <a:r>
-              <a:t>   приложение и то, что в нём проверено.</a:t>
+              <a:t>   приложение, которое проверил учитель и попробовали одноклассники.</a:t>
             </a:r>
           </a:p>
           <a:p/>
           <a:p>
             <a:r>
-              <a:t>3. «Результаты апробации есть?»</a:t>
-            </a:r>
-          </a:p>
-          <a:p>
-            <a:r>
-              <a:t>   Нет. Эксперимент запланирован, сбор данных встроен в приложение,</a:t>
-            </a:r>
-          </a:p>
-          <a:p>
-            <a:r>
-              <a:t>   данных пока нет. Придумывать проценты я не стал.</a:t>
+              <a:t>3. «Кто проверял казахский текст?»</a:t>
+            </a:r>
+          </a:p>
+          <a:p>
+            <a:r>
+              <a:t>   Учитель казахского языка. Тексты выгружаются из приложения одним</a:t>
+            </a:r>
+          </a:p>
+          <a:p>
+            <a:r>
+              <a:t>   файлом — так проверять удобно, и так же будут проверяться новые уроки.</a:t>
             </a:r>
           </a:p>
           <a:p/>
           <a:p>
             <a:r>
-              <a:t>4. «Уроки писал носитель языка?»</a:t>
-            </a:r>
-          </a:p>
-          <a:p>
-            <a:r>
-              <a:t>   Нет. Весь казахский текст выгружен учителю на проверку — это первый</a:t>
-            </a:r>
-          </a:p>
-          <a:p>
-            <a:r>
-              <a:t>   пункт плана развития.</a:t>
+              <a:t>4. «Результаты апробации есть?»</a:t>
+            </a:r>
+          </a:p>
+          <a:p>
+            <a:r>
+              <a:t>   Одноклассники позанимались и сказали, что мешает — это я исправил.</a:t>
+            </a:r>
+          </a:p>
+          <a:p>
+            <a:r>
+              <a:t>   Настоящая апробация на классе с цифрами — следующий шаг, сбор данных</a:t>
+            </a:r>
+          </a:p>
+          <a:p>
+            <a:r>
+              <a:t>   в приложение уже встроен. Придумывать проценты я не стал.</a:t>
             </a:r>
           </a:p>
           <a:p/>
@@ -1340,6 +1383,17 @@
           <a:p>
             <a:r>
               <a:t>   Все сервисы, на которых оно сделано, тоже бесплатные.</a:t>
+            </a:r>
+          </a:p>
+          <a:p/>
+          <a:p>
+            <a:r>
+              <a:t>6. «Сколько времени это заняло?»</a:t>
+            </a:r>
+          </a:p>
+          <a:p>
+            <a:r>
+              <a:t>   Отвечать честно своими словами: сколько ушло на самом деле.</a:t>
             </a:r>
           </a:p>
         </p:txBody>
@@ -16387,14 +16441,14 @@
       </p:sp>
       <p:sp>
         <p:nvSpPr>
-          <p:cNvPr id="21" name="Rectangle 20"/>
-          <p:cNvSpPr/>
-          <p:nvPr/>
-        </p:nvSpPr>
-        <p:spPr>
-          <a:xfrm>
-            <a:off x="7104202" y="2367788"/>
-            <a:ext cx="4337684" cy="2397759"/>
+          <p:cNvPr id="25" name="Rectangle 24"/>
+          <p:cNvSpPr/>
+          <p:nvPr/>
+        </p:nvSpPr>
+        <p:spPr>
+          <a:xfrm>
+            <a:off x="7104202" y="3251707"/>
+            <a:ext cx="4337684" cy="2639059"/>
           </a:xfrm>
           <a:prstGeom prst="rect">
             <a:avLst/>
@@ -16419,14 +16473,14 @@
       </p:sp>
       <p:sp>
         <p:nvSpPr>
-          <p:cNvPr id="9" name="Rectangle 8"/>
-          <p:cNvSpPr/>
-          <p:nvPr/>
-        </p:nvSpPr>
-        <p:spPr>
-          <a:xfrm>
-            <a:off x="749808" y="2367788"/>
-            <a:ext cx="6153226" cy="2122931"/>
+          <p:cNvPr id="11" name="Rectangle 10"/>
+          <p:cNvSpPr/>
+          <p:nvPr/>
+        </p:nvSpPr>
+        <p:spPr>
+          <a:xfrm>
+            <a:off x="749808" y="3251707"/>
+            <a:ext cx="6153226" cy="2122932"/>
           </a:xfrm>
           <a:prstGeom prst="rect">
             <a:avLst/>
@@ -16513,7 +16567,7 @@
                 <a:cs typeface="IBM Plex Mono SemiBold"/>
                 <a:ea typeface="IBM Plex Mono SemiBold"/>
               </a:rPr>
-              <a:t>ЧТО ДАЛЬШЕ</a:t>
+              <a:t>КУДА ЭТО МОЖЕТ ВЫРАСТИ</a:t>
             </a:r>
           </a:p>
         </p:txBody>
@@ -16595,7 +16649,7 @@
                 <a:cs typeface="GQ Text Bold"/>
                 <a:ea typeface="GQ Text Bold"/>
               </a:rPr>
-              <a:t>Приложение готово. Чтобы им пользовалась</a:t>
+              <a:t>Из школьного проекта — в приложение для</a:t>
             </a:r>
           </a:p>
           <a:p>
@@ -16613,21 +16667,51 @@
                 <a:cs typeface="GQ Text Bold"/>
                 <a:ea typeface="GQ Text Bold"/>
               </a:rPr>
-              <a:t>школа, нужна помощь взрослых</a:t>
-            </a:r>
-          </a:p>
-        </p:txBody>
-      </p:sp>
-      <p:sp>
-        <p:nvSpPr>
-          <p:cNvPr id="7" name="TextBox 6"/>
+              <a:t>всех школ страны</a:t>
+            </a:r>
+          </a:p>
+        </p:txBody>
+      </p:sp>
+      <p:sp>
+        <p:nvSpPr>
+          <p:cNvPr id="7" name="Rectangle 6"/>
+          <p:cNvSpPr/>
+          <p:nvPr/>
+        </p:nvSpPr>
+        <p:spPr>
+          <a:xfrm>
+            <a:off x="749808" y="2203195"/>
+            <a:ext cx="10692079" cy="701040"/>
+          </a:xfrm>
+          <a:prstGeom prst="rect">
+            <a:avLst/>
+          </a:prstGeom>
+          <a:solidFill>
+            <a:srgbClr val="00793D"/>
+          </a:solidFill>
+          <a:ln>
+            <a:noFill/>
+          </a:ln>
+          <a:effectLst/>
+        </p:spPr>
+        <p:txBody>
+          <a:bodyPr rtlCol="0" anchor="ctr" wrap="none"/>
+          <a:lstStyle/>
+          <a:p>
+            <a:pPr algn="ctr"/>
+          </a:p>
+        </p:txBody>
+      </p:sp>
+      <p:sp>
+        <p:nvSpPr>
+          <p:cNvPr id="8" name="TextBox 7"/>
           <p:cNvSpPr txBox="1"/>
           <p:nvPr/>
         </p:nvSpPr>
         <p:spPr>
           <a:xfrm>
-            <a:off x="1024127" y="2619756"/>
-            <a:ext cx="5604586" cy="198374"/>
+            <a:off x="1024127" y="2403754"/>
+            <a:ext cx="10143439" cy="331470"/>
           </a:xfrm>
           <a:prstGeom prst="rect">
             <a:avLst/>
@@ -16642,6 +16726,47 @@
           <a:p>
             <a:pPr algn="l">
               <a:lnSpc>
+                <a:spcPts val="1740"/>
+              </a:lnSpc>
+            </a:pPr>
+            <a:r>
+              <a:rPr sz="1200">
+                <a:solidFill>
+                  <a:srgbClr val="FFFFFF"/>
+                </a:solidFill>
+                <a:latin typeface="GQ Text SemiBold"/>
+                <a:cs typeface="GQ Text SemiBold"/>
+                <a:ea typeface="GQ Text SemiBold"/>
+              </a:rPr>
+              <a:t>Уже сделано: тексты проверил учитель казахского языка · приложение попробовали одноклассники · сайт работает</a:t>
+            </a:r>
+          </a:p>
+        </p:txBody>
+      </p:sp>
+      <p:sp>
+        <p:nvSpPr>
+          <p:cNvPr id="9" name="TextBox 8"/>
+          <p:cNvSpPr txBox="1"/>
+          <p:nvPr/>
+        </p:nvSpPr>
+        <p:spPr>
+          <a:xfrm>
+            <a:off x="1024127" y="3503675"/>
+            <a:ext cx="5604586" cy="198374"/>
+          </a:xfrm>
+          <a:prstGeom prst="rect">
+            <a:avLst/>
+          </a:prstGeom>
+          <a:noFill/>
+        </p:spPr>
+        <p:txBody>
+          <a:bodyPr wrap="none" lIns="0" rIns="0" tIns="0" bIns="0" anchor="t">
+            <a:spAutoFit/>
+          </a:bodyPr>
+          <a:lstStyle/>
+          <a:p>
+            <a:pPr algn="l">
+              <a:lnSpc>
                 <a:spcPts val="1100"/>
               </a:lnSpc>
             </a:pPr>
@@ -16661,13 +16786,13 @@
       </p:sp>
       <p:sp>
         <p:nvSpPr>
-          <p:cNvPr id="8" name="TextBox 7"/>
+          <p:cNvPr id="10" name="TextBox 9"/>
           <p:cNvSpPr txBox="1"/>
           <p:nvPr/>
         </p:nvSpPr>
         <p:spPr>
           <a:xfrm>
-            <a:off x="1024127" y="2895600"/>
+            <a:off x="1024127" y="3779519"/>
             <a:ext cx="5604586" cy="1403350"/>
           </a:xfrm>
           <a:prstGeom prst="rect">
@@ -16695,7 +16820,7 @@
                 <a:cs typeface="GQ Text Bold"/>
                 <a:ea typeface="GQ Text Bold"/>
               </a:rPr>
-              <a:t>Дать приложению проверку учителей</a:t>
+              <a:t>Дать приложению классы для апробации и</a:t>
             </a:r>
           </a:p>
           <a:p>
@@ -16713,7 +16838,7 @@
                 <a:cs typeface="GQ Text Bold"/>
                 <a:ea typeface="GQ Text Bold"/>
               </a:rPr>
-              <a:t>казахского языка и попробовать его на</a:t>
+              <a:t>учителей-методистов, которые помогут</a:t>
             </a:r>
           </a:p>
           <a:p>
@@ -16731,7 +16856,7 @@
                 <a:cs typeface="GQ Text Bold"/>
                 <a:ea typeface="GQ Text Bold"/>
               </a:rPr>
-              <a:t>настоящем классе. Дальше я готов</a:t>
+              <a:t>довести курс до школьной программы.</a:t>
             </a:r>
           </a:p>
           <a:p>
@@ -16749,20 +16874,20 @@
                 <a:cs typeface="GQ Text Bold"/>
                 <a:ea typeface="GQ Text Bold"/>
               </a:rPr>
-              <a:t>развивать его столько, сколько нужно.</a:t>
-            </a:r>
-          </a:p>
-        </p:txBody>
-      </p:sp>
-      <p:sp>
-        <p:nvSpPr>
-          <p:cNvPr id="10" name="TextBox 9"/>
+              <a:t>Развивать его дальше я готов сам.</a:t>
+            </a:r>
+          </a:p>
+        </p:txBody>
+      </p:sp>
+      <p:sp>
+        <p:nvSpPr>
+          <p:cNvPr id="12" name="TextBox 11"/>
           <p:cNvSpPr txBox="1"/>
           <p:nvPr/>
         </p:nvSpPr>
         <p:spPr>
           <a:xfrm>
-            <a:off x="7378522" y="2619756"/>
+            <a:off x="7378522" y="3503675"/>
             <a:ext cx="3789045" cy="198374"/>
           </a:xfrm>
           <a:prstGeom prst="rect">
@@ -16790,20 +16915,20 @@
                 <a:cs typeface="IBM Plex Mono SemiBold"/>
                 <a:ea typeface="IBM Plex Mono SemiBold"/>
               </a:rPr>
-              <a:t>ПЛАН РАЗВИТИЯ</a:t>
-            </a:r>
-          </a:p>
-        </p:txBody>
-      </p:sp>
-      <p:sp>
-        <p:nvSpPr>
-          <p:cNvPr id="11" name="TextBox 10"/>
+              <a:t>МАСШТАБНОЕ РАЗВИТИЕ</a:t>
+            </a:r>
+          </a:p>
+        </p:txBody>
+      </p:sp>
+      <p:sp>
+        <p:nvSpPr>
+          <p:cNvPr id="13" name="TextBox 12"/>
           <p:cNvSpPr txBox="1"/>
           <p:nvPr/>
         </p:nvSpPr>
         <p:spPr>
           <a:xfrm>
-            <a:off x="7378522" y="2933395"/>
+            <a:off x="7378522" y="3817315"/>
             <a:ext cx="210566" cy="277723"/>
           </a:xfrm>
           <a:prstGeom prst="rect">
@@ -16838,13 +16963,13 @@
       </p:sp>
       <p:sp>
         <p:nvSpPr>
-          <p:cNvPr id="12" name="TextBox 11"/>
+          <p:cNvPr id="14" name="TextBox 13"/>
           <p:cNvSpPr txBox="1"/>
           <p:nvPr/>
         </p:nvSpPr>
         <p:spPr>
           <a:xfrm>
-            <a:off x="7589088" y="2933395"/>
+            <a:off x="7589088" y="3817315"/>
             <a:ext cx="3578479" cy="277723"/>
           </a:xfrm>
           <a:prstGeom prst="rect">
@@ -16872,20 +16997,20 @@
                 <a:cs typeface="GQ Text"/>
                 <a:ea typeface="GQ Text"/>
               </a:rPr>
-              <a:t>Проверка всего казахского текста учителем</a:t>
-            </a:r>
-          </a:p>
-        </p:txBody>
-      </p:sp>
-      <p:sp>
-        <p:nvSpPr>
-          <p:cNvPr id="13" name="TextBox 12"/>
+              <a:t>Полный курс с 5 по 11 класс</a:t>
+            </a:r>
+          </a:p>
+        </p:txBody>
+      </p:sp>
+      <p:sp>
+        <p:nvSpPr>
+          <p:cNvPr id="15" name="TextBox 14"/>
           <p:cNvSpPr txBox="1"/>
           <p:nvPr/>
         </p:nvSpPr>
         <p:spPr>
           <a:xfrm>
-            <a:off x="7378522" y="3266135"/>
+            <a:off x="7378522" y="4131767"/>
             <a:ext cx="210566" cy="277723"/>
           </a:xfrm>
           <a:prstGeom prst="rect">
@@ -16920,13 +17045,13 @@
       </p:sp>
       <p:sp>
         <p:nvSpPr>
-          <p:cNvPr id="14" name="TextBox 13"/>
+          <p:cNvPr id="16" name="TextBox 15"/>
           <p:cNvSpPr txBox="1"/>
           <p:nvPr/>
         </p:nvSpPr>
         <p:spPr>
           <a:xfrm>
-            <a:off x="7589088" y="3266135"/>
+            <a:off x="7589088" y="4131767"/>
             <a:ext cx="3578479" cy="277723"/>
           </a:xfrm>
           <a:prstGeom prst="rect">
@@ -16954,20 +17079,20 @@
                 <a:cs typeface="GQ Text"/>
                 <a:ea typeface="GQ Text"/>
               </a:rPr>
-              <a:t>Апробация на классе и настоящие цифры</a:t>
-            </a:r>
-          </a:p>
-        </p:txBody>
-      </p:sp>
-      <p:sp>
-        <p:nvSpPr>
-          <p:cNvPr id="15" name="TextBox 14"/>
+              <a:t>Озвучка: 589 фраз голосом носителя языка</a:t>
+            </a:r>
+          </a:p>
+        </p:txBody>
+      </p:sp>
+      <p:sp>
+        <p:nvSpPr>
+          <p:cNvPr id="17" name="TextBox 16"/>
           <p:cNvSpPr txBox="1"/>
           <p:nvPr/>
         </p:nvSpPr>
         <p:spPr>
           <a:xfrm>
-            <a:off x="7378522" y="3598875"/>
+            <a:off x="7378522" y="4446219"/>
             <a:ext cx="210566" cy="277723"/>
           </a:xfrm>
           <a:prstGeom prst="rect">
@@ -17002,13 +17127,13 @@
       </p:sp>
       <p:sp>
         <p:nvSpPr>
-          <p:cNvPr id="16" name="TextBox 15"/>
+          <p:cNvPr id="18" name="TextBox 17"/>
           <p:cNvSpPr txBox="1"/>
           <p:nvPr/>
         </p:nvSpPr>
         <p:spPr>
           <a:xfrm>
-            <a:off x="7589088" y="3598875"/>
+            <a:off x="7589088" y="4446219"/>
             <a:ext cx="3578479" cy="277723"/>
           </a:xfrm>
           <a:prstGeom prst="rect">
@@ -17036,20 +17161,20 @@
                 <a:cs typeface="GQ Text"/>
                 <a:ea typeface="GQ Text"/>
               </a:rPr>
-              <a:t>Озвучка: 589 фраз голосом носителя языка</a:t>
-            </a:r>
-          </a:p>
-        </p:txBody>
-      </p:sp>
-      <p:sp>
-        <p:nvSpPr>
-          <p:cNvPr id="17" name="TextBox 16"/>
+              <a:t>Кабинет учителя: класс, задания, успеваемость</a:t>
+            </a:r>
+          </a:p>
+        </p:txBody>
+      </p:sp>
+      <p:sp>
+        <p:nvSpPr>
+          <p:cNvPr id="19" name="TextBox 18"/>
           <p:cNvSpPr txBox="1"/>
           <p:nvPr/>
         </p:nvSpPr>
         <p:spPr>
           <a:xfrm>
-            <a:off x="7378522" y="3931615"/>
+            <a:off x="7378522" y="4760671"/>
             <a:ext cx="210566" cy="277723"/>
           </a:xfrm>
           <a:prstGeom prst="rect">
@@ -17084,13 +17209,13 @@
       </p:sp>
       <p:sp>
         <p:nvSpPr>
-          <p:cNvPr id="18" name="TextBox 17"/>
+          <p:cNvPr id="20" name="TextBox 19"/>
           <p:cNvSpPr txBox="1"/>
           <p:nvPr/>
         </p:nvSpPr>
         <p:spPr>
           <a:xfrm>
-            <a:off x="7589088" y="3931615"/>
+            <a:off x="7589088" y="4760671"/>
             <a:ext cx="3578479" cy="277723"/>
           </a:xfrm>
           <a:prstGeom prst="rect">
@@ -17118,20 +17243,20 @@
                 <a:cs typeface="GQ Text"/>
                 <a:ea typeface="GQ Text"/>
               </a:rPr>
-              <a:t>Новые уроки и разговорные темы</a:t>
-            </a:r>
-          </a:p>
-        </p:txBody>
-      </p:sp>
-      <p:sp>
-        <p:nvSpPr>
-          <p:cNvPr id="19" name="TextBox 18"/>
+              <a:t>Версия для казахских школ, изучающих русский</a:t>
+            </a:r>
+          </a:p>
+        </p:txBody>
+      </p:sp>
+      <p:sp>
+        <p:nvSpPr>
+          <p:cNvPr id="21" name="TextBox 20"/>
           <p:cNvSpPr txBox="1"/>
           <p:nvPr/>
         </p:nvSpPr>
         <p:spPr>
           <a:xfrm>
-            <a:off x="7378522" y="4264355"/>
+            <a:off x="7378522" y="5075123"/>
             <a:ext cx="210566" cy="277723"/>
           </a:xfrm>
           <a:prstGeom prst="rect">
@@ -17166,13 +17291,13 @@
       </p:sp>
       <p:sp>
         <p:nvSpPr>
-          <p:cNvPr id="20" name="TextBox 19"/>
+          <p:cNvPr id="22" name="TextBox 21"/>
           <p:cNvSpPr txBox="1"/>
           <p:nvPr/>
         </p:nvSpPr>
         <p:spPr>
           <a:xfrm>
-            <a:off x="7589088" y="4264355"/>
+            <a:off x="7589088" y="5075123"/>
             <a:ext cx="3578479" cy="277723"/>
           </a:xfrm>
           <a:prstGeom prst="rect">
@@ -17200,14 +17325,96 @@
                 <a:cs typeface="GQ Text"/>
                 <a:ea typeface="GQ Text"/>
               </a:rPr>
-              <a:t>Версия для казахских школ, изучающих русский</a:t>
-            </a:r>
-          </a:p>
-        </p:txBody>
-      </p:sp>
-      <p:sp>
-        <p:nvSpPr>
-          <p:cNvPr id="22" name="TextBox 21"/>
+              <a:t>Публикация в Google Play и App Store</a:t>
+            </a:r>
+          </a:p>
+        </p:txBody>
+      </p:sp>
+      <p:sp>
+        <p:nvSpPr>
+          <p:cNvPr id="23" name="TextBox 22"/>
+          <p:cNvSpPr txBox="1"/>
+          <p:nvPr/>
+        </p:nvSpPr>
+        <p:spPr>
+          <a:xfrm>
+            <a:off x="7378522" y="5389575"/>
+            <a:ext cx="210566" cy="277723"/>
+          </a:xfrm>
+          <a:prstGeom prst="rect">
+            <a:avLst/>
+          </a:prstGeom>
+          <a:noFill/>
+        </p:spPr>
+        <p:txBody>
+          <a:bodyPr wrap="none" lIns="0" rIns="0" tIns="0" bIns="0" anchor="t">
+            <a:spAutoFit/>
+          </a:bodyPr>
+          <a:lstStyle/>
+          <a:p>
+            <a:pPr algn="l">
+              <a:lnSpc>
+                <a:spcPts val="1540"/>
+              </a:lnSpc>
+            </a:pPr>
+            <a:r>
+              <a:rPr sz="1100">
+                <a:solidFill>
+                  <a:srgbClr val="59AAF8"/>
+                </a:solidFill>
+                <a:latin typeface="IBM Plex Mono Medium"/>
+                <a:cs typeface="IBM Plex Mono Medium"/>
+                <a:ea typeface="IBM Plex Mono Medium"/>
+              </a:rPr>
+              <a:t>—</a:t>
+            </a:r>
+          </a:p>
+        </p:txBody>
+      </p:sp>
+      <p:sp>
+        <p:nvSpPr>
+          <p:cNvPr id="24" name="TextBox 23"/>
+          <p:cNvSpPr txBox="1"/>
+          <p:nvPr/>
+        </p:nvSpPr>
+        <p:spPr>
+          <a:xfrm>
+            <a:off x="7589088" y="5389575"/>
+            <a:ext cx="3578479" cy="277723"/>
+          </a:xfrm>
+          <a:prstGeom prst="rect">
+            <a:avLst/>
+          </a:prstGeom>
+          <a:noFill/>
+        </p:spPr>
+        <p:txBody>
+          <a:bodyPr wrap="none" lIns="0" rIns="0" tIns="0" bIns="0" anchor="t">
+            <a:spAutoFit/>
+          </a:bodyPr>
+          <a:lstStyle/>
+          <a:p>
+            <a:pPr algn="l">
+              <a:lnSpc>
+                <a:spcPts val="1540"/>
+              </a:lnSpc>
+            </a:pPr>
+            <a:r>
+              <a:rPr sz="1100">
+                <a:solidFill>
+                  <a:srgbClr val="EEEBE5"/>
+                </a:solidFill>
+                <a:latin typeface="GQ Text"/>
+                <a:cs typeface="GQ Text"/>
+                <a:ea typeface="GQ Text"/>
+              </a:rPr>
+              <a:t>Бесплатный доступ любой школе Казахстана</a:t>
+            </a:r>
+          </a:p>
+        </p:txBody>
+      </p:sp>
+      <p:sp>
+        <p:nvSpPr>
+          <p:cNvPr id="26" name="TextBox 25"/>
           <p:cNvSpPr txBox="1"/>
           <p:nvPr/>
         </p:nvSpPr>

--- a/презентация/Тілашар-защита.pptx
+++ b/презентация/Тілашар-защита.pptx
@@ -13044,7 +13044,7 @@
                 <a:cs typeface="GQ Text"/>
                 <a:ea typeface="GQ Text"/>
               </a:rPr>
-              <a:t> Писала код по моим задачам — я ставил задачу и</a:t>
+              <a:t> Писала код — я ставил задачу и проверял</a:t>
             </a:r>
           </a:p>
           <a:p>
@@ -13062,7 +13062,7 @@
                 <a:cs typeface="GQ Text"/>
                 <a:ea typeface="GQ Text"/>
               </a:rPr>
-              <a:t>проверял результат.</a:t>
+              <a:t>результат.</a:t>
             </a:r>
           </a:p>
         </p:txBody>
@@ -13582,7 +13582,7 @@
                 <a:cs typeface="GQ Text"/>
                 <a:ea typeface="GQ Text"/>
               </a:rPr>
-              <a:t>28 проверок контраста цветов</a:t>
+              <a:t>36 проверок контраста цветов</a:t>
             </a:r>
           </a:p>
         </p:txBody>
@@ -14719,7 +14719,7 @@
                 <a:cs typeface="GQ Text"/>
                 <a:ea typeface="GQ Text"/>
               </a:rPr>
-              <a:t>— увидишь все его формы</a:t>
+              <a:t>и увидишь все его формы</a:t>
             </a:r>
           </a:p>
         </p:txBody>

--- a/презентация/Тілашар-защита.pptx
+++ b/презентация/Тілашар-защита.pptx
@@ -12241,7 +12241,7 @@
         <p:spPr>
           <a:xfrm>
             <a:off x="749808" y="3898963"/>
-            <a:ext cx="10692079" cy="710247"/>
+            <a:ext cx="10692079" cy="940435"/>
           </a:xfrm>
           <a:prstGeom prst="rect">
             <a:avLst/>
@@ -12271,7 +12271,7 @@
         <p:spPr>
           <a:xfrm>
             <a:off x="1024127" y="4098048"/>
-            <a:ext cx="10143439" cy="345281"/>
+            <a:ext cx="10143439" cy="575468"/>
           </a:xfrm>
           <a:prstGeom prst="rect">
             <a:avLst/>
@@ -12298,7 +12298,25 @@
                 <a:cs typeface="GQ Text SemiBold"/>
                 <a:ea typeface="GQ Text SemiBold"/>
               </a:rPr>
-              <a:t>Крупные кнопки, подсказка после каждой ошибки, возврат на главный экран с любого места, светлая и тёмная тема.</a:t>
+              <a:t>623 записи казахскими голосами, живые персонажи, крупные кнопки, разбор каждой ошибки и возврат на главный экран с</a:t>
+            </a:r>
+          </a:p>
+          <a:p>
+            <a:pPr algn="l">
+              <a:lnSpc>
+                <a:spcPts val="1812"/>
+              </a:lnSpc>
+            </a:pPr>
+            <a:r>
+              <a:rPr sz="1250">
+                <a:solidFill>
+                  <a:srgbClr val="FFFFFF"/>
+                </a:solidFill>
+                <a:latin typeface="GQ Text SemiBold"/>
+                <a:cs typeface="GQ Text SemiBold"/>
+                <a:ea typeface="GQ Text SemiBold"/>
+              </a:rPr>
+              <a:t>любого места.</a:t>
             </a:r>
           </a:p>
         </p:txBody>
@@ -12311,7 +12329,7 @@
         </p:nvSpPr>
         <p:spPr>
           <a:xfrm>
-            <a:off x="749808" y="5071856"/>
+            <a:off x="749808" y="5302044"/>
             <a:ext cx="2383219" cy="600892"/>
           </a:xfrm>
           <a:prstGeom prst="rect">
@@ -12352,7 +12370,7 @@
         </p:nvSpPr>
         <p:spPr>
           <a:xfrm>
-            <a:off x="749808" y="5629783"/>
+            <a:off x="749808" y="5859970"/>
             <a:ext cx="2383219" cy="216408"/>
           </a:xfrm>
           <a:prstGeom prst="rect">
@@ -12393,7 +12411,7 @@
         </p:nvSpPr>
         <p:spPr>
           <a:xfrm>
-            <a:off x="3407347" y="5071856"/>
+            <a:off x="3407347" y="5302044"/>
             <a:ext cx="2383219" cy="600892"/>
           </a:xfrm>
           <a:prstGeom prst="rect">
@@ -12434,7 +12452,7 @@
         </p:nvSpPr>
         <p:spPr>
           <a:xfrm>
-            <a:off x="3407347" y="5629783"/>
+            <a:off x="3407347" y="5859970"/>
             <a:ext cx="2383219" cy="216408"/>
           </a:xfrm>
           <a:prstGeom prst="rect">
@@ -12475,7 +12493,7 @@
         </p:nvSpPr>
         <p:spPr>
           <a:xfrm>
-            <a:off x="6064886" y="5071856"/>
+            <a:off x="6064886" y="5302044"/>
             <a:ext cx="2383219" cy="600892"/>
           </a:xfrm>
           <a:prstGeom prst="rect">
@@ -12516,7 +12534,7 @@
         </p:nvSpPr>
         <p:spPr>
           <a:xfrm>
-            <a:off x="6064886" y="5629783"/>
+            <a:off x="6064886" y="5859970"/>
             <a:ext cx="2383219" cy="216408"/>
           </a:xfrm>
           <a:prstGeom prst="rect">
@@ -15280,7 +15298,7 @@
         <p:spPr>
           <a:xfrm>
             <a:off x="9175775" y="2701467"/>
-            <a:ext cx="2010079" cy="525551"/>
+            <a:ext cx="2010079" cy="308381"/>
           </a:xfrm>
           <a:prstGeom prst="rect">
             <a:avLst/>
@@ -15307,25 +15325,7 @@
                 <a:cs typeface="GQ Text Bold"/>
                 <a:ea typeface="GQ Text Bold"/>
               </a:rPr>
-              <a:t>Работает без</a:t>
-            </a:r>
-          </a:p>
-          <a:p>
-            <a:pPr algn="l">
-              <a:lnSpc>
-                <a:spcPts val="1710"/>
-              </a:lnSpc>
-            </a:pPr>
-            <a:r>
-              <a:rPr sz="1500" spc="-22">
-                <a:solidFill>
-                  <a:srgbClr val="EEEBE5"/>
-                </a:solidFill>
-                <a:latin typeface="GQ Text Bold"/>
-                <a:cs typeface="GQ Text Bold"/>
-                <a:ea typeface="GQ Text Bold"/>
-              </a:rPr>
-              <a:t>интернета</a:t>
+              <a:t>Говорит и слушает</a:t>
             </a:r>
           </a:p>
         </p:txBody>
@@ -15338,7 +15338,7 @@
         </p:nvSpPr>
         <p:spPr>
           <a:xfrm>
-            <a:off x="9175775" y="3297554"/>
+            <a:off x="9175775" y="3080384"/>
             <a:ext cx="204216" cy="252475"/>
           </a:xfrm>
           <a:prstGeom prst="rect">
@@ -15379,8 +15379,8 @@
         </p:nvSpPr>
         <p:spPr>
           <a:xfrm>
-            <a:off x="9379991" y="3297554"/>
-            <a:ext cx="1805863" cy="252475"/>
+            <a:off x="9379991" y="3080384"/>
+            <a:ext cx="1805863" cy="430276"/>
           </a:xfrm>
           <a:prstGeom prst="rect">
             <a:avLst/>
@@ -15407,7 +15407,25 @@
                 <a:cs typeface="GQ Text"/>
                 <a:ea typeface="GQ Text"/>
               </a:rPr>
-              <a:t>Скачивается один раз</a:t>
+              <a:t>623 записи казахскими</a:t>
+            </a:r>
+          </a:p>
+          <a:p>
+            <a:pPr algn="l">
+              <a:lnSpc>
+                <a:spcPts val="1400"/>
+              </a:lnSpc>
+            </a:pPr>
+            <a:r>
+              <a:rPr sz="1000">
+                <a:solidFill>
+                  <a:srgbClr val="EEEBE5"/>
+                </a:solidFill>
+                <a:latin typeface="GQ Text"/>
+                <a:cs typeface="GQ Text"/>
+                <a:ea typeface="GQ Text"/>
+              </a:rPr>
+              <a:t>голосами</a:t>
             </a:r>
           </a:p>
         </p:txBody>
@@ -15420,7 +15438,7 @@
         </p:nvSpPr>
         <p:spPr>
           <a:xfrm>
-            <a:off x="9175775" y="3575939"/>
+            <a:off x="9175775" y="3536568"/>
             <a:ext cx="204216" cy="252475"/>
           </a:xfrm>
           <a:prstGeom prst="rect">
@@ -15461,7 +15479,7 @@
         </p:nvSpPr>
         <p:spPr>
           <a:xfrm>
-            <a:off x="9379991" y="3575939"/>
+            <a:off x="9379991" y="3536568"/>
             <a:ext cx="1805863" cy="430276"/>
           </a:xfrm>
           <a:prstGeom prst="rect">
@@ -15489,7 +15507,7 @@
                 <a:cs typeface="GQ Text"/>
                 <a:ea typeface="GQ Text"/>
               </a:rPr>
-              <a:t>Дальше занимайся где</a:t>
+              <a:t>Персонаж двигается, пока</a:t>
             </a:r>
           </a:p>
           <a:p>
@@ -15507,7 +15525,7 @@
                 <a:cs typeface="GQ Text"/>
                 <a:ea typeface="GQ Text"/>
               </a:rPr>
-              <a:t>угодно</a:t>
+              <a:t>звучит его реплика</a:t>
             </a:r>
           </a:p>
         </p:txBody>
@@ -15578,7 +15596,7 @@
                 <a:cs typeface="GQ Text SemiBold"/>
                 <a:ea typeface="GQ Text SemiBold"/>
               </a:rPr>
-              <a:t>Всё это проверяется автотестами при каждом обновлении: сломать незаметно нельзя.</a:t>
+              <a:t>И всё это работает без интернета: после первой загрузки приложение не отправляет в сеть ни одного запроса.</a:t>
             </a:r>
           </a:p>
         </p:txBody>
@@ -16140,7 +16158,7 @@
                 <a:cs typeface="GQ Text Bold"/>
                 <a:ea typeface="GQ Text Bold"/>
               </a:rPr>
-              <a:t>202</a:t>
+              <a:t>210</a:t>
             </a:r>
           </a:p>
         </p:txBody>
@@ -17079,7 +17097,7 @@
                 <a:cs typeface="GQ Text"/>
                 <a:ea typeface="GQ Text"/>
               </a:rPr>
-              <a:t>Озвучка: 589 фраз голосом носителя языка</a:t>
+              <a:t>Запись живым голосом носителя языка</a:t>
             </a:r>
           </a:p>
         </p:txBody>

--- a/презентация/Тілашар-защита.pptx
+++ b/презентация/Тілашар-защита.pptx
@@ -16076,7 +16076,7 @@
                 <a:cs typeface="IBM Plex Mono SemiBold"/>
                 <a:ea typeface="IBM Plex Mono SemiBold"/>
               </a:rPr>
-              <a:t>ФАЙЛОМ ДЛЯ ANDROID</a:t>
+              <a:t>ФАЙЛОМ НА ТЕЛЕФОН И КОМПЬЮТЕР</a:t>
             </a:r>
           </a:p>
         </p:txBody>
@@ -16117,7 +16117,7 @@
                 <a:cs typeface="GQ Text"/>
                 <a:ea typeface="GQ Text"/>
               </a:rPr>
-              <a:t>Готовый файл лежит здесь: github.com/s-chaikovskiy/grammarquest-web/releases</a:t>
+              <a:t>Android и Windows — здесь: github.com/s-chaikovskiy/grammarquest-web/releases</a:t>
             </a:r>
           </a:p>
         </p:txBody>

--- a/презентация/Тілашар-защита.pptx
+++ b/презентация/Тілашар-защита.pptx
@@ -16756,7 +16756,7 @@
                 <a:cs typeface="GQ Text SemiBold"/>
                 <a:ea typeface="GQ Text SemiBold"/>
               </a:rPr>
-              <a:t>Уже сделано: тексты проверил учитель казахского языка · приложение попробовали одноклассники · сайт работает</a:t>
+              <a:t>Уже сделано: 26 уроков и 623 записи озвучки · работает без интернета — на телефоне и на компьютере · сайт открыт для всех</a:t>
             </a:r>
           </a:p>
         </p:txBody>
